--- a/docs/case_study/capitallens_ai_case_study.pptx
+++ b/docs/case_study/capitallens_ai_case_study.pptx
@@ -2,32 +2,32 @@
 <file path=ppt/presentation.xml><?xml version="1.0" encoding="utf-8"?>
 <p:presentation xmlns:p="http://schemas.openxmlformats.org/presentationml/2006/main">
   <p:sldMasterIdLst>
-    <p:sldMasterId xmlns:r="http://schemas.openxmlformats.org/officeDocument/2006/relationships" id="2147483648" r:id="Ra4636faff9e6450e"/>
+    <p:sldMasterId xmlns:r="http://schemas.openxmlformats.org/officeDocument/2006/relationships" id="2147483648" r:id="R59eecf578ae1487a"/>
   </p:sldMasterIdLst>
   <p:notesMasterIdLst>
-    <p:notesMasterId xmlns:r="http://schemas.openxmlformats.org/officeDocument/2006/relationships" r:id="Ra0a732b28f0a42f7"/>
+    <p:notesMasterId xmlns:r="http://schemas.openxmlformats.org/officeDocument/2006/relationships" r:id="Rd122b4efdeae4f79"/>
   </p:notesMasterIdLst>
   <p:sldIdLst>
-    <p:sldId xmlns:r="http://schemas.openxmlformats.org/officeDocument/2006/relationships" id="256" r:id="R0e2fc8eab8c64b6f"/>
-    <p:sldId xmlns:r="http://schemas.openxmlformats.org/officeDocument/2006/relationships" id="257" r:id="Rc39940d06c7f4f0e"/>
-    <p:sldId xmlns:r="http://schemas.openxmlformats.org/officeDocument/2006/relationships" id="258" r:id="Rf2a9c61e527546e2"/>
-    <p:sldId xmlns:r="http://schemas.openxmlformats.org/officeDocument/2006/relationships" id="259" r:id="R5e016f09d7104555"/>
-    <p:sldId xmlns:r="http://schemas.openxmlformats.org/officeDocument/2006/relationships" id="260" r:id="R8ec4f671b5d24563"/>
-    <p:sldId xmlns:r="http://schemas.openxmlformats.org/officeDocument/2006/relationships" id="261" r:id="R5cefef39059d40f9"/>
-    <p:sldId xmlns:r="http://schemas.openxmlformats.org/officeDocument/2006/relationships" id="262" r:id="R40aa38a91ac34e54"/>
-    <p:sldId xmlns:r="http://schemas.openxmlformats.org/officeDocument/2006/relationships" id="263" r:id="R2dd43a6229ac41e0"/>
-    <p:sldId xmlns:r="http://schemas.openxmlformats.org/officeDocument/2006/relationships" id="264" r:id="R89291c5d858a4473"/>
-    <p:sldId xmlns:r="http://schemas.openxmlformats.org/officeDocument/2006/relationships" id="265" r:id="Ra2a9f25e89c249d1"/>
-    <p:sldId xmlns:r="http://schemas.openxmlformats.org/officeDocument/2006/relationships" id="266" r:id="R5f46be08dcd34d57"/>
-    <p:sldId xmlns:r="http://schemas.openxmlformats.org/officeDocument/2006/relationships" id="267" r:id="Rd69d55db25514793"/>
-    <p:sldId xmlns:r="http://schemas.openxmlformats.org/officeDocument/2006/relationships" id="268" r:id="R5c926afe50404fc2"/>
-    <p:sldId xmlns:r="http://schemas.openxmlformats.org/officeDocument/2006/relationships" id="269" r:id="R3e4e4fde418248a1"/>
-    <p:sldId xmlns:r="http://schemas.openxmlformats.org/officeDocument/2006/relationships" id="270" r:id="Rbff8ef268965448f"/>
-    <p:sldId xmlns:r="http://schemas.openxmlformats.org/officeDocument/2006/relationships" id="271" r:id="R94397646545147af"/>
-    <p:sldId xmlns:r="http://schemas.openxmlformats.org/officeDocument/2006/relationships" id="272" r:id="R0f82031371de418a"/>
-    <p:sldId xmlns:r="http://schemas.openxmlformats.org/officeDocument/2006/relationships" id="273" r:id="R97bc72602a284a10"/>
-    <p:sldId xmlns:r="http://schemas.openxmlformats.org/officeDocument/2006/relationships" id="274" r:id="R0aadbc53aa0645c5"/>
-    <p:sldId xmlns:r="http://schemas.openxmlformats.org/officeDocument/2006/relationships" id="275" r:id="Rbd1777221f624df9"/>
+    <p:sldId xmlns:r="http://schemas.openxmlformats.org/officeDocument/2006/relationships" id="256" r:id="R615c6305926746ce"/>
+    <p:sldId xmlns:r="http://schemas.openxmlformats.org/officeDocument/2006/relationships" id="257" r:id="Rb40bcde5d82d4ba7"/>
+    <p:sldId xmlns:r="http://schemas.openxmlformats.org/officeDocument/2006/relationships" id="258" r:id="R40a31b3190e5400b"/>
+    <p:sldId xmlns:r="http://schemas.openxmlformats.org/officeDocument/2006/relationships" id="259" r:id="R8ecba19385f648f1"/>
+    <p:sldId xmlns:r="http://schemas.openxmlformats.org/officeDocument/2006/relationships" id="260" r:id="Re41501c39891450c"/>
+    <p:sldId xmlns:r="http://schemas.openxmlformats.org/officeDocument/2006/relationships" id="261" r:id="R58dda409dba642b6"/>
+    <p:sldId xmlns:r="http://schemas.openxmlformats.org/officeDocument/2006/relationships" id="262" r:id="Reba43d19bd574b3a"/>
+    <p:sldId xmlns:r="http://schemas.openxmlformats.org/officeDocument/2006/relationships" id="263" r:id="R3abac2fb6e8c4dbd"/>
+    <p:sldId xmlns:r="http://schemas.openxmlformats.org/officeDocument/2006/relationships" id="264" r:id="R6c6e47b9a25a428b"/>
+    <p:sldId xmlns:r="http://schemas.openxmlformats.org/officeDocument/2006/relationships" id="265" r:id="R8884dbfbb0ba49c6"/>
+    <p:sldId xmlns:r="http://schemas.openxmlformats.org/officeDocument/2006/relationships" id="266" r:id="R2ec82b27f6254bed"/>
+    <p:sldId xmlns:r="http://schemas.openxmlformats.org/officeDocument/2006/relationships" id="267" r:id="R7d49cdbdf20145b7"/>
+    <p:sldId xmlns:r="http://schemas.openxmlformats.org/officeDocument/2006/relationships" id="268" r:id="Re84f7c12e9484862"/>
+    <p:sldId xmlns:r="http://schemas.openxmlformats.org/officeDocument/2006/relationships" id="269" r:id="R6ebe8e20b9774421"/>
+    <p:sldId xmlns:r="http://schemas.openxmlformats.org/officeDocument/2006/relationships" id="270" r:id="R77f193d12abb46fa"/>
+    <p:sldId xmlns:r="http://schemas.openxmlformats.org/officeDocument/2006/relationships" id="271" r:id="Ra83c06715743479a"/>
+    <p:sldId xmlns:r="http://schemas.openxmlformats.org/officeDocument/2006/relationships" id="272" r:id="R359cab2027c943ba"/>
+    <p:sldId xmlns:r="http://schemas.openxmlformats.org/officeDocument/2006/relationships" id="273" r:id="R5413967abbf04bc3"/>
+    <p:sldId xmlns:r="http://schemas.openxmlformats.org/officeDocument/2006/relationships" id="274" r:id="Rcec5e5b4337c41c5"/>
+    <p:sldId xmlns:r="http://schemas.openxmlformats.org/officeDocument/2006/relationships" id="275" r:id="Ra3ed5eebce5e4fff"/>
   </p:sldIdLst>
   <p:sldSz cx="12192000" cy="6858000"/>
   <p:notesSz cx="6858000" cy="9144000"/>
@@ -1874,7 +1874,7 @@
   </p:cSld>
   <p:clrMap bg1="lt1" tx1="dk1" bg2="lt2" tx2="dk2" accent1="accent1" accent2="accent2" accent3="accent3" accent4="accent4" accent5="accent5" accent6="accent6" hlink="hlink" folHlink="folHlink"/>
   <p:sldLayoutIdLst>
-    <p:sldLayoutId xmlns:r="http://schemas.openxmlformats.org/officeDocument/2006/relationships" id="2147483649" r:id="R39d4cfdb5ed24ec0"/>
+    <p:sldLayoutId xmlns:r="http://schemas.openxmlformats.org/officeDocument/2006/relationships" id="2147483649" r:id="R7a16f417525e46c2"/>
   </p:sldLayoutIdLst>
   <p:txStyles>
     <p:titleStyle>
@@ -2425,7 +2425,7 @@
           <p:cNvPr id="1" name="">
             <a:extLst xmlns:a="http://schemas.openxmlformats.org/drawingml/2006/main">
               <a:ext uri="{FF2B5EF4-FFF2-40B4-BE49-F238E27FC236}">
-                <a16:creationId xmlns:a16="http://schemas.microsoft.com/office/drawing/2014/main" id="{ECC13C33-BF5D-4767-84A4-8DB66D1338EB}"/>
+                <a16:creationId xmlns:a16="http://schemas.microsoft.com/office/drawing/2014/main" id="{80EF5272-9B37-4938-9B8A-BFAF69305AE1}"/>
               </a:ext>
             </a:extLst>
           </p:cNvPr>
@@ -2460,7 +2460,7 @@
           <p:cNvPr id="2" name="">
             <a:extLst xmlns:a="http://schemas.openxmlformats.org/drawingml/2006/main">
               <a:ext uri="{FF2B5EF4-FFF2-40B4-BE49-F238E27FC236}">
-                <a16:creationId xmlns:a16="http://schemas.microsoft.com/office/drawing/2014/main" id="{BEC171A4-DFE6-49B3-AA35-CAC5E875B6F3}"/>
+                <a16:creationId xmlns:a16="http://schemas.microsoft.com/office/drawing/2014/main" id="{EECDEFEA-C955-4E15-82F6-7F7B94F6DCC9}"/>
               </a:ext>
             </a:extLst>
           </p:cNvPr>
@@ -2495,7 +2495,7 @@
           <p:cNvPr id="3" name="">
             <a:extLst xmlns:a="http://schemas.openxmlformats.org/drawingml/2006/main">
               <a:ext uri="{FF2B5EF4-FFF2-40B4-BE49-F238E27FC236}">
-                <a16:creationId xmlns:a16="http://schemas.microsoft.com/office/drawing/2014/main" id="{DE28F131-A9C6-4E62-8A2B-F116526096EB}"/>
+                <a16:creationId xmlns:a16="http://schemas.microsoft.com/office/drawing/2014/main" id="{77052A55-8CD4-463A-991F-963B99EA9D20}"/>
               </a:ext>
             </a:extLst>
           </p:cNvPr>
@@ -2530,7 +2530,7 @@
           <p:cNvPr id="4" name="">
             <a:extLst xmlns:a="http://schemas.openxmlformats.org/drawingml/2006/main">
               <a:ext uri="{FF2B5EF4-FFF2-40B4-BE49-F238E27FC236}">
-                <a16:creationId xmlns:a16="http://schemas.microsoft.com/office/drawing/2014/main" id="{22D48166-828B-425E-90F1-3874E62E65FB}"/>
+                <a16:creationId xmlns:a16="http://schemas.microsoft.com/office/drawing/2014/main" id="{8211F303-B5E2-456D-BD53-72C2EF5607AF}"/>
               </a:ext>
             </a:extLst>
           </p:cNvPr>
@@ -2594,7 +2594,7 @@
           <p:cNvPr id="5" name="">
             <a:extLst xmlns:a="http://schemas.openxmlformats.org/drawingml/2006/main">
               <a:ext uri="{FF2B5EF4-FFF2-40B4-BE49-F238E27FC236}">
-                <a16:creationId xmlns:a16="http://schemas.microsoft.com/office/drawing/2014/main" id="{5F62B2E3-5367-47A4-B79C-2A85E3BAB3DE}"/>
+                <a16:creationId xmlns:a16="http://schemas.microsoft.com/office/drawing/2014/main" id="{9BA09CBA-415D-4FCB-8C32-EACAF7B0EB51}"/>
               </a:ext>
             </a:extLst>
           </p:cNvPr>
@@ -2658,7 +2658,7 @@
           <p:cNvPr id="6" name="">
             <a:extLst xmlns:a="http://schemas.openxmlformats.org/drawingml/2006/main">
               <a:ext uri="{FF2B5EF4-FFF2-40B4-BE49-F238E27FC236}">
-                <a16:creationId xmlns:a16="http://schemas.microsoft.com/office/drawing/2014/main" id="{6B1A8559-BCCB-41EF-A6EB-89B257C1A665}"/>
+                <a16:creationId xmlns:a16="http://schemas.microsoft.com/office/drawing/2014/main" id="{E558B786-F697-4268-B1CB-F07C94D35B71}"/>
               </a:ext>
             </a:extLst>
           </p:cNvPr>
@@ -2722,7 +2722,7 @@
           <p:cNvPr id="7" name="">
             <a:extLst xmlns:a="http://schemas.openxmlformats.org/drawingml/2006/main">
               <a:ext uri="{FF2B5EF4-FFF2-40B4-BE49-F238E27FC236}">
-                <a16:creationId xmlns:a16="http://schemas.microsoft.com/office/drawing/2014/main" id="{717F79F1-2262-47CC-A026-E415BAC7E202}"/>
+                <a16:creationId xmlns:a16="http://schemas.microsoft.com/office/drawing/2014/main" id="{C5E3A08F-7270-4C95-900B-0E8792DA1C92}"/>
               </a:ext>
             </a:extLst>
           </p:cNvPr>
@@ -2734,7 +2734,7 @@
         <p:spPr>
           <a:xfrm xmlns:a="http://schemas.openxmlformats.org/drawingml/2006/main">
             <a:off x="857250" y="2876550"/>
-            <a:ext cx="6191250" cy="266700"/>
+            <a:ext cx="7239000" cy="266700"/>
           </a:xfrm>
           <a:prstGeom xmlns:a="http://schemas.openxmlformats.org/drawingml/2006/main" prst="rect">
             <a:avLst/>
@@ -2776,7 +2776,7 @@
                 <a:ea typeface="Aptos"/>
                 <a:cs typeface="Aptos"/>
               </a:rPr>
-              <a:t>Finance track submission by Sai-Vivek17</a:t>
+              <a:t>Round 1 Case Study | Finance Track | Built by Sai-Vivek17</a:t>
             </a:r>
           </a:p>
         </p:txBody>
@@ -2786,904 +2786,19 @@
           <p:cNvPr id="8" name="">
             <a:extLst xmlns:a="http://schemas.openxmlformats.org/drawingml/2006/main">
               <a:ext uri="{FF2B5EF4-FFF2-40B4-BE49-F238E27FC236}">
-                <a16:creationId xmlns:a16="http://schemas.microsoft.com/office/drawing/2014/main" id="{72A6E545-875D-48CF-9781-4BA07C18CA23}"/>
-              </a:ext>
-            </a:extLst>
-          </p:cNvPr>
-          <p:cNvSpPr>
-            <a:spLocks xmlns:a="http://schemas.openxmlformats.org/drawingml/2006/main" noGrp="1"/>
-          </p:cNvSpPr>
-          <p:nvPr/>
-        </p:nvSpPr>
-        <p:spPr>
-          <a:xfrm xmlns:a="http://schemas.openxmlformats.org/drawingml/2006/main">
-            <a:off x="857250" y="3905250"/>
-            <a:ext cx="1325880" cy="704850"/>
-          </a:xfrm>
-          <a:prstGeom xmlns:a="http://schemas.openxmlformats.org/drawingml/2006/main" prst="roundRect">
-            <a:avLst>
-              <a:gd name="adj" fmla="val 16216"/>
-            </a:avLst>
-          </a:prstGeom>
-          <a:solidFill xmlns:a="http://schemas.openxmlformats.org/drawingml/2006/main">
-            <a:srgbClr val="12243A"/>
-          </a:solidFill>
-          <a:ln xmlns:a="http://schemas.openxmlformats.org/drawingml/2006/main" w="9525">
-            <a:solidFill>
-              <a:srgbClr val="24415F"/>
-            </a:solidFill>
-            <a:prstDash val="solid"/>
-          </a:ln>
-        </p:spPr>
-      </p:sp>
-      <p:sp>
-        <p:nvSpPr>
-          <p:cNvPr id="9" name="">
-            <a:extLst xmlns:a="http://schemas.openxmlformats.org/drawingml/2006/main">
-              <a:ext uri="{FF2B5EF4-FFF2-40B4-BE49-F238E27FC236}">
-                <a16:creationId xmlns:a16="http://schemas.microsoft.com/office/drawing/2014/main" id="{A4F2D52E-7987-4D8C-AD4E-9D507BFF2C06}"/>
-              </a:ext>
-            </a:extLst>
-          </p:cNvPr>
-          <p:cNvSpPr>
-            <a:spLocks xmlns:a="http://schemas.openxmlformats.org/drawingml/2006/main" noGrp="1"/>
-          </p:cNvSpPr>
-          <p:nvPr/>
-        </p:nvSpPr>
-        <p:spPr>
-          <a:xfrm xmlns:a="http://schemas.openxmlformats.org/drawingml/2006/main">
-            <a:off x="971550" y="4076700"/>
-            <a:ext cx="1097280" cy="342900"/>
-          </a:xfrm>
-          <a:prstGeom xmlns:a="http://schemas.openxmlformats.org/drawingml/2006/main" prst="rect">
-            <a:avLst/>
-          </a:prstGeom>
-          <a:solidFill xmlns:a="http://schemas.openxmlformats.org/drawingml/2006/main">
-            <a:srgbClr val="000000">
-              <a:alpha val="0"/>
-            </a:srgbClr>
-          </a:solidFill>
-          <a:ln xmlns:a="http://schemas.openxmlformats.org/drawingml/2006/main" w="0">
-            <a:solidFill>
-              <a:srgbClr val="000000">
-                <a:alpha val="0"/>
-              </a:srgbClr>
-            </a:solidFill>
-            <a:prstDash val="solid"/>
-          </a:ln>
-        </p:spPr>
-        <p:txBody>
-          <a:bodyPr xmlns:a="http://schemas.openxmlformats.org/drawingml/2006/main"/>
-          <a:lstStyle xmlns:a="http://schemas.openxmlformats.org/drawingml/2006/main"/>
-          <a:p xmlns:a="http://schemas.openxmlformats.org/drawingml/2006/main">
-            <a:pPr algn="ctr">
-              <a:defRPr sz="1200" b="1">
-                <a:solidFill>
-                  <a:srgbClr val="FFFFFF"/>
-                </a:solidFill>
-                <a:latin typeface="Aptos Display"/>
-                <a:ea typeface="Aptos Display"/>
-                <a:cs typeface="Aptos Display"/>
-              </a:defRPr>
-            </a:pPr>
-            <a:r>
-              <a:rPr sz="1200" b="1">
-                <a:solidFill>
-                  <a:srgbClr val="FFFFFF"/>
-                </a:solidFill>
-                <a:latin typeface="Aptos Display"/>
-                <a:ea typeface="Aptos Display"/>
-                <a:cs typeface="Aptos Display"/>
-              </a:rPr>
-              <a:t>Plan</a:t>
-            </a:r>
-          </a:p>
-        </p:txBody>
-      </p:sp>
-      <p:sp>
-        <p:nvSpPr>
-          <p:cNvPr id="10" name="">
-            <a:extLst xmlns:a="http://schemas.openxmlformats.org/drawingml/2006/main">
-              <a:ext uri="{FF2B5EF4-FFF2-40B4-BE49-F238E27FC236}">
-                <a16:creationId xmlns:a16="http://schemas.microsoft.com/office/drawing/2014/main" id="{7055824D-43A0-49A9-8D5B-D2116C3AFF80}"/>
-              </a:ext>
-            </a:extLst>
-          </p:cNvPr>
-          <p:cNvSpPr>
-            <a:spLocks xmlns:a="http://schemas.openxmlformats.org/drawingml/2006/main" noGrp="1"/>
-          </p:cNvSpPr>
-          <p:nvPr/>
-        </p:nvSpPr>
-        <p:spPr>
-          <a:xfrm xmlns:a="http://schemas.openxmlformats.org/drawingml/2006/main">
-            <a:off x="2202180" y="4133850"/>
-            <a:ext cx="133350" cy="266700"/>
-          </a:xfrm>
-          <a:prstGeom xmlns:a="http://schemas.openxmlformats.org/drawingml/2006/main" prst="rect">
-            <a:avLst/>
-          </a:prstGeom>
-          <a:solidFill xmlns:a="http://schemas.openxmlformats.org/drawingml/2006/main">
-            <a:srgbClr val="000000">
-              <a:alpha val="0"/>
-            </a:srgbClr>
-          </a:solidFill>
-          <a:ln xmlns:a="http://schemas.openxmlformats.org/drawingml/2006/main" w="0">
-            <a:solidFill>
-              <a:srgbClr val="000000">
-                <a:alpha val="0"/>
-              </a:srgbClr>
-            </a:solidFill>
-            <a:prstDash val="solid"/>
-          </a:ln>
-        </p:spPr>
-        <p:txBody>
-          <a:bodyPr xmlns:a="http://schemas.openxmlformats.org/drawingml/2006/main"/>
-          <a:lstStyle xmlns:a="http://schemas.openxmlformats.org/drawingml/2006/main"/>
-          <a:p xmlns:a="http://schemas.openxmlformats.org/drawingml/2006/main">
-            <a:pPr algn="ctr">
-              <a:defRPr sz="1500" b="1">
-                <a:solidFill>
-                  <a:srgbClr val="38BDF8"/>
-                </a:solidFill>
-                <a:latin typeface="Aptos Display"/>
-                <a:ea typeface="Aptos Display"/>
-                <a:cs typeface="Aptos Display"/>
-              </a:defRPr>
-            </a:pPr>
-            <a:r>
-              <a:rPr sz="1500" b="1">
-                <a:solidFill>
-                  <a:srgbClr val="38BDF8"/>
-                </a:solidFill>
-                <a:latin typeface="Aptos Display"/>
-                <a:ea typeface="Aptos Display"/>
-                <a:cs typeface="Aptos Display"/>
-              </a:rPr>
-              <a:t>&gt;</a:t>
-            </a:r>
-          </a:p>
-        </p:txBody>
-      </p:sp>
-      <p:sp>
-        <p:nvSpPr>
-          <p:cNvPr id="11" name="">
-            <a:extLst xmlns:a="http://schemas.openxmlformats.org/drawingml/2006/main">
-              <a:ext uri="{FF2B5EF4-FFF2-40B4-BE49-F238E27FC236}">
-                <a16:creationId xmlns:a16="http://schemas.microsoft.com/office/drawing/2014/main" id="{DEB141CF-7FD3-4D09-80FA-F48FE5CC1325}"/>
-              </a:ext>
-            </a:extLst>
-          </p:cNvPr>
-          <p:cNvSpPr>
-            <a:spLocks xmlns:a="http://schemas.openxmlformats.org/drawingml/2006/main" noGrp="1"/>
-          </p:cNvSpPr>
-          <p:nvPr/>
-        </p:nvSpPr>
-        <p:spPr>
-          <a:xfrm xmlns:a="http://schemas.openxmlformats.org/drawingml/2006/main">
-            <a:off x="2335530" y="3905250"/>
-            <a:ext cx="1325880" cy="704850"/>
-          </a:xfrm>
-          <a:prstGeom xmlns:a="http://schemas.openxmlformats.org/drawingml/2006/main" prst="roundRect">
-            <a:avLst>
-              <a:gd name="adj" fmla="val 16216"/>
-            </a:avLst>
-          </a:prstGeom>
-          <a:solidFill xmlns:a="http://schemas.openxmlformats.org/drawingml/2006/main">
-            <a:srgbClr val="12243A"/>
-          </a:solidFill>
-          <a:ln xmlns:a="http://schemas.openxmlformats.org/drawingml/2006/main" w="9525">
-            <a:solidFill>
-              <a:srgbClr val="24415F"/>
-            </a:solidFill>
-            <a:prstDash val="solid"/>
-          </a:ln>
-        </p:spPr>
-      </p:sp>
-      <p:sp>
-        <p:nvSpPr>
-          <p:cNvPr id="12" name="">
-            <a:extLst xmlns:a="http://schemas.openxmlformats.org/drawingml/2006/main">
-              <a:ext uri="{FF2B5EF4-FFF2-40B4-BE49-F238E27FC236}">
-                <a16:creationId xmlns:a16="http://schemas.microsoft.com/office/drawing/2014/main" id="{FC3E63E4-2ECB-467A-8BC8-B276BAE79801}"/>
-              </a:ext>
-            </a:extLst>
-          </p:cNvPr>
-          <p:cNvSpPr>
-            <a:spLocks xmlns:a="http://schemas.openxmlformats.org/drawingml/2006/main" noGrp="1"/>
-          </p:cNvSpPr>
-          <p:nvPr/>
-        </p:nvSpPr>
-        <p:spPr>
-          <a:xfrm xmlns:a="http://schemas.openxmlformats.org/drawingml/2006/main">
-            <a:off x="2449830" y="4076700"/>
-            <a:ext cx="1097280" cy="342900"/>
-          </a:xfrm>
-          <a:prstGeom xmlns:a="http://schemas.openxmlformats.org/drawingml/2006/main" prst="rect">
-            <a:avLst/>
-          </a:prstGeom>
-          <a:solidFill xmlns:a="http://schemas.openxmlformats.org/drawingml/2006/main">
-            <a:srgbClr val="000000">
-              <a:alpha val="0"/>
-            </a:srgbClr>
-          </a:solidFill>
-          <a:ln xmlns:a="http://schemas.openxmlformats.org/drawingml/2006/main" w="0">
-            <a:solidFill>
-              <a:srgbClr val="000000">
-                <a:alpha val="0"/>
-              </a:srgbClr>
-            </a:solidFill>
-            <a:prstDash val="solid"/>
-          </a:ln>
-        </p:spPr>
-        <p:txBody>
-          <a:bodyPr xmlns:a="http://schemas.openxmlformats.org/drawingml/2006/main"/>
-          <a:lstStyle xmlns:a="http://schemas.openxmlformats.org/drawingml/2006/main"/>
-          <a:p xmlns:a="http://schemas.openxmlformats.org/drawingml/2006/main">
-            <a:pPr algn="ctr">
-              <a:defRPr sz="1200" b="1">
-                <a:solidFill>
-                  <a:srgbClr val="FFFFFF"/>
-                </a:solidFill>
-                <a:latin typeface="Aptos Display"/>
-                <a:ea typeface="Aptos Display"/>
-                <a:cs typeface="Aptos Display"/>
-              </a:defRPr>
-            </a:pPr>
-            <a:r>
-              <a:rPr sz="1200" b="1">
-                <a:solidFill>
-                  <a:srgbClr val="FFFFFF"/>
-                </a:solidFill>
-                <a:latin typeface="Aptos Display"/>
-                <a:ea typeface="Aptos Display"/>
-                <a:cs typeface="Aptos Display"/>
-              </a:rPr>
-              <a:t>Retrieve</a:t>
-            </a:r>
-          </a:p>
-        </p:txBody>
-      </p:sp>
-      <p:sp>
-        <p:nvSpPr>
-          <p:cNvPr id="13" name="">
-            <a:extLst xmlns:a="http://schemas.openxmlformats.org/drawingml/2006/main">
-              <a:ext uri="{FF2B5EF4-FFF2-40B4-BE49-F238E27FC236}">
-                <a16:creationId xmlns:a16="http://schemas.microsoft.com/office/drawing/2014/main" id="{151E7922-356E-4C36-B4F0-B28A0B0E11BD}"/>
-              </a:ext>
-            </a:extLst>
-          </p:cNvPr>
-          <p:cNvSpPr>
-            <a:spLocks xmlns:a="http://schemas.openxmlformats.org/drawingml/2006/main" noGrp="1"/>
-          </p:cNvSpPr>
-          <p:nvPr/>
-        </p:nvSpPr>
-        <p:spPr>
-          <a:xfrm xmlns:a="http://schemas.openxmlformats.org/drawingml/2006/main">
-            <a:off x="3680460" y="4133850"/>
-            <a:ext cx="133350" cy="266700"/>
-          </a:xfrm>
-          <a:prstGeom xmlns:a="http://schemas.openxmlformats.org/drawingml/2006/main" prst="rect">
-            <a:avLst/>
-          </a:prstGeom>
-          <a:solidFill xmlns:a="http://schemas.openxmlformats.org/drawingml/2006/main">
-            <a:srgbClr val="000000">
-              <a:alpha val="0"/>
-            </a:srgbClr>
-          </a:solidFill>
-          <a:ln xmlns:a="http://schemas.openxmlformats.org/drawingml/2006/main" w="0">
-            <a:solidFill>
-              <a:srgbClr val="000000">
-                <a:alpha val="0"/>
-              </a:srgbClr>
-            </a:solidFill>
-            <a:prstDash val="solid"/>
-          </a:ln>
-        </p:spPr>
-        <p:txBody>
-          <a:bodyPr xmlns:a="http://schemas.openxmlformats.org/drawingml/2006/main"/>
-          <a:lstStyle xmlns:a="http://schemas.openxmlformats.org/drawingml/2006/main"/>
-          <a:p xmlns:a="http://schemas.openxmlformats.org/drawingml/2006/main">
-            <a:pPr algn="ctr">
-              <a:defRPr sz="1500" b="1">
-                <a:solidFill>
-                  <a:srgbClr val="38BDF8"/>
-                </a:solidFill>
-                <a:latin typeface="Aptos Display"/>
-                <a:ea typeface="Aptos Display"/>
-                <a:cs typeface="Aptos Display"/>
-              </a:defRPr>
-            </a:pPr>
-            <a:r>
-              <a:rPr sz="1500" b="1">
-                <a:solidFill>
-                  <a:srgbClr val="38BDF8"/>
-                </a:solidFill>
-                <a:latin typeface="Aptos Display"/>
-                <a:ea typeface="Aptos Display"/>
-                <a:cs typeface="Aptos Display"/>
-              </a:rPr>
-              <a:t>&gt;</a:t>
-            </a:r>
-          </a:p>
-        </p:txBody>
-      </p:sp>
-      <p:sp>
-        <p:nvSpPr>
-          <p:cNvPr id="14" name="">
-            <a:extLst xmlns:a="http://schemas.openxmlformats.org/drawingml/2006/main">
-              <a:ext uri="{FF2B5EF4-FFF2-40B4-BE49-F238E27FC236}">
-                <a16:creationId xmlns:a16="http://schemas.microsoft.com/office/drawing/2014/main" id="{45F9A575-3F8C-4DC4-A8FF-B4B53E120AC0}"/>
-              </a:ext>
-            </a:extLst>
-          </p:cNvPr>
-          <p:cNvSpPr>
-            <a:spLocks xmlns:a="http://schemas.openxmlformats.org/drawingml/2006/main" noGrp="1"/>
-          </p:cNvSpPr>
-          <p:nvPr/>
-        </p:nvSpPr>
-        <p:spPr>
-          <a:xfrm xmlns:a="http://schemas.openxmlformats.org/drawingml/2006/main">
-            <a:off x="3813810" y="3905250"/>
-            <a:ext cx="1325880" cy="704850"/>
-          </a:xfrm>
-          <a:prstGeom xmlns:a="http://schemas.openxmlformats.org/drawingml/2006/main" prst="roundRect">
-            <a:avLst>
-              <a:gd name="adj" fmla="val 16216"/>
-            </a:avLst>
-          </a:prstGeom>
-          <a:solidFill xmlns:a="http://schemas.openxmlformats.org/drawingml/2006/main">
-            <a:srgbClr val="12243A"/>
-          </a:solidFill>
-          <a:ln xmlns:a="http://schemas.openxmlformats.org/drawingml/2006/main" w="9525">
-            <a:solidFill>
-              <a:srgbClr val="24415F"/>
-            </a:solidFill>
-            <a:prstDash val="solid"/>
-          </a:ln>
-        </p:spPr>
-      </p:sp>
-      <p:sp>
-        <p:nvSpPr>
-          <p:cNvPr id="15" name="">
-            <a:extLst xmlns:a="http://schemas.openxmlformats.org/drawingml/2006/main">
-              <a:ext uri="{FF2B5EF4-FFF2-40B4-BE49-F238E27FC236}">
-                <a16:creationId xmlns:a16="http://schemas.microsoft.com/office/drawing/2014/main" id="{FDA986EF-4C61-4875-91B1-D7004F1DA027}"/>
-              </a:ext>
-            </a:extLst>
-          </p:cNvPr>
-          <p:cNvSpPr>
-            <a:spLocks xmlns:a="http://schemas.openxmlformats.org/drawingml/2006/main" noGrp="1"/>
-          </p:cNvSpPr>
-          <p:nvPr/>
-        </p:nvSpPr>
-        <p:spPr>
-          <a:xfrm xmlns:a="http://schemas.openxmlformats.org/drawingml/2006/main">
-            <a:off x="3928110" y="4076700"/>
-            <a:ext cx="1097280" cy="342900"/>
-          </a:xfrm>
-          <a:prstGeom xmlns:a="http://schemas.openxmlformats.org/drawingml/2006/main" prst="rect">
-            <a:avLst/>
-          </a:prstGeom>
-          <a:solidFill xmlns:a="http://schemas.openxmlformats.org/drawingml/2006/main">
-            <a:srgbClr val="000000">
-              <a:alpha val="0"/>
-            </a:srgbClr>
-          </a:solidFill>
-          <a:ln xmlns:a="http://schemas.openxmlformats.org/drawingml/2006/main" w="0">
-            <a:solidFill>
-              <a:srgbClr val="000000">
-                <a:alpha val="0"/>
-              </a:srgbClr>
-            </a:solidFill>
-            <a:prstDash val="solid"/>
-          </a:ln>
-        </p:spPr>
-        <p:txBody>
-          <a:bodyPr xmlns:a="http://schemas.openxmlformats.org/drawingml/2006/main"/>
-          <a:lstStyle xmlns:a="http://schemas.openxmlformats.org/drawingml/2006/main"/>
-          <a:p xmlns:a="http://schemas.openxmlformats.org/drawingml/2006/main">
-            <a:pPr algn="ctr">
-              <a:defRPr sz="1200" b="1">
-                <a:solidFill>
-                  <a:srgbClr val="FFFFFF"/>
-                </a:solidFill>
-                <a:latin typeface="Aptos Display"/>
-                <a:ea typeface="Aptos Display"/>
-                <a:cs typeface="Aptos Display"/>
-              </a:defRPr>
-            </a:pPr>
-            <a:r>
-              <a:rPr sz="1200" b="1">
-                <a:solidFill>
-                  <a:srgbClr val="FFFFFF"/>
-                </a:solidFill>
-                <a:latin typeface="Aptos Display"/>
-                <a:ea typeface="Aptos Display"/>
-                <a:cs typeface="Aptos Display"/>
-              </a:rPr>
-              <a:t>Analyze</a:t>
-            </a:r>
-          </a:p>
-        </p:txBody>
-      </p:sp>
-      <p:sp>
-        <p:nvSpPr>
-          <p:cNvPr id="16" name="">
-            <a:extLst xmlns:a="http://schemas.openxmlformats.org/drawingml/2006/main">
-              <a:ext uri="{FF2B5EF4-FFF2-40B4-BE49-F238E27FC236}">
-                <a16:creationId xmlns:a16="http://schemas.microsoft.com/office/drawing/2014/main" id="{F9E50A16-8711-4CAE-812B-615F67D215C7}"/>
-              </a:ext>
-            </a:extLst>
-          </p:cNvPr>
-          <p:cNvSpPr>
-            <a:spLocks xmlns:a="http://schemas.openxmlformats.org/drawingml/2006/main" noGrp="1"/>
-          </p:cNvSpPr>
-          <p:nvPr/>
-        </p:nvSpPr>
-        <p:spPr>
-          <a:xfrm xmlns:a="http://schemas.openxmlformats.org/drawingml/2006/main">
-            <a:off x="5158740" y="4133850"/>
-            <a:ext cx="133350" cy="266700"/>
-          </a:xfrm>
-          <a:prstGeom xmlns:a="http://schemas.openxmlformats.org/drawingml/2006/main" prst="rect">
-            <a:avLst/>
-          </a:prstGeom>
-          <a:solidFill xmlns:a="http://schemas.openxmlformats.org/drawingml/2006/main">
-            <a:srgbClr val="000000">
-              <a:alpha val="0"/>
-            </a:srgbClr>
-          </a:solidFill>
-          <a:ln xmlns:a="http://schemas.openxmlformats.org/drawingml/2006/main" w="0">
-            <a:solidFill>
-              <a:srgbClr val="000000">
-                <a:alpha val="0"/>
-              </a:srgbClr>
-            </a:solidFill>
-            <a:prstDash val="solid"/>
-          </a:ln>
-        </p:spPr>
-        <p:txBody>
-          <a:bodyPr xmlns:a="http://schemas.openxmlformats.org/drawingml/2006/main"/>
-          <a:lstStyle xmlns:a="http://schemas.openxmlformats.org/drawingml/2006/main"/>
-          <a:p xmlns:a="http://schemas.openxmlformats.org/drawingml/2006/main">
-            <a:pPr algn="ctr">
-              <a:defRPr sz="1500" b="1">
-                <a:solidFill>
-                  <a:srgbClr val="38BDF8"/>
-                </a:solidFill>
-                <a:latin typeface="Aptos Display"/>
-                <a:ea typeface="Aptos Display"/>
-                <a:cs typeface="Aptos Display"/>
-              </a:defRPr>
-            </a:pPr>
-            <a:r>
-              <a:rPr sz="1500" b="1">
-                <a:solidFill>
-                  <a:srgbClr val="38BDF8"/>
-                </a:solidFill>
-                <a:latin typeface="Aptos Display"/>
-                <a:ea typeface="Aptos Display"/>
-                <a:cs typeface="Aptos Display"/>
-              </a:rPr>
-              <a:t>&gt;</a:t>
-            </a:r>
-          </a:p>
-        </p:txBody>
-      </p:sp>
-      <p:sp>
-        <p:nvSpPr>
-          <p:cNvPr id="17" name="">
-            <a:extLst xmlns:a="http://schemas.openxmlformats.org/drawingml/2006/main">
-              <a:ext uri="{FF2B5EF4-FFF2-40B4-BE49-F238E27FC236}">
-                <a16:creationId xmlns:a16="http://schemas.microsoft.com/office/drawing/2014/main" id="{E0861EBD-77B5-4BDE-B334-F4C1B23819C5}"/>
-              </a:ext>
-            </a:extLst>
-          </p:cNvPr>
-          <p:cNvSpPr>
-            <a:spLocks xmlns:a="http://schemas.openxmlformats.org/drawingml/2006/main" noGrp="1"/>
-          </p:cNvSpPr>
-          <p:nvPr/>
-        </p:nvSpPr>
-        <p:spPr>
-          <a:xfrm xmlns:a="http://schemas.openxmlformats.org/drawingml/2006/main">
-            <a:off x="5292090" y="3905250"/>
-            <a:ext cx="1325880" cy="704850"/>
-          </a:xfrm>
-          <a:prstGeom xmlns:a="http://schemas.openxmlformats.org/drawingml/2006/main" prst="roundRect">
-            <a:avLst>
-              <a:gd name="adj" fmla="val 16216"/>
-            </a:avLst>
-          </a:prstGeom>
-          <a:solidFill xmlns:a="http://schemas.openxmlformats.org/drawingml/2006/main">
-            <a:srgbClr val="12243A"/>
-          </a:solidFill>
-          <a:ln xmlns:a="http://schemas.openxmlformats.org/drawingml/2006/main" w="9525">
-            <a:solidFill>
-              <a:srgbClr val="24415F"/>
-            </a:solidFill>
-            <a:prstDash val="solid"/>
-          </a:ln>
-        </p:spPr>
-      </p:sp>
-      <p:sp>
-        <p:nvSpPr>
-          <p:cNvPr id="18" name="">
-            <a:extLst xmlns:a="http://schemas.openxmlformats.org/drawingml/2006/main">
-              <a:ext uri="{FF2B5EF4-FFF2-40B4-BE49-F238E27FC236}">
-                <a16:creationId xmlns:a16="http://schemas.microsoft.com/office/drawing/2014/main" id="{5016A622-5D75-46FD-9330-A2785AF81FA1}"/>
-              </a:ext>
-            </a:extLst>
-          </p:cNvPr>
-          <p:cNvSpPr>
-            <a:spLocks xmlns:a="http://schemas.openxmlformats.org/drawingml/2006/main" noGrp="1"/>
-          </p:cNvSpPr>
-          <p:nvPr/>
-        </p:nvSpPr>
-        <p:spPr>
-          <a:xfrm xmlns:a="http://schemas.openxmlformats.org/drawingml/2006/main">
-            <a:off x="5406390" y="4076700"/>
-            <a:ext cx="1097280" cy="342900"/>
-          </a:xfrm>
-          <a:prstGeom xmlns:a="http://schemas.openxmlformats.org/drawingml/2006/main" prst="rect">
-            <a:avLst/>
-          </a:prstGeom>
-          <a:solidFill xmlns:a="http://schemas.openxmlformats.org/drawingml/2006/main">
-            <a:srgbClr val="000000">
-              <a:alpha val="0"/>
-            </a:srgbClr>
-          </a:solidFill>
-          <a:ln xmlns:a="http://schemas.openxmlformats.org/drawingml/2006/main" w="0">
-            <a:solidFill>
-              <a:srgbClr val="000000">
-                <a:alpha val="0"/>
-              </a:srgbClr>
-            </a:solidFill>
-            <a:prstDash val="solid"/>
-          </a:ln>
-        </p:spPr>
-        <p:txBody>
-          <a:bodyPr xmlns:a="http://schemas.openxmlformats.org/drawingml/2006/main"/>
-          <a:lstStyle xmlns:a="http://schemas.openxmlformats.org/drawingml/2006/main"/>
-          <a:p xmlns:a="http://schemas.openxmlformats.org/drawingml/2006/main">
-            <a:pPr algn="ctr">
-              <a:defRPr sz="1200" b="1">
-                <a:solidFill>
-                  <a:srgbClr val="FFFFFF"/>
-                </a:solidFill>
-                <a:latin typeface="Aptos Display"/>
-                <a:ea typeface="Aptos Display"/>
-                <a:cs typeface="Aptos Display"/>
-              </a:defRPr>
-            </a:pPr>
-            <a:r>
-              <a:rPr sz="1200" b="1">
-                <a:solidFill>
-                  <a:srgbClr val="FFFFFF"/>
-                </a:solidFill>
-                <a:latin typeface="Aptos Display"/>
-                <a:ea typeface="Aptos Display"/>
-                <a:cs typeface="Aptos Display"/>
-              </a:rPr>
-              <a:t>Cite</a:t>
-            </a:r>
-          </a:p>
-        </p:txBody>
-      </p:sp>
-      <p:sp>
-        <p:nvSpPr>
-          <p:cNvPr id="19" name="">
-            <a:extLst xmlns:a="http://schemas.openxmlformats.org/drawingml/2006/main">
-              <a:ext uri="{FF2B5EF4-FFF2-40B4-BE49-F238E27FC236}">
-                <a16:creationId xmlns:a16="http://schemas.microsoft.com/office/drawing/2014/main" id="{E1D62C4B-50B7-4560-B20A-2F57542FA723}"/>
-              </a:ext>
-            </a:extLst>
-          </p:cNvPr>
-          <p:cNvSpPr>
-            <a:spLocks xmlns:a="http://schemas.openxmlformats.org/drawingml/2006/main" noGrp="1"/>
-          </p:cNvSpPr>
-          <p:nvPr/>
-        </p:nvSpPr>
-        <p:spPr>
-          <a:xfrm xmlns:a="http://schemas.openxmlformats.org/drawingml/2006/main">
-            <a:off x="6637020" y="4133850"/>
-            <a:ext cx="133350" cy="266700"/>
-          </a:xfrm>
-          <a:prstGeom xmlns:a="http://schemas.openxmlformats.org/drawingml/2006/main" prst="rect">
-            <a:avLst/>
-          </a:prstGeom>
-          <a:solidFill xmlns:a="http://schemas.openxmlformats.org/drawingml/2006/main">
-            <a:srgbClr val="000000">
-              <a:alpha val="0"/>
-            </a:srgbClr>
-          </a:solidFill>
-          <a:ln xmlns:a="http://schemas.openxmlformats.org/drawingml/2006/main" w="0">
-            <a:solidFill>
-              <a:srgbClr val="000000">
-                <a:alpha val="0"/>
-              </a:srgbClr>
-            </a:solidFill>
-            <a:prstDash val="solid"/>
-          </a:ln>
-        </p:spPr>
-        <p:txBody>
-          <a:bodyPr xmlns:a="http://schemas.openxmlformats.org/drawingml/2006/main"/>
-          <a:lstStyle xmlns:a="http://schemas.openxmlformats.org/drawingml/2006/main"/>
-          <a:p xmlns:a="http://schemas.openxmlformats.org/drawingml/2006/main">
-            <a:pPr algn="ctr">
-              <a:defRPr sz="1500" b="1">
-                <a:solidFill>
-                  <a:srgbClr val="38BDF8"/>
-                </a:solidFill>
-                <a:latin typeface="Aptos Display"/>
-                <a:ea typeface="Aptos Display"/>
-                <a:cs typeface="Aptos Display"/>
-              </a:defRPr>
-            </a:pPr>
-            <a:r>
-              <a:rPr sz="1500" b="1">
-                <a:solidFill>
-                  <a:srgbClr val="38BDF8"/>
-                </a:solidFill>
-                <a:latin typeface="Aptos Display"/>
-                <a:ea typeface="Aptos Display"/>
-                <a:cs typeface="Aptos Display"/>
-              </a:rPr>
-              <a:t>&gt;</a:t>
-            </a:r>
-          </a:p>
-        </p:txBody>
-      </p:sp>
-      <p:sp>
-        <p:nvSpPr>
-          <p:cNvPr id="20" name="">
-            <a:extLst xmlns:a="http://schemas.openxmlformats.org/drawingml/2006/main">
-              <a:ext uri="{FF2B5EF4-FFF2-40B4-BE49-F238E27FC236}">
-                <a16:creationId xmlns:a16="http://schemas.microsoft.com/office/drawing/2014/main" id="{83E03204-9F67-4316-B616-E095775D1D21}"/>
-              </a:ext>
-            </a:extLst>
-          </p:cNvPr>
-          <p:cNvSpPr>
-            <a:spLocks xmlns:a="http://schemas.openxmlformats.org/drawingml/2006/main" noGrp="1"/>
-          </p:cNvSpPr>
-          <p:nvPr/>
-        </p:nvSpPr>
-        <p:spPr>
-          <a:xfrm xmlns:a="http://schemas.openxmlformats.org/drawingml/2006/main">
-            <a:off x="6770370" y="3905250"/>
-            <a:ext cx="1325880" cy="704850"/>
-          </a:xfrm>
-          <a:prstGeom xmlns:a="http://schemas.openxmlformats.org/drawingml/2006/main" prst="roundRect">
-            <a:avLst>
-              <a:gd name="adj" fmla="val 16216"/>
-            </a:avLst>
-          </a:prstGeom>
-          <a:solidFill xmlns:a="http://schemas.openxmlformats.org/drawingml/2006/main">
-            <a:srgbClr val="12243A"/>
-          </a:solidFill>
-          <a:ln xmlns:a="http://schemas.openxmlformats.org/drawingml/2006/main" w="9525">
-            <a:solidFill>
-              <a:srgbClr val="F59E0B"/>
-            </a:solidFill>
-            <a:prstDash val="solid"/>
-          </a:ln>
-        </p:spPr>
-      </p:sp>
-      <p:sp>
-        <p:nvSpPr>
-          <p:cNvPr id="21" name="">
-            <a:extLst xmlns:a="http://schemas.openxmlformats.org/drawingml/2006/main">
-              <a:ext uri="{FF2B5EF4-FFF2-40B4-BE49-F238E27FC236}">
-                <a16:creationId xmlns:a16="http://schemas.microsoft.com/office/drawing/2014/main" id="{0B354898-0F55-47CF-9A62-932E587CDFA8}"/>
-              </a:ext>
-            </a:extLst>
-          </p:cNvPr>
-          <p:cNvSpPr>
-            <a:spLocks xmlns:a="http://schemas.openxmlformats.org/drawingml/2006/main" noGrp="1"/>
-          </p:cNvSpPr>
-          <p:nvPr/>
-        </p:nvSpPr>
-        <p:spPr>
-          <a:xfrm xmlns:a="http://schemas.openxmlformats.org/drawingml/2006/main">
-            <a:off x="6884670" y="4076700"/>
-            <a:ext cx="1097280" cy="342900"/>
-          </a:xfrm>
-          <a:prstGeom xmlns:a="http://schemas.openxmlformats.org/drawingml/2006/main" prst="rect">
-            <a:avLst/>
-          </a:prstGeom>
-          <a:solidFill xmlns:a="http://schemas.openxmlformats.org/drawingml/2006/main">
-            <a:srgbClr val="000000">
-              <a:alpha val="0"/>
-            </a:srgbClr>
-          </a:solidFill>
-          <a:ln xmlns:a="http://schemas.openxmlformats.org/drawingml/2006/main" w="0">
-            <a:solidFill>
-              <a:srgbClr val="000000">
-                <a:alpha val="0"/>
-              </a:srgbClr>
-            </a:solidFill>
-            <a:prstDash val="solid"/>
-          </a:ln>
-        </p:spPr>
-        <p:txBody>
-          <a:bodyPr xmlns:a="http://schemas.openxmlformats.org/drawingml/2006/main"/>
-          <a:lstStyle xmlns:a="http://schemas.openxmlformats.org/drawingml/2006/main"/>
-          <a:p xmlns:a="http://schemas.openxmlformats.org/drawingml/2006/main">
-            <a:pPr algn="ctr">
-              <a:defRPr sz="1200" b="1">
-                <a:solidFill>
-                  <a:srgbClr val="FFFFFF"/>
-                </a:solidFill>
-                <a:latin typeface="Aptos Display"/>
-                <a:ea typeface="Aptos Display"/>
-                <a:cs typeface="Aptos Display"/>
-              </a:defRPr>
-            </a:pPr>
-            <a:r>
-              <a:rPr sz="1200" b="1">
-                <a:solidFill>
-                  <a:srgbClr val="FFFFFF"/>
-                </a:solidFill>
-                <a:latin typeface="Aptos Display"/>
-                <a:ea typeface="Aptos Display"/>
-                <a:cs typeface="Aptos Display"/>
-              </a:rPr>
-              <a:t>Export</a:t>
-            </a:r>
-          </a:p>
-        </p:txBody>
-      </p:sp>
-      <p:sp>
-        <p:nvSpPr>
-          <p:cNvPr id="22" name="">
-            <a:extLst xmlns:a="http://schemas.openxmlformats.org/drawingml/2006/main">
-              <a:ext uri="{FF2B5EF4-FFF2-40B4-BE49-F238E27FC236}">
-                <a16:creationId xmlns:a16="http://schemas.microsoft.com/office/drawing/2014/main" id="{A3E38F99-3952-49E5-BE26-FBF0B56C11FB}"/>
-              </a:ext>
-            </a:extLst>
-          </p:cNvPr>
-          <p:cNvSpPr>
-            <a:spLocks xmlns:a="http://schemas.openxmlformats.org/drawingml/2006/main" noGrp="1"/>
-          </p:cNvSpPr>
-          <p:nvPr/>
-        </p:nvSpPr>
-        <p:spPr>
-          <a:xfrm xmlns:a="http://schemas.openxmlformats.org/drawingml/2006/main">
-            <a:off x="8839200" y="781050"/>
-            <a:ext cx="2324100" cy="4667250"/>
-          </a:xfrm>
-          <a:prstGeom xmlns:a="http://schemas.openxmlformats.org/drawingml/2006/main" prst="roundRect">
-            <a:avLst>
-              <a:gd name="adj" fmla="val 4918"/>
-            </a:avLst>
-          </a:prstGeom>
-          <a:solidFill xmlns:a="http://schemas.openxmlformats.org/drawingml/2006/main">
-            <a:srgbClr val="0E1B2D"/>
-          </a:solidFill>
-          <a:ln xmlns:a="http://schemas.openxmlformats.org/drawingml/2006/main" w="9525">
-            <a:solidFill>
-              <a:srgbClr val="24415F"/>
-            </a:solidFill>
-            <a:prstDash val="solid"/>
-          </a:ln>
-        </p:spPr>
-      </p:sp>
-      <p:sp>
-        <p:nvSpPr>
-          <p:cNvPr id="23" name="">
-            <a:extLst xmlns:a="http://schemas.openxmlformats.org/drawingml/2006/main">
-              <a:ext uri="{FF2B5EF4-FFF2-40B4-BE49-F238E27FC236}">
-                <a16:creationId xmlns:a16="http://schemas.microsoft.com/office/drawing/2014/main" id="{DB84BDA8-B8C4-466C-A82D-5710C56B98EA}"/>
-              </a:ext>
-            </a:extLst>
-          </p:cNvPr>
-          <p:cNvSpPr>
-            <a:spLocks xmlns:a="http://schemas.openxmlformats.org/drawingml/2006/main" noGrp="1"/>
-          </p:cNvSpPr>
-          <p:nvPr/>
-        </p:nvSpPr>
-        <p:spPr>
-          <a:xfrm xmlns:a="http://schemas.openxmlformats.org/drawingml/2006/main">
-            <a:off x="9124950" y="1238250"/>
-            <a:ext cx="1752600" cy="1123950"/>
-          </a:xfrm>
-          <a:prstGeom xmlns:a="http://schemas.openxmlformats.org/drawingml/2006/main" prst="roundRect">
-            <a:avLst>
-              <a:gd name="adj" fmla="val 10169"/>
-            </a:avLst>
-          </a:prstGeom>
-          <a:solidFill xmlns:a="http://schemas.openxmlformats.org/drawingml/2006/main">
-            <a:srgbClr val="0E1B2D"/>
-          </a:solidFill>
-          <a:ln xmlns:a="http://schemas.openxmlformats.org/drawingml/2006/main" w="9525">
-            <a:solidFill>
-              <a:srgbClr val="24415F"/>
-            </a:solidFill>
-            <a:prstDash val="solid"/>
-          </a:ln>
-        </p:spPr>
-      </p:sp>
-      <p:sp>
-        <p:nvSpPr>
-          <p:cNvPr id="24" name="">
-            <a:extLst xmlns:a="http://schemas.openxmlformats.org/drawingml/2006/main">
-              <a:ext uri="{FF2B5EF4-FFF2-40B4-BE49-F238E27FC236}">
-                <a16:creationId xmlns:a16="http://schemas.microsoft.com/office/drawing/2014/main" id="{FC6E0527-2B3F-4007-B809-BBA7A73CF4FF}"/>
-              </a:ext>
-            </a:extLst>
-          </p:cNvPr>
-          <p:cNvSpPr>
-            <a:spLocks xmlns:a="http://schemas.openxmlformats.org/drawingml/2006/main" noGrp="1"/>
-          </p:cNvSpPr>
-          <p:nvPr/>
-        </p:nvSpPr>
-        <p:spPr>
-          <a:xfrm xmlns:a="http://schemas.openxmlformats.org/drawingml/2006/main">
-            <a:off x="9353550" y="1447800"/>
-            <a:ext cx="1295400" cy="400050"/>
-          </a:xfrm>
-          <a:prstGeom xmlns:a="http://schemas.openxmlformats.org/drawingml/2006/main" prst="rect">
-            <a:avLst/>
-          </a:prstGeom>
-          <a:solidFill xmlns:a="http://schemas.openxmlformats.org/drawingml/2006/main">
-            <a:srgbClr val="000000">
-              <a:alpha val="0"/>
-            </a:srgbClr>
-          </a:solidFill>
-          <a:ln xmlns:a="http://schemas.openxmlformats.org/drawingml/2006/main" w="0">
-            <a:solidFill>
-              <a:srgbClr val="000000">
-                <a:alpha val="0"/>
-              </a:srgbClr>
-            </a:solidFill>
-            <a:prstDash val="solid"/>
-          </a:ln>
-        </p:spPr>
-        <p:txBody>
-          <a:bodyPr xmlns:a="http://schemas.openxmlformats.org/drawingml/2006/main"/>
-          <a:lstStyle xmlns:a="http://schemas.openxmlformats.org/drawingml/2006/main"/>
-          <a:p xmlns:a="http://schemas.openxmlformats.org/drawingml/2006/main">
-            <a:pPr algn="l">
-              <a:defRPr sz="2250" b="1">
-                <a:solidFill>
-                  <a:srgbClr val="34D399"/>
-                </a:solidFill>
-                <a:latin typeface="Aptos Display"/>
-                <a:ea typeface="Aptos Display"/>
-                <a:cs typeface="Aptos Display"/>
-              </a:defRPr>
-            </a:pPr>
-            <a:r>
-              <a:rPr sz="2250" b="1">
-                <a:solidFill>
-                  <a:srgbClr val="34D399"/>
-                </a:solidFill>
-                <a:latin typeface="Aptos Display"/>
-                <a:ea typeface="Aptos Display"/>
-                <a:cs typeface="Aptos Display"/>
-              </a:rPr>
-              <a:t>8</a:t>
-            </a:r>
-          </a:p>
-        </p:txBody>
-      </p:sp>
-      <p:sp>
-        <p:nvSpPr>
-          <p:cNvPr id="25" name="">
-            <a:extLst xmlns:a="http://schemas.openxmlformats.org/drawingml/2006/main">
-              <a:ext uri="{FF2B5EF4-FFF2-40B4-BE49-F238E27FC236}">
-                <a16:creationId xmlns:a16="http://schemas.microsoft.com/office/drawing/2014/main" id="{8E630DB9-3595-49CE-8F34-DBED257D27B0}"/>
-              </a:ext>
-            </a:extLst>
-          </p:cNvPr>
-          <p:cNvSpPr>
-            <a:spLocks xmlns:a="http://schemas.openxmlformats.org/drawingml/2006/main" noGrp="1"/>
-          </p:cNvSpPr>
-          <p:nvPr/>
-        </p:nvSpPr>
-        <p:spPr>
-          <a:xfrm xmlns:a="http://schemas.openxmlformats.org/drawingml/2006/main">
-            <a:off x="9353550" y="1885950"/>
-            <a:ext cx="1295400" cy="266700"/>
+                <a16:creationId xmlns:a16="http://schemas.microsoft.com/office/drawing/2014/main" id="{59EEA947-5FE4-4DCE-BB80-6D62C647EDE0}"/>
+              </a:ext>
+            </a:extLst>
+          </p:cNvPr>
+          <p:cNvSpPr>
+            <a:spLocks xmlns:a="http://schemas.openxmlformats.org/drawingml/2006/main" noGrp="1"/>
+          </p:cNvSpPr>
+          <p:nvPr/>
+        </p:nvSpPr>
+        <p:spPr>
+          <a:xfrm xmlns:a="http://schemas.openxmlformats.org/drawingml/2006/main">
+            <a:off x="857250" y="3238500"/>
+            <a:ext cx="7239000" cy="228600"/>
           </a:xfrm>
           <a:prstGeom xmlns:a="http://schemas.openxmlformats.org/drawingml/2006/main" prst="rect">
             <a:avLst/>
@@ -3725,128 +2840,29 @@
                 <a:ea typeface="Aptos"/>
                 <a:cs typeface="Aptos"/>
               </a:rPr>
-              <a:t>Agent modules</a:t>
+              <a:t>GitHub: github.com/Sai-Vivek17/capital-lens-ai</a:t>
             </a:r>
           </a:p>
         </p:txBody>
       </p:sp>
       <p:sp>
         <p:nvSpPr>
-          <p:cNvPr id="26" name="">
-            <a:extLst xmlns:a="http://schemas.openxmlformats.org/drawingml/2006/main">
-              <a:ext uri="{FF2B5EF4-FFF2-40B4-BE49-F238E27FC236}">
-                <a16:creationId xmlns:a16="http://schemas.microsoft.com/office/drawing/2014/main" id="{6A6360E2-3EA0-4319-8994-E5D6550C9DE1}"/>
-              </a:ext>
-            </a:extLst>
-          </p:cNvPr>
-          <p:cNvSpPr>
-            <a:spLocks xmlns:a="http://schemas.openxmlformats.org/drawingml/2006/main" noGrp="1"/>
-          </p:cNvSpPr>
-          <p:nvPr/>
-        </p:nvSpPr>
-        <p:spPr>
-          <a:xfrm xmlns:a="http://schemas.openxmlformats.org/drawingml/2006/main">
-            <a:off x="9124950" y="2647950"/>
-            <a:ext cx="1752600" cy="1123950"/>
-          </a:xfrm>
-          <a:prstGeom xmlns:a="http://schemas.openxmlformats.org/drawingml/2006/main" prst="roundRect">
-            <a:avLst>
-              <a:gd name="adj" fmla="val 10169"/>
-            </a:avLst>
-          </a:prstGeom>
-          <a:solidFill xmlns:a="http://schemas.openxmlformats.org/drawingml/2006/main">
-            <a:srgbClr val="0E1B2D"/>
-          </a:solidFill>
-          <a:ln xmlns:a="http://schemas.openxmlformats.org/drawingml/2006/main" w="9525">
-            <a:solidFill>
-              <a:srgbClr val="24415F"/>
-            </a:solidFill>
-            <a:prstDash val="solid"/>
-          </a:ln>
-        </p:spPr>
-      </p:sp>
-      <p:sp>
-        <p:nvSpPr>
-          <p:cNvPr id="27" name="">
-            <a:extLst xmlns:a="http://schemas.openxmlformats.org/drawingml/2006/main">
-              <a:ext uri="{FF2B5EF4-FFF2-40B4-BE49-F238E27FC236}">
-                <a16:creationId xmlns:a16="http://schemas.microsoft.com/office/drawing/2014/main" id="{95CB5EA4-FA3E-4B47-A1DD-2DC68BB5D87F}"/>
-              </a:ext>
-            </a:extLst>
-          </p:cNvPr>
-          <p:cNvSpPr>
-            <a:spLocks xmlns:a="http://schemas.openxmlformats.org/drawingml/2006/main" noGrp="1"/>
-          </p:cNvSpPr>
-          <p:nvPr/>
-        </p:nvSpPr>
-        <p:spPr>
-          <a:xfrm xmlns:a="http://schemas.openxmlformats.org/drawingml/2006/main">
-            <a:off x="9353550" y="2857500"/>
-            <a:ext cx="1295400" cy="400050"/>
-          </a:xfrm>
-          <a:prstGeom xmlns:a="http://schemas.openxmlformats.org/drawingml/2006/main" prst="rect">
-            <a:avLst/>
-          </a:prstGeom>
-          <a:solidFill xmlns:a="http://schemas.openxmlformats.org/drawingml/2006/main">
-            <a:srgbClr val="000000">
-              <a:alpha val="0"/>
-            </a:srgbClr>
-          </a:solidFill>
-          <a:ln xmlns:a="http://schemas.openxmlformats.org/drawingml/2006/main" w="0">
-            <a:solidFill>
-              <a:srgbClr val="000000">
-                <a:alpha val="0"/>
-              </a:srgbClr>
-            </a:solidFill>
-            <a:prstDash val="solid"/>
-          </a:ln>
-        </p:spPr>
-        <p:txBody>
-          <a:bodyPr xmlns:a="http://schemas.openxmlformats.org/drawingml/2006/main"/>
-          <a:lstStyle xmlns:a="http://schemas.openxmlformats.org/drawingml/2006/main"/>
-          <a:p xmlns:a="http://schemas.openxmlformats.org/drawingml/2006/main">
-            <a:pPr algn="l">
-              <a:defRPr sz="2250" b="1">
-                <a:solidFill>
-                  <a:srgbClr val="38BDF8"/>
-                </a:solidFill>
-                <a:latin typeface="Aptos Display"/>
-                <a:ea typeface="Aptos Display"/>
-                <a:cs typeface="Aptos Display"/>
-              </a:defRPr>
-            </a:pPr>
-            <a:r>
-              <a:rPr sz="2250" b="1">
-                <a:solidFill>
-                  <a:srgbClr val="38BDF8"/>
-                </a:solidFill>
-                <a:latin typeface="Aptos Display"/>
-                <a:ea typeface="Aptos Display"/>
-                <a:cs typeface="Aptos Display"/>
-              </a:rPr>
-              <a:t>5</a:t>
-            </a:r>
-          </a:p>
-        </p:txBody>
-      </p:sp>
-      <p:sp>
-        <p:nvSpPr>
-          <p:cNvPr id="28" name="">
-            <a:extLst xmlns:a="http://schemas.openxmlformats.org/drawingml/2006/main">
-              <a:ext uri="{FF2B5EF4-FFF2-40B4-BE49-F238E27FC236}">
-                <a16:creationId xmlns:a16="http://schemas.microsoft.com/office/drawing/2014/main" id="{08788688-0BD4-4A33-9725-E2E2AB03F372}"/>
-              </a:ext>
-            </a:extLst>
-          </p:cNvPr>
-          <p:cNvSpPr>
-            <a:spLocks xmlns:a="http://schemas.openxmlformats.org/drawingml/2006/main" noGrp="1"/>
-          </p:cNvSpPr>
-          <p:nvPr/>
-        </p:nvSpPr>
-        <p:spPr>
-          <a:xfrm xmlns:a="http://schemas.openxmlformats.org/drawingml/2006/main">
-            <a:off x="9353550" y="3295650"/>
-            <a:ext cx="1295400" cy="266700"/>
+          <p:cNvPr id="9" name="">
+            <a:extLst xmlns:a="http://schemas.openxmlformats.org/drawingml/2006/main">
+              <a:ext uri="{FF2B5EF4-FFF2-40B4-BE49-F238E27FC236}">
+                <a16:creationId xmlns:a16="http://schemas.microsoft.com/office/drawing/2014/main" id="{114E762A-C779-4937-A08A-D00EA9474E7A}"/>
+              </a:ext>
+            </a:extLst>
+          </p:cNvPr>
+          <p:cNvSpPr>
+            <a:spLocks xmlns:a="http://schemas.openxmlformats.org/drawingml/2006/main" noGrp="1"/>
+          </p:cNvSpPr>
+          <p:nvPr/>
+        </p:nvSpPr>
+        <p:spPr>
+          <a:xfrm xmlns:a="http://schemas.openxmlformats.org/drawingml/2006/main">
+            <a:off x="857250" y="3524250"/>
+            <a:ext cx="7239000" cy="228600"/>
           </a:xfrm>
           <a:prstGeom xmlns:a="http://schemas.openxmlformats.org/drawingml/2006/main" prst="rect">
             <a:avLst/>
@@ -3888,28 +2904,814 @@
                 <a:ea typeface="Aptos"/>
                 <a:cs typeface="Aptos"/>
               </a:rPr>
-              <a:t>Demo companies</a:t>
+              <a:t>Live demo: https://capital-lens-ai.streamlit.app</a:t>
             </a:r>
           </a:p>
         </p:txBody>
       </p:sp>
       <p:sp>
         <p:nvSpPr>
-          <p:cNvPr id="29" name="">
-            <a:extLst xmlns:a="http://schemas.openxmlformats.org/drawingml/2006/main">
-              <a:ext uri="{FF2B5EF4-FFF2-40B4-BE49-F238E27FC236}">
-                <a16:creationId xmlns:a16="http://schemas.microsoft.com/office/drawing/2014/main" id="{F513316B-06D7-4345-A3CE-A82B6A156455}"/>
-              </a:ext>
-            </a:extLst>
-          </p:cNvPr>
-          <p:cNvSpPr>
-            <a:spLocks xmlns:a="http://schemas.openxmlformats.org/drawingml/2006/main" noGrp="1"/>
-          </p:cNvSpPr>
-          <p:nvPr/>
-        </p:nvSpPr>
-        <p:spPr>
-          <a:xfrm xmlns:a="http://schemas.openxmlformats.org/drawingml/2006/main">
-            <a:off x="9124950" y="4057650"/>
+          <p:cNvPr id="10" name="">
+            <a:extLst xmlns:a="http://schemas.openxmlformats.org/drawingml/2006/main">
+              <a:ext uri="{FF2B5EF4-FFF2-40B4-BE49-F238E27FC236}">
+                <a16:creationId xmlns:a16="http://schemas.microsoft.com/office/drawing/2014/main" id="{DD90683C-2AAB-4099-A80E-77935CC8920D}"/>
+              </a:ext>
+            </a:extLst>
+          </p:cNvPr>
+          <p:cNvSpPr>
+            <a:spLocks xmlns:a="http://schemas.openxmlformats.org/drawingml/2006/main" noGrp="1"/>
+          </p:cNvSpPr>
+          <p:nvPr/>
+        </p:nvSpPr>
+        <p:spPr>
+          <a:xfrm xmlns:a="http://schemas.openxmlformats.org/drawingml/2006/main">
+            <a:off x="857250" y="3905250"/>
+            <a:ext cx="1325880" cy="704850"/>
+          </a:xfrm>
+          <a:prstGeom xmlns:a="http://schemas.openxmlformats.org/drawingml/2006/main" prst="roundRect">
+            <a:avLst>
+              <a:gd name="adj" fmla="val 16216"/>
+            </a:avLst>
+          </a:prstGeom>
+          <a:solidFill xmlns:a="http://schemas.openxmlformats.org/drawingml/2006/main">
+            <a:srgbClr val="12243A"/>
+          </a:solidFill>
+          <a:ln xmlns:a="http://schemas.openxmlformats.org/drawingml/2006/main" w="9525">
+            <a:solidFill>
+              <a:srgbClr val="24415F"/>
+            </a:solidFill>
+            <a:prstDash val="solid"/>
+          </a:ln>
+        </p:spPr>
+      </p:sp>
+      <p:sp>
+        <p:nvSpPr>
+          <p:cNvPr id="11" name="">
+            <a:extLst xmlns:a="http://schemas.openxmlformats.org/drawingml/2006/main">
+              <a:ext uri="{FF2B5EF4-FFF2-40B4-BE49-F238E27FC236}">
+                <a16:creationId xmlns:a16="http://schemas.microsoft.com/office/drawing/2014/main" id="{5C508AAD-8CFE-46BA-A467-712D869EBB70}"/>
+              </a:ext>
+            </a:extLst>
+          </p:cNvPr>
+          <p:cNvSpPr>
+            <a:spLocks xmlns:a="http://schemas.openxmlformats.org/drawingml/2006/main" noGrp="1"/>
+          </p:cNvSpPr>
+          <p:nvPr/>
+        </p:nvSpPr>
+        <p:spPr>
+          <a:xfrm xmlns:a="http://schemas.openxmlformats.org/drawingml/2006/main">
+            <a:off x="971550" y="4076700"/>
+            <a:ext cx="1097280" cy="342900"/>
+          </a:xfrm>
+          <a:prstGeom xmlns:a="http://schemas.openxmlformats.org/drawingml/2006/main" prst="rect">
+            <a:avLst/>
+          </a:prstGeom>
+          <a:solidFill xmlns:a="http://schemas.openxmlformats.org/drawingml/2006/main">
+            <a:srgbClr val="000000">
+              <a:alpha val="0"/>
+            </a:srgbClr>
+          </a:solidFill>
+          <a:ln xmlns:a="http://schemas.openxmlformats.org/drawingml/2006/main" w="0">
+            <a:solidFill>
+              <a:srgbClr val="000000">
+                <a:alpha val="0"/>
+              </a:srgbClr>
+            </a:solidFill>
+            <a:prstDash val="solid"/>
+          </a:ln>
+        </p:spPr>
+        <p:txBody>
+          <a:bodyPr xmlns:a="http://schemas.openxmlformats.org/drawingml/2006/main"/>
+          <a:lstStyle xmlns:a="http://schemas.openxmlformats.org/drawingml/2006/main"/>
+          <a:p xmlns:a="http://schemas.openxmlformats.org/drawingml/2006/main">
+            <a:pPr algn="ctr">
+              <a:defRPr sz="1200" b="1">
+                <a:solidFill>
+                  <a:srgbClr val="FFFFFF"/>
+                </a:solidFill>
+                <a:latin typeface="Aptos Display"/>
+                <a:ea typeface="Aptos Display"/>
+                <a:cs typeface="Aptos Display"/>
+              </a:defRPr>
+            </a:pPr>
+            <a:r>
+              <a:rPr sz="1200" b="1">
+                <a:solidFill>
+                  <a:srgbClr val="FFFFFF"/>
+                </a:solidFill>
+                <a:latin typeface="Aptos Display"/>
+                <a:ea typeface="Aptos Display"/>
+                <a:cs typeface="Aptos Display"/>
+              </a:rPr>
+              <a:t>Plan</a:t>
+            </a:r>
+          </a:p>
+        </p:txBody>
+      </p:sp>
+      <p:sp>
+        <p:nvSpPr>
+          <p:cNvPr id="12" name="">
+            <a:extLst xmlns:a="http://schemas.openxmlformats.org/drawingml/2006/main">
+              <a:ext uri="{FF2B5EF4-FFF2-40B4-BE49-F238E27FC236}">
+                <a16:creationId xmlns:a16="http://schemas.microsoft.com/office/drawing/2014/main" id="{70629213-A38B-49CC-B654-2EF370119B86}"/>
+              </a:ext>
+            </a:extLst>
+          </p:cNvPr>
+          <p:cNvSpPr>
+            <a:spLocks xmlns:a="http://schemas.openxmlformats.org/drawingml/2006/main" noGrp="1"/>
+          </p:cNvSpPr>
+          <p:nvPr/>
+        </p:nvSpPr>
+        <p:spPr>
+          <a:xfrm xmlns:a="http://schemas.openxmlformats.org/drawingml/2006/main">
+            <a:off x="2202180" y="4133850"/>
+            <a:ext cx="133350" cy="266700"/>
+          </a:xfrm>
+          <a:prstGeom xmlns:a="http://schemas.openxmlformats.org/drawingml/2006/main" prst="rect">
+            <a:avLst/>
+          </a:prstGeom>
+          <a:solidFill xmlns:a="http://schemas.openxmlformats.org/drawingml/2006/main">
+            <a:srgbClr val="000000">
+              <a:alpha val="0"/>
+            </a:srgbClr>
+          </a:solidFill>
+          <a:ln xmlns:a="http://schemas.openxmlformats.org/drawingml/2006/main" w="0">
+            <a:solidFill>
+              <a:srgbClr val="000000">
+                <a:alpha val="0"/>
+              </a:srgbClr>
+            </a:solidFill>
+            <a:prstDash val="solid"/>
+          </a:ln>
+        </p:spPr>
+        <p:txBody>
+          <a:bodyPr xmlns:a="http://schemas.openxmlformats.org/drawingml/2006/main"/>
+          <a:lstStyle xmlns:a="http://schemas.openxmlformats.org/drawingml/2006/main"/>
+          <a:p xmlns:a="http://schemas.openxmlformats.org/drawingml/2006/main">
+            <a:pPr algn="ctr">
+              <a:defRPr sz="1500" b="1">
+                <a:solidFill>
+                  <a:srgbClr val="38BDF8"/>
+                </a:solidFill>
+                <a:latin typeface="Aptos Display"/>
+                <a:ea typeface="Aptos Display"/>
+                <a:cs typeface="Aptos Display"/>
+              </a:defRPr>
+            </a:pPr>
+            <a:r>
+              <a:rPr sz="1500" b="1">
+                <a:solidFill>
+                  <a:srgbClr val="38BDF8"/>
+                </a:solidFill>
+                <a:latin typeface="Aptos Display"/>
+                <a:ea typeface="Aptos Display"/>
+                <a:cs typeface="Aptos Display"/>
+              </a:rPr>
+              <a:t>&gt;</a:t>
+            </a:r>
+          </a:p>
+        </p:txBody>
+      </p:sp>
+      <p:sp>
+        <p:nvSpPr>
+          <p:cNvPr id="13" name="">
+            <a:extLst xmlns:a="http://schemas.openxmlformats.org/drawingml/2006/main">
+              <a:ext uri="{FF2B5EF4-FFF2-40B4-BE49-F238E27FC236}">
+                <a16:creationId xmlns:a16="http://schemas.microsoft.com/office/drawing/2014/main" id="{3A2E2A1E-2678-4A50-9C0F-AB6DD678740C}"/>
+              </a:ext>
+            </a:extLst>
+          </p:cNvPr>
+          <p:cNvSpPr>
+            <a:spLocks xmlns:a="http://schemas.openxmlformats.org/drawingml/2006/main" noGrp="1"/>
+          </p:cNvSpPr>
+          <p:nvPr/>
+        </p:nvSpPr>
+        <p:spPr>
+          <a:xfrm xmlns:a="http://schemas.openxmlformats.org/drawingml/2006/main">
+            <a:off x="2335530" y="3905250"/>
+            <a:ext cx="1325880" cy="704850"/>
+          </a:xfrm>
+          <a:prstGeom xmlns:a="http://schemas.openxmlformats.org/drawingml/2006/main" prst="roundRect">
+            <a:avLst>
+              <a:gd name="adj" fmla="val 16216"/>
+            </a:avLst>
+          </a:prstGeom>
+          <a:solidFill xmlns:a="http://schemas.openxmlformats.org/drawingml/2006/main">
+            <a:srgbClr val="12243A"/>
+          </a:solidFill>
+          <a:ln xmlns:a="http://schemas.openxmlformats.org/drawingml/2006/main" w="9525">
+            <a:solidFill>
+              <a:srgbClr val="24415F"/>
+            </a:solidFill>
+            <a:prstDash val="solid"/>
+          </a:ln>
+        </p:spPr>
+      </p:sp>
+      <p:sp>
+        <p:nvSpPr>
+          <p:cNvPr id="14" name="">
+            <a:extLst xmlns:a="http://schemas.openxmlformats.org/drawingml/2006/main">
+              <a:ext uri="{FF2B5EF4-FFF2-40B4-BE49-F238E27FC236}">
+                <a16:creationId xmlns:a16="http://schemas.microsoft.com/office/drawing/2014/main" id="{F55905A1-5F41-4D1E-ACE6-0083D4853B80}"/>
+              </a:ext>
+            </a:extLst>
+          </p:cNvPr>
+          <p:cNvSpPr>
+            <a:spLocks xmlns:a="http://schemas.openxmlformats.org/drawingml/2006/main" noGrp="1"/>
+          </p:cNvSpPr>
+          <p:nvPr/>
+        </p:nvSpPr>
+        <p:spPr>
+          <a:xfrm xmlns:a="http://schemas.openxmlformats.org/drawingml/2006/main">
+            <a:off x="2449830" y="4076700"/>
+            <a:ext cx="1097280" cy="342900"/>
+          </a:xfrm>
+          <a:prstGeom xmlns:a="http://schemas.openxmlformats.org/drawingml/2006/main" prst="rect">
+            <a:avLst/>
+          </a:prstGeom>
+          <a:solidFill xmlns:a="http://schemas.openxmlformats.org/drawingml/2006/main">
+            <a:srgbClr val="000000">
+              <a:alpha val="0"/>
+            </a:srgbClr>
+          </a:solidFill>
+          <a:ln xmlns:a="http://schemas.openxmlformats.org/drawingml/2006/main" w="0">
+            <a:solidFill>
+              <a:srgbClr val="000000">
+                <a:alpha val="0"/>
+              </a:srgbClr>
+            </a:solidFill>
+            <a:prstDash val="solid"/>
+          </a:ln>
+        </p:spPr>
+        <p:txBody>
+          <a:bodyPr xmlns:a="http://schemas.openxmlformats.org/drawingml/2006/main"/>
+          <a:lstStyle xmlns:a="http://schemas.openxmlformats.org/drawingml/2006/main"/>
+          <a:p xmlns:a="http://schemas.openxmlformats.org/drawingml/2006/main">
+            <a:pPr algn="ctr">
+              <a:defRPr sz="1200" b="1">
+                <a:solidFill>
+                  <a:srgbClr val="FFFFFF"/>
+                </a:solidFill>
+                <a:latin typeface="Aptos Display"/>
+                <a:ea typeface="Aptos Display"/>
+                <a:cs typeface="Aptos Display"/>
+              </a:defRPr>
+            </a:pPr>
+            <a:r>
+              <a:rPr sz="1200" b="1">
+                <a:solidFill>
+                  <a:srgbClr val="FFFFFF"/>
+                </a:solidFill>
+                <a:latin typeface="Aptos Display"/>
+                <a:ea typeface="Aptos Display"/>
+                <a:cs typeface="Aptos Display"/>
+              </a:rPr>
+              <a:t>Retrieve</a:t>
+            </a:r>
+          </a:p>
+        </p:txBody>
+      </p:sp>
+      <p:sp>
+        <p:nvSpPr>
+          <p:cNvPr id="15" name="">
+            <a:extLst xmlns:a="http://schemas.openxmlformats.org/drawingml/2006/main">
+              <a:ext uri="{FF2B5EF4-FFF2-40B4-BE49-F238E27FC236}">
+                <a16:creationId xmlns:a16="http://schemas.microsoft.com/office/drawing/2014/main" id="{A83C609C-6405-4CBD-A2C3-248050165884}"/>
+              </a:ext>
+            </a:extLst>
+          </p:cNvPr>
+          <p:cNvSpPr>
+            <a:spLocks xmlns:a="http://schemas.openxmlformats.org/drawingml/2006/main" noGrp="1"/>
+          </p:cNvSpPr>
+          <p:nvPr/>
+        </p:nvSpPr>
+        <p:spPr>
+          <a:xfrm xmlns:a="http://schemas.openxmlformats.org/drawingml/2006/main">
+            <a:off x="3680460" y="4133850"/>
+            <a:ext cx="133350" cy="266700"/>
+          </a:xfrm>
+          <a:prstGeom xmlns:a="http://schemas.openxmlformats.org/drawingml/2006/main" prst="rect">
+            <a:avLst/>
+          </a:prstGeom>
+          <a:solidFill xmlns:a="http://schemas.openxmlformats.org/drawingml/2006/main">
+            <a:srgbClr val="000000">
+              <a:alpha val="0"/>
+            </a:srgbClr>
+          </a:solidFill>
+          <a:ln xmlns:a="http://schemas.openxmlformats.org/drawingml/2006/main" w="0">
+            <a:solidFill>
+              <a:srgbClr val="000000">
+                <a:alpha val="0"/>
+              </a:srgbClr>
+            </a:solidFill>
+            <a:prstDash val="solid"/>
+          </a:ln>
+        </p:spPr>
+        <p:txBody>
+          <a:bodyPr xmlns:a="http://schemas.openxmlformats.org/drawingml/2006/main"/>
+          <a:lstStyle xmlns:a="http://schemas.openxmlformats.org/drawingml/2006/main"/>
+          <a:p xmlns:a="http://schemas.openxmlformats.org/drawingml/2006/main">
+            <a:pPr algn="ctr">
+              <a:defRPr sz="1500" b="1">
+                <a:solidFill>
+                  <a:srgbClr val="38BDF8"/>
+                </a:solidFill>
+                <a:latin typeface="Aptos Display"/>
+                <a:ea typeface="Aptos Display"/>
+                <a:cs typeface="Aptos Display"/>
+              </a:defRPr>
+            </a:pPr>
+            <a:r>
+              <a:rPr sz="1500" b="1">
+                <a:solidFill>
+                  <a:srgbClr val="38BDF8"/>
+                </a:solidFill>
+                <a:latin typeface="Aptos Display"/>
+                <a:ea typeface="Aptos Display"/>
+                <a:cs typeface="Aptos Display"/>
+              </a:rPr>
+              <a:t>&gt;</a:t>
+            </a:r>
+          </a:p>
+        </p:txBody>
+      </p:sp>
+      <p:sp>
+        <p:nvSpPr>
+          <p:cNvPr id="16" name="">
+            <a:extLst xmlns:a="http://schemas.openxmlformats.org/drawingml/2006/main">
+              <a:ext uri="{FF2B5EF4-FFF2-40B4-BE49-F238E27FC236}">
+                <a16:creationId xmlns:a16="http://schemas.microsoft.com/office/drawing/2014/main" id="{3FED802D-CE3B-45D1-A986-050821E1E246}"/>
+              </a:ext>
+            </a:extLst>
+          </p:cNvPr>
+          <p:cNvSpPr>
+            <a:spLocks xmlns:a="http://schemas.openxmlformats.org/drawingml/2006/main" noGrp="1"/>
+          </p:cNvSpPr>
+          <p:nvPr/>
+        </p:nvSpPr>
+        <p:spPr>
+          <a:xfrm xmlns:a="http://schemas.openxmlformats.org/drawingml/2006/main">
+            <a:off x="3813810" y="3905250"/>
+            <a:ext cx="1325880" cy="704850"/>
+          </a:xfrm>
+          <a:prstGeom xmlns:a="http://schemas.openxmlformats.org/drawingml/2006/main" prst="roundRect">
+            <a:avLst>
+              <a:gd name="adj" fmla="val 16216"/>
+            </a:avLst>
+          </a:prstGeom>
+          <a:solidFill xmlns:a="http://schemas.openxmlformats.org/drawingml/2006/main">
+            <a:srgbClr val="12243A"/>
+          </a:solidFill>
+          <a:ln xmlns:a="http://schemas.openxmlformats.org/drawingml/2006/main" w="9525">
+            <a:solidFill>
+              <a:srgbClr val="24415F"/>
+            </a:solidFill>
+            <a:prstDash val="solid"/>
+          </a:ln>
+        </p:spPr>
+      </p:sp>
+      <p:sp>
+        <p:nvSpPr>
+          <p:cNvPr id="17" name="">
+            <a:extLst xmlns:a="http://schemas.openxmlformats.org/drawingml/2006/main">
+              <a:ext uri="{FF2B5EF4-FFF2-40B4-BE49-F238E27FC236}">
+                <a16:creationId xmlns:a16="http://schemas.microsoft.com/office/drawing/2014/main" id="{BAE659D8-CFF4-4523-B7E1-AB1DD5078406}"/>
+              </a:ext>
+            </a:extLst>
+          </p:cNvPr>
+          <p:cNvSpPr>
+            <a:spLocks xmlns:a="http://schemas.openxmlformats.org/drawingml/2006/main" noGrp="1"/>
+          </p:cNvSpPr>
+          <p:nvPr/>
+        </p:nvSpPr>
+        <p:spPr>
+          <a:xfrm xmlns:a="http://schemas.openxmlformats.org/drawingml/2006/main">
+            <a:off x="3928110" y="4076700"/>
+            <a:ext cx="1097280" cy="342900"/>
+          </a:xfrm>
+          <a:prstGeom xmlns:a="http://schemas.openxmlformats.org/drawingml/2006/main" prst="rect">
+            <a:avLst/>
+          </a:prstGeom>
+          <a:solidFill xmlns:a="http://schemas.openxmlformats.org/drawingml/2006/main">
+            <a:srgbClr val="000000">
+              <a:alpha val="0"/>
+            </a:srgbClr>
+          </a:solidFill>
+          <a:ln xmlns:a="http://schemas.openxmlformats.org/drawingml/2006/main" w="0">
+            <a:solidFill>
+              <a:srgbClr val="000000">
+                <a:alpha val="0"/>
+              </a:srgbClr>
+            </a:solidFill>
+            <a:prstDash val="solid"/>
+          </a:ln>
+        </p:spPr>
+        <p:txBody>
+          <a:bodyPr xmlns:a="http://schemas.openxmlformats.org/drawingml/2006/main"/>
+          <a:lstStyle xmlns:a="http://schemas.openxmlformats.org/drawingml/2006/main"/>
+          <a:p xmlns:a="http://schemas.openxmlformats.org/drawingml/2006/main">
+            <a:pPr algn="ctr">
+              <a:defRPr sz="1200" b="1">
+                <a:solidFill>
+                  <a:srgbClr val="FFFFFF"/>
+                </a:solidFill>
+                <a:latin typeface="Aptos Display"/>
+                <a:ea typeface="Aptos Display"/>
+                <a:cs typeface="Aptos Display"/>
+              </a:defRPr>
+            </a:pPr>
+            <a:r>
+              <a:rPr sz="1200" b="1">
+                <a:solidFill>
+                  <a:srgbClr val="FFFFFF"/>
+                </a:solidFill>
+                <a:latin typeface="Aptos Display"/>
+                <a:ea typeface="Aptos Display"/>
+                <a:cs typeface="Aptos Display"/>
+              </a:rPr>
+              <a:t>Analyze</a:t>
+            </a:r>
+          </a:p>
+        </p:txBody>
+      </p:sp>
+      <p:sp>
+        <p:nvSpPr>
+          <p:cNvPr id="18" name="">
+            <a:extLst xmlns:a="http://schemas.openxmlformats.org/drawingml/2006/main">
+              <a:ext uri="{FF2B5EF4-FFF2-40B4-BE49-F238E27FC236}">
+                <a16:creationId xmlns:a16="http://schemas.microsoft.com/office/drawing/2014/main" id="{6C832BC7-2DF9-4D22-9DAD-FEC41BD543CA}"/>
+              </a:ext>
+            </a:extLst>
+          </p:cNvPr>
+          <p:cNvSpPr>
+            <a:spLocks xmlns:a="http://schemas.openxmlformats.org/drawingml/2006/main" noGrp="1"/>
+          </p:cNvSpPr>
+          <p:nvPr/>
+        </p:nvSpPr>
+        <p:spPr>
+          <a:xfrm xmlns:a="http://schemas.openxmlformats.org/drawingml/2006/main">
+            <a:off x="5158740" y="4133850"/>
+            <a:ext cx="133350" cy="266700"/>
+          </a:xfrm>
+          <a:prstGeom xmlns:a="http://schemas.openxmlformats.org/drawingml/2006/main" prst="rect">
+            <a:avLst/>
+          </a:prstGeom>
+          <a:solidFill xmlns:a="http://schemas.openxmlformats.org/drawingml/2006/main">
+            <a:srgbClr val="000000">
+              <a:alpha val="0"/>
+            </a:srgbClr>
+          </a:solidFill>
+          <a:ln xmlns:a="http://schemas.openxmlformats.org/drawingml/2006/main" w="0">
+            <a:solidFill>
+              <a:srgbClr val="000000">
+                <a:alpha val="0"/>
+              </a:srgbClr>
+            </a:solidFill>
+            <a:prstDash val="solid"/>
+          </a:ln>
+        </p:spPr>
+        <p:txBody>
+          <a:bodyPr xmlns:a="http://schemas.openxmlformats.org/drawingml/2006/main"/>
+          <a:lstStyle xmlns:a="http://schemas.openxmlformats.org/drawingml/2006/main"/>
+          <a:p xmlns:a="http://schemas.openxmlformats.org/drawingml/2006/main">
+            <a:pPr algn="ctr">
+              <a:defRPr sz="1500" b="1">
+                <a:solidFill>
+                  <a:srgbClr val="38BDF8"/>
+                </a:solidFill>
+                <a:latin typeface="Aptos Display"/>
+                <a:ea typeface="Aptos Display"/>
+                <a:cs typeface="Aptos Display"/>
+              </a:defRPr>
+            </a:pPr>
+            <a:r>
+              <a:rPr sz="1500" b="1">
+                <a:solidFill>
+                  <a:srgbClr val="38BDF8"/>
+                </a:solidFill>
+                <a:latin typeface="Aptos Display"/>
+                <a:ea typeface="Aptos Display"/>
+                <a:cs typeface="Aptos Display"/>
+              </a:rPr>
+              <a:t>&gt;</a:t>
+            </a:r>
+          </a:p>
+        </p:txBody>
+      </p:sp>
+      <p:sp>
+        <p:nvSpPr>
+          <p:cNvPr id="19" name="">
+            <a:extLst xmlns:a="http://schemas.openxmlformats.org/drawingml/2006/main">
+              <a:ext uri="{FF2B5EF4-FFF2-40B4-BE49-F238E27FC236}">
+                <a16:creationId xmlns:a16="http://schemas.microsoft.com/office/drawing/2014/main" id="{8975984A-CEE4-41FE-BEA5-D6AAC0EF15C2}"/>
+              </a:ext>
+            </a:extLst>
+          </p:cNvPr>
+          <p:cNvSpPr>
+            <a:spLocks xmlns:a="http://schemas.openxmlformats.org/drawingml/2006/main" noGrp="1"/>
+          </p:cNvSpPr>
+          <p:nvPr/>
+        </p:nvSpPr>
+        <p:spPr>
+          <a:xfrm xmlns:a="http://schemas.openxmlformats.org/drawingml/2006/main">
+            <a:off x="5292090" y="3905250"/>
+            <a:ext cx="1325880" cy="704850"/>
+          </a:xfrm>
+          <a:prstGeom xmlns:a="http://schemas.openxmlformats.org/drawingml/2006/main" prst="roundRect">
+            <a:avLst>
+              <a:gd name="adj" fmla="val 16216"/>
+            </a:avLst>
+          </a:prstGeom>
+          <a:solidFill xmlns:a="http://schemas.openxmlformats.org/drawingml/2006/main">
+            <a:srgbClr val="12243A"/>
+          </a:solidFill>
+          <a:ln xmlns:a="http://schemas.openxmlformats.org/drawingml/2006/main" w="9525">
+            <a:solidFill>
+              <a:srgbClr val="24415F"/>
+            </a:solidFill>
+            <a:prstDash val="solid"/>
+          </a:ln>
+        </p:spPr>
+      </p:sp>
+      <p:sp>
+        <p:nvSpPr>
+          <p:cNvPr id="20" name="">
+            <a:extLst xmlns:a="http://schemas.openxmlformats.org/drawingml/2006/main">
+              <a:ext uri="{FF2B5EF4-FFF2-40B4-BE49-F238E27FC236}">
+                <a16:creationId xmlns:a16="http://schemas.microsoft.com/office/drawing/2014/main" id="{F0FB32AC-5175-4FD9-82A1-8D8304F50B59}"/>
+              </a:ext>
+            </a:extLst>
+          </p:cNvPr>
+          <p:cNvSpPr>
+            <a:spLocks xmlns:a="http://schemas.openxmlformats.org/drawingml/2006/main" noGrp="1"/>
+          </p:cNvSpPr>
+          <p:nvPr/>
+        </p:nvSpPr>
+        <p:spPr>
+          <a:xfrm xmlns:a="http://schemas.openxmlformats.org/drawingml/2006/main">
+            <a:off x="5406390" y="4076700"/>
+            <a:ext cx="1097280" cy="342900"/>
+          </a:xfrm>
+          <a:prstGeom xmlns:a="http://schemas.openxmlformats.org/drawingml/2006/main" prst="rect">
+            <a:avLst/>
+          </a:prstGeom>
+          <a:solidFill xmlns:a="http://schemas.openxmlformats.org/drawingml/2006/main">
+            <a:srgbClr val="000000">
+              <a:alpha val="0"/>
+            </a:srgbClr>
+          </a:solidFill>
+          <a:ln xmlns:a="http://schemas.openxmlformats.org/drawingml/2006/main" w="0">
+            <a:solidFill>
+              <a:srgbClr val="000000">
+                <a:alpha val="0"/>
+              </a:srgbClr>
+            </a:solidFill>
+            <a:prstDash val="solid"/>
+          </a:ln>
+        </p:spPr>
+        <p:txBody>
+          <a:bodyPr xmlns:a="http://schemas.openxmlformats.org/drawingml/2006/main"/>
+          <a:lstStyle xmlns:a="http://schemas.openxmlformats.org/drawingml/2006/main"/>
+          <a:p xmlns:a="http://schemas.openxmlformats.org/drawingml/2006/main">
+            <a:pPr algn="ctr">
+              <a:defRPr sz="1200" b="1">
+                <a:solidFill>
+                  <a:srgbClr val="FFFFFF"/>
+                </a:solidFill>
+                <a:latin typeface="Aptos Display"/>
+                <a:ea typeface="Aptos Display"/>
+                <a:cs typeface="Aptos Display"/>
+              </a:defRPr>
+            </a:pPr>
+            <a:r>
+              <a:rPr sz="1200" b="1">
+                <a:solidFill>
+                  <a:srgbClr val="FFFFFF"/>
+                </a:solidFill>
+                <a:latin typeface="Aptos Display"/>
+                <a:ea typeface="Aptos Display"/>
+                <a:cs typeface="Aptos Display"/>
+              </a:rPr>
+              <a:t>Cite</a:t>
+            </a:r>
+          </a:p>
+        </p:txBody>
+      </p:sp>
+      <p:sp>
+        <p:nvSpPr>
+          <p:cNvPr id="21" name="">
+            <a:extLst xmlns:a="http://schemas.openxmlformats.org/drawingml/2006/main">
+              <a:ext uri="{FF2B5EF4-FFF2-40B4-BE49-F238E27FC236}">
+                <a16:creationId xmlns:a16="http://schemas.microsoft.com/office/drawing/2014/main" id="{BF8C8BCD-E11F-44EF-A361-6E6EF302DBCC}"/>
+              </a:ext>
+            </a:extLst>
+          </p:cNvPr>
+          <p:cNvSpPr>
+            <a:spLocks xmlns:a="http://schemas.openxmlformats.org/drawingml/2006/main" noGrp="1"/>
+          </p:cNvSpPr>
+          <p:nvPr/>
+        </p:nvSpPr>
+        <p:spPr>
+          <a:xfrm xmlns:a="http://schemas.openxmlformats.org/drawingml/2006/main">
+            <a:off x="6637020" y="4133850"/>
+            <a:ext cx="133350" cy="266700"/>
+          </a:xfrm>
+          <a:prstGeom xmlns:a="http://schemas.openxmlformats.org/drawingml/2006/main" prst="rect">
+            <a:avLst/>
+          </a:prstGeom>
+          <a:solidFill xmlns:a="http://schemas.openxmlformats.org/drawingml/2006/main">
+            <a:srgbClr val="000000">
+              <a:alpha val="0"/>
+            </a:srgbClr>
+          </a:solidFill>
+          <a:ln xmlns:a="http://schemas.openxmlformats.org/drawingml/2006/main" w="0">
+            <a:solidFill>
+              <a:srgbClr val="000000">
+                <a:alpha val="0"/>
+              </a:srgbClr>
+            </a:solidFill>
+            <a:prstDash val="solid"/>
+          </a:ln>
+        </p:spPr>
+        <p:txBody>
+          <a:bodyPr xmlns:a="http://schemas.openxmlformats.org/drawingml/2006/main"/>
+          <a:lstStyle xmlns:a="http://schemas.openxmlformats.org/drawingml/2006/main"/>
+          <a:p xmlns:a="http://schemas.openxmlformats.org/drawingml/2006/main">
+            <a:pPr algn="ctr">
+              <a:defRPr sz="1500" b="1">
+                <a:solidFill>
+                  <a:srgbClr val="38BDF8"/>
+                </a:solidFill>
+                <a:latin typeface="Aptos Display"/>
+                <a:ea typeface="Aptos Display"/>
+                <a:cs typeface="Aptos Display"/>
+              </a:defRPr>
+            </a:pPr>
+            <a:r>
+              <a:rPr sz="1500" b="1">
+                <a:solidFill>
+                  <a:srgbClr val="38BDF8"/>
+                </a:solidFill>
+                <a:latin typeface="Aptos Display"/>
+                <a:ea typeface="Aptos Display"/>
+                <a:cs typeface="Aptos Display"/>
+              </a:rPr>
+              <a:t>&gt;</a:t>
+            </a:r>
+          </a:p>
+        </p:txBody>
+      </p:sp>
+      <p:sp>
+        <p:nvSpPr>
+          <p:cNvPr id="22" name="">
+            <a:extLst xmlns:a="http://schemas.openxmlformats.org/drawingml/2006/main">
+              <a:ext uri="{FF2B5EF4-FFF2-40B4-BE49-F238E27FC236}">
+                <a16:creationId xmlns:a16="http://schemas.microsoft.com/office/drawing/2014/main" id="{8D835EE2-4661-4836-9F7D-BCF1030A1A1E}"/>
+              </a:ext>
+            </a:extLst>
+          </p:cNvPr>
+          <p:cNvSpPr>
+            <a:spLocks xmlns:a="http://schemas.openxmlformats.org/drawingml/2006/main" noGrp="1"/>
+          </p:cNvSpPr>
+          <p:nvPr/>
+        </p:nvSpPr>
+        <p:spPr>
+          <a:xfrm xmlns:a="http://schemas.openxmlformats.org/drawingml/2006/main">
+            <a:off x="6770370" y="3905250"/>
+            <a:ext cx="1325880" cy="704850"/>
+          </a:xfrm>
+          <a:prstGeom xmlns:a="http://schemas.openxmlformats.org/drawingml/2006/main" prst="roundRect">
+            <a:avLst>
+              <a:gd name="adj" fmla="val 16216"/>
+            </a:avLst>
+          </a:prstGeom>
+          <a:solidFill xmlns:a="http://schemas.openxmlformats.org/drawingml/2006/main">
+            <a:srgbClr val="12243A"/>
+          </a:solidFill>
+          <a:ln xmlns:a="http://schemas.openxmlformats.org/drawingml/2006/main" w="9525">
+            <a:solidFill>
+              <a:srgbClr val="F59E0B"/>
+            </a:solidFill>
+            <a:prstDash val="solid"/>
+          </a:ln>
+        </p:spPr>
+      </p:sp>
+      <p:sp>
+        <p:nvSpPr>
+          <p:cNvPr id="23" name="">
+            <a:extLst xmlns:a="http://schemas.openxmlformats.org/drawingml/2006/main">
+              <a:ext uri="{FF2B5EF4-FFF2-40B4-BE49-F238E27FC236}">
+                <a16:creationId xmlns:a16="http://schemas.microsoft.com/office/drawing/2014/main" id="{C75BB653-B045-4372-821D-DECF773A6971}"/>
+              </a:ext>
+            </a:extLst>
+          </p:cNvPr>
+          <p:cNvSpPr>
+            <a:spLocks xmlns:a="http://schemas.openxmlformats.org/drawingml/2006/main" noGrp="1"/>
+          </p:cNvSpPr>
+          <p:nvPr/>
+        </p:nvSpPr>
+        <p:spPr>
+          <a:xfrm xmlns:a="http://schemas.openxmlformats.org/drawingml/2006/main">
+            <a:off x="6884670" y="4076700"/>
+            <a:ext cx="1097280" cy="342900"/>
+          </a:xfrm>
+          <a:prstGeom xmlns:a="http://schemas.openxmlformats.org/drawingml/2006/main" prst="rect">
+            <a:avLst/>
+          </a:prstGeom>
+          <a:solidFill xmlns:a="http://schemas.openxmlformats.org/drawingml/2006/main">
+            <a:srgbClr val="000000">
+              <a:alpha val="0"/>
+            </a:srgbClr>
+          </a:solidFill>
+          <a:ln xmlns:a="http://schemas.openxmlformats.org/drawingml/2006/main" w="0">
+            <a:solidFill>
+              <a:srgbClr val="000000">
+                <a:alpha val="0"/>
+              </a:srgbClr>
+            </a:solidFill>
+            <a:prstDash val="solid"/>
+          </a:ln>
+        </p:spPr>
+        <p:txBody>
+          <a:bodyPr xmlns:a="http://schemas.openxmlformats.org/drawingml/2006/main"/>
+          <a:lstStyle xmlns:a="http://schemas.openxmlformats.org/drawingml/2006/main"/>
+          <a:p xmlns:a="http://schemas.openxmlformats.org/drawingml/2006/main">
+            <a:pPr algn="ctr">
+              <a:defRPr sz="1200" b="1">
+                <a:solidFill>
+                  <a:srgbClr val="FFFFFF"/>
+                </a:solidFill>
+                <a:latin typeface="Aptos Display"/>
+                <a:ea typeface="Aptos Display"/>
+                <a:cs typeface="Aptos Display"/>
+              </a:defRPr>
+            </a:pPr>
+            <a:r>
+              <a:rPr sz="1200" b="1">
+                <a:solidFill>
+                  <a:srgbClr val="FFFFFF"/>
+                </a:solidFill>
+                <a:latin typeface="Aptos Display"/>
+                <a:ea typeface="Aptos Display"/>
+                <a:cs typeface="Aptos Display"/>
+              </a:rPr>
+              <a:t>Export</a:t>
+            </a:r>
+          </a:p>
+        </p:txBody>
+      </p:sp>
+      <p:sp>
+        <p:nvSpPr>
+          <p:cNvPr id="24" name="">
+            <a:extLst xmlns:a="http://schemas.openxmlformats.org/drawingml/2006/main">
+              <a:ext uri="{FF2B5EF4-FFF2-40B4-BE49-F238E27FC236}">
+                <a16:creationId xmlns:a16="http://schemas.microsoft.com/office/drawing/2014/main" id="{B0643619-AE29-4C98-AD18-454189208B4E}"/>
+              </a:ext>
+            </a:extLst>
+          </p:cNvPr>
+          <p:cNvSpPr>
+            <a:spLocks xmlns:a="http://schemas.openxmlformats.org/drawingml/2006/main" noGrp="1"/>
+          </p:cNvSpPr>
+          <p:nvPr/>
+        </p:nvSpPr>
+        <p:spPr>
+          <a:xfrm xmlns:a="http://schemas.openxmlformats.org/drawingml/2006/main">
+            <a:off x="8839200" y="781050"/>
+            <a:ext cx="2324100" cy="4667250"/>
+          </a:xfrm>
+          <a:prstGeom xmlns:a="http://schemas.openxmlformats.org/drawingml/2006/main" prst="roundRect">
+            <a:avLst>
+              <a:gd name="adj" fmla="val 4918"/>
+            </a:avLst>
+          </a:prstGeom>
+          <a:solidFill xmlns:a="http://schemas.openxmlformats.org/drawingml/2006/main">
+            <a:srgbClr val="0E1B2D"/>
+          </a:solidFill>
+          <a:ln xmlns:a="http://schemas.openxmlformats.org/drawingml/2006/main" w="9525">
+            <a:solidFill>
+              <a:srgbClr val="24415F"/>
+            </a:solidFill>
+            <a:prstDash val="solid"/>
+          </a:ln>
+        </p:spPr>
+      </p:sp>
+      <p:sp>
+        <p:nvSpPr>
+          <p:cNvPr id="25" name="">
+            <a:extLst xmlns:a="http://schemas.openxmlformats.org/drawingml/2006/main">
+              <a:ext uri="{FF2B5EF4-FFF2-40B4-BE49-F238E27FC236}">
+                <a16:creationId xmlns:a16="http://schemas.microsoft.com/office/drawing/2014/main" id="{5F0F6E0B-D10C-4992-8978-5F9540E0ED0C}"/>
+              </a:ext>
+            </a:extLst>
+          </p:cNvPr>
+          <p:cNvSpPr>
+            <a:spLocks xmlns:a="http://schemas.openxmlformats.org/drawingml/2006/main" noGrp="1"/>
+          </p:cNvSpPr>
+          <p:nvPr/>
+        </p:nvSpPr>
+        <p:spPr>
+          <a:xfrm xmlns:a="http://schemas.openxmlformats.org/drawingml/2006/main">
+            <a:off x="9124950" y="1238250"/>
             <a:ext cx="1752600" cy="1123950"/>
           </a:xfrm>
           <a:prstGeom xmlns:a="http://schemas.openxmlformats.org/drawingml/2006/main" prst="roundRect">
@@ -3930,21 +3732,21 @@
       </p:sp>
       <p:sp>
         <p:nvSpPr>
-          <p:cNvPr id="30" name="">
-            <a:extLst xmlns:a="http://schemas.openxmlformats.org/drawingml/2006/main">
-              <a:ext uri="{FF2B5EF4-FFF2-40B4-BE49-F238E27FC236}">
-                <a16:creationId xmlns:a16="http://schemas.microsoft.com/office/drawing/2014/main" id="{31595C0C-846A-484D-ABF4-F32FDEB1E11C}"/>
-              </a:ext>
-            </a:extLst>
-          </p:cNvPr>
-          <p:cNvSpPr>
-            <a:spLocks xmlns:a="http://schemas.openxmlformats.org/drawingml/2006/main" noGrp="1"/>
-          </p:cNvSpPr>
-          <p:nvPr/>
-        </p:nvSpPr>
-        <p:spPr>
-          <a:xfrm xmlns:a="http://schemas.openxmlformats.org/drawingml/2006/main">
-            <a:off x="9353550" y="4267200"/>
+          <p:cNvPr id="26" name="">
+            <a:extLst xmlns:a="http://schemas.openxmlformats.org/drawingml/2006/main">
+              <a:ext uri="{FF2B5EF4-FFF2-40B4-BE49-F238E27FC236}">
+                <a16:creationId xmlns:a16="http://schemas.microsoft.com/office/drawing/2014/main" id="{C1A9229F-6619-4A98-908B-746513A6F8D7}"/>
+              </a:ext>
+            </a:extLst>
+          </p:cNvPr>
+          <p:cNvSpPr>
+            <a:spLocks xmlns:a="http://schemas.openxmlformats.org/drawingml/2006/main" noGrp="1"/>
+          </p:cNvSpPr>
+          <p:nvPr/>
+        </p:nvSpPr>
+        <p:spPr>
+          <a:xfrm xmlns:a="http://schemas.openxmlformats.org/drawingml/2006/main">
+            <a:off x="9353550" y="1447800"/>
             <a:ext cx="1295400" cy="400050"/>
           </a:xfrm>
           <a:prstGeom xmlns:a="http://schemas.openxmlformats.org/drawingml/2006/main" prst="rect">
@@ -3971,7 +3773,7 @@
             <a:pPr algn="l">
               <a:defRPr sz="2250" b="1">
                 <a:solidFill>
-                  <a:srgbClr val="F59E0B"/>
+                  <a:srgbClr val="34D399"/>
                 </a:solidFill>
                 <a:latin typeface="Aptos Display"/>
                 <a:ea typeface="Aptos Display"/>
@@ -3981,34 +3783,34 @@
             <a:r>
               <a:rPr sz="2250" b="1">
                 <a:solidFill>
-                  <a:srgbClr val="F59E0B"/>
+                  <a:srgbClr val="34D399"/>
                 </a:solidFill>
                 <a:latin typeface="Aptos Display"/>
                 <a:ea typeface="Aptos Display"/>
                 <a:cs typeface="Aptos Display"/>
               </a:rPr>
-              <a:t>Yes</a:t>
+              <a:t>8</a:t>
             </a:r>
           </a:p>
         </p:txBody>
       </p:sp>
       <p:sp>
         <p:nvSpPr>
-          <p:cNvPr id="31" name="">
-            <a:extLst xmlns:a="http://schemas.openxmlformats.org/drawingml/2006/main">
-              <a:ext uri="{FF2B5EF4-FFF2-40B4-BE49-F238E27FC236}">
-                <a16:creationId xmlns:a16="http://schemas.microsoft.com/office/drawing/2014/main" id="{AACC289B-027D-41DE-9C6E-6813F5675A84}"/>
-              </a:ext>
-            </a:extLst>
-          </p:cNvPr>
-          <p:cNvSpPr>
-            <a:spLocks xmlns:a="http://schemas.openxmlformats.org/drawingml/2006/main" noGrp="1"/>
-          </p:cNvSpPr>
-          <p:nvPr/>
-        </p:nvSpPr>
-        <p:spPr>
-          <a:xfrm xmlns:a="http://schemas.openxmlformats.org/drawingml/2006/main">
-            <a:off x="9353550" y="4705350"/>
+          <p:cNvPr id="27" name="">
+            <a:extLst xmlns:a="http://schemas.openxmlformats.org/drawingml/2006/main">
+              <a:ext uri="{FF2B5EF4-FFF2-40B4-BE49-F238E27FC236}">
+                <a16:creationId xmlns:a16="http://schemas.microsoft.com/office/drawing/2014/main" id="{8DCECA65-19E5-4D9F-B8DE-96FA4F1A996E}"/>
+              </a:ext>
+            </a:extLst>
+          </p:cNvPr>
+          <p:cNvSpPr>
+            <a:spLocks xmlns:a="http://schemas.openxmlformats.org/drawingml/2006/main" noGrp="1"/>
+          </p:cNvSpPr>
+          <p:nvPr/>
+        </p:nvSpPr>
+        <p:spPr>
+          <a:xfrm xmlns:a="http://schemas.openxmlformats.org/drawingml/2006/main">
+            <a:off x="9353550" y="1885950"/>
             <a:ext cx="1295400" cy="266700"/>
           </a:xfrm>
           <a:prstGeom xmlns:a="http://schemas.openxmlformats.org/drawingml/2006/main" prst="rect">
@@ -4051,6 +3853,332 @@
                 <a:ea typeface="Aptos"/>
                 <a:cs typeface="Aptos"/>
               </a:rPr>
+              <a:t>Agent modules</a:t>
+            </a:r>
+          </a:p>
+        </p:txBody>
+      </p:sp>
+      <p:sp>
+        <p:nvSpPr>
+          <p:cNvPr id="28" name="">
+            <a:extLst xmlns:a="http://schemas.openxmlformats.org/drawingml/2006/main">
+              <a:ext uri="{FF2B5EF4-FFF2-40B4-BE49-F238E27FC236}">
+                <a16:creationId xmlns:a16="http://schemas.microsoft.com/office/drawing/2014/main" id="{2B804B15-F705-45B9-93E3-9816B6C931B0}"/>
+              </a:ext>
+            </a:extLst>
+          </p:cNvPr>
+          <p:cNvSpPr>
+            <a:spLocks xmlns:a="http://schemas.openxmlformats.org/drawingml/2006/main" noGrp="1"/>
+          </p:cNvSpPr>
+          <p:nvPr/>
+        </p:nvSpPr>
+        <p:spPr>
+          <a:xfrm xmlns:a="http://schemas.openxmlformats.org/drawingml/2006/main">
+            <a:off x="9124950" y="2647950"/>
+            <a:ext cx="1752600" cy="1123950"/>
+          </a:xfrm>
+          <a:prstGeom xmlns:a="http://schemas.openxmlformats.org/drawingml/2006/main" prst="roundRect">
+            <a:avLst>
+              <a:gd name="adj" fmla="val 10169"/>
+            </a:avLst>
+          </a:prstGeom>
+          <a:solidFill xmlns:a="http://schemas.openxmlformats.org/drawingml/2006/main">
+            <a:srgbClr val="0E1B2D"/>
+          </a:solidFill>
+          <a:ln xmlns:a="http://schemas.openxmlformats.org/drawingml/2006/main" w="9525">
+            <a:solidFill>
+              <a:srgbClr val="24415F"/>
+            </a:solidFill>
+            <a:prstDash val="solid"/>
+          </a:ln>
+        </p:spPr>
+      </p:sp>
+      <p:sp>
+        <p:nvSpPr>
+          <p:cNvPr id="29" name="">
+            <a:extLst xmlns:a="http://schemas.openxmlformats.org/drawingml/2006/main">
+              <a:ext uri="{FF2B5EF4-FFF2-40B4-BE49-F238E27FC236}">
+                <a16:creationId xmlns:a16="http://schemas.microsoft.com/office/drawing/2014/main" id="{A4CB5084-AED2-4928-9944-AFCFCF716E96}"/>
+              </a:ext>
+            </a:extLst>
+          </p:cNvPr>
+          <p:cNvSpPr>
+            <a:spLocks xmlns:a="http://schemas.openxmlformats.org/drawingml/2006/main" noGrp="1"/>
+          </p:cNvSpPr>
+          <p:nvPr/>
+        </p:nvSpPr>
+        <p:spPr>
+          <a:xfrm xmlns:a="http://schemas.openxmlformats.org/drawingml/2006/main">
+            <a:off x="9353550" y="2857500"/>
+            <a:ext cx="1295400" cy="400050"/>
+          </a:xfrm>
+          <a:prstGeom xmlns:a="http://schemas.openxmlformats.org/drawingml/2006/main" prst="rect">
+            <a:avLst/>
+          </a:prstGeom>
+          <a:solidFill xmlns:a="http://schemas.openxmlformats.org/drawingml/2006/main">
+            <a:srgbClr val="000000">
+              <a:alpha val="0"/>
+            </a:srgbClr>
+          </a:solidFill>
+          <a:ln xmlns:a="http://schemas.openxmlformats.org/drawingml/2006/main" w="0">
+            <a:solidFill>
+              <a:srgbClr val="000000">
+                <a:alpha val="0"/>
+              </a:srgbClr>
+            </a:solidFill>
+            <a:prstDash val="solid"/>
+          </a:ln>
+        </p:spPr>
+        <p:txBody>
+          <a:bodyPr xmlns:a="http://schemas.openxmlformats.org/drawingml/2006/main"/>
+          <a:lstStyle xmlns:a="http://schemas.openxmlformats.org/drawingml/2006/main"/>
+          <a:p xmlns:a="http://schemas.openxmlformats.org/drawingml/2006/main">
+            <a:pPr algn="l">
+              <a:defRPr sz="2250" b="1">
+                <a:solidFill>
+                  <a:srgbClr val="38BDF8"/>
+                </a:solidFill>
+                <a:latin typeface="Aptos Display"/>
+                <a:ea typeface="Aptos Display"/>
+                <a:cs typeface="Aptos Display"/>
+              </a:defRPr>
+            </a:pPr>
+            <a:r>
+              <a:rPr sz="2250" b="1">
+                <a:solidFill>
+                  <a:srgbClr val="38BDF8"/>
+                </a:solidFill>
+                <a:latin typeface="Aptos Display"/>
+                <a:ea typeface="Aptos Display"/>
+                <a:cs typeface="Aptos Display"/>
+              </a:rPr>
+              <a:t>5</a:t>
+            </a:r>
+          </a:p>
+        </p:txBody>
+      </p:sp>
+      <p:sp>
+        <p:nvSpPr>
+          <p:cNvPr id="30" name="">
+            <a:extLst xmlns:a="http://schemas.openxmlformats.org/drawingml/2006/main">
+              <a:ext uri="{FF2B5EF4-FFF2-40B4-BE49-F238E27FC236}">
+                <a16:creationId xmlns:a16="http://schemas.microsoft.com/office/drawing/2014/main" id="{091FE477-1A5E-4B4A-8989-B117C8F4EADD}"/>
+              </a:ext>
+            </a:extLst>
+          </p:cNvPr>
+          <p:cNvSpPr>
+            <a:spLocks xmlns:a="http://schemas.openxmlformats.org/drawingml/2006/main" noGrp="1"/>
+          </p:cNvSpPr>
+          <p:nvPr/>
+        </p:nvSpPr>
+        <p:spPr>
+          <a:xfrm xmlns:a="http://schemas.openxmlformats.org/drawingml/2006/main">
+            <a:off x="9353550" y="3295650"/>
+            <a:ext cx="1295400" cy="266700"/>
+          </a:xfrm>
+          <a:prstGeom xmlns:a="http://schemas.openxmlformats.org/drawingml/2006/main" prst="rect">
+            <a:avLst/>
+          </a:prstGeom>
+          <a:solidFill xmlns:a="http://schemas.openxmlformats.org/drawingml/2006/main">
+            <a:srgbClr val="000000">
+              <a:alpha val="0"/>
+            </a:srgbClr>
+          </a:solidFill>
+          <a:ln xmlns:a="http://schemas.openxmlformats.org/drawingml/2006/main" w="0">
+            <a:solidFill>
+              <a:srgbClr val="000000">
+                <a:alpha val="0"/>
+              </a:srgbClr>
+            </a:solidFill>
+            <a:prstDash val="solid"/>
+          </a:ln>
+        </p:spPr>
+        <p:txBody>
+          <a:bodyPr xmlns:a="http://schemas.openxmlformats.org/drawingml/2006/main"/>
+          <a:lstStyle xmlns:a="http://schemas.openxmlformats.org/drawingml/2006/main"/>
+          <a:p xmlns:a="http://schemas.openxmlformats.org/drawingml/2006/main">
+            <a:pPr algn="l">
+              <a:defRPr sz="1200" b="0">
+                <a:solidFill>
+                  <a:srgbClr val="D8E6F3"/>
+                </a:solidFill>
+                <a:latin typeface="Aptos"/>
+                <a:ea typeface="Aptos"/>
+                <a:cs typeface="Aptos"/>
+              </a:defRPr>
+            </a:pPr>
+            <a:r>
+              <a:rPr sz="1200" b="0">
+                <a:solidFill>
+                  <a:srgbClr val="D8E6F3"/>
+                </a:solidFill>
+                <a:latin typeface="Aptos"/>
+                <a:ea typeface="Aptos"/>
+                <a:cs typeface="Aptos"/>
+              </a:rPr>
+              <a:t>Demo companies</a:t>
+            </a:r>
+          </a:p>
+        </p:txBody>
+      </p:sp>
+      <p:sp>
+        <p:nvSpPr>
+          <p:cNvPr id="31" name="">
+            <a:extLst xmlns:a="http://schemas.openxmlformats.org/drawingml/2006/main">
+              <a:ext uri="{FF2B5EF4-FFF2-40B4-BE49-F238E27FC236}">
+                <a16:creationId xmlns:a16="http://schemas.microsoft.com/office/drawing/2014/main" id="{14A77BD3-F9B2-4AA0-A21D-BA0230D441D7}"/>
+              </a:ext>
+            </a:extLst>
+          </p:cNvPr>
+          <p:cNvSpPr>
+            <a:spLocks xmlns:a="http://schemas.openxmlformats.org/drawingml/2006/main" noGrp="1"/>
+          </p:cNvSpPr>
+          <p:nvPr/>
+        </p:nvSpPr>
+        <p:spPr>
+          <a:xfrm xmlns:a="http://schemas.openxmlformats.org/drawingml/2006/main">
+            <a:off x="9124950" y="4057650"/>
+            <a:ext cx="1752600" cy="1123950"/>
+          </a:xfrm>
+          <a:prstGeom xmlns:a="http://schemas.openxmlformats.org/drawingml/2006/main" prst="roundRect">
+            <a:avLst>
+              <a:gd name="adj" fmla="val 10169"/>
+            </a:avLst>
+          </a:prstGeom>
+          <a:solidFill xmlns:a="http://schemas.openxmlformats.org/drawingml/2006/main">
+            <a:srgbClr val="0E1B2D"/>
+          </a:solidFill>
+          <a:ln xmlns:a="http://schemas.openxmlformats.org/drawingml/2006/main" w="9525">
+            <a:solidFill>
+              <a:srgbClr val="24415F"/>
+            </a:solidFill>
+            <a:prstDash val="solid"/>
+          </a:ln>
+        </p:spPr>
+      </p:sp>
+      <p:sp>
+        <p:nvSpPr>
+          <p:cNvPr id="32" name="">
+            <a:extLst xmlns:a="http://schemas.openxmlformats.org/drawingml/2006/main">
+              <a:ext uri="{FF2B5EF4-FFF2-40B4-BE49-F238E27FC236}">
+                <a16:creationId xmlns:a16="http://schemas.microsoft.com/office/drawing/2014/main" id="{B33AA254-177C-4A49-A24D-CAD4AF763F32}"/>
+              </a:ext>
+            </a:extLst>
+          </p:cNvPr>
+          <p:cNvSpPr>
+            <a:spLocks xmlns:a="http://schemas.openxmlformats.org/drawingml/2006/main" noGrp="1"/>
+          </p:cNvSpPr>
+          <p:nvPr/>
+        </p:nvSpPr>
+        <p:spPr>
+          <a:xfrm xmlns:a="http://schemas.openxmlformats.org/drawingml/2006/main">
+            <a:off x="9353550" y="4267200"/>
+            <a:ext cx="1295400" cy="400050"/>
+          </a:xfrm>
+          <a:prstGeom xmlns:a="http://schemas.openxmlformats.org/drawingml/2006/main" prst="rect">
+            <a:avLst/>
+          </a:prstGeom>
+          <a:solidFill xmlns:a="http://schemas.openxmlformats.org/drawingml/2006/main">
+            <a:srgbClr val="000000">
+              <a:alpha val="0"/>
+            </a:srgbClr>
+          </a:solidFill>
+          <a:ln xmlns:a="http://schemas.openxmlformats.org/drawingml/2006/main" w="0">
+            <a:solidFill>
+              <a:srgbClr val="000000">
+                <a:alpha val="0"/>
+              </a:srgbClr>
+            </a:solidFill>
+            <a:prstDash val="solid"/>
+          </a:ln>
+        </p:spPr>
+        <p:txBody>
+          <a:bodyPr xmlns:a="http://schemas.openxmlformats.org/drawingml/2006/main"/>
+          <a:lstStyle xmlns:a="http://schemas.openxmlformats.org/drawingml/2006/main"/>
+          <a:p xmlns:a="http://schemas.openxmlformats.org/drawingml/2006/main">
+            <a:pPr algn="l">
+              <a:defRPr sz="2250" b="1">
+                <a:solidFill>
+                  <a:srgbClr val="F59E0B"/>
+                </a:solidFill>
+                <a:latin typeface="Aptos Display"/>
+                <a:ea typeface="Aptos Display"/>
+                <a:cs typeface="Aptos Display"/>
+              </a:defRPr>
+            </a:pPr>
+            <a:r>
+              <a:rPr sz="2250" b="1">
+                <a:solidFill>
+                  <a:srgbClr val="F59E0B"/>
+                </a:solidFill>
+                <a:latin typeface="Aptos Display"/>
+                <a:ea typeface="Aptos Display"/>
+                <a:cs typeface="Aptos Display"/>
+              </a:rPr>
+              <a:t>Yes</a:t>
+            </a:r>
+          </a:p>
+        </p:txBody>
+      </p:sp>
+      <p:sp>
+        <p:nvSpPr>
+          <p:cNvPr id="33" name="">
+            <a:extLst xmlns:a="http://schemas.openxmlformats.org/drawingml/2006/main">
+              <a:ext uri="{FF2B5EF4-FFF2-40B4-BE49-F238E27FC236}">
+                <a16:creationId xmlns:a16="http://schemas.microsoft.com/office/drawing/2014/main" id="{975BA941-7480-4260-85F3-8B18EFF2CA09}"/>
+              </a:ext>
+            </a:extLst>
+          </p:cNvPr>
+          <p:cNvSpPr>
+            <a:spLocks xmlns:a="http://schemas.openxmlformats.org/drawingml/2006/main" noGrp="1"/>
+          </p:cNvSpPr>
+          <p:nvPr/>
+        </p:nvSpPr>
+        <p:spPr>
+          <a:xfrm xmlns:a="http://schemas.openxmlformats.org/drawingml/2006/main">
+            <a:off x="9353550" y="4705350"/>
+            <a:ext cx="1295400" cy="266700"/>
+          </a:xfrm>
+          <a:prstGeom xmlns:a="http://schemas.openxmlformats.org/drawingml/2006/main" prst="rect">
+            <a:avLst/>
+          </a:prstGeom>
+          <a:solidFill xmlns:a="http://schemas.openxmlformats.org/drawingml/2006/main">
+            <a:srgbClr val="000000">
+              <a:alpha val="0"/>
+            </a:srgbClr>
+          </a:solidFill>
+          <a:ln xmlns:a="http://schemas.openxmlformats.org/drawingml/2006/main" w="0">
+            <a:solidFill>
+              <a:srgbClr val="000000">
+                <a:alpha val="0"/>
+              </a:srgbClr>
+            </a:solidFill>
+            <a:prstDash val="solid"/>
+          </a:ln>
+        </p:spPr>
+        <p:txBody>
+          <a:bodyPr xmlns:a="http://schemas.openxmlformats.org/drawingml/2006/main"/>
+          <a:lstStyle xmlns:a="http://schemas.openxmlformats.org/drawingml/2006/main"/>
+          <a:p xmlns:a="http://schemas.openxmlformats.org/drawingml/2006/main">
+            <a:pPr algn="l">
+              <a:defRPr sz="1200" b="0">
+                <a:solidFill>
+                  <a:srgbClr val="D8E6F3"/>
+                </a:solidFill>
+                <a:latin typeface="Aptos"/>
+                <a:ea typeface="Aptos"/>
+                <a:cs typeface="Aptos"/>
+              </a:defRPr>
+            </a:pPr>
+            <a:r>
+              <a:rPr sz="1200" b="0">
+                <a:solidFill>
+                  <a:srgbClr val="D8E6F3"/>
+                </a:solidFill>
+                <a:latin typeface="Aptos"/>
+                <a:ea typeface="Aptos"/>
+                <a:cs typeface="Aptos"/>
+              </a:rPr>
               <a:t>Runs without API keys</a:t>
             </a:r>
           </a:p>
@@ -4058,10 +4186,10 @@
       </p:sp>
       <p:sp>
         <p:nvSpPr>
-          <p:cNvPr id="32" name="">
-            <a:extLst xmlns:a="http://schemas.openxmlformats.org/drawingml/2006/main">
-              <a:ext uri="{FF2B5EF4-FFF2-40B4-BE49-F238E27FC236}">
-                <a16:creationId xmlns:a16="http://schemas.microsoft.com/office/drawing/2014/main" id="{234E5528-6FE9-4571-B4F7-B73CAE835B32}"/>
+          <p:cNvPr id="34" name="">
+            <a:extLst xmlns:a="http://schemas.openxmlformats.org/drawingml/2006/main">
+              <a:ext uri="{FF2B5EF4-FFF2-40B4-BE49-F238E27FC236}">
+                <a16:creationId xmlns:a16="http://schemas.microsoft.com/office/drawing/2014/main" id="{97B04F30-148D-4F4C-9CB8-3D7494E5F7CC}"/>
               </a:ext>
             </a:extLst>
           </p:cNvPr>
@@ -4073,7 +4201,7 @@
         <p:spPr>
           <a:xfrm xmlns:a="http://schemas.openxmlformats.org/drawingml/2006/main">
             <a:off x="857250" y="6400800"/>
-            <a:ext cx="4572000" cy="228600"/>
+            <a:ext cx="6667500" cy="228600"/>
           </a:xfrm>
           <a:prstGeom xmlns:a="http://schemas.openxmlformats.org/drawingml/2006/main" prst="rect">
             <a:avLst/>
@@ -4115,7 +4243,7 @@
                 <a:ea typeface="Aptos"/>
                 <a:cs typeface="Aptos"/>
               </a:rPr>
-              <a:t>Max-20-slide case study</a:t>
+              <a:t>Submission PDF: max-20-slide case study for The Arch hackathon</a:t>
             </a:r>
           </a:p>
         </p:txBody>
@@ -4123,7 +4251,7 @@
     </p:spTree>
     <p:extLst>
       <p:ext uri="{BB962C8B-B14F-4D97-AF65-F5344CB8AC3E}">
-        <p14:creationId xmlns:p14="http://schemas.microsoft.com/office/powerpoint/2010/main" val="1480102719"/>
+        <p14:creationId xmlns:p14="http://schemas.microsoft.com/office/powerpoint/2010/main" val="425777421"/>
       </p:ext>
     </p:extLst>
   </p:cSld>
@@ -4154,7 +4282,7 @@
           <p:cNvPr id="1" name="">
             <a:extLst xmlns:a="http://schemas.openxmlformats.org/drawingml/2006/main">
               <a:ext uri="{FF2B5EF4-FFF2-40B4-BE49-F238E27FC236}">
-                <a16:creationId xmlns:a16="http://schemas.microsoft.com/office/drawing/2014/main" id="{72289801-3AA8-4E98-9CDB-E40F36532DC8}"/>
+                <a16:creationId xmlns:a16="http://schemas.microsoft.com/office/drawing/2014/main" id="{7C1FBA42-2114-411D-982F-5B71505E4195}"/>
               </a:ext>
             </a:extLst>
           </p:cNvPr>
@@ -4189,7 +4317,7 @@
           <p:cNvPr id="2" name="">
             <a:extLst xmlns:a="http://schemas.openxmlformats.org/drawingml/2006/main">
               <a:ext uri="{FF2B5EF4-FFF2-40B4-BE49-F238E27FC236}">
-                <a16:creationId xmlns:a16="http://schemas.microsoft.com/office/drawing/2014/main" id="{3B28B824-B96B-4BAB-91A6-FFEF7FD1A70E}"/>
+                <a16:creationId xmlns:a16="http://schemas.microsoft.com/office/drawing/2014/main" id="{B7CDF227-6282-49F6-A858-2666FBCBE1C0}"/>
               </a:ext>
             </a:extLst>
           </p:cNvPr>
@@ -4224,7 +4352,7 @@
           <p:cNvPr id="3" name="">
             <a:extLst xmlns:a="http://schemas.openxmlformats.org/drawingml/2006/main">
               <a:ext uri="{FF2B5EF4-FFF2-40B4-BE49-F238E27FC236}">
-                <a16:creationId xmlns:a16="http://schemas.microsoft.com/office/drawing/2014/main" id="{F93715DA-4A03-4E55-B23E-AC7D959A00EB}"/>
+                <a16:creationId xmlns:a16="http://schemas.microsoft.com/office/drawing/2014/main" id="{15B5F05B-E091-4069-82B7-9F33D30EBC5F}"/>
               </a:ext>
             </a:extLst>
           </p:cNvPr>
@@ -4259,7 +4387,7 @@
           <p:cNvPr id="4" name="">
             <a:extLst xmlns:a="http://schemas.openxmlformats.org/drawingml/2006/main">
               <a:ext uri="{FF2B5EF4-FFF2-40B4-BE49-F238E27FC236}">
-                <a16:creationId xmlns:a16="http://schemas.microsoft.com/office/drawing/2014/main" id="{FF0FD6FC-EFAB-4452-A2D8-7783470B3180}"/>
+                <a16:creationId xmlns:a16="http://schemas.microsoft.com/office/drawing/2014/main" id="{FB598D58-0284-48BB-859A-FDAF7FC0A321}"/>
               </a:ext>
             </a:extLst>
           </p:cNvPr>
@@ -4323,7 +4451,7 @@
           <p:cNvPr id="5" name="">
             <a:extLst xmlns:a="http://schemas.openxmlformats.org/drawingml/2006/main">
               <a:ext uri="{FF2B5EF4-FFF2-40B4-BE49-F238E27FC236}">
-                <a16:creationId xmlns:a16="http://schemas.microsoft.com/office/drawing/2014/main" id="{73489BDD-E2FA-4B45-96D8-35AEBE8444CB}"/>
+                <a16:creationId xmlns:a16="http://schemas.microsoft.com/office/drawing/2014/main" id="{0E2F67AD-61E5-4F39-9563-EA4CD370FD9B}"/>
               </a:ext>
             </a:extLst>
           </p:cNvPr>
@@ -4387,7 +4515,7 @@
           <p:cNvPr id="6" name="">
             <a:extLst xmlns:a="http://schemas.openxmlformats.org/drawingml/2006/main">
               <a:ext uri="{FF2B5EF4-FFF2-40B4-BE49-F238E27FC236}">
-                <a16:creationId xmlns:a16="http://schemas.microsoft.com/office/drawing/2014/main" id="{106F4B6D-431B-4812-BAB6-B0E1B7C2E40E}"/>
+                <a16:creationId xmlns:a16="http://schemas.microsoft.com/office/drawing/2014/main" id="{A8E1A299-B9F9-434F-9E52-B0D751C80221}"/>
               </a:ext>
             </a:extLst>
           </p:cNvPr>
@@ -4422,7 +4550,7 @@
           <p:cNvPr id="7" name="">
             <a:extLst xmlns:a="http://schemas.openxmlformats.org/drawingml/2006/main">
               <a:ext uri="{FF2B5EF4-FFF2-40B4-BE49-F238E27FC236}">
-                <a16:creationId xmlns:a16="http://schemas.microsoft.com/office/drawing/2014/main" id="{8617A1E5-A445-45C6-8CB2-34DAAA398BE9}"/>
+                <a16:creationId xmlns:a16="http://schemas.microsoft.com/office/drawing/2014/main" id="{4E3561C5-DFF2-48DE-BDE4-54F73D463352}"/>
               </a:ext>
             </a:extLst>
           </p:cNvPr>
@@ -4486,7 +4614,7 @@
           <p:cNvPr id="8" name="">
             <a:extLst xmlns:a="http://schemas.openxmlformats.org/drawingml/2006/main">
               <a:ext uri="{FF2B5EF4-FFF2-40B4-BE49-F238E27FC236}">
-                <a16:creationId xmlns:a16="http://schemas.microsoft.com/office/drawing/2014/main" id="{9467C7BE-AE0F-449E-8137-0EF8C7A6F0E4}"/>
+                <a16:creationId xmlns:a16="http://schemas.microsoft.com/office/drawing/2014/main" id="{A5FCBA81-846F-466B-B733-A37C8F680C11}"/>
               </a:ext>
             </a:extLst>
           </p:cNvPr>
@@ -4550,7 +4678,7 @@
           <p:cNvPr id="9" name="">
             <a:extLst xmlns:a="http://schemas.openxmlformats.org/drawingml/2006/main">
               <a:ext uri="{FF2B5EF4-FFF2-40B4-BE49-F238E27FC236}">
-                <a16:creationId xmlns:a16="http://schemas.microsoft.com/office/drawing/2014/main" id="{4C09E4A3-86F3-4383-BC27-447994F65AB6}"/>
+                <a16:creationId xmlns:a16="http://schemas.microsoft.com/office/drawing/2014/main" id="{8C4DFE90-94E8-4C92-8EFC-D7D75C54C498}"/>
               </a:ext>
             </a:extLst>
           </p:cNvPr>
@@ -4585,7 +4713,7 @@
           <p:cNvPr id="10" name="">
             <a:extLst xmlns:a="http://schemas.openxmlformats.org/drawingml/2006/main">
               <a:ext uri="{FF2B5EF4-FFF2-40B4-BE49-F238E27FC236}">
-                <a16:creationId xmlns:a16="http://schemas.microsoft.com/office/drawing/2014/main" id="{E51E4DCA-607D-44EB-827B-2A4E2DB750A0}"/>
+                <a16:creationId xmlns:a16="http://schemas.microsoft.com/office/drawing/2014/main" id="{6FFE7AFF-AFAE-47D9-8236-2A32EE77B105}"/>
               </a:ext>
             </a:extLst>
           </p:cNvPr>
@@ -4649,7 +4777,7 @@
           <p:cNvPr id="11" name="">
             <a:extLst xmlns:a="http://schemas.openxmlformats.org/drawingml/2006/main">
               <a:ext uri="{FF2B5EF4-FFF2-40B4-BE49-F238E27FC236}">
-                <a16:creationId xmlns:a16="http://schemas.microsoft.com/office/drawing/2014/main" id="{AE20B632-A3DA-4CC6-9ACC-6A051CFAE386}"/>
+                <a16:creationId xmlns:a16="http://schemas.microsoft.com/office/drawing/2014/main" id="{FABBFA29-6005-4C41-AFE7-B7EFF2E5EF1E}"/>
               </a:ext>
             </a:extLst>
           </p:cNvPr>
@@ -4713,7 +4841,7 @@
           <p:cNvPr id="12" name="">
             <a:extLst xmlns:a="http://schemas.openxmlformats.org/drawingml/2006/main">
               <a:ext uri="{FF2B5EF4-FFF2-40B4-BE49-F238E27FC236}">
-                <a16:creationId xmlns:a16="http://schemas.microsoft.com/office/drawing/2014/main" id="{DFAE1AC3-E1E6-450D-8F28-5956842BB19F}"/>
+                <a16:creationId xmlns:a16="http://schemas.microsoft.com/office/drawing/2014/main" id="{8F78998E-902B-4E6A-8016-2FA75F632D65}"/>
               </a:ext>
             </a:extLst>
           </p:cNvPr>
@@ -4748,7 +4876,7 @@
           <p:cNvPr id="13" name="">
             <a:extLst xmlns:a="http://schemas.openxmlformats.org/drawingml/2006/main">
               <a:ext uri="{FF2B5EF4-FFF2-40B4-BE49-F238E27FC236}">
-                <a16:creationId xmlns:a16="http://schemas.microsoft.com/office/drawing/2014/main" id="{644E6058-1B2E-4B00-B3F9-B95316D5E6AD}"/>
+                <a16:creationId xmlns:a16="http://schemas.microsoft.com/office/drawing/2014/main" id="{180D35C8-CBF7-4AE5-919B-E11ECE6750A3}"/>
               </a:ext>
             </a:extLst>
           </p:cNvPr>
@@ -4812,7 +4940,7 @@
           <p:cNvPr id="14" name="">
             <a:extLst xmlns:a="http://schemas.openxmlformats.org/drawingml/2006/main">
               <a:ext uri="{FF2B5EF4-FFF2-40B4-BE49-F238E27FC236}">
-                <a16:creationId xmlns:a16="http://schemas.microsoft.com/office/drawing/2014/main" id="{59141A22-8079-4481-AA66-C5F1FFD1AB95}"/>
+                <a16:creationId xmlns:a16="http://schemas.microsoft.com/office/drawing/2014/main" id="{664C662C-FEB0-4028-AE18-53B06EC990C1}"/>
               </a:ext>
             </a:extLst>
           </p:cNvPr>
@@ -4876,7 +5004,7 @@
           <p:cNvPr id="15" name="">
             <a:extLst xmlns:a="http://schemas.openxmlformats.org/drawingml/2006/main">
               <a:ext uri="{FF2B5EF4-FFF2-40B4-BE49-F238E27FC236}">
-                <a16:creationId xmlns:a16="http://schemas.microsoft.com/office/drawing/2014/main" id="{8FC99300-E2B3-484D-9CE8-8D9A1450BF8B}"/>
+                <a16:creationId xmlns:a16="http://schemas.microsoft.com/office/drawing/2014/main" id="{8A85B91E-1456-4C2D-AE6A-24D503982B43}"/>
               </a:ext>
             </a:extLst>
           </p:cNvPr>
@@ -4911,7 +5039,7 @@
           <p:cNvPr id="16" name="">
             <a:extLst xmlns:a="http://schemas.openxmlformats.org/drawingml/2006/main">
               <a:ext uri="{FF2B5EF4-FFF2-40B4-BE49-F238E27FC236}">
-                <a16:creationId xmlns:a16="http://schemas.microsoft.com/office/drawing/2014/main" id="{08552886-01F7-4259-AEF0-D0AEBB96ED3C}"/>
+                <a16:creationId xmlns:a16="http://schemas.microsoft.com/office/drawing/2014/main" id="{3067999F-EFFA-4382-9B8D-D483A53DA38B}"/>
               </a:ext>
             </a:extLst>
           </p:cNvPr>
@@ -4975,7 +5103,7 @@
           <p:cNvPr id="17" name="">
             <a:extLst xmlns:a="http://schemas.openxmlformats.org/drawingml/2006/main">
               <a:ext uri="{FF2B5EF4-FFF2-40B4-BE49-F238E27FC236}">
-                <a16:creationId xmlns:a16="http://schemas.microsoft.com/office/drawing/2014/main" id="{19FCA397-0682-451C-909B-7C99CCE865B0}"/>
+                <a16:creationId xmlns:a16="http://schemas.microsoft.com/office/drawing/2014/main" id="{E40F3D43-B97A-4AA9-9D77-F804F3AE45DB}"/>
               </a:ext>
             </a:extLst>
           </p:cNvPr>
@@ -5039,7 +5167,7 @@
           <p:cNvPr id="18" name="">
             <a:extLst xmlns:a="http://schemas.openxmlformats.org/drawingml/2006/main">
               <a:ext uri="{FF2B5EF4-FFF2-40B4-BE49-F238E27FC236}">
-                <a16:creationId xmlns:a16="http://schemas.microsoft.com/office/drawing/2014/main" id="{7BEB6785-0413-4F5D-B670-1CDC6BA33BEB}"/>
+                <a16:creationId xmlns:a16="http://schemas.microsoft.com/office/drawing/2014/main" id="{79302270-2BF3-44C6-9A7A-6762CEE28ED4}"/>
               </a:ext>
             </a:extLst>
           </p:cNvPr>
@@ -5074,7 +5202,7 @@
           <p:cNvPr id="19" name="">
             <a:extLst xmlns:a="http://schemas.openxmlformats.org/drawingml/2006/main">
               <a:ext uri="{FF2B5EF4-FFF2-40B4-BE49-F238E27FC236}">
-                <a16:creationId xmlns:a16="http://schemas.microsoft.com/office/drawing/2014/main" id="{1F776138-4235-46A0-B3E7-7373F0B8489D}"/>
+                <a16:creationId xmlns:a16="http://schemas.microsoft.com/office/drawing/2014/main" id="{5F55D7CD-75F5-4C55-A6CD-B325997AD2B3}"/>
               </a:ext>
             </a:extLst>
           </p:cNvPr>
@@ -5138,7 +5266,7 @@
           <p:cNvPr id="20" name="">
             <a:extLst xmlns:a="http://schemas.openxmlformats.org/drawingml/2006/main">
               <a:ext uri="{FF2B5EF4-FFF2-40B4-BE49-F238E27FC236}">
-                <a16:creationId xmlns:a16="http://schemas.microsoft.com/office/drawing/2014/main" id="{34F0F997-7B16-450E-8B66-07193C8A95B8}"/>
+                <a16:creationId xmlns:a16="http://schemas.microsoft.com/office/drawing/2014/main" id="{C41C4460-516D-48F7-AF6E-B2B778D27DBA}"/>
               </a:ext>
             </a:extLst>
           </p:cNvPr>
@@ -5202,7 +5330,7 @@
           <p:cNvPr id="21" name="">
             <a:extLst xmlns:a="http://schemas.openxmlformats.org/drawingml/2006/main">
               <a:ext uri="{FF2B5EF4-FFF2-40B4-BE49-F238E27FC236}">
-                <a16:creationId xmlns:a16="http://schemas.microsoft.com/office/drawing/2014/main" id="{DA451DC1-6B94-459C-8EF0-C8D01C71B2AC}"/>
+                <a16:creationId xmlns:a16="http://schemas.microsoft.com/office/drawing/2014/main" id="{6BF14A9A-C055-4A99-B5A2-B3701D1E8E33}"/>
               </a:ext>
             </a:extLst>
           </p:cNvPr>
@@ -5237,7 +5365,7 @@
           <p:cNvPr id="22" name="">
             <a:extLst xmlns:a="http://schemas.openxmlformats.org/drawingml/2006/main">
               <a:ext uri="{FF2B5EF4-FFF2-40B4-BE49-F238E27FC236}">
-                <a16:creationId xmlns:a16="http://schemas.microsoft.com/office/drawing/2014/main" id="{1C387D14-B29D-45D7-9BE4-CD1C09ED3E85}"/>
+                <a16:creationId xmlns:a16="http://schemas.microsoft.com/office/drawing/2014/main" id="{D2327A4F-D30C-495C-BFF0-9DD66C7D739F}"/>
               </a:ext>
             </a:extLst>
           </p:cNvPr>
@@ -5301,7 +5429,7 @@
           <p:cNvPr id="23" name="">
             <a:extLst xmlns:a="http://schemas.openxmlformats.org/drawingml/2006/main">
               <a:ext uri="{FF2B5EF4-FFF2-40B4-BE49-F238E27FC236}">
-                <a16:creationId xmlns:a16="http://schemas.microsoft.com/office/drawing/2014/main" id="{A2E00121-97AA-4E2A-A420-428C9EA038E2}"/>
+                <a16:creationId xmlns:a16="http://schemas.microsoft.com/office/drawing/2014/main" id="{8BA8C067-0E18-4F3A-91EE-F2314A852824}"/>
               </a:ext>
             </a:extLst>
           </p:cNvPr>
@@ -5365,7 +5493,7 @@
           <p:cNvPr id="24" name="">
             <a:extLst xmlns:a="http://schemas.openxmlformats.org/drawingml/2006/main">
               <a:ext uri="{FF2B5EF4-FFF2-40B4-BE49-F238E27FC236}">
-                <a16:creationId xmlns:a16="http://schemas.microsoft.com/office/drawing/2014/main" id="{AC0D9CB7-8304-4571-A546-85941C4D5E17}"/>
+                <a16:creationId xmlns:a16="http://schemas.microsoft.com/office/drawing/2014/main" id="{9129D45E-D3D7-4EA7-817F-E3F9E5418813}"/>
               </a:ext>
             </a:extLst>
           </p:cNvPr>
@@ -5400,7 +5528,7 @@
           <p:cNvPr id="25" name="">
             <a:extLst xmlns:a="http://schemas.openxmlformats.org/drawingml/2006/main">
               <a:ext uri="{FF2B5EF4-FFF2-40B4-BE49-F238E27FC236}">
-                <a16:creationId xmlns:a16="http://schemas.microsoft.com/office/drawing/2014/main" id="{7F91935E-F7EE-471D-88AE-A91F7870DC44}"/>
+                <a16:creationId xmlns:a16="http://schemas.microsoft.com/office/drawing/2014/main" id="{066A6855-A941-4B75-B24B-21B233CAE9D2}"/>
               </a:ext>
             </a:extLst>
           </p:cNvPr>
@@ -5464,7 +5592,7 @@
           <p:cNvPr id="26" name="">
             <a:extLst xmlns:a="http://schemas.openxmlformats.org/drawingml/2006/main">
               <a:ext uri="{FF2B5EF4-FFF2-40B4-BE49-F238E27FC236}">
-                <a16:creationId xmlns:a16="http://schemas.microsoft.com/office/drawing/2014/main" id="{0E0BC34D-FA0B-471C-B433-9175832B4605}"/>
+                <a16:creationId xmlns:a16="http://schemas.microsoft.com/office/drawing/2014/main" id="{C90655B0-8BF9-4780-AE20-D9D5BB634721}"/>
               </a:ext>
             </a:extLst>
           </p:cNvPr>
@@ -5499,7 +5627,7 @@
           <p:cNvPr id="27" name="">
             <a:extLst xmlns:a="http://schemas.openxmlformats.org/drawingml/2006/main">
               <a:ext uri="{FF2B5EF4-FFF2-40B4-BE49-F238E27FC236}">
-                <a16:creationId xmlns:a16="http://schemas.microsoft.com/office/drawing/2014/main" id="{769D6606-C6A1-44C2-88E6-DDADF9C31913}"/>
+                <a16:creationId xmlns:a16="http://schemas.microsoft.com/office/drawing/2014/main" id="{0D03F36A-AC49-44C0-AF83-A1479F327057}"/>
               </a:ext>
             </a:extLst>
           </p:cNvPr>
@@ -5563,7 +5691,7 @@
           <p:cNvPr id="28" name="">
             <a:extLst xmlns:a="http://schemas.openxmlformats.org/drawingml/2006/main">
               <a:ext uri="{FF2B5EF4-FFF2-40B4-BE49-F238E27FC236}">
-                <a16:creationId xmlns:a16="http://schemas.microsoft.com/office/drawing/2014/main" id="{97C26C83-2008-4D84-B982-9F40DF7C66F5}"/>
+                <a16:creationId xmlns:a16="http://schemas.microsoft.com/office/drawing/2014/main" id="{435B43AC-65C9-4E5C-BF68-BF1ED9AD7F8A}"/>
               </a:ext>
             </a:extLst>
           </p:cNvPr>
@@ -5627,7 +5755,7 @@
           <p:cNvPr id="29" name="">
             <a:extLst xmlns:a="http://schemas.openxmlformats.org/drawingml/2006/main">
               <a:ext uri="{FF2B5EF4-FFF2-40B4-BE49-F238E27FC236}">
-                <a16:creationId xmlns:a16="http://schemas.microsoft.com/office/drawing/2014/main" id="{71DF50A0-15B4-43AB-924D-CF08671A3DF8}"/>
+                <a16:creationId xmlns:a16="http://schemas.microsoft.com/office/drawing/2014/main" id="{FE2C743A-57EA-4347-800A-7050146616DB}"/>
               </a:ext>
             </a:extLst>
           </p:cNvPr>
@@ -5662,7 +5790,7 @@
           <p:cNvPr id="30" name="">
             <a:extLst xmlns:a="http://schemas.openxmlformats.org/drawingml/2006/main">
               <a:ext uri="{FF2B5EF4-FFF2-40B4-BE49-F238E27FC236}">
-                <a16:creationId xmlns:a16="http://schemas.microsoft.com/office/drawing/2014/main" id="{AE34A8AF-21BE-4856-AED2-840F64584531}"/>
+                <a16:creationId xmlns:a16="http://schemas.microsoft.com/office/drawing/2014/main" id="{0BD6EBFF-102F-4E2F-9870-AB5A7E112858}"/>
               </a:ext>
             </a:extLst>
           </p:cNvPr>
@@ -5726,7 +5854,7 @@
           <p:cNvPr id="31" name="">
             <a:extLst xmlns:a="http://schemas.openxmlformats.org/drawingml/2006/main">
               <a:ext uri="{FF2B5EF4-FFF2-40B4-BE49-F238E27FC236}">
-                <a16:creationId xmlns:a16="http://schemas.microsoft.com/office/drawing/2014/main" id="{78E0388F-AEAC-47DB-B84F-81D903456171}"/>
+                <a16:creationId xmlns:a16="http://schemas.microsoft.com/office/drawing/2014/main" id="{A39D0461-36D3-43B9-A83A-EF6B7D01C589}"/>
               </a:ext>
             </a:extLst>
           </p:cNvPr>
@@ -5790,7 +5918,7 @@
           <p:cNvPr id="32" name="">
             <a:extLst xmlns:a="http://schemas.openxmlformats.org/drawingml/2006/main">
               <a:ext uri="{FF2B5EF4-FFF2-40B4-BE49-F238E27FC236}">
-                <a16:creationId xmlns:a16="http://schemas.microsoft.com/office/drawing/2014/main" id="{5B2BE9EF-79DC-41DA-9F01-DE94786C606C}"/>
+                <a16:creationId xmlns:a16="http://schemas.microsoft.com/office/drawing/2014/main" id="{3A927037-B02D-40E1-8A7B-A115569089E9}"/>
               </a:ext>
             </a:extLst>
           </p:cNvPr>
@@ -5825,7 +5953,7 @@
           <p:cNvPr id="33" name="">
             <a:extLst xmlns:a="http://schemas.openxmlformats.org/drawingml/2006/main">
               <a:ext uri="{FF2B5EF4-FFF2-40B4-BE49-F238E27FC236}">
-                <a16:creationId xmlns:a16="http://schemas.microsoft.com/office/drawing/2014/main" id="{36A9D411-0872-49D7-94DE-B0BE79986E91}"/>
+                <a16:creationId xmlns:a16="http://schemas.microsoft.com/office/drawing/2014/main" id="{0191FBD4-ED00-431E-8E45-8827E884122B}"/>
               </a:ext>
             </a:extLst>
           </p:cNvPr>
@@ -5889,7 +6017,7 @@
           <p:cNvPr id="34" name="">
             <a:extLst xmlns:a="http://schemas.openxmlformats.org/drawingml/2006/main">
               <a:ext uri="{FF2B5EF4-FFF2-40B4-BE49-F238E27FC236}">
-                <a16:creationId xmlns:a16="http://schemas.microsoft.com/office/drawing/2014/main" id="{74A67F4A-3E65-421B-AE02-744628393908}"/>
+                <a16:creationId xmlns:a16="http://schemas.microsoft.com/office/drawing/2014/main" id="{880D46C3-1F89-4BB5-9BF8-F17FE741DFA3}"/>
               </a:ext>
             </a:extLst>
           </p:cNvPr>
@@ -5951,7 +6079,7 @@
     </p:spTree>
     <p:extLst>
       <p:ext uri="{BB962C8B-B14F-4D97-AF65-F5344CB8AC3E}">
-        <p14:creationId xmlns:p14="http://schemas.microsoft.com/office/powerpoint/2010/main" val="2126724308"/>
+        <p14:creationId xmlns:p14="http://schemas.microsoft.com/office/powerpoint/2010/main" val="144542432"/>
       </p:ext>
     </p:extLst>
   </p:cSld>
@@ -5982,7 +6110,7 @@
           <p:cNvPr id="1" name="">
             <a:extLst xmlns:a="http://schemas.openxmlformats.org/drawingml/2006/main">
               <a:ext uri="{FF2B5EF4-FFF2-40B4-BE49-F238E27FC236}">
-                <a16:creationId xmlns:a16="http://schemas.microsoft.com/office/drawing/2014/main" id="{C8D4884F-D0F9-463C-999E-62F1AEC810AD}"/>
+                <a16:creationId xmlns:a16="http://schemas.microsoft.com/office/drawing/2014/main" id="{080D22CA-1638-43DD-B80B-49D7C99B189A}"/>
               </a:ext>
             </a:extLst>
           </p:cNvPr>
@@ -6017,7 +6145,7 @@
           <p:cNvPr id="2" name="">
             <a:extLst xmlns:a="http://schemas.openxmlformats.org/drawingml/2006/main">
               <a:ext uri="{FF2B5EF4-FFF2-40B4-BE49-F238E27FC236}">
-                <a16:creationId xmlns:a16="http://schemas.microsoft.com/office/drawing/2014/main" id="{17613995-11E3-4325-828D-E4A31D39688D}"/>
+                <a16:creationId xmlns:a16="http://schemas.microsoft.com/office/drawing/2014/main" id="{410C10E2-191B-4810-BB0E-B5A8E973D602}"/>
               </a:ext>
             </a:extLst>
           </p:cNvPr>
@@ -6052,7 +6180,7 @@
           <p:cNvPr id="3" name="">
             <a:extLst xmlns:a="http://schemas.openxmlformats.org/drawingml/2006/main">
               <a:ext uri="{FF2B5EF4-FFF2-40B4-BE49-F238E27FC236}">
-                <a16:creationId xmlns:a16="http://schemas.microsoft.com/office/drawing/2014/main" id="{D7434CCF-40F3-4CDA-945C-86C5B6E5664C}"/>
+                <a16:creationId xmlns:a16="http://schemas.microsoft.com/office/drawing/2014/main" id="{64D36B14-17E0-4E3C-A6F9-E4ABFF73A11D}"/>
               </a:ext>
             </a:extLst>
           </p:cNvPr>
@@ -6087,7 +6215,7 @@
           <p:cNvPr id="4" name="">
             <a:extLst xmlns:a="http://schemas.openxmlformats.org/drawingml/2006/main">
               <a:ext uri="{FF2B5EF4-FFF2-40B4-BE49-F238E27FC236}">
-                <a16:creationId xmlns:a16="http://schemas.microsoft.com/office/drawing/2014/main" id="{A0C5E7FD-4D36-4A1D-8B02-D1034C56CBDA}"/>
+                <a16:creationId xmlns:a16="http://schemas.microsoft.com/office/drawing/2014/main" id="{1C7B5AF7-262B-4EDC-BD3B-65AB6457704B}"/>
               </a:ext>
             </a:extLst>
           </p:cNvPr>
@@ -6151,7 +6279,7 @@
           <p:cNvPr id="5" name="">
             <a:extLst xmlns:a="http://schemas.openxmlformats.org/drawingml/2006/main">
               <a:ext uri="{FF2B5EF4-FFF2-40B4-BE49-F238E27FC236}">
-                <a16:creationId xmlns:a16="http://schemas.microsoft.com/office/drawing/2014/main" id="{329B7420-F8A8-4703-B868-3142E7FA0384}"/>
+                <a16:creationId xmlns:a16="http://schemas.microsoft.com/office/drawing/2014/main" id="{560BE551-B0C5-4A95-8741-004487A4F607}"/>
               </a:ext>
             </a:extLst>
           </p:cNvPr>
@@ -6215,7 +6343,7 @@
           <p:cNvPr id="6" name="">
             <a:extLst xmlns:a="http://schemas.openxmlformats.org/drawingml/2006/main">
               <a:ext uri="{FF2B5EF4-FFF2-40B4-BE49-F238E27FC236}">
-                <a16:creationId xmlns:a16="http://schemas.microsoft.com/office/drawing/2014/main" id="{B7B1CD2D-4D35-478C-BC87-A027164467B7}"/>
+                <a16:creationId xmlns:a16="http://schemas.microsoft.com/office/drawing/2014/main" id="{A1648C2E-DC5D-4B1E-9749-7EA97C6617C5}"/>
               </a:ext>
             </a:extLst>
           </p:cNvPr>
@@ -6250,7 +6378,7 @@
           <p:cNvPr id="7" name="">
             <a:extLst xmlns:a="http://schemas.openxmlformats.org/drawingml/2006/main">
               <a:ext uri="{FF2B5EF4-FFF2-40B4-BE49-F238E27FC236}">
-                <a16:creationId xmlns:a16="http://schemas.microsoft.com/office/drawing/2014/main" id="{64FDD660-196D-498E-8021-C651AEAF4DDB}"/>
+                <a16:creationId xmlns:a16="http://schemas.microsoft.com/office/drawing/2014/main" id="{C591DF11-21C1-4479-A1BC-34F22F742E90}"/>
               </a:ext>
             </a:extLst>
           </p:cNvPr>
@@ -6314,7 +6442,7 @@
           <p:cNvPr id="8" name="">
             <a:extLst xmlns:a="http://schemas.openxmlformats.org/drawingml/2006/main">
               <a:ext uri="{FF2B5EF4-FFF2-40B4-BE49-F238E27FC236}">
-                <a16:creationId xmlns:a16="http://schemas.microsoft.com/office/drawing/2014/main" id="{1A364DA7-E14D-433D-BCAA-AA80D1A5E39F}"/>
+                <a16:creationId xmlns:a16="http://schemas.microsoft.com/office/drawing/2014/main" id="{C16823A3-5D15-4AAA-9373-F83EF3B8AFCB}"/>
               </a:ext>
             </a:extLst>
           </p:cNvPr>
@@ -6378,7 +6506,7 @@
           <p:cNvPr id="9" name="">
             <a:extLst xmlns:a="http://schemas.openxmlformats.org/drawingml/2006/main">
               <a:ext uri="{FF2B5EF4-FFF2-40B4-BE49-F238E27FC236}">
-                <a16:creationId xmlns:a16="http://schemas.microsoft.com/office/drawing/2014/main" id="{0F2734DB-306C-4281-BA92-FB0617C4545F}"/>
+                <a16:creationId xmlns:a16="http://schemas.microsoft.com/office/drawing/2014/main" id="{E76A5155-87D0-4911-B783-BDEC5CA2FD42}"/>
               </a:ext>
             </a:extLst>
           </p:cNvPr>
@@ -6415,7 +6543,7 @@
           <p:cNvPr id="10" name="">
             <a:extLst xmlns:a="http://schemas.openxmlformats.org/drawingml/2006/main">
               <a:ext uri="{FF2B5EF4-FFF2-40B4-BE49-F238E27FC236}">
-                <a16:creationId xmlns:a16="http://schemas.microsoft.com/office/drawing/2014/main" id="{E3E02DC8-7EA6-4ABF-ACEF-E573202AE558}"/>
+                <a16:creationId xmlns:a16="http://schemas.microsoft.com/office/drawing/2014/main" id="{3FC6A458-BF09-43EA-91DB-00C2F23F75C3}"/>
               </a:ext>
             </a:extLst>
           </p:cNvPr>
@@ -6479,7 +6607,7 @@
           <p:cNvPr id="11" name="">
             <a:extLst xmlns:a="http://schemas.openxmlformats.org/drawingml/2006/main">
               <a:ext uri="{FF2B5EF4-FFF2-40B4-BE49-F238E27FC236}">
-                <a16:creationId xmlns:a16="http://schemas.microsoft.com/office/drawing/2014/main" id="{CF7A2767-7F0F-49BD-9F3B-890AC7BB2267}"/>
+                <a16:creationId xmlns:a16="http://schemas.microsoft.com/office/drawing/2014/main" id="{72C92A93-DBFA-4C3C-9107-32BECB95458D}"/>
               </a:ext>
             </a:extLst>
           </p:cNvPr>
@@ -6516,7 +6644,7 @@
           <p:cNvPr id="12" name="">
             <a:extLst xmlns:a="http://schemas.openxmlformats.org/drawingml/2006/main">
               <a:ext uri="{FF2B5EF4-FFF2-40B4-BE49-F238E27FC236}">
-                <a16:creationId xmlns:a16="http://schemas.microsoft.com/office/drawing/2014/main" id="{063BEDE5-3000-45E5-BDA2-9DF1CD9234C3}"/>
+                <a16:creationId xmlns:a16="http://schemas.microsoft.com/office/drawing/2014/main" id="{2A95D31E-68D3-4CEB-917B-61DB622C646F}"/>
               </a:ext>
             </a:extLst>
           </p:cNvPr>
@@ -6580,7 +6708,7 @@
           <p:cNvPr id="13" name="">
             <a:extLst xmlns:a="http://schemas.openxmlformats.org/drawingml/2006/main">
               <a:ext uri="{FF2B5EF4-FFF2-40B4-BE49-F238E27FC236}">
-                <a16:creationId xmlns:a16="http://schemas.microsoft.com/office/drawing/2014/main" id="{02F235C9-57E9-4C91-9DC0-401191AF305E}"/>
+                <a16:creationId xmlns:a16="http://schemas.microsoft.com/office/drawing/2014/main" id="{9ED29E7F-3905-4AB8-AEA5-71D2E29632D2}"/>
               </a:ext>
             </a:extLst>
           </p:cNvPr>
@@ -6617,7 +6745,7 @@
           <p:cNvPr id="14" name="">
             <a:extLst xmlns:a="http://schemas.openxmlformats.org/drawingml/2006/main">
               <a:ext uri="{FF2B5EF4-FFF2-40B4-BE49-F238E27FC236}">
-                <a16:creationId xmlns:a16="http://schemas.microsoft.com/office/drawing/2014/main" id="{6A1C72BC-438D-4BA6-ACD5-BA4D5F682B8F}"/>
+                <a16:creationId xmlns:a16="http://schemas.microsoft.com/office/drawing/2014/main" id="{EDB9EF70-CE59-4A3B-8CDB-A78FD832DC65}"/>
               </a:ext>
             </a:extLst>
           </p:cNvPr>
@@ -6681,7 +6809,7 @@
           <p:cNvPr id="15" name="">
             <a:extLst xmlns:a="http://schemas.openxmlformats.org/drawingml/2006/main">
               <a:ext uri="{FF2B5EF4-FFF2-40B4-BE49-F238E27FC236}">
-                <a16:creationId xmlns:a16="http://schemas.microsoft.com/office/drawing/2014/main" id="{A6A00F55-6364-4223-83E4-2C9426ADD1AB}"/>
+                <a16:creationId xmlns:a16="http://schemas.microsoft.com/office/drawing/2014/main" id="{46D30FEE-0887-47D5-9859-765C8964DC34}"/>
               </a:ext>
             </a:extLst>
           </p:cNvPr>
@@ -6718,7 +6846,7 @@
           <p:cNvPr id="16" name="">
             <a:extLst xmlns:a="http://schemas.openxmlformats.org/drawingml/2006/main">
               <a:ext uri="{FF2B5EF4-FFF2-40B4-BE49-F238E27FC236}">
-                <a16:creationId xmlns:a16="http://schemas.microsoft.com/office/drawing/2014/main" id="{85412324-CF83-4764-B729-7F4CB50CC53B}"/>
+                <a16:creationId xmlns:a16="http://schemas.microsoft.com/office/drawing/2014/main" id="{351B39A1-1338-40B6-ACF3-1B0FB20FB72A}"/>
               </a:ext>
             </a:extLst>
           </p:cNvPr>
@@ -6782,7 +6910,7 @@
           <p:cNvPr id="17" name="">
             <a:extLst xmlns:a="http://schemas.openxmlformats.org/drawingml/2006/main">
               <a:ext uri="{FF2B5EF4-FFF2-40B4-BE49-F238E27FC236}">
-                <a16:creationId xmlns:a16="http://schemas.microsoft.com/office/drawing/2014/main" id="{1CEFE4C4-F6EA-4B44-A0C9-473B577B16F1}"/>
+                <a16:creationId xmlns:a16="http://schemas.microsoft.com/office/drawing/2014/main" id="{E8549479-02DE-4E76-8C6F-2567000E3540}"/>
               </a:ext>
             </a:extLst>
           </p:cNvPr>
@@ -6817,7 +6945,7 @@
           <p:cNvPr id="18" name="">
             <a:extLst xmlns:a="http://schemas.openxmlformats.org/drawingml/2006/main">
               <a:ext uri="{FF2B5EF4-FFF2-40B4-BE49-F238E27FC236}">
-                <a16:creationId xmlns:a16="http://schemas.microsoft.com/office/drawing/2014/main" id="{08974B1C-5CCE-4494-97F3-C8FE3625286C}"/>
+                <a16:creationId xmlns:a16="http://schemas.microsoft.com/office/drawing/2014/main" id="{42C345A8-1F25-4011-8E2B-D7AAE50EA04D}"/>
               </a:ext>
             </a:extLst>
           </p:cNvPr>
@@ -6881,7 +7009,7 @@
           <p:cNvPr id="19" name="">
             <a:extLst xmlns:a="http://schemas.openxmlformats.org/drawingml/2006/main">
               <a:ext uri="{FF2B5EF4-FFF2-40B4-BE49-F238E27FC236}">
-                <a16:creationId xmlns:a16="http://schemas.microsoft.com/office/drawing/2014/main" id="{391E7D3E-7F0E-49FC-A96C-1B4DF361F809}"/>
+                <a16:creationId xmlns:a16="http://schemas.microsoft.com/office/drawing/2014/main" id="{4D36545F-C13B-42D5-875E-9819FCAA781A}"/>
               </a:ext>
             </a:extLst>
           </p:cNvPr>
@@ -6943,7 +7071,7 @@
     </p:spTree>
     <p:extLst>
       <p:ext uri="{BB962C8B-B14F-4D97-AF65-F5344CB8AC3E}">
-        <p14:creationId xmlns:p14="http://schemas.microsoft.com/office/powerpoint/2010/main" val="1372255419"/>
+        <p14:creationId xmlns:p14="http://schemas.microsoft.com/office/powerpoint/2010/main" val="1921339258"/>
       </p:ext>
     </p:extLst>
   </p:cSld>
@@ -6974,7 +7102,7 @@
           <p:cNvPr id="1" name="">
             <a:extLst xmlns:a="http://schemas.openxmlformats.org/drawingml/2006/main">
               <a:ext uri="{FF2B5EF4-FFF2-40B4-BE49-F238E27FC236}">
-                <a16:creationId xmlns:a16="http://schemas.microsoft.com/office/drawing/2014/main" id="{788D20A8-C1A6-4021-B8C0-69CF9B2F6D0B}"/>
+                <a16:creationId xmlns:a16="http://schemas.microsoft.com/office/drawing/2014/main" id="{93E73D67-FAC1-4692-8A39-190101704E33}"/>
               </a:ext>
             </a:extLst>
           </p:cNvPr>
@@ -7009,7 +7137,7 @@
           <p:cNvPr id="2" name="">
             <a:extLst xmlns:a="http://schemas.openxmlformats.org/drawingml/2006/main">
               <a:ext uri="{FF2B5EF4-FFF2-40B4-BE49-F238E27FC236}">
-                <a16:creationId xmlns:a16="http://schemas.microsoft.com/office/drawing/2014/main" id="{52E27864-071B-4A26-9A07-5F92318B7902}"/>
+                <a16:creationId xmlns:a16="http://schemas.microsoft.com/office/drawing/2014/main" id="{B3591968-CCF0-4B1F-B918-C8D759D85A04}"/>
               </a:ext>
             </a:extLst>
           </p:cNvPr>
@@ -7044,7 +7172,7 @@
           <p:cNvPr id="3" name="">
             <a:extLst xmlns:a="http://schemas.openxmlformats.org/drawingml/2006/main">
               <a:ext uri="{FF2B5EF4-FFF2-40B4-BE49-F238E27FC236}">
-                <a16:creationId xmlns:a16="http://schemas.microsoft.com/office/drawing/2014/main" id="{22F83510-E692-4A0A-8530-FB1D91C17E29}"/>
+                <a16:creationId xmlns:a16="http://schemas.microsoft.com/office/drawing/2014/main" id="{242B0FB9-F272-45D9-8CB2-1AE4BA5BC6E7}"/>
               </a:ext>
             </a:extLst>
           </p:cNvPr>
@@ -7079,7 +7207,7 @@
           <p:cNvPr id="4" name="">
             <a:extLst xmlns:a="http://schemas.openxmlformats.org/drawingml/2006/main">
               <a:ext uri="{FF2B5EF4-FFF2-40B4-BE49-F238E27FC236}">
-                <a16:creationId xmlns:a16="http://schemas.microsoft.com/office/drawing/2014/main" id="{3493D8EA-FDCC-47AA-A99E-C10C66D58ABB}"/>
+                <a16:creationId xmlns:a16="http://schemas.microsoft.com/office/drawing/2014/main" id="{574F68BD-3D3C-45A8-ABE3-65F6FFC731EF}"/>
               </a:ext>
             </a:extLst>
           </p:cNvPr>
@@ -7143,7 +7271,7 @@
           <p:cNvPr id="5" name="">
             <a:extLst xmlns:a="http://schemas.openxmlformats.org/drawingml/2006/main">
               <a:ext uri="{FF2B5EF4-FFF2-40B4-BE49-F238E27FC236}">
-                <a16:creationId xmlns:a16="http://schemas.microsoft.com/office/drawing/2014/main" id="{505A3736-DA57-4879-AEA0-5AE31E16F15D}"/>
+                <a16:creationId xmlns:a16="http://schemas.microsoft.com/office/drawing/2014/main" id="{DB3CF819-68A0-4FF6-B57E-9189BDFB5E4E}"/>
               </a:ext>
             </a:extLst>
           </p:cNvPr>
@@ -7207,7 +7335,7 @@
           <p:cNvPr id="6" name="">
             <a:extLst xmlns:a="http://schemas.openxmlformats.org/drawingml/2006/main">
               <a:ext uri="{FF2B5EF4-FFF2-40B4-BE49-F238E27FC236}">
-                <a16:creationId xmlns:a16="http://schemas.microsoft.com/office/drawing/2014/main" id="{CB38606B-192E-4912-9198-9004C9E32594}"/>
+                <a16:creationId xmlns:a16="http://schemas.microsoft.com/office/drawing/2014/main" id="{F84A3668-4E71-4258-8ED6-3A759E9E28D1}"/>
               </a:ext>
             </a:extLst>
           </p:cNvPr>
@@ -7242,7 +7370,7 @@
           <p:cNvPr id="7" name="">
             <a:extLst xmlns:a="http://schemas.openxmlformats.org/drawingml/2006/main">
               <a:ext uri="{FF2B5EF4-FFF2-40B4-BE49-F238E27FC236}">
-                <a16:creationId xmlns:a16="http://schemas.microsoft.com/office/drawing/2014/main" id="{A1356E57-875D-421C-B67C-EEBF9BBB64FD}"/>
+                <a16:creationId xmlns:a16="http://schemas.microsoft.com/office/drawing/2014/main" id="{F78B4E93-5424-4172-AC54-DDFEB81ABD23}"/>
               </a:ext>
             </a:extLst>
           </p:cNvPr>
@@ -7306,7 +7434,7 @@
           <p:cNvPr id="8" name="">
             <a:extLst xmlns:a="http://schemas.openxmlformats.org/drawingml/2006/main">
               <a:ext uri="{FF2B5EF4-FFF2-40B4-BE49-F238E27FC236}">
-                <a16:creationId xmlns:a16="http://schemas.microsoft.com/office/drawing/2014/main" id="{44512EFD-FFD6-418E-9F4D-6BD49E4338BC}"/>
+                <a16:creationId xmlns:a16="http://schemas.microsoft.com/office/drawing/2014/main" id="{614FFE9B-C4FE-4FC3-B5E2-725E21D2485B}"/>
               </a:ext>
             </a:extLst>
           </p:cNvPr>
@@ -7370,7 +7498,7 @@
           <p:cNvPr id="9" name="">
             <a:extLst xmlns:a="http://schemas.openxmlformats.org/drawingml/2006/main">
               <a:ext uri="{FF2B5EF4-FFF2-40B4-BE49-F238E27FC236}">
-                <a16:creationId xmlns:a16="http://schemas.microsoft.com/office/drawing/2014/main" id="{7960B4C1-EE8D-45DB-A70D-05EF5129C960}"/>
+                <a16:creationId xmlns:a16="http://schemas.microsoft.com/office/drawing/2014/main" id="{F8674264-34FC-42DE-9AA4-6CDCDF0D6A1F}"/>
               </a:ext>
             </a:extLst>
           </p:cNvPr>
@@ -7434,7 +7562,7 @@
           <p:cNvPr id="10" name="">
             <a:extLst xmlns:a="http://schemas.openxmlformats.org/drawingml/2006/main">
               <a:ext uri="{FF2B5EF4-FFF2-40B4-BE49-F238E27FC236}">
-                <a16:creationId xmlns:a16="http://schemas.microsoft.com/office/drawing/2014/main" id="{E5B45719-9848-4BAC-B395-F4B901662AF0}"/>
+                <a16:creationId xmlns:a16="http://schemas.microsoft.com/office/drawing/2014/main" id="{72216033-E0B8-4F17-B4E0-D6492EE96A33}"/>
               </a:ext>
             </a:extLst>
           </p:cNvPr>
@@ -7469,7 +7597,7 @@
           <p:cNvPr id="11" name="">
             <a:extLst xmlns:a="http://schemas.openxmlformats.org/drawingml/2006/main">
               <a:ext uri="{FF2B5EF4-FFF2-40B4-BE49-F238E27FC236}">
-                <a16:creationId xmlns:a16="http://schemas.microsoft.com/office/drawing/2014/main" id="{89DCF975-16D9-4EBC-88E9-BD40B6DCE5A9}"/>
+                <a16:creationId xmlns:a16="http://schemas.microsoft.com/office/drawing/2014/main" id="{96CF8BB4-924C-45F8-810B-1596034E26FD}"/>
               </a:ext>
             </a:extLst>
           </p:cNvPr>
@@ -7533,7 +7661,7 @@
           <p:cNvPr id="12" name="">
             <a:extLst xmlns:a="http://schemas.openxmlformats.org/drawingml/2006/main">
               <a:ext uri="{FF2B5EF4-FFF2-40B4-BE49-F238E27FC236}">
-                <a16:creationId xmlns:a16="http://schemas.microsoft.com/office/drawing/2014/main" id="{75ED651B-24AF-4AE9-B2BA-CB9C5671E4E2}"/>
+                <a16:creationId xmlns:a16="http://schemas.microsoft.com/office/drawing/2014/main" id="{8FE057ED-560C-4FB8-95FD-B14E6B044273}"/>
               </a:ext>
             </a:extLst>
           </p:cNvPr>
@@ -7597,7 +7725,7 @@
           <p:cNvPr id="13" name="">
             <a:extLst xmlns:a="http://schemas.openxmlformats.org/drawingml/2006/main">
               <a:ext uri="{FF2B5EF4-FFF2-40B4-BE49-F238E27FC236}">
-                <a16:creationId xmlns:a16="http://schemas.microsoft.com/office/drawing/2014/main" id="{EC03E5FB-8CE9-400B-B66E-73D72DD0818F}"/>
+                <a16:creationId xmlns:a16="http://schemas.microsoft.com/office/drawing/2014/main" id="{33BC9BA2-309C-44A3-B53D-45B7671B649A}"/>
               </a:ext>
             </a:extLst>
           </p:cNvPr>
@@ -7632,7 +7760,7 @@
           <p:cNvPr id="14" name="">
             <a:extLst xmlns:a="http://schemas.openxmlformats.org/drawingml/2006/main">
               <a:ext uri="{FF2B5EF4-FFF2-40B4-BE49-F238E27FC236}">
-                <a16:creationId xmlns:a16="http://schemas.microsoft.com/office/drawing/2014/main" id="{8F8B6E1B-45ED-4785-8A23-2A94461A1360}"/>
+                <a16:creationId xmlns:a16="http://schemas.microsoft.com/office/drawing/2014/main" id="{0805530B-B35C-4A1B-B1E1-CCF3DC37F739}"/>
               </a:ext>
             </a:extLst>
           </p:cNvPr>
@@ -7696,7 +7824,7 @@
           <p:cNvPr id="15" name="">
             <a:extLst xmlns:a="http://schemas.openxmlformats.org/drawingml/2006/main">
               <a:ext uri="{FF2B5EF4-FFF2-40B4-BE49-F238E27FC236}">
-                <a16:creationId xmlns:a16="http://schemas.microsoft.com/office/drawing/2014/main" id="{021D96EE-7821-4B94-9D6E-F96724071791}"/>
+                <a16:creationId xmlns:a16="http://schemas.microsoft.com/office/drawing/2014/main" id="{488B298E-2D46-4210-8E96-F35BFC75AAF3}"/>
               </a:ext>
             </a:extLst>
           </p:cNvPr>
@@ -7760,7 +7888,7 @@
           <p:cNvPr id="16" name="">
             <a:extLst xmlns:a="http://schemas.openxmlformats.org/drawingml/2006/main">
               <a:ext uri="{FF2B5EF4-FFF2-40B4-BE49-F238E27FC236}">
-                <a16:creationId xmlns:a16="http://schemas.microsoft.com/office/drawing/2014/main" id="{9AD13F65-773D-4555-ABEA-4BF59FA70AE1}"/>
+                <a16:creationId xmlns:a16="http://schemas.microsoft.com/office/drawing/2014/main" id="{115C24C8-AF77-4FEF-9B4E-80F82C9136C1}"/>
               </a:ext>
             </a:extLst>
           </p:cNvPr>
@@ -7795,7 +7923,7 @@
           <p:cNvPr id="17" name="">
             <a:extLst xmlns:a="http://schemas.openxmlformats.org/drawingml/2006/main">
               <a:ext uri="{FF2B5EF4-FFF2-40B4-BE49-F238E27FC236}">
-                <a16:creationId xmlns:a16="http://schemas.microsoft.com/office/drawing/2014/main" id="{CA7377C4-68E2-44CE-8B9A-D2B0D470C4F8}"/>
+                <a16:creationId xmlns:a16="http://schemas.microsoft.com/office/drawing/2014/main" id="{0E17682F-3A64-49DF-A67E-5EC5432A4424}"/>
               </a:ext>
             </a:extLst>
           </p:cNvPr>
@@ -7859,7 +7987,7 @@
           <p:cNvPr id="18" name="">
             <a:extLst xmlns:a="http://schemas.openxmlformats.org/drawingml/2006/main">
               <a:ext uri="{FF2B5EF4-FFF2-40B4-BE49-F238E27FC236}">
-                <a16:creationId xmlns:a16="http://schemas.microsoft.com/office/drawing/2014/main" id="{F284B6B0-1DAB-4BAD-B42B-B17A0CDF5A59}"/>
+                <a16:creationId xmlns:a16="http://schemas.microsoft.com/office/drawing/2014/main" id="{8F15631C-8CCA-4853-AC91-844CA133E43E}"/>
               </a:ext>
             </a:extLst>
           </p:cNvPr>
@@ -7923,7 +8051,7 @@
           <p:cNvPr id="19" name="">
             <a:extLst xmlns:a="http://schemas.openxmlformats.org/drawingml/2006/main">
               <a:ext uri="{FF2B5EF4-FFF2-40B4-BE49-F238E27FC236}">
-                <a16:creationId xmlns:a16="http://schemas.microsoft.com/office/drawing/2014/main" id="{FFE4EDD5-1CD9-4C68-8780-1AE78D6DB73C}"/>
+                <a16:creationId xmlns:a16="http://schemas.microsoft.com/office/drawing/2014/main" id="{DCCA2CC8-04EA-45C8-9E0D-65634296D813}"/>
               </a:ext>
             </a:extLst>
           </p:cNvPr>
@@ -7958,7 +8086,7 @@
           <p:cNvPr id="20" name="">
             <a:extLst xmlns:a="http://schemas.openxmlformats.org/drawingml/2006/main">
               <a:ext uri="{FF2B5EF4-FFF2-40B4-BE49-F238E27FC236}">
-                <a16:creationId xmlns:a16="http://schemas.microsoft.com/office/drawing/2014/main" id="{E28541FB-5A5C-48BE-A04E-15CB4A07499A}"/>
+                <a16:creationId xmlns:a16="http://schemas.microsoft.com/office/drawing/2014/main" id="{F0603BA4-CA47-4DC5-A311-3709CBA18E10}"/>
               </a:ext>
             </a:extLst>
           </p:cNvPr>
@@ -8020,7 +8148,7 @@
     </p:spTree>
     <p:extLst>
       <p:ext uri="{BB962C8B-B14F-4D97-AF65-F5344CB8AC3E}">
-        <p14:creationId xmlns:p14="http://schemas.microsoft.com/office/powerpoint/2010/main" val="1207442385"/>
+        <p14:creationId xmlns:p14="http://schemas.microsoft.com/office/powerpoint/2010/main" val="245292264"/>
       </p:ext>
     </p:extLst>
   </p:cSld>
@@ -8051,7 +8179,7 @@
           <p:cNvPr id="1" name="">
             <a:extLst xmlns:a="http://schemas.openxmlformats.org/drawingml/2006/main">
               <a:ext uri="{FF2B5EF4-FFF2-40B4-BE49-F238E27FC236}">
-                <a16:creationId xmlns:a16="http://schemas.microsoft.com/office/drawing/2014/main" id="{0069EC76-1BF1-45DF-A1C9-57381512A958}"/>
+                <a16:creationId xmlns:a16="http://schemas.microsoft.com/office/drawing/2014/main" id="{12C92830-9039-4D9C-9D30-2DFBBDA54D67}"/>
               </a:ext>
             </a:extLst>
           </p:cNvPr>
@@ -8086,7 +8214,7 @@
           <p:cNvPr id="2" name="">
             <a:extLst xmlns:a="http://schemas.openxmlformats.org/drawingml/2006/main">
               <a:ext uri="{FF2B5EF4-FFF2-40B4-BE49-F238E27FC236}">
-                <a16:creationId xmlns:a16="http://schemas.microsoft.com/office/drawing/2014/main" id="{6EE5F22D-3784-4F57-AD11-694BC373C732}"/>
+                <a16:creationId xmlns:a16="http://schemas.microsoft.com/office/drawing/2014/main" id="{CC369917-1C27-41F9-ABBC-501113F14C1E}"/>
               </a:ext>
             </a:extLst>
           </p:cNvPr>
@@ -8121,7 +8249,7 @@
           <p:cNvPr id="3" name="">
             <a:extLst xmlns:a="http://schemas.openxmlformats.org/drawingml/2006/main">
               <a:ext uri="{FF2B5EF4-FFF2-40B4-BE49-F238E27FC236}">
-                <a16:creationId xmlns:a16="http://schemas.microsoft.com/office/drawing/2014/main" id="{BDE3001A-A8D5-4BCF-AA27-6834C0DAED28}"/>
+                <a16:creationId xmlns:a16="http://schemas.microsoft.com/office/drawing/2014/main" id="{80B14481-9DDC-4F97-9154-A02B8E35DCD2}"/>
               </a:ext>
             </a:extLst>
           </p:cNvPr>
@@ -8156,7 +8284,7 @@
           <p:cNvPr id="4" name="">
             <a:extLst xmlns:a="http://schemas.openxmlformats.org/drawingml/2006/main">
               <a:ext uri="{FF2B5EF4-FFF2-40B4-BE49-F238E27FC236}">
-                <a16:creationId xmlns:a16="http://schemas.microsoft.com/office/drawing/2014/main" id="{0BDB66E0-8E14-429D-8EE9-9F94DF362583}"/>
+                <a16:creationId xmlns:a16="http://schemas.microsoft.com/office/drawing/2014/main" id="{13397679-CF29-480A-AEF7-AC47301E6D7B}"/>
               </a:ext>
             </a:extLst>
           </p:cNvPr>
@@ -8220,7 +8348,7 @@
           <p:cNvPr id="5" name="">
             <a:extLst xmlns:a="http://schemas.openxmlformats.org/drawingml/2006/main">
               <a:ext uri="{FF2B5EF4-FFF2-40B4-BE49-F238E27FC236}">
-                <a16:creationId xmlns:a16="http://schemas.microsoft.com/office/drawing/2014/main" id="{EB127887-C417-4CA9-80F1-FA49D2A8D72F}"/>
+                <a16:creationId xmlns:a16="http://schemas.microsoft.com/office/drawing/2014/main" id="{7963BFF1-9D0F-4AE1-854F-0660D647A0E6}"/>
               </a:ext>
             </a:extLst>
           </p:cNvPr>
@@ -8284,7 +8412,7 @@
           <p:cNvPr id="6" name="">
             <a:extLst xmlns:a="http://schemas.openxmlformats.org/drawingml/2006/main">
               <a:ext uri="{FF2B5EF4-FFF2-40B4-BE49-F238E27FC236}">
-                <a16:creationId xmlns:a16="http://schemas.microsoft.com/office/drawing/2014/main" id="{013BA5DB-5CFB-4B45-8D79-F172AAB308B7}"/>
+                <a16:creationId xmlns:a16="http://schemas.microsoft.com/office/drawing/2014/main" id="{59D84F3D-925E-4187-BF58-9D4A2A53EB19}"/>
               </a:ext>
             </a:extLst>
           </p:cNvPr>
@@ -8319,7 +8447,7 @@
           <p:cNvPr id="7" name="">
             <a:extLst xmlns:a="http://schemas.openxmlformats.org/drawingml/2006/main">
               <a:ext uri="{FF2B5EF4-FFF2-40B4-BE49-F238E27FC236}">
-                <a16:creationId xmlns:a16="http://schemas.microsoft.com/office/drawing/2014/main" id="{DDB39894-AB24-4F33-8B1C-FB8EA8A2722D}"/>
+                <a16:creationId xmlns:a16="http://schemas.microsoft.com/office/drawing/2014/main" id="{9535DA1F-2E8D-4B3C-AFC2-04F5746C9FF0}"/>
               </a:ext>
             </a:extLst>
           </p:cNvPr>
@@ -8383,7 +8511,7 @@
           <p:cNvPr id="8" name="">
             <a:extLst xmlns:a="http://schemas.openxmlformats.org/drawingml/2006/main">
               <a:ext uri="{FF2B5EF4-FFF2-40B4-BE49-F238E27FC236}">
-                <a16:creationId xmlns:a16="http://schemas.microsoft.com/office/drawing/2014/main" id="{E62A1751-E6E4-4641-A24D-5B3C4056ECDE}"/>
+                <a16:creationId xmlns:a16="http://schemas.microsoft.com/office/drawing/2014/main" id="{BE55A1B7-D288-4F15-92F7-E9311BE9D24B}"/>
               </a:ext>
             </a:extLst>
           </p:cNvPr>
@@ -8447,7 +8575,7 @@
           <p:cNvPr id="9" name="">
             <a:extLst xmlns:a="http://schemas.openxmlformats.org/drawingml/2006/main">
               <a:ext uri="{FF2B5EF4-FFF2-40B4-BE49-F238E27FC236}">
-                <a16:creationId xmlns:a16="http://schemas.microsoft.com/office/drawing/2014/main" id="{F11184F3-86E3-4BF3-BB48-E577922CEFAC}"/>
+                <a16:creationId xmlns:a16="http://schemas.microsoft.com/office/drawing/2014/main" id="{2350CF20-30F9-42DC-8532-22EF375DC379}"/>
               </a:ext>
             </a:extLst>
           </p:cNvPr>
@@ -8482,7 +8610,7 @@
           <p:cNvPr id="10" name="">
             <a:extLst xmlns:a="http://schemas.openxmlformats.org/drawingml/2006/main">
               <a:ext uri="{FF2B5EF4-FFF2-40B4-BE49-F238E27FC236}">
-                <a16:creationId xmlns:a16="http://schemas.microsoft.com/office/drawing/2014/main" id="{D47C8BE5-E7F0-4974-AC5E-A137CAF64BAC}"/>
+                <a16:creationId xmlns:a16="http://schemas.microsoft.com/office/drawing/2014/main" id="{EA1780F1-8085-474F-8344-C116D006D5CD}"/>
               </a:ext>
             </a:extLst>
           </p:cNvPr>
@@ -8546,7 +8674,7 @@
           <p:cNvPr id="11" name="">
             <a:extLst xmlns:a="http://schemas.openxmlformats.org/drawingml/2006/main">
               <a:ext uri="{FF2B5EF4-FFF2-40B4-BE49-F238E27FC236}">
-                <a16:creationId xmlns:a16="http://schemas.microsoft.com/office/drawing/2014/main" id="{7A8D2CF9-3830-4D36-AB47-4EEC1D0A8614}"/>
+                <a16:creationId xmlns:a16="http://schemas.microsoft.com/office/drawing/2014/main" id="{71D4A1BA-EE7F-4AD8-86A2-4B670D356D21}"/>
               </a:ext>
             </a:extLst>
           </p:cNvPr>
@@ -8583,7 +8711,7 @@
           <p:cNvPr id="12" name="">
             <a:extLst xmlns:a="http://schemas.openxmlformats.org/drawingml/2006/main">
               <a:ext uri="{FF2B5EF4-FFF2-40B4-BE49-F238E27FC236}">
-                <a16:creationId xmlns:a16="http://schemas.microsoft.com/office/drawing/2014/main" id="{3CA437AF-5CBF-4F8F-B897-AE2BB26EA43F}"/>
+                <a16:creationId xmlns:a16="http://schemas.microsoft.com/office/drawing/2014/main" id="{D3AC8AED-873C-4FC5-9396-A9A8A5C45418}"/>
               </a:ext>
             </a:extLst>
           </p:cNvPr>
@@ -8647,7 +8775,7 @@
           <p:cNvPr id="13" name="">
             <a:extLst xmlns:a="http://schemas.openxmlformats.org/drawingml/2006/main">
               <a:ext uri="{FF2B5EF4-FFF2-40B4-BE49-F238E27FC236}">
-                <a16:creationId xmlns:a16="http://schemas.microsoft.com/office/drawing/2014/main" id="{54ACBA80-F32E-4709-8782-A80226BE2AE5}"/>
+                <a16:creationId xmlns:a16="http://schemas.microsoft.com/office/drawing/2014/main" id="{2D2FBF60-C805-4069-A6F3-8FC1EE4A52EE}"/>
               </a:ext>
             </a:extLst>
           </p:cNvPr>
@@ -8684,7 +8812,7 @@
           <p:cNvPr id="14" name="">
             <a:extLst xmlns:a="http://schemas.openxmlformats.org/drawingml/2006/main">
               <a:ext uri="{FF2B5EF4-FFF2-40B4-BE49-F238E27FC236}">
-                <a16:creationId xmlns:a16="http://schemas.microsoft.com/office/drawing/2014/main" id="{05943D06-6E96-45B4-A92B-BD97438BCBD6}"/>
+                <a16:creationId xmlns:a16="http://schemas.microsoft.com/office/drawing/2014/main" id="{4A45D9B7-0D29-497C-9C63-DC53CE4F3E4B}"/>
               </a:ext>
             </a:extLst>
           </p:cNvPr>
@@ -8748,7 +8876,7 @@
           <p:cNvPr id="15" name="">
             <a:extLst xmlns:a="http://schemas.openxmlformats.org/drawingml/2006/main">
               <a:ext uri="{FF2B5EF4-FFF2-40B4-BE49-F238E27FC236}">
-                <a16:creationId xmlns:a16="http://schemas.microsoft.com/office/drawing/2014/main" id="{A66A898A-78AD-4D5B-8BEA-5D245C2961DF}"/>
+                <a16:creationId xmlns:a16="http://schemas.microsoft.com/office/drawing/2014/main" id="{F2408F58-FE78-4263-ADE4-07EB97C3138D}"/>
               </a:ext>
             </a:extLst>
           </p:cNvPr>
@@ -8785,7 +8913,7 @@
           <p:cNvPr id="16" name="">
             <a:extLst xmlns:a="http://schemas.openxmlformats.org/drawingml/2006/main">
               <a:ext uri="{FF2B5EF4-FFF2-40B4-BE49-F238E27FC236}">
-                <a16:creationId xmlns:a16="http://schemas.microsoft.com/office/drawing/2014/main" id="{16DF3F54-B28D-4157-ACB8-F93572CFF003}"/>
+                <a16:creationId xmlns:a16="http://schemas.microsoft.com/office/drawing/2014/main" id="{FD021AC1-7A50-4BCA-BBBD-F610BFA59B25}"/>
               </a:ext>
             </a:extLst>
           </p:cNvPr>
@@ -8849,7 +8977,7 @@
           <p:cNvPr id="17" name="">
             <a:extLst xmlns:a="http://schemas.openxmlformats.org/drawingml/2006/main">
               <a:ext uri="{FF2B5EF4-FFF2-40B4-BE49-F238E27FC236}">
-                <a16:creationId xmlns:a16="http://schemas.microsoft.com/office/drawing/2014/main" id="{9CB845B5-E865-49FD-A0AE-9C1B04B8E0AA}"/>
+                <a16:creationId xmlns:a16="http://schemas.microsoft.com/office/drawing/2014/main" id="{23125718-931E-477B-97FB-F2B1FC49F5D8}"/>
               </a:ext>
             </a:extLst>
           </p:cNvPr>
@@ -8886,7 +9014,7 @@
           <p:cNvPr id="18" name="">
             <a:extLst xmlns:a="http://schemas.openxmlformats.org/drawingml/2006/main">
               <a:ext uri="{FF2B5EF4-FFF2-40B4-BE49-F238E27FC236}">
-                <a16:creationId xmlns:a16="http://schemas.microsoft.com/office/drawing/2014/main" id="{48A1BB2E-4BF0-4C01-BA64-EF405160062D}"/>
+                <a16:creationId xmlns:a16="http://schemas.microsoft.com/office/drawing/2014/main" id="{D5F52F52-718D-4BAE-8B38-4AA1AC0CF76D}"/>
               </a:ext>
             </a:extLst>
           </p:cNvPr>
@@ -8950,7 +9078,7 @@
           <p:cNvPr id="19" name="">
             <a:extLst xmlns:a="http://schemas.openxmlformats.org/drawingml/2006/main">
               <a:ext uri="{FF2B5EF4-FFF2-40B4-BE49-F238E27FC236}">
-                <a16:creationId xmlns:a16="http://schemas.microsoft.com/office/drawing/2014/main" id="{2120896F-D014-4094-A05D-F10838798E36}"/>
+                <a16:creationId xmlns:a16="http://schemas.microsoft.com/office/drawing/2014/main" id="{EB0ACD98-D870-4B33-A88E-0160EC63115E}"/>
               </a:ext>
             </a:extLst>
           </p:cNvPr>
@@ -8987,7 +9115,7 @@
           <p:cNvPr id="20" name="">
             <a:extLst xmlns:a="http://schemas.openxmlformats.org/drawingml/2006/main">
               <a:ext uri="{FF2B5EF4-FFF2-40B4-BE49-F238E27FC236}">
-                <a16:creationId xmlns:a16="http://schemas.microsoft.com/office/drawing/2014/main" id="{63F16BD5-BCD2-4D2C-A6A2-26021BE92CF3}"/>
+                <a16:creationId xmlns:a16="http://schemas.microsoft.com/office/drawing/2014/main" id="{A1627955-C0B3-42E8-B200-61457F35723D}"/>
               </a:ext>
             </a:extLst>
           </p:cNvPr>
@@ -9051,7 +9179,7 @@
           <p:cNvPr id="21" name="">
             <a:extLst xmlns:a="http://schemas.openxmlformats.org/drawingml/2006/main">
               <a:ext uri="{FF2B5EF4-FFF2-40B4-BE49-F238E27FC236}">
-                <a16:creationId xmlns:a16="http://schemas.microsoft.com/office/drawing/2014/main" id="{BEC0546F-B218-4961-AD9D-EFD2EFD26CD2}"/>
+                <a16:creationId xmlns:a16="http://schemas.microsoft.com/office/drawing/2014/main" id="{D58C0822-9293-40BC-A60B-F20AFD47453B}"/>
               </a:ext>
             </a:extLst>
           </p:cNvPr>
@@ -9086,7 +9214,7 @@
           <p:cNvPr id="22" name="">
             <a:extLst xmlns:a="http://schemas.openxmlformats.org/drawingml/2006/main">
               <a:ext uri="{FF2B5EF4-FFF2-40B4-BE49-F238E27FC236}">
-                <a16:creationId xmlns:a16="http://schemas.microsoft.com/office/drawing/2014/main" id="{7431A047-9509-40AF-91FB-E664A630E574}"/>
+                <a16:creationId xmlns:a16="http://schemas.microsoft.com/office/drawing/2014/main" id="{2CB4DB32-DFE3-4DF3-B538-CC3FBDF730E4}"/>
               </a:ext>
             </a:extLst>
           </p:cNvPr>
@@ -9150,7 +9278,7 @@
           <p:cNvPr id="23" name="">
             <a:extLst xmlns:a="http://schemas.openxmlformats.org/drawingml/2006/main">
               <a:ext uri="{FF2B5EF4-FFF2-40B4-BE49-F238E27FC236}">
-                <a16:creationId xmlns:a16="http://schemas.microsoft.com/office/drawing/2014/main" id="{100D6888-1DC2-4F93-B23D-AC7CAC381B45}"/>
+                <a16:creationId xmlns:a16="http://schemas.microsoft.com/office/drawing/2014/main" id="{73E116F0-B833-454E-B294-7F2E2F8F92B2}"/>
               </a:ext>
             </a:extLst>
           </p:cNvPr>
@@ -9187,7 +9315,7 @@
           <p:cNvPr id="24" name="">
             <a:extLst xmlns:a="http://schemas.openxmlformats.org/drawingml/2006/main">
               <a:ext uri="{FF2B5EF4-FFF2-40B4-BE49-F238E27FC236}">
-                <a16:creationId xmlns:a16="http://schemas.microsoft.com/office/drawing/2014/main" id="{C6F56937-6357-450F-A8A7-2AB67A2ABEAA}"/>
+                <a16:creationId xmlns:a16="http://schemas.microsoft.com/office/drawing/2014/main" id="{5905F052-F72F-4D43-B1F6-C11A4A7E6736}"/>
               </a:ext>
             </a:extLst>
           </p:cNvPr>
@@ -9251,7 +9379,7 @@
           <p:cNvPr id="25" name="">
             <a:extLst xmlns:a="http://schemas.openxmlformats.org/drawingml/2006/main">
               <a:ext uri="{FF2B5EF4-FFF2-40B4-BE49-F238E27FC236}">
-                <a16:creationId xmlns:a16="http://schemas.microsoft.com/office/drawing/2014/main" id="{21DE4004-3907-460A-A3BB-9365FB3066D1}"/>
+                <a16:creationId xmlns:a16="http://schemas.microsoft.com/office/drawing/2014/main" id="{8646ECC6-FEFE-43DE-8979-66B70BEE1BA6}"/>
               </a:ext>
             </a:extLst>
           </p:cNvPr>
@@ -9288,7 +9416,7 @@
           <p:cNvPr id="26" name="">
             <a:extLst xmlns:a="http://schemas.openxmlformats.org/drawingml/2006/main">
               <a:ext uri="{FF2B5EF4-FFF2-40B4-BE49-F238E27FC236}">
-                <a16:creationId xmlns:a16="http://schemas.microsoft.com/office/drawing/2014/main" id="{9E34B098-EC5C-4D59-87A0-E59F7ABBB003}"/>
+                <a16:creationId xmlns:a16="http://schemas.microsoft.com/office/drawing/2014/main" id="{9658FC5C-0D9C-48EC-897F-5F4CFDEEB2DC}"/>
               </a:ext>
             </a:extLst>
           </p:cNvPr>
@@ -9352,7 +9480,7 @@
           <p:cNvPr id="27" name="">
             <a:extLst xmlns:a="http://schemas.openxmlformats.org/drawingml/2006/main">
               <a:ext uri="{FF2B5EF4-FFF2-40B4-BE49-F238E27FC236}">
-                <a16:creationId xmlns:a16="http://schemas.microsoft.com/office/drawing/2014/main" id="{5D0F10A4-7CB2-4F49-AA5A-5733B5385909}"/>
+                <a16:creationId xmlns:a16="http://schemas.microsoft.com/office/drawing/2014/main" id="{51F84829-A8E5-4189-963C-7770F3520C45}"/>
               </a:ext>
             </a:extLst>
           </p:cNvPr>
@@ -9389,7 +9517,7 @@
           <p:cNvPr id="28" name="">
             <a:extLst xmlns:a="http://schemas.openxmlformats.org/drawingml/2006/main">
               <a:ext uri="{FF2B5EF4-FFF2-40B4-BE49-F238E27FC236}">
-                <a16:creationId xmlns:a16="http://schemas.microsoft.com/office/drawing/2014/main" id="{D018C8C1-462D-4B66-ABF8-65AFB2F3568E}"/>
+                <a16:creationId xmlns:a16="http://schemas.microsoft.com/office/drawing/2014/main" id="{A71620F1-2338-496F-93C3-C9F79D04117E}"/>
               </a:ext>
             </a:extLst>
           </p:cNvPr>
@@ -9453,7 +9581,7 @@
           <p:cNvPr id="29" name="">
             <a:extLst xmlns:a="http://schemas.openxmlformats.org/drawingml/2006/main">
               <a:ext uri="{FF2B5EF4-FFF2-40B4-BE49-F238E27FC236}">
-                <a16:creationId xmlns:a16="http://schemas.microsoft.com/office/drawing/2014/main" id="{E331DDC6-46B8-4C74-A995-4371936E6213}"/>
+                <a16:creationId xmlns:a16="http://schemas.microsoft.com/office/drawing/2014/main" id="{86BAE861-F325-4158-81E1-4711D036DA1D}"/>
               </a:ext>
             </a:extLst>
           </p:cNvPr>
@@ -9490,7 +9618,7 @@
           <p:cNvPr id="30" name="">
             <a:extLst xmlns:a="http://schemas.openxmlformats.org/drawingml/2006/main">
               <a:ext uri="{FF2B5EF4-FFF2-40B4-BE49-F238E27FC236}">
-                <a16:creationId xmlns:a16="http://schemas.microsoft.com/office/drawing/2014/main" id="{A5EA408F-A064-484A-B6D8-B4089DE3080D}"/>
+                <a16:creationId xmlns:a16="http://schemas.microsoft.com/office/drawing/2014/main" id="{53E35393-846B-4815-8B24-2637D72D4546}"/>
               </a:ext>
             </a:extLst>
           </p:cNvPr>
@@ -9554,7 +9682,7 @@
           <p:cNvPr id="31" name="">
             <a:extLst xmlns:a="http://schemas.openxmlformats.org/drawingml/2006/main">
               <a:ext uri="{FF2B5EF4-FFF2-40B4-BE49-F238E27FC236}">
-                <a16:creationId xmlns:a16="http://schemas.microsoft.com/office/drawing/2014/main" id="{DFF075EA-5857-46A3-8919-BB1929D4358D}"/>
+                <a16:creationId xmlns:a16="http://schemas.microsoft.com/office/drawing/2014/main" id="{C57F5249-1103-4C99-B037-74D0F863ACD8}"/>
               </a:ext>
             </a:extLst>
           </p:cNvPr>
@@ -9591,7 +9719,7 @@
           <p:cNvPr id="32" name="">
             <a:extLst xmlns:a="http://schemas.openxmlformats.org/drawingml/2006/main">
               <a:ext uri="{FF2B5EF4-FFF2-40B4-BE49-F238E27FC236}">
-                <a16:creationId xmlns:a16="http://schemas.microsoft.com/office/drawing/2014/main" id="{AAAE0AD4-37F4-4E07-B2D2-F4F66EEED9A6}"/>
+                <a16:creationId xmlns:a16="http://schemas.microsoft.com/office/drawing/2014/main" id="{BB2601EF-2965-4FBB-AEBF-6C8612C6522A}"/>
               </a:ext>
             </a:extLst>
           </p:cNvPr>
@@ -9653,7 +9781,7 @@
     </p:spTree>
     <p:extLst>
       <p:ext uri="{BB962C8B-B14F-4D97-AF65-F5344CB8AC3E}">
-        <p14:creationId xmlns:p14="http://schemas.microsoft.com/office/powerpoint/2010/main" val="2007387074"/>
+        <p14:creationId xmlns:p14="http://schemas.microsoft.com/office/powerpoint/2010/main" val="1600913734"/>
       </p:ext>
     </p:extLst>
   </p:cSld>
@@ -9684,7 +9812,7 @@
           <p:cNvPr id="1" name="">
             <a:extLst xmlns:a="http://schemas.openxmlformats.org/drawingml/2006/main">
               <a:ext uri="{FF2B5EF4-FFF2-40B4-BE49-F238E27FC236}">
-                <a16:creationId xmlns:a16="http://schemas.microsoft.com/office/drawing/2014/main" id="{66D3C28F-349C-4FBB-8189-35A71AAF82AA}"/>
+                <a16:creationId xmlns:a16="http://schemas.microsoft.com/office/drawing/2014/main" id="{E7271A9B-F251-4CA5-B80F-81931C479135}"/>
               </a:ext>
             </a:extLst>
           </p:cNvPr>
@@ -9719,7 +9847,7 @@
           <p:cNvPr id="2" name="">
             <a:extLst xmlns:a="http://schemas.openxmlformats.org/drawingml/2006/main">
               <a:ext uri="{FF2B5EF4-FFF2-40B4-BE49-F238E27FC236}">
-                <a16:creationId xmlns:a16="http://schemas.microsoft.com/office/drawing/2014/main" id="{FD81F7FD-C122-48CE-9982-4946C7089D14}"/>
+                <a16:creationId xmlns:a16="http://schemas.microsoft.com/office/drawing/2014/main" id="{75DC5377-1F26-4EF4-B763-32A039D1BF06}"/>
               </a:ext>
             </a:extLst>
           </p:cNvPr>
@@ -9754,7 +9882,7 @@
           <p:cNvPr id="3" name="">
             <a:extLst xmlns:a="http://schemas.openxmlformats.org/drawingml/2006/main">
               <a:ext uri="{FF2B5EF4-FFF2-40B4-BE49-F238E27FC236}">
-                <a16:creationId xmlns:a16="http://schemas.microsoft.com/office/drawing/2014/main" id="{7E353DCA-3201-40C0-9CE3-FB2ACE16EA51}"/>
+                <a16:creationId xmlns:a16="http://schemas.microsoft.com/office/drawing/2014/main" id="{5AA6ADB3-70B6-4D4C-900E-B7FBA72AC5DE}"/>
               </a:ext>
             </a:extLst>
           </p:cNvPr>
@@ -9789,7 +9917,7 @@
           <p:cNvPr id="4" name="">
             <a:extLst xmlns:a="http://schemas.openxmlformats.org/drawingml/2006/main">
               <a:ext uri="{FF2B5EF4-FFF2-40B4-BE49-F238E27FC236}">
-                <a16:creationId xmlns:a16="http://schemas.microsoft.com/office/drawing/2014/main" id="{56E073DC-CF05-4A80-BAB3-D7E50B2AA87F}"/>
+                <a16:creationId xmlns:a16="http://schemas.microsoft.com/office/drawing/2014/main" id="{14F88E02-E884-4D1A-ACC6-B4C72035A6D3}"/>
               </a:ext>
             </a:extLst>
           </p:cNvPr>
@@ -9853,7 +9981,7 @@
           <p:cNvPr id="5" name="">
             <a:extLst xmlns:a="http://schemas.openxmlformats.org/drawingml/2006/main">
               <a:ext uri="{FF2B5EF4-FFF2-40B4-BE49-F238E27FC236}">
-                <a16:creationId xmlns:a16="http://schemas.microsoft.com/office/drawing/2014/main" id="{10164FB5-1BEF-4BFD-A594-0A94205939D9}"/>
+                <a16:creationId xmlns:a16="http://schemas.microsoft.com/office/drawing/2014/main" id="{F0E3B5E2-953A-4FD7-B073-FEB858D3E433}"/>
               </a:ext>
             </a:extLst>
           </p:cNvPr>
@@ -9917,7 +10045,7 @@
           <p:cNvPr id="6" name="">
             <a:extLst xmlns:a="http://schemas.openxmlformats.org/drawingml/2006/main">
               <a:ext uri="{FF2B5EF4-FFF2-40B4-BE49-F238E27FC236}">
-                <a16:creationId xmlns:a16="http://schemas.microsoft.com/office/drawing/2014/main" id="{FE6986DA-5F01-4F48-B5CC-8B7554C6C2BC}"/>
+                <a16:creationId xmlns:a16="http://schemas.microsoft.com/office/drawing/2014/main" id="{4F1935A0-F2E7-4E8A-9E69-51A812B627EB}"/>
               </a:ext>
             </a:extLst>
           </p:cNvPr>
@@ -9952,7 +10080,7 @@
           <p:cNvPr id="7" name="">
             <a:extLst xmlns:a="http://schemas.openxmlformats.org/drawingml/2006/main">
               <a:ext uri="{FF2B5EF4-FFF2-40B4-BE49-F238E27FC236}">
-                <a16:creationId xmlns:a16="http://schemas.microsoft.com/office/drawing/2014/main" id="{929F39D2-76E5-48E2-B054-6A80C6E01595}"/>
+                <a16:creationId xmlns:a16="http://schemas.microsoft.com/office/drawing/2014/main" id="{95DB4C3F-5285-4F72-8430-CF025F072AE6}"/>
               </a:ext>
             </a:extLst>
           </p:cNvPr>
@@ -10016,7 +10144,7 @@
           <p:cNvPr id="8" name="">
             <a:extLst xmlns:a="http://schemas.openxmlformats.org/drawingml/2006/main">
               <a:ext uri="{FF2B5EF4-FFF2-40B4-BE49-F238E27FC236}">
-                <a16:creationId xmlns:a16="http://schemas.microsoft.com/office/drawing/2014/main" id="{73D26D0F-1BF1-4A0A-888B-7F7FBD688D78}"/>
+                <a16:creationId xmlns:a16="http://schemas.microsoft.com/office/drawing/2014/main" id="{90B9C72D-3819-4EE3-AA6B-0E1150E11A0B}"/>
               </a:ext>
             </a:extLst>
           </p:cNvPr>
@@ -10080,7 +10208,7 @@
           <p:cNvPr id="9" name="">
             <a:extLst xmlns:a="http://schemas.openxmlformats.org/drawingml/2006/main">
               <a:ext uri="{FF2B5EF4-FFF2-40B4-BE49-F238E27FC236}">
-                <a16:creationId xmlns:a16="http://schemas.microsoft.com/office/drawing/2014/main" id="{BCDC9D07-52B4-4F47-A823-FADA75C8E530}"/>
+                <a16:creationId xmlns:a16="http://schemas.microsoft.com/office/drawing/2014/main" id="{9AD6244E-933E-46BD-9077-2BF5D6186A74}"/>
               </a:ext>
             </a:extLst>
           </p:cNvPr>
@@ -10115,7 +10243,7 @@
           <p:cNvPr id="10" name="">
             <a:extLst xmlns:a="http://schemas.openxmlformats.org/drawingml/2006/main">
               <a:ext uri="{FF2B5EF4-FFF2-40B4-BE49-F238E27FC236}">
-                <a16:creationId xmlns:a16="http://schemas.microsoft.com/office/drawing/2014/main" id="{129BC9E6-189B-408F-A650-484BE7B9D21F}"/>
+                <a16:creationId xmlns:a16="http://schemas.microsoft.com/office/drawing/2014/main" id="{43B8773B-2C02-483E-8979-F27F622726B7}"/>
               </a:ext>
             </a:extLst>
           </p:cNvPr>
@@ -10179,7 +10307,7 @@
           <p:cNvPr id="11" name="">
             <a:extLst xmlns:a="http://schemas.openxmlformats.org/drawingml/2006/main">
               <a:ext uri="{FF2B5EF4-FFF2-40B4-BE49-F238E27FC236}">
-                <a16:creationId xmlns:a16="http://schemas.microsoft.com/office/drawing/2014/main" id="{88E7B5AA-D22E-4D99-8146-8E5633E313DE}"/>
+                <a16:creationId xmlns:a16="http://schemas.microsoft.com/office/drawing/2014/main" id="{323B1FDD-B3C2-4465-BE2B-694886923AA2}"/>
               </a:ext>
             </a:extLst>
           </p:cNvPr>
@@ -10243,7 +10371,7 @@
           <p:cNvPr id="12" name="">
             <a:extLst xmlns:a="http://schemas.openxmlformats.org/drawingml/2006/main">
               <a:ext uri="{FF2B5EF4-FFF2-40B4-BE49-F238E27FC236}">
-                <a16:creationId xmlns:a16="http://schemas.microsoft.com/office/drawing/2014/main" id="{FC9EDCDF-11BC-4DDF-AFE5-BE7F46564C93}"/>
+                <a16:creationId xmlns:a16="http://schemas.microsoft.com/office/drawing/2014/main" id="{CC5DE924-5E4C-4CA8-9FD5-B2D7CBBC924C}"/>
               </a:ext>
             </a:extLst>
           </p:cNvPr>
@@ -10278,7 +10406,7 @@
           <p:cNvPr id="13" name="">
             <a:extLst xmlns:a="http://schemas.openxmlformats.org/drawingml/2006/main">
               <a:ext uri="{FF2B5EF4-FFF2-40B4-BE49-F238E27FC236}">
-                <a16:creationId xmlns:a16="http://schemas.microsoft.com/office/drawing/2014/main" id="{EEE257DE-4EEE-4DA3-B953-38A490B71C69}"/>
+                <a16:creationId xmlns:a16="http://schemas.microsoft.com/office/drawing/2014/main" id="{E76BDCA8-160F-47B6-9697-F172D88942A6}"/>
               </a:ext>
             </a:extLst>
           </p:cNvPr>
@@ -10342,7 +10470,7 @@
           <p:cNvPr id="14" name="">
             <a:extLst xmlns:a="http://schemas.openxmlformats.org/drawingml/2006/main">
               <a:ext uri="{FF2B5EF4-FFF2-40B4-BE49-F238E27FC236}">
-                <a16:creationId xmlns:a16="http://schemas.microsoft.com/office/drawing/2014/main" id="{FF8505F6-00AB-47DF-ABF2-67478C4AA01C}"/>
+                <a16:creationId xmlns:a16="http://schemas.microsoft.com/office/drawing/2014/main" id="{44F4E98B-5C24-43D8-9E0C-FFE50D9748C2}"/>
               </a:ext>
             </a:extLst>
           </p:cNvPr>
@@ -10406,7 +10534,7 @@
           <p:cNvPr id="15" name="">
             <a:extLst xmlns:a="http://schemas.openxmlformats.org/drawingml/2006/main">
               <a:ext uri="{FF2B5EF4-FFF2-40B4-BE49-F238E27FC236}">
-                <a16:creationId xmlns:a16="http://schemas.microsoft.com/office/drawing/2014/main" id="{044A1132-C56F-4886-8073-C3E6DDB873A3}"/>
+                <a16:creationId xmlns:a16="http://schemas.microsoft.com/office/drawing/2014/main" id="{C7CD2A63-A941-4303-91FA-36CF6797D454}"/>
               </a:ext>
             </a:extLst>
           </p:cNvPr>
@@ -10441,7 +10569,7 @@
           <p:cNvPr id="16" name="">
             <a:extLst xmlns:a="http://schemas.openxmlformats.org/drawingml/2006/main">
               <a:ext uri="{FF2B5EF4-FFF2-40B4-BE49-F238E27FC236}">
-                <a16:creationId xmlns:a16="http://schemas.microsoft.com/office/drawing/2014/main" id="{F94AF30E-CD1C-43D8-9843-1415295489A7}"/>
+                <a16:creationId xmlns:a16="http://schemas.microsoft.com/office/drawing/2014/main" id="{7B472D1C-4EC3-4FC0-8CC5-A7B4D8E466F5}"/>
               </a:ext>
             </a:extLst>
           </p:cNvPr>
@@ -10505,7 +10633,7 @@
           <p:cNvPr id="17" name="">
             <a:extLst xmlns:a="http://schemas.openxmlformats.org/drawingml/2006/main">
               <a:ext uri="{FF2B5EF4-FFF2-40B4-BE49-F238E27FC236}">
-                <a16:creationId xmlns:a16="http://schemas.microsoft.com/office/drawing/2014/main" id="{A4742753-1903-4C34-8AF9-4AC4DDAA8A33}"/>
+                <a16:creationId xmlns:a16="http://schemas.microsoft.com/office/drawing/2014/main" id="{B5273193-8915-46FB-8E7F-5051ACD76C9A}"/>
               </a:ext>
             </a:extLst>
           </p:cNvPr>
@@ -10569,7 +10697,7 @@
           <p:cNvPr id="18" name="">
             <a:extLst xmlns:a="http://schemas.openxmlformats.org/drawingml/2006/main">
               <a:ext uri="{FF2B5EF4-FFF2-40B4-BE49-F238E27FC236}">
-                <a16:creationId xmlns:a16="http://schemas.microsoft.com/office/drawing/2014/main" id="{A64E076D-9707-45AD-9E23-15D26E8594D4}"/>
+                <a16:creationId xmlns:a16="http://schemas.microsoft.com/office/drawing/2014/main" id="{0A5E22A1-EAA3-4DF9-9972-DFA0D693542D}"/>
               </a:ext>
             </a:extLst>
           </p:cNvPr>
@@ -10604,7 +10732,7 @@
           <p:cNvPr id="19" name="">
             <a:extLst xmlns:a="http://schemas.openxmlformats.org/drawingml/2006/main">
               <a:ext uri="{FF2B5EF4-FFF2-40B4-BE49-F238E27FC236}">
-                <a16:creationId xmlns:a16="http://schemas.microsoft.com/office/drawing/2014/main" id="{ABFD90B3-285E-4AFF-A898-EB07507BB39D}"/>
+                <a16:creationId xmlns:a16="http://schemas.microsoft.com/office/drawing/2014/main" id="{F3550152-23DA-45AB-8A24-3A2A643B7BEC}"/>
               </a:ext>
             </a:extLst>
           </p:cNvPr>
@@ -10668,7 +10796,7 @@
           <p:cNvPr id="20" name="">
             <a:extLst xmlns:a="http://schemas.openxmlformats.org/drawingml/2006/main">
               <a:ext uri="{FF2B5EF4-FFF2-40B4-BE49-F238E27FC236}">
-                <a16:creationId xmlns:a16="http://schemas.microsoft.com/office/drawing/2014/main" id="{8713B0EC-1B9F-4F22-BA2D-165CD8C122C9}"/>
+                <a16:creationId xmlns:a16="http://schemas.microsoft.com/office/drawing/2014/main" id="{74E689E1-5DB8-4107-B53B-347793B6EA8A}"/>
               </a:ext>
             </a:extLst>
           </p:cNvPr>
@@ -10732,7 +10860,7 @@
           <p:cNvPr id="21" name="">
             <a:extLst xmlns:a="http://schemas.openxmlformats.org/drawingml/2006/main">
               <a:ext uri="{FF2B5EF4-FFF2-40B4-BE49-F238E27FC236}">
-                <a16:creationId xmlns:a16="http://schemas.microsoft.com/office/drawing/2014/main" id="{F6B6987F-CF12-47BB-B887-E7050328CEA3}"/>
+                <a16:creationId xmlns:a16="http://schemas.microsoft.com/office/drawing/2014/main" id="{C5189B2E-CA45-46F2-BF1F-DDB3E82D31D5}"/>
               </a:ext>
             </a:extLst>
           </p:cNvPr>
@@ -10767,7 +10895,7 @@
           <p:cNvPr id="22" name="">
             <a:extLst xmlns:a="http://schemas.openxmlformats.org/drawingml/2006/main">
               <a:ext uri="{FF2B5EF4-FFF2-40B4-BE49-F238E27FC236}">
-                <a16:creationId xmlns:a16="http://schemas.microsoft.com/office/drawing/2014/main" id="{7CF285A7-E971-4AC1-86FF-4BBEAFBCDBEC}"/>
+                <a16:creationId xmlns:a16="http://schemas.microsoft.com/office/drawing/2014/main" id="{3F4449D4-A9C4-492B-AB5B-EEEE1E2785F2}"/>
               </a:ext>
             </a:extLst>
           </p:cNvPr>
@@ -10831,7 +10959,7 @@
           <p:cNvPr id="23" name="">
             <a:extLst xmlns:a="http://schemas.openxmlformats.org/drawingml/2006/main">
               <a:ext uri="{FF2B5EF4-FFF2-40B4-BE49-F238E27FC236}">
-                <a16:creationId xmlns:a16="http://schemas.microsoft.com/office/drawing/2014/main" id="{86E3A16A-345B-41ED-9324-DEAC0E6575FC}"/>
+                <a16:creationId xmlns:a16="http://schemas.microsoft.com/office/drawing/2014/main" id="{4127BE10-1C9C-4385-BD2D-534C162AC933}"/>
               </a:ext>
             </a:extLst>
           </p:cNvPr>
@@ -10868,7 +10996,7 @@
           <p:cNvPr id="24" name="">
             <a:extLst xmlns:a="http://schemas.openxmlformats.org/drawingml/2006/main">
               <a:ext uri="{FF2B5EF4-FFF2-40B4-BE49-F238E27FC236}">
-                <a16:creationId xmlns:a16="http://schemas.microsoft.com/office/drawing/2014/main" id="{65901D36-1E78-4437-B57A-D0D94E6FFE22}"/>
+                <a16:creationId xmlns:a16="http://schemas.microsoft.com/office/drawing/2014/main" id="{54F603D2-EA12-402D-93AB-A58C4388E60B}"/>
               </a:ext>
             </a:extLst>
           </p:cNvPr>
@@ -10932,7 +11060,7 @@
           <p:cNvPr id="25" name="">
             <a:extLst xmlns:a="http://schemas.openxmlformats.org/drawingml/2006/main">
               <a:ext uri="{FF2B5EF4-FFF2-40B4-BE49-F238E27FC236}">
-                <a16:creationId xmlns:a16="http://schemas.microsoft.com/office/drawing/2014/main" id="{C2F3CFA2-48DF-4EED-A99A-EFCFAC60E8F7}"/>
+                <a16:creationId xmlns:a16="http://schemas.microsoft.com/office/drawing/2014/main" id="{0039AD5E-EAB1-453F-B829-C9EBF400D063}"/>
               </a:ext>
             </a:extLst>
           </p:cNvPr>
@@ -10969,7 +11097,7 @@
           <p:cNvPr id="26" name="">
             <a:extLst xmlns:a="http://schemas.openxmlformats.org/drawingml/2006/main">
               <a:ext uri="{FF2B5EF4-FFF2-40B4-BE49-F238E27FC236}">
-                <a16:creationId xmlns:a16="http://schemas.microsoft.com/office/drawing/2014/main" id="{4D4FBC83-A70C-41AC-B2A2-CA701D4B71BF}"/>
+                <a16:creationId xmlns:a16="http://schemas.microsoft.com/office/drawing/2014/main" id="{AE23CD03-D33B-4182-8C16-DFDE2AF52661}"/>
               </a:ext>
             </a:extLst>
           </p:cNvPr>
@@ -11033,7 +11161,7 @@
           <p:cNvPr id="27" name="">
             <a:extLst xmlns:a="http://schemas.openxmlformats.org/drawingml/2006/main">
               <a:ext uri="{FF2B5EF4-FFF2-40B4-BE49-F238E27FC236}">
-                <a16:creationId xmlns:a16="http://schemas.microsoft.com/office/drawing/2014/main" id="{10D66168-450B-4962-8F10-AABD66B3274D}"/>
+                <a16:creationId xmlns:a16="http://schemas.microsoft.com/office/drawing/2014/main" id="{54303452-E7FE-470F-AEC8-1D3F7944B0B2}"/>
               </a:ext>
             </a:extLst>
           </p:cNvPr>
@@ -11070,7 +11198,7 @@
           <p:cNvPr id="28" name="">
             <a:extLst xmlns:a="http://schemas.openxmlformats.org/drawingml/2006/main">
               <a:ext uri="{FF2B5EF4-FFF2-40B4-BE49-F238E27FC236}">
-                <a16:creationId xmlns:a16="http://schemas.microsoft.com/office/drawing/2014/main" id="{67615BB4-CC54-4810-94C7-FC324A30B753}"/>
+                <a16:creationId xmlns:a16="http://schemas.microsoft.com/office/drawing/2014/main" id="{883028E5-E52A-4BA9-B890-92684C1298C0}"/>
               </a:ext>
             </a:extLst>
           </p:cNvPr>
@@ -11132,7 +11260,7 @@
     </p:spTree>
     <p:extLst>
       <p:ext uri="{BB962C8B-B14F-4D97-AF65-F5344CB8AC3E}">
-        <p14:creationId xmlns:p14="http://schemas.microsoft.com/office/powerpoint/2010/main" val="1536271062"/>
+        <p14:creationId xmlns:p14="http://schemas.microsoft.com/office/powerpoint/2010/main" val="298462592"/>
       </p:ext>
     </p:extLst>
   </p:cSld>
@@ -11163,7 +11291,7 @@
           <p:cNvPr id="1" name="">
             <a:extLst xmlns:a="http://schemas.openxmlformats.org/drawingml/2006/main">
               <a:ext uri="{FF2B5EF4-FFF2-40B4-BE49-F238E27FC236}">
-                <a16:creationId xmlns:a16="http://schemas.microsoft.com/office/drawing/2014/main" id="{16379C4E-29E0-4C34-829F-A8DD2DAC9358}"/>
+                <a16:creationId xmlns:a16="http://schemas.microsoft.com/office/drawing/2014/main" id="{162C639C-C09A-43BE-B072-D43D827795F8}"/>
               </a:ext>
             </a:extLst>
           </p:cNvPr>
@@ -11198,7 +11326,7 @@
           <p:cNvPr id="2" name="">
             <a:extLst xmlns:a="http://schemas.openxmlformats.org/drawingml/2006/main">
               <a:ext uri="{FF2B5EF4-FFF2-40B4-BE49-F238E27FC236}">
-                <a16:creationId xmlns:a16="http://schemas.microsoft.com/office/drawing/2014/main" id="{83D1CA97-FCFF-411C-80D7-4FC95711824A}"/>
+                <a16:creationId xmlns:a16="http://schemas.microsoft.com/office/drawing/2014/main" id="{09DF4A63-361F-4F5E-B221-4F43AF74B93A}"/>
               </a:ext>
             </a:extLst>
           </p:cNvPr>
@@ -11233,7 +11361,7 @@
           <p:cNvPr id="3" name="">
             <a:extLst xmlns:a="http://schemas.openxmlformats.org/drawingml/2006/main">
               <a:ext uri="{FF2B5EF4-FFF2-40B4-BE49-F238E27FC236}">
-                <a16:creationId xmlns:a16="http://schemas.microsoft.com/office/drawing/2014/main" id="{6EB51C7E-26E1-4998-810C-2240F6AD1CC0}"/>
+                <a16:creationId xmlns:a16="http://schemas.microsoft.com/office/drawing/2014/main" id="{A9D12874-F3E3-4130-9145-835A0732ABDA}"/>
               </a:ext>
             </a:extLst>
           </p:cNvPr>
@@ -11268,7 +11396,7 @@
           <p:cNvPr id="4" name="">
             <a:extLst xmlns:a="http://schemas.openxmlformats.org/drawingml/2006/main">
               <a:ext uri="{FF2B5EF4-FFF2-40B4-BE49-F238E27FC236}">
-                <a16:creationId xmlns:a16="http://schemas.microsoft.com/office/drawing/2014/main" id="{786D1C56-5820-4B70-817C-E82EB3C291D1}"/>
+                <a16:creationId xmlns:a16="http://schemas.microsoft.com/office/drawing/2014/main" id="{545A92E4-95C4-49B3-A3B3-B7F702D53EF2}"/>
               </a:ext>
             </a:extLst>
           </p:cNvPr>
@@ -11332,7 +11460,7 @@
           <p:cNvPr id="5" name="">
             <a:extLst xmlns:a="http://schemas.openxmlformats.org/drawingml/2006/main">
               <a:ext uri="{FF2B5EF4-FFF2-40B4-BE49-F238E27FC236}">
-                <a16:creationId xmlns:a16="http://schemas.microsoft.com/office/drawing/2014/main" id="{DE7179A3-BD8B-40A7-A8CF-1D39529E2348}"/>
+                <a16:creationId xmlns:a16="http://schemas.microsoft.com/office/drawing/2014/main" id="{6CE94F4B-A919-4F58-BF99-3E1D5B29342C}"/>
               </a:ext>
             </a:extLst>
           </p:cNvPr>
@@ -11396,7 +11524,7 @@
           <p:cNvPr id="6" name="">
             <a:extLst xmlns:a="http://schemas.openxmlformats.org/drawingml/2006/main">
               <a:ext uri="{FF2B5EF4-FFF2-40B4-BE49-F238E27FC236}">
-                <a16:creationId xmlns:a16="http://schemas.microsoft.com/office/drawing/2014/main" id="{19222A23-C09F-44C6-B97E-2AF2002200FF}"/>
+                <a16:creationId xmlns:a16="http://schemas.microsoft.com/office/drawing/2014/main" id="{E0F1E40C-7A2B-437C-AF90-9D26C9E1A355}"/>
               </a:ext>
             </a:extLst>
           </p:cNvPr>
@@ -11431,7 +11559,7 @@
           <p:cNvPr id="7" name="">
             <a:extLst xmlns:a="http://schemas.openxmlformats.org/drawingml/2006/main">
               <a:ext uri="{FF2B5EF4-FFF2-40B4-BE49-F238E27FC236}">
-                <a16:creationId xmlns:a16="http://schemas.microsoft.com/office/drawing/2014/main" id="{24382B93-6C26-48BB-AC21-AF113D1F1E90}"/>
+                <a16:creationId xmlns:a16="http://schemas.microsoft.com/office/drawing/2014/main" id="{F6960391-B112-4AD8-BBC8-90A9884FD89A}"/>
               </a:ext>
             </a:extLst>
           </p:cNvPr>
@@ -11495,7 +11623,7 @@
           <p:cNvPr id="8" name="">
             <a:extLst xmlns:a="http://schemas.openxmlformats.org/drawingml/2006/main">
               <a:ext uri="{FF2B5EF4-FFF2-40B4-BE49-F238E27FC236}">
-                <a16:creationId xmlns:a16="http://schemas.microsoft.com/office/drawing/2014/main" id="{13DBDD14-3AD7-40CE-9396-23806BF55681}"/>
+                <a16:creationId xmlns:a16="http://schemas.microsoft.com/office/drawing/2014/main" id="{E02CF15D-9B39-40B2-A70C-993D4F3C3DDA}"/>
               </a:ext>
             </a:extLst>
           </p:cNvPr>
@@ -11559,7 +11687,7 @@
           <p:cNvPr id="9" name="">
             <a:extLst xmlns:a="http://schemas.openxmlformats.org/drawingml/2006/main">
               <a:ext uri="{FF2B5EF4-FFF2-40B4-BE49-F238E27FC236}">
-                <a16:creationId xmlns:a16="http://schemas.microsoft.com/office/drawing/2014/main" id="{50D0B453-FA6A-4A52-A1F6-53AF8C60A6EE}"/>
+                <a16:creationId xmlns:a16="http://schemas.microsoft.com/office/drawing/2014/main" id="{30DE0113-3105-466B-8B8D-7C6B45DF4869}"/>
               </a:ext>
             </a:extLst>
           </p:cNvPr>
@@ -11596,7 +11724,7 @@
           <p:cNvPr id="10" name="">
             <a:extLst xmlns:a="http://schemas.openxmlformats.org/drawingml/2006/main">
               <a:ext uri="{FF2B5EF4-FFF2-40B4-BE49-F238E27FC236}">
-                <a16:creationId xmlns:a16="http://schemas.microsoft.com/office/drawing/2014/main" id="{F22E158A-C2B4-41B0-A796-A389B644E045}"/>
+                <a16:creationId xmlns:a16="http://schemas.microsoft.com/office/drawing/2014/main" id="{7575FC88-542F-429E-9BA5-1F501A5EB54F}"/>
               </a:ext>
             </a:extLst>
           </p:cNvPr>
@@ -11660,7 +11788,7 @@
           <p:cNvPr id="11" name="">
             <a:extLst xmlns:a="http://schemas.openxmlformats.org/drawingml/2006/main">
               <a:ext uri="{FF2B5EF4-FFF2-40B4-BE49-F238E27FC236}">
-                <a16:creationId xmlns:a16="http://schemas.microsoft.com/office/drawing/2014/main" id="{7917A3C4-CB2B-4F54-A354-68F83F24980C}"/>
+                <a16:creationId xmlns:a16="http://schemas.microsoft.com/office/drawing/2014/main" id="{CC42C34E-46D5-4C06-A609-500828ACE995}"/>
               </a:ext>
             </a:extLst>
           </p:cNvPr>
@@ -11697,7 +11825,7 @@
           <p:cNvPr id="12" name="">
             <a:extLst xmlns:a="http://schemas.openxmlformats.org/drawingml/2006/main">
               <a:ext uri="{FF2B5EF4-FFF2-40B4-BE49-F238E27FC236}">
-                <a16:creationId xmlns:a16="http://schemas.microsoft.com/office/drawing/2014/main" id="{5CD51680-2F05-49C6-8845-D9F4BF1E19E7}"/>
+                <a16:creationId xmlns:a16="http://schemas.microsoft.com/office/drawing/2014/main" id="{5E4909E6-3D3F-4000-BA4A-BF1FB822A334}"/>
               </a:ext>
             </a:extLst>
           </p:cNvPr>
@@ -11761,7 +11889,7 @@
           <p:cNvPr id="13" name="">
             <a:extLst xmlns:a="http://schemas.openxmlformats.org/drawingml/2006/main">
               <a:ext uri="{FF2B5EF4-FFF2-40B4-BE49-F238E27FC236}">
-                <a16:creationId xmlns:a16="http://schemas.microsoft.com/office/drawing/2014/main" id="{835853FC-0878-43DB-AAB3-ECEC2E41DABF}"/>
+                <a16:creationId xmlns:a16="http://schemas.microsoft.com/office/drawing/2014/main" id="{B6FA5FBD-9737-409C-9362-9FB97EA39BA8}"/>
               </a:ext>
             </a:extLst>
           </p:cNvPr>
@@ -11798,7 +11926,7 @@
           <p:cNvPr id="14" name="">
             <a:extLst xmlns:a="http://schemas.openxmlformats.org/drawingml/2006/main">
               <a:ext uri="{FF2B5EF4-FFF2-40B4-BE49-F238E27FC236}">
-                <a16:creationId xmlns:a16="http://schemas.microsoft.com/office/drawing/2014/main" id="{252AB189-D41C-4D3F-BF5D-EB9AD1A92EFE}"/>
+                <a16:creationId xmlns:a16="http://schemas.microsoft.com/office/drawing/2014/main" id="{ED2AC8A9-88F0-4F3D-BBE0-8DB039FD9B93}"/>
               </a:ext>
             </a:extLst>
           </p:cNvPr>
@@ -11862,7 +11990,7 @@
           <p:cNvPr id="15" name="">
             <a:extLst xmlns:a="http://schemas.openxmlformats.org/drawingml/2006/main">
               <a:ext uri="{FF2B5EF4-FFF2-40B4-BE49-F238E27FC236}">
-                <a16:creationId xmlns:a16="http://schemas.microsoft.com/office/drawing/2014/main" id="{CF8C70ED-7D93-4CC0-945E-40EEAAEA873F}"/>
+                <a16:creationId xmlns:a16="http://schemas.microsoft.com/office/drawing/2014/main" id="{6591D2A6-A3F4-4652-9E88-D29DA2C674DA}"/>
               </a:ext>
             </a:extLst>
           </p:cNvPr>
@@ -11899,7 +12027,7 @@
           <p:cNvPr id="16" name="">
             <a:extLst xmlns:a="http://schemas.openxmlformats.org/drawingml/2006/main">
               <a:ext uri="{FF2B5EF4-FFF2-40B4-BE49-F238E27FC236}">
-                <a16:creationId xmlns:a16="http://schemas.microsoft.com/office/drawing/2014/main" id="{DC65C076-BF27-4D63-A6C7-9900275CD2EB}"/>
+                <a16:creationId xmlns:a16="http://schemas.microsoft.com/office/drawing/2014/main" id="{9D76EDEC-96B9-4A82-96D4-017034D9BD20}"/>
               </a:ext>
             </a:extLst>
           </p:cNvPr>
@@ -11963,7 +12091,7 @@
           <p:cNvPr id="17" name="">
             <a:extLst xmlns:a="http://schemas.openxmlformats.org/drawingml/2006/main">
               <a:ext uri="{FF2B5EF4-FFF2-40B4-BE49-F238E27FC236}">
-                <a16:creationId xmlns:a16="http://schemas.microsoft.com/office/drawing/2014/main" id="{F5C3481B-6F13-4BA9-94B8-D57414E2A633}"/>
+                <a16:creationId xmlns:a16="http://schemas.microsoft.com/office/drawing/2014/main" id="{EA6D62F7-6FC1-4CF6-8F6F-FF21CB30CA11}"/>
               </a:ext>
             </a:extLst>
           </p:cNvPr>
@@ -11998,7 +12126,7 @@
           <p:cNvPr id="18" name="">
             <a:extLst xmlns:a="http://schemas.openxmlformats.org/drawingml/2006/main">
               <a:ext uri="{FF2B5EF4-FFF2-40B4-BE49-F238E27FC236}">
-                <a16:creationId xmlns:a16="http://schemas.microsoft.com/office/drawing/2014/main" id="{8BFEB1FA-D5A5-4CD2-A614-9F25F5B36716}"/>
+                <a16:creationId xmlns:a16="http://schemas.microsoft.com/office/drawing/2014/main" id="{F897097E-961D-4B4C-BC92-DE10E1514153}"/>
               </a:ext>
             </a:extLst>
           </p:cNvPr>
@@ -12060,7 +12188,7 @@
     </p:spTree>
     <p:extLst>
       <p:ext uri="{BB962C8B-B14F-4D97-AF65-F5344CB8AC3E}">
-        <p14:creationId xmlns:p14="http://schemas.microsoft.com/office/powerpoint/2010/main" val="319670398"/>
+        <p14:creationId xmlns:p14="http://schemas.microsoft.com/office/powerpoint/2010/main" val="1860820543"/>
       </p:ext>
     </p:extLst>
   </p:cSld>
@@ -12091,7 +12219,7 @@
           <p:cNvPr id="1" name="">
             <a:extLst xmlns:a="http://schemas.openxmlformats.org/drawingml/2006/main">
               <a:ext uri="{FF2B5EF4-FFF2-40B4-BE49-F238E27FC236}">
-                <a16:creationId xmlns:a16="http://schemas.microsoft.com/office/drawing/2014/main" id="{C6D4A27E-40C3-4228-AC26-728634E4CCB1}"/>
+                <a16:creationId xmlns:a16="http://schemas.microsoft.com/office/drawing/2014/main" id="{252081DF-C025-4DD6-A3F5-512A489DD56D}"/>
               </a:ext>
             </a:extLst>
           </p:cNvPr>
@@ -12126,7 +12254,7 @@
           <p:cNvPr id="2" name="">
             <a:extLst xmlns:a="http://schemas.openxmlformats.org/drawingml/2006/main">
               <a:ext uri="{FF2B5EF4-FFF2-40B4-BE49-F238E27FC236}">
-                <a16:creationId xmlns:a16="http://schemas.microsoft.com/office/drawing/2014/main" id="{D49ECE34-3C3F-4C58-AF40-269A01EBB7E5}"/>
+                <a16:creationId xmlns:a16="http://schemas.microsoft.com/office/drawing/2014/main" id="{10A296A9-BDA6-49D5-B537-AE19C3F83752}"/>
               </a:ext>
             </a:extLst>
           </p:cNvPr>
@@ -12161,7 +12289,7 @@
           <p:cNvPr id="3" name="">
             <a:extLst xmlns:a="http://schemas.openxmlformats.org/drawingml/2006/main">
               <a:ext uri="{FF2B5EF4-FFF2-40B4-BE49-F238E27FC236}">
-                <a16:creationId xmlns:a16="http://schemas.microsoft.com/office/drawing/2014/main" id="{AFEEF380-17FC-4263-8132-9FF9C8BC3C83}"/>
+                <a16:creationId xmlns:a16="http://schemas.microsoft.com/office/drawing/2014/main" id="{86173578-A2AF-4C68-B67C-DAE43AEB01C8}"/>
               </a:ext>
             </a:extLst>
           </p:cNvPr>
@@ -12196,7 +12324,7 @@
           <p:cNvPr id="4" name="">
             <a:extLst xmlns:a="http://schemas.openxmlformats.org/drawingml/2006/main">
               <a:ext uri="{FF2B5EF4-FFF2-40B4-BE49-F238E27FC236}">
-                <a16:creationId xmlns:a16="http://schemas.microsoft.com/office/drawing/2014/main" id="{1718CA79-EFA3-49CC-A9FA-71929C18AD1C}"/>
+                <a16:creationId xmlns:a16="http://schemas.microsoft.com/office/drawing/2014/main" id="{F2B6334B-BAA2-4EFF-AB74-D0AEB192095D}"/>
               </a:ext>
             </a:extLst>
           </p:cNvPr>
@@ -12260,7 +12388,7 @@
           <p:cNvPr id="5" name="">
             <a:extLst xmlns:a="http://schemas.openxmlformats.org/drawingml/2006/main">
               <a:ext uri="{FF2B5EF4-FFF2-40B4-BE49-F238E27FC236}">
-                <a16:creationId xmlns:a16="http://schemas.microsoft.com/office/drawing/2014/main" id="{09963EB0-9104-4DCB-8E61-341A1063ACC7}"/>
+                <a16:creationId xmlns:a16="http://schemas.microsoft.com/office/drawing/2014/main" id="{E45D9083-3448-4626-A614-11155F3997F8}"/>
               </a:ext>
             </a:extLst>
           </p:cNvPr>
@@ -12324,7 +12452,7 @@
           <p:cNvPr id="6" name="">
             <a:extLst xmlns:a="http://schemas.openxmlformats.org/drawingml/2006/main">
               <a:ext uri="{FF2B5EF4-FFF2-40B4-BE49-F238E27FC236}">
-                <a16:creationId xmlns:a16="http://schemas.microsoft.com/office/drawing/2014/main" id="{E6CED36D-4EFC-44ED-8B79-3FF530B13196}"/>
+                <a16:creationId xmlns:a16="http://schemas.microsoft.com/office/drawing/2014/main" id="{37DF3F17-8367-4E78-BAB1-674CD4896AAF}"/>
               </a:ext>
             </a:extLst>
           </p:cNvPr>
@@ -12359,7 +12487,7 @@
           <p:cNvPr id="7" name="">
             <a:extLst xmlns:a="http://schemas.openxmlformats.org/drawingml/2006/main">
               <a:ext uri="{FF2B5EF4-FFF2-40B4-BE49-F238E27FC236}">
-                <a16:creationId xmlns:a16="http://schemas.microsoft.com/office/drawing/2014/main" id="{9A7B0FAA-3F0F-4FF7-A9ED-ED0574FE9F95}"/>
+                <a16:creationId xmlns:a16="http://schemas.microsoft.com/office/drawing/2014/main" id="{C9AA97E3-B214-452F-AC5C-6476E5F037FF}"/>
               </a:ext>
             </a:extLst>
           </p:cNvPr>
@@ -12423,7 +12551,7 @@
           <p:cNvPr id="8" name="">
             <a:extLst xmlns:a="http://schemas.openxmlformats.org/drawingml/2006/main">
               <a:ext uri="{FF2B5EF4-FFF2-40B4-BE49-F238E27FC236}">
-                <a16:creationId xmlns:a16="http://schemas.microsoft.com/office/drawing/2014/main" id="{1B7EF170-5ED5-4D62-BA59-C08FC9E6A0F9}"/>
+                <a16:creationId xmlns:a16="http://schemas.microsoft.com/office/drawing/2014/main" id="{88A9AA60-9077-4EB0-8E36-CA207A0F56A1}"/>
               </a:ext>
             </a:extLst>
           </p:cNvPr>
@@ -12487,7 +12615,7 @@
           <p:cNvPr id="9" name="">
             <a:extLst xmlns:a="http://schemas.openxmlformats.org/drawingml/2006/main">
               <a:ext uri="{FF2B5EF4-FFF2-40B4-BE49-F238E27FC236}">
-                <a16:creationId xmlns:a16="http://schemas.microsoft.com/office/drawing/2014/main" id="{A6B0AFF1-9B57-4B3E-8BBA-9743CE3B7CBD}"/>
+                <a16:creationId xmlns:a16="http://schemas.microsoft.com/office/drawing/2014/main" id="{8A4904E7-624F-4DB1-B9E5-CC7104EB43DD}"/>
               </a:ext>
             </a:extLst>
           </p:cNvPr>
@@ -12524,7 +12652,7 @@
           <p:cNvPr id="10" name="">
             <a:extLst xmlns:a="http://schemas.openxmlformats.org/drawingml/2006/main">
               <a:ext uri="{FF2B5EF4-FFF2-40B4-BE49-F238E27FC236}">
-                <a16:creationId xmlns:a16="http://schemas.microsoft.com/office/drawing/2014/main" id="{33826D52-5EFE-466E-887F-4FB93C8BCFC5}"/>
+                <a16:creationId xmlns:a16="http://schemas.microsoft.com/office/drawing/2014/main" id="{16CBF605-06A2-4EBC-81F0-CBD7438AF015}"/>
               </a:ext>
             </a:extLst>
           </p:cNvPr>
@@ -12588,7 +12716,7 @@
           <p:cNvPr id="11" name="">
             <a:extLst xmlns:a="http://schemas.openxmlformats.org/drawingml/2006/main">
               <a:ext uri="{FF2B5EF4-FFF2-40B4-BE49-F238E27FC236}">
-                <a16:creationId xmlns:a16="http://schemas.microsoft.com/office/drawing/2014/main" id="{97FEE3E2-2A37-43AB-885C-4BE1A176D979}"/>
+                <a16:creationId xmlns:a16="http://schemas.microsoft.com/office/drawing/2014/main" id="{87E39737-8C19-46F5-87FC-86495F1B0FE4}"/>
               </a:ext>
             </a:extLst>
           </p:cNvPr>
@@ -12625,7 +12753,7 @@
           <p:cNvPr id="12" name="">
             <a:extLst xmlns:a="http://schemas.openxmlformats.org/drawingml/2006/main">
               <a:ext uri="{FF2B5EF4-FFF2-40B4-BE49-F238E27FC236}">
-                <a16:creationId xmlns:a16="http://schemas.microsoft.com/office/drawing/2014/main" id="{CBEA079A-CA12-444C-88B9-2AF07D56FCFB}"/>
+                <a16:creationId xmlns:a16="http://schemas.microsoft.com/office/drawing/2014/main" id="{5741D935-AAD5-41E2-B5EF-AB6F187B23E4}"/>
               </a:ext>
             </a:extLst>
           </p:cNvPr>
@@ -12689,7 +12817,7 @@
           <p:cNvPr id="13" name="">
             <a:extLst xmlns:a="http://schemas.openxmlformats.org/drawingml/2006/main">
               <a:ext uri="{FF2B5EF4-FFF2-40B4-BE49-F238E27FC236}">
-                <a16:creationId xmlns:a16="http://schemas.microsoft.com/office/drawing/2014/main" id="{DA204FD7-9B8C-49F3-8EE4-618FF64E7AD1}"/>
+                <a16:creationId xmlns:a16="http://schemas.microsoft.com/office/drawing/2014/main" id="{5A9D7C69-0237-4C3B-85D8-6B88B00D19BF}"/>
               </a:ext>
             </a:extLst>
           </p:cNvPr>
@@ -12726,7 +12854,7 @@
           <p:cNvPr id="14" name="">
             <a:extLst xmlns:a="http://schemas.openxmlformats.org/drawingml/2006/main">
               <a:ext uri="{FF2B5EF4-FFF2-40B4-BE49-F238E27FC236}">
-                <a16:creationId xmlns:a16="http://schemas.microsoft.com/office/drawing/2014/main" id="{5086F909-EBD0-412B-9FBC-44B6EE139F15}"/>
+                <a16:creationId xmlns:a16="http://schemas.microsoft.com/office/drawing/2014/main" id="{332C2918-B98D-4EB0-B678-23450D7E6469}"/>
               </a:ext>
             </a:extLst>
           </p:cNvPr>
@@ -12790,7 +12918,7 @@
           <p:cNvPr id="15" name="">
             <a:extLst xmlns:a="http://schemas.openxmlformats.org/drawingml/2006/main">
               <a:ext uri="{FF2B5EF4-FFF2-40B4-BE49-F238E27FC236}">
-                <a16:creationId xmlns:a16="http://schemas.microsoft.com/office/drawing/2014/main" id="{9F0357E1-6D22-4FEB-8818-551242040E76}"/>
+                <a16:creationId xmlns:a16="http://schemas.microsoft.com/office/drawing/2014/main" id="{A334F202-52A1-4190-B088-52EE321F835B}"/>
               </a:ext>
             </a:extLst>
           </p:cNvPr>
@@ -12827,7 +12955,7 @@
           <p:cNvPr id="16" name="">
             <a:extLst xmlns:a="http://schemas.openxmlformats.org/drawingml/2006/main">
               <a:ext uri="{FF2B5EF4-FFF2-40B4-BE49-F238E27FC236}">
-                <a16:creationId xmlns:a16="http://schemas.microsoft.com/office/drawing/2014/main" id="{9CEA5BB5-B55A-419E-A601-2D927FFDDF50}"/>
+                <a16:creationId xmlns:a16="http://schemas.microsoft.com/office/drawing/2014/main" id="{49D3BE73-3CF9-45C7-BEFD-45356F966220}"/>
               </a:ext>
             </a:extLst>
           </p:cNvPr>
@@ -12889,7 +13017,7 @@
     </p:spTree>
     <p:extLst>
       <p:ext uri="{BB962C8B-B14F-4D97-AF65-F5344CB8AC3E}">
-        <p14:creationId xmlns:p14="http://schemas.microsoft.com/office/powerpoint/2010/main" val="792500466"/>
+        <p14:creationId xmlns:p14="http://schemas.microsoft.com/office/powerpoint/2010/main" val="1109810506"/>
       </p:ext>
     </p:extLst>
   </p:cSld>
@@ -12920,7 +13048,7 @@
           <p:cNvPr id="1" name="">
             <a:extLst xmlns:a="http://schemas.openxmlformats.org/drawingml/2006/main">
               <a:ext uri="{FF2B5EF4-FFF2-40B4-BE49-F238E27FC236}">
-                <a16:creationId xmlns:a16="http://schemas.microsoft.com/office/drawing/2014/main" id="{C8BC5268-4BB1-4354-B014-9FA5FCCB9DF5}"/>
+                <a16:creationId xmlns:a16="http://schemas.microsoft.com/office/drawing/2014/main" id="{66C55013-B66B-46CC-B576-736ECCFA782F}"/>
               </a:ext>
             </a:extLst>
           </p:cNvPr>
@@ -12955,7 +13083,7 @@
           <p:cNvPr id="2" name="">
             <a:extLst xmlns:a="http://schemas.openxmlformats.org/drawingml/2006/main">
               <a:ext uri="{FF2B5EF4-FFF2-40B4-BE49-F238E27FC236}">
-                <a16:creationId xmlns:a16="http://schemas.microsoft.com/office/drawing/2014/main" id="{85353EA6-43B8-4142-89E0-D430322348DD}"/>
+                <a16:creationId xmlns:a16="http://schemas.microsoft.com/office/drawing/2014/main" id="{8661B5E3-790E-4888-9858-075BA2E09DD7}"/>
               </a:ext>
             </a:extLst>
           </p:cNvPr>
@@ -12990,7 +13118,7 @@
           <p:cNvPr id="3" name="">
             <a:extLst xmlns:a="http://schemas.openxmlformats.org/drawingml/2006/main">
               <a:ext uri="{FF2B5EF4-FFF2-40B4-BE49-F238E27FC236}">
-                <a16:creationId xmlns:a16="http://schemas.microsoft.com/office/drawing/2014/main" id="{ECDF6FB8-3E22-4B15-AC1F-E2689B95A93B}"/>
+                <a16:creationId xmlns:a16="http://schemas.microsoft.com/office/drawing/2014/main" id="{343EC9DC-4AF6-45F8-9F29-A64A5DFF0B83}"/>
               </a:ext>
             </a:extLst>
           </p:cNvPr>
@@ -13025,7 +13153,7 @@
           <p:cNvPr id="4" name="">
             <a:extLst xmlns:a="http://schemas.openxmlformats.org/drawingml/2006/main">
               <a:ext uri="{FF2B5EF4-FFF2-40B4-BE49-F238E27FC236}">
-                <a16:creationId xmlns:a16="http://schemas.microsoft.com/office/drawing/2014/main" id="{05EB12F4-A54B-4119-8B46-44A207E1A4DC}"/>
+                <a16:creationId xmlns:a16="http://schemas.microsoft.com/office/drawing/2014/main" id="{35410884-1516-43AB-B0CE-7993C2878B02}"/>
               </a:ext>
             </a:extLst>
           </p:cNvPr>
@@ -13089,7 +13217,7 @@
           <p:cNvPr id="5" name="">
             <a:extLst xmlns:a="http://schemas.openxmlformats.org/drawingml/2006/main">
               <a:ext uri="{FF2B5EF4-FFF2-40B4-BE49-F238E27FC236}">
-                <a16:creationId xmlns:a16="http://schemas.microsoft.com/office/drawing/2014/main" id="{7985D7A5-F2E0-464E-BCB0-A4674B23A9B9}"/>
+                <a16:creationId xmlns:a16="http://schemas.microsoft.com/office/drawing/2014/main" id="{57D5DEEB-911D-4C4C-AE0D-4A829487FF42}"/>
               </a:ext>
             </a:extLst>
           </p:cNvPr>
@@ -13153,7 +13281,7 @@
           <p:cNvPr id="6" name="">
             <a:extLst xmlns:a="http://schemas.openxmlformats.org/drawingml/2006/main">
               <a:ext uri="{FF2B5EF4-FFF2-40B4-BE49-F238E27FC236}">
-                <a16:creationId xmlns:a16="http://schemas.microsoft.com/office/drawing/2014/main" id="{863002BB-5B0A-47EB-9A7D-608AD57856BB}"/>
+                <a16:creationId xmlns:a16="http://schemas.microsoft.com/office/drawing/2014/main" id="{1EFFC4DB-D683-4461-9E56-0332C0FF1184}"/>
               </a:ext>
             </a:extLst>
           </p:cNvPr>
@@ -13188,7 +13316,7 @@
           <p:cNvPr id="7" name="">
             <a:extLst xmlns:a="http://schemas.openxmlformats.org/drawingml/2006/main">
               <a:ext uri="{FF2B5EF4-FFF2-40B4-BE49-F238E27FC236}">
-                <a16:creationId xmlns:a16="http://schemas.microsoft.com/office/drawing/2014/main" id="{E3376FB7-1C98-49C4-8451-FAC5D901F15B}"/>
+                <a16:creationId xmlns:a16="http://schemas.microsoft.com/office/drawing/2014/main" id="{7686436C-A3F5-4DAF-83D0-15363D9A3A11}"/>
               </a:ext>
             </a:extLst>
           </p:cNvPr>
@@ -13252,7 +13380,7 @@
           <p:cNvPr id="8" name="">
             <a:extLst xmlns:a="http://schemas.openxmlformats.org/drawingml/2006/main">
               <a:ext uri="{FF2B5EF4-FFF2-40B4-BE49-F238E27FC236}">
-                <a16:creationId xmlns:a16="http://schemas.microsoft.com/office/drawing/2014/main" id="{2E3142BA-0A4A-43B0-B6DD-87F2EF0359C1}"/>
+                <a16:creationId xmlns:a16="http://schemas.microsoft.com/office/drawing/2014/main" id="{90BB5123-5AE8-47ED-9A9E-24AE8C74C385}"/>
               </a:ext>
             </a:extLst>
           </p:cNvPr>
@@ -13316,7 +13444,7 @@
           <p:cNvPr id="9" name="">
             <a:extLst xmlns:a="http://schemas.openxmlformats.org/drawingml/2006/main">
               <a:ext uri="{FF2B5EF4-FFF2-40B4-BE49-F238E27FC236}">
-                <a16:creationId xmlns:a16="http://schemas.microsoft.com/office/drawing/2014/main" id="{E94E2119-3E83-4C82-9E0A-2CE9442CC489}"/>
+                <a16:creationId xmlns:a16="http://schemas.microsoft.com/office/drawing/2014/main" id="{6A2E0E35-ABF0-4A20-AB34-1D6702D4FC61}"/>
               </a:ext>
             </a:extLst>
           </p:cNvPr>
@@ -13351,7 +13479,7 @@
           <p:cNvPr id="10" name="">
             <a:extLst xmlns:a="http://schemas.openxmlformats.org/drawingml/2006/main">
               <a:ext uri="{FF2B5EF4-FFF2-40B4-BE49-F238E27FC236}">
-                <a16:creationId xmlns:a16="http://schemas.microsoft.com/office/drawing/2014/main" id="{A044D814-1255-4108-8CEA-DB6DE3FAA017}"/>
+                <a16:creationId xmlns:a16="http://schemas.microsoft.com/office/drawing/2014/main" id="{5025B583-E992-4E33-A402-1D6DAB153EF6}"/>
               </a:ext>
             </a:extLst>
           </p:cNvPr>
@@ -13415,7 +13543,7 @@
           <p:cNvPr id="11" name="">
             <a:extLst xmlns:a="http://schemas.openxmlformats.org/drawingml/2006/main">
               <a:ext uri="{FF2B5EF4-FFF2-40B4-BE49-F238E27FC236}">
-                <a16:creationId xmlns:a16="http://schemas.microsoft.com/office/drawing/2014/main" id="{E4475523-DCDF-4B70-BFD1-3FC3E2F49025}"/>
+                <a16:creationId xmlns:a16="http://schemas.microsoft.com/office/drawing/2014/main" id="{D98FB125-FFEE-422C-96BB-A2F1909C1463}"/>
               </a:ext>
             </a:extLst>
           </p:cNvPr>
@@ -13450,7 +13578,7 @@
           <p:cNvPr id="12" name="">
             <a:extLst xmlns:a="http://schemas.openxmlformats.org/drawingml/2006/main">
               <a:ext uri="{FF2B5EF4-FFF2-40B4-BE49-F238E27FC236}">
-                <a16:creationId xmlns:a16="http://schemas.microsoft.com/office/drawing/2014/main" id="{B4C7058A-33AE-4D38-87DA-581C6F7DA3A3}"/>
+                <a16:creationId xmlns:a16="http://schemas.microsoft.com/office/drawing/2014/main" id="{1BABAF53-CD95-429E-B772-CAA389080087}"/>
               </a:ext>
             </a:extLst>
           </p:cNvPr>
@@ -13514,7 +13642,7 @@
           <p:cNvPr id="13" name="">
             <a:extLst xmlns:a="http://schemas.openxmlformats.org/drawingml/2006/main">
               <a:ext uri="{FF2B5EF4-FFF2-40B4-BE49-F238E27FC236}">
-                <a16:creationId xmlns:a16="http://schemas.microsoft.com/office/drawing/2014/main" id="{9EC02185-29D9-47C4-90F8-3BB7C0AF7AA3}"/>
+                <a16:creationId xmlns:a16="http://schemas.microsoft.com/office/drawing/2014/main" id="{24FA7A42-77D8-476A-8898-B1A6C3F0CAFB}"/>
               </a:ext>
             </a:extLst>
           </p:cNvPr>
@@ -13549,7 +13677,7 @@
           <p:cNvPr id="14" name="">
             <a:extLst xmlns:a="http://schemas.openxmlformats.org/drawingml/2006/main">
               <a:ext uri="{FF2B5EF4-FFF2-40B4-BE49-F238E27FC236}">
-                <a16:creationId xmlns:a16="http://schemas.microsoft.com/office/drawing/2014/main" id="{6E09B688-434B-4095-9D8A-4DFC385A8894}"/>
+                <a16:creationId xmlns:a16="http://schemas.microsoft.com/office/drawing/2014/main" id="{9739C7C6-C6C7-414F-8C71-4513C026465F}"/>
               </a:ext>
             </a:extLst>
           </p:cNvPr>
@@ -13613,7 +13741,7 @@
           <p:cNvPr id="15" name="">
             <a:extLst xmlns:a="http://schemas.openxmlformats.org/drawingml/2006/main">
               <a:ext uri="{FF2B5EF4-FFF2-40B4-BE49-F238E27FC236}">
-                <a16:creationId xmlns:a16="http://schemas.microsoft.com/office/drawing/2014/main" id="{61B1D731-2E24-446A-A636-0AA8F73F8CEB}"/>
+                <a16:creationId xmlns:a16="http://schemas.microsoft.com/office/drawing/2014/main" id="{D5D3516E-B7D0-44CF-958D-B5F202A36B3A}"/>
               </a:ext>
             </a:extLst>
           </p:cNvPr>
@@ -13648,7 +13776,7 @@
           <p:cNvPr id="16" name="">
             <a:extLst xmlns:a="http://schemas.openxmlformats.org/drawingml/2006/main">
               <a:ext uri="{FF2B5EF4-FFF2-40B4-BE49-F238E27FC236}">
-                <a16:creationId xmlns:a16="http://schemas.microsoft.com/office/drawing/2014/main" id="{CA812878-B763-4243-8713-37C220F58657}"/>
+                <a16:creationId xmlns:a16="http://schemas.microsoft.com/office/drawing/2014/main" id="{CF5B647D-6276-4073-8B19-0B52F474D9D5}"/>
               </a:ext>
             </a:extLst>
           </p:cNvPr>
@@ -13712,7 +13840,7 @@
           <p:cNvPr id="17" name="">
             <a:extLst xmlns:a="http://schemas.openxmlformats.org/drawingml/2006/main">
               <a:ext uri="{FF2B5EF4-FFF2-40B4-BE49-F238E27FC236}">
-                <a16:creationId xmlns:a16="http://schemas.microsoft.com/office/drawing/2014/main" id="{0C4F819C-D8A3-49D0-A208-34793BB8FA78}"/>
+                <a16:creationId xmlns:a16="http://schemas.microsoft.com/office/drawing/2014/main" id="{522D01BA-C8E6-4C8A-99FB-2CB84D9E641C}"/>
               </a:ext>
             </a:extLst>
           </p:cNvPr>
@@ -13747,7 +13875,7 @@
           <p:cNvPr id="18" name="">
             <a:extLst xmlns:a="http://schemas.openxmlformats.org/drawingml/2006/main">
               <a:ext uri="{FF2B5EF4-FFF2-40B4-BE49-F238E27FC236}">
-                <a16:creationId xmlns:a16="http://schemas.microsoft.com/office/drawing/2014/main" id="{4031170C-65AA-4E75-B5FD-C5B0284706D5}"/>
+                <a16:creationId xmlns:a16="http://schemas.microsoft.com/office/drawing/2014/main" id="{2DC4D97C-B324-4537-A134-96FB55F00D11}"/>
               </a:ext>
             </a:extLst>
           </p:cNvPr>
@@ -13811,7 +13939,7 @@
           <p:cNvPr id="19" name="">
             <a:extLst xmlns:a="http://schemas.openxmlformats.org/drawingml/2006/main">
               <a:ext uri="{FF2B5EF4-FFF2-40B4-BE49-F238E27FC236}">
-                <a16:creationId xmlns:a16="http://schemas.microsoft.com/office/drawing/2014/main" id="{ECBC662B-E927-4E18-A10B-B645003038C1}"/>
+                <a16:creationId xmlns:a16="http://schemas.microsoft.com/office/drawing/2014/main" id="{BFE16CBB-1197-4807-8EEB-5698A785CAA3}"/>
               </a:ext>
             </a:extLst>
           </p:cNvPr>
@@ -13846,7 +13974,7 @@
           <p:cNvPr id="20" name="">
             <a:extLst xmlns:a="http://schemas.openxmlformats.org/drawingml/2006/main">
               <a:ext uri="{FF2B5EF4-FFF2-40B4-BE49-F238E27FC236}">
-                <a16:creationId xmlns:a16="http://schemas.microsoft.com/office/drawing/2014/main" id="{2C002E25-361B-4B65-8E91-73138B9EA3CB}"/>
+                <a16:creationId xmlns:a16="http://schemas.microsoft.com/office/drawing/2014/main" id="{55EC6655-5B48-475A-85BF-9A9233235B76}"/>
               </a:ext>
             </a:extLst>
           </p:cNvPr>
@@ -13910,7 +14038,7 @@
           <p:cNvPr id="21" name="">
             <a:extLst xmlns:a="http://schemas.openxmlformats.org/drawingml/2006/main">
               <a:ext uri="{FF2B5EF4-FFF2-40B4-BE49-F238E27FC236}">
-                <a16:creationId xmlns:a16="http://schemas.microsoft.com/office/drawing/2014/main" id="{2E887470-0BA8-45C6-AA0E-F497EEABC0C2}"/>
+                <a16:creationId xmlns:a16="http://schemas.microsoft.com/office/drawing/2014/main" id="{EBB8B7DA-083B-4812-8A6E-1E91716E3423}"/>
               </a:ext>
             </a:extLst>
           </p:cNvPr>
@@ -13945,7 +14073,7 @@
           <p:cNvPr id="22" name="">
             <a:extLst xmlns:a="http://schemas.openxmlformats.org/drawingml/2006/main">
               <a:ext uri="{FF2B5EF4-FFF2-40B4-BE49-F238E27FC236}">
-                <a16:creationId xmlns:a16="http://schemas.microsoft.com/office/drawing/2014/main" id="{11C13BD7-572F-47C7-BDAE-A65BEC0AFA73}"/>
+                <a16:creationId xmlns:a16="http://schemas.microsoft.com/office/drawing/2014/main" id="{1308E131-10D4-4423-8281-89CC7AF6AE98}"/>
               </a:ext>
             </a:extLst>
           </p:cNvPr>
@@ -14009,7 +14137,7 @@
           <p:cNvPr id="23" name="">
             <a:extLst xmlns:a="http://schemas.openxmlformats.org/drawingml/2006/main">
               <a:ext uri="{FF2B5EF4-FFF2-40B4-BE49-F238E27FC236}">
-                <a16:creationId xmlns:a16="http://schemas.microsoft.com/office/drawing/2014/main" id="{586900F0-C998-4A4B-B10C-1885F5028362}"/>
+                <a16:creationId xmlns:a16="http://schemas.microsoft.com/office/drawing/2014/main" id="{0D834AD8-4448-4DCA-B058-DFE7CFF79832}"/>
               </a:ext>
             </a:extLst>
           </p:cNvPr>
@@ -14044,7 +14172,7 @@
           <p:cNvPr id="24" name="">
             <a:extLst xmlns:a="http://schemas.openxmlformats.org/drawingml/2006/main">
               <a:ext uri="{FF2B5EF4-FFF2-40B4-BE49-F238E27FC236}">
-                <a16:creationId xmlns:a16="http://schemas.microsoft.com/office/drawing/2014/main" id="{55837196-1B95-43BB-AC61-1F420C4E3AA9}"/>
+                <a16:creationId xmlns:a16="http://schemas.microsoft.com/office/drawing/2014/main" id="{9BA68C39-E1D6-4755-8CA2-7F4A8140FAFB}"/>
               </a:ext>
             </a:extLst>
           </p:cNvPr>
@@ -14108,7 +14236,7 @@
           <p:cNvPr id="25" name="">
             <a:extLst xmlns:a="http://schemas.openxmlformats.org/drawingml/2006/main">
               <a:ext uri="{FF2B5EF4-FFF2-40B4-BE49-F238E27FC236}">
-                <a16:creationId xmlns:a16="http://schemas.microsoft.com/office/drawing/2014/main" id="{524EC792-C402-4E4E-8E46-CD7129D633B2}"/>
+                <a16:creationId xmlns:a16="http://schemas.microsoft.com/office/drawing/2014/main" id="{5DFFC52D-1D2A-43B0-B893-DD815DCC30D5}"/>
               </a:ext>
             </a:extLst>
           </p:cNvPr>
@@ -14170,7 +14298,7 @@
     </p:spTree>
     <p:extLst>
       <p:ext uri="{BB962C8B-B14F-4D97-AF65-F5344CB8AC3E}">
-        <p14:creationId xmlns:p14="http://schemas.microsoft.com/office/powerpoint/2010/main" val="179704915"/>
+        <p14:creationId xmlns:p14="http://schemas.microsoft.com/office/powerpoint/2010/main" val="1283623019"/>
       </p:ext>
     </p:extLst>
   </p:cSld>
@@ -14201,7 +14329,7 @@
           <p:cNvPr id="1" name="">
             <a:extLst xmlns:a="http://schemas.openxmlformats.org/drawingml/2006/main">
               <a:ext uri="{FF2B5EF4-FFF2-40B4-BE49-F238E27FC236}">
-                <a16:creationId xmlns:a16="http://schemas.microsoft.com/office/drawing/2014/main" id="{B2A49CF5-E573-4D44-BF9A-9396EEE3FE1B}"/>
+                <a16:creationId xmlns:a16="http://schemas.microsoft.com/office/drawing/2014/main" id="{DAF7C91E-C853-4BCA-A927-B84238D6AC4D}"/>
               </a:ext>
             </a:extLst>
           </p:cNvPr>
@@ -14236,7 +14364,7 @@
           <p:cNvPr id="2" name="">
             <a:extLst xmlns:a="http://schemas.openxmlformats.org/drawingml/2006/main">
               <a:ext uri="{FF2B5EF4-FFF2-40B4-BE49-F238E27FC236}">
-                <a16:creationId xmlns:a16="http://schemas.microsoft.com/office/drawing/2014/main" id="{79ACFF75-C488-4D38-B6CC-83D789578778}"/>
+                <a16:creationId xmlns:a16="http://schemas.microsoft.com/office/drawing/2014/main" id="{1843E127-BD97-4F1C-8DC8-BADD25B2A480}"/>
               </a:ext>
             </a:extLst>
           </p:cNvPr>
@@ -14271,7 +14399,7 @@
           <p:cNvPr id="3" name="">
             <a:extLst xmlns:a="http://schemas.openxmlformats.org/drawingml/2006/main">
               <a:ext uri="{FF2B5EF4-FFF2-40B4-BE49-F238E27FC236}">
-                <a16:creationId xmlns:a16="http://schemas.microsoft.com/office/drawing/2014/main" id="{387C7335-CA53-4980-BC0A-7265A27BE921}"/>
+                <a16:creationId xmlns:a16="http://schemas.microsoft.com/office/drawing/2014/main" id="{E920BC0E-29E9-4B58-9F0A-E26E04558F66}"/>
               </a:ext>
             </a:extLst>
           </p:cNvPr>
@@ -14306,7 +14434,7 @@
           <p:cNvPr id="4" name="">
             <a:extLst xmlns:a="http://schemas.openxmlformats.org/drawingml/2006/main">
               <a:ext uri="{FF2B5EF4-FFF2-40B4-BE49-F238E27FC236}">
-                <a16:creationId xmlns:a16="http://schemas.microsoft.com/office/drawing/2014/main" id="{706CC1B9-D819-4C92-A5CB-6707C483810A}"/>
+                <a16:creationId xmlns:a16="http://schemas.microsoft.com/office/drawing/2014/main" id="{00CE826A-26AA-48AE-9741-9C7523EA2478}"/>
               </a:ext>
             </a:extLst>
           </p:cNvPr>
@@ -14370,7 +14498,7 @@
           <p:cNvPr id="5" name="">
             <a:extLst xmlns:a="http://schemas.openxmlformats.org/drawingml/2006/main">
               <a:ext uri="{FF2B5EF4-FFF2-40B4-BE49-F238E27FC236}">
-                <a16:creationId xmlns:a16="http://schemas.microsoft.com/office/drawing/2014/main" id="{90756E3C-A8B4-4BA6-A1FE-F676A846C163}"/>
+                <a16:creationId xmlns:a16="http://schemas.microsoft.com/office/drawing/2014/main" id="{B022FF42-660B-4394-B0BF-2F3DFB1890B5}"/>
               </a:ext>
             </a:extLst>
           </p:cNvPr>
@@ -14434,7 +14562,7 @@
           <p:cNvPr id="6" name="">
             <a:extLst xmlns:a="http://schemas.openxmlformats.org/drawingml/2006/main">
               <a:ext uri="{FF2B5EF4-FFF2-40B4-BE49-F238E27FC236}">
-                <a16:creationId xmlns:a16="http://schemas.microsoft.com/office/drawing/2014/main" id="{740BF5A3-1738-4EA6-BF4E-13E310D7069D}"/>
+                <a16:creationId xmlns:a16="http://schemas.microsoft.com/office/drawing/2014/main" id="{B5B89B77-1BA3-45F5-B7D6-C384AD7A44F2}"/>
               </a:ext>
             </a:extLst>
           </p:cNvPr>
@@ -14469,7 +14597,7 @@
           <p:cNvPr id="7" name="">
             <a:extLst xmlns:a="http://schemas.openxmlformats.org/drawingml/2006/main">
               <a:ext uri="{FF2B5EF4-FFF2-40B4-BE49-F238E27FC236}">
-                <a16:creationId xmlns:a16="http://schemas.microsoft.com/office/drawing/2014/main" id="{B1838678-EF12-4D50-ADB4-50A5DFAA8D52}"/>
+                <a16:creationId xmlns:a16="http://schemas.microsoft.com/office/drawing/2014/main" id="{501C7577-1C38-4FC6-B6C2-2ED067AB6656}"/>
               </a:ext>
             </a:extLst>
           </p:cNvPr>
@@ -14533,7 +14661,7 @@
           <p:cNvPr id="8" name="">
             <a:extLst xmlns:a="http://schemas.openxmlformats.org/drawingml/2006/main">
               <a:ext uri="{FF2B5EF4-FFF2-40B4-BE49-F238E27FC236}">
-                <a16:creationId xmlns:a16="http://schemas.microsoft.com/office/drawing/2014/main" id="{FEAD253F-BD85-4C17-A4BF-9073C5E9C5C7}"/>
+                <a16:creationId xmlns:a16="http://schemas.microsoft.com/office/drawing/2014/main" id="{24DC9B0F-D4F5-42FD-A57E-AEC3BD59A94C}"/>
               </a:ext>
             </a:extLst>
           </p:cNvPr>
@@ -14597,7 +14725,7 @@
           <p:cNvPr id="9" name="">
             <a:extLst xmlns:a="http://schemas.openxmlformats.org/drawingml/2006/main">
               <a:ext uri="{FF2B5EF4-FFF2-40B4-BE49-F238E27FC236}">
-                <a16:creationId xmlns:a16="http://schemas.microsoft.com/office/drawing/2014/main" id="{A15F1865-9DA2-4783-BBBA-280F4502539B}"/>
+                <a16:creationId xmlns:a16="http://schemas.microsoft.com/office/drawing/2014/main" id="{6776D762-69F6-438E-93D3-4095DB5D63DB}"/>
               </a:ext>
             </a:extLst>
           </p:cNvPr>
@@ -14632,7 +14760,7 @@
           <p:cNvPr id="10" name="">
             <a:extLst xmlns:a="http://schemas.openxmlformats.org/drawingml/2006/main">
               <a:ext uri="{FF2B5EF4-FFF2-40B4-BE49-F238E27FC236}">
-                <a16:creationId xmlns:a16="http://schemas.microsoft.com/office/drawing/2014/main" id="{B7ECEE9D-228B-4899-A90A-EBDC7158B595}"/>
+                <a16:creationId xmlns:a16="http://schemas.microsoft.com/office/drawing/2014/main" id="{7C627598-8002-44E8-BF40-92EC1B9E35D1}"/>
               </a:ext>
             </a:extLst>
           </p:cNvPr>
@@ -14696,7 +14824,7 @@
           <p:cNvPr id="11" name="">
             <a:extLst xmlns:a="http://schemas.openxmlformats.org/drawingml/2006/main">
               <a:ext uri="{FF2B5EF4-FFF2-40B4-BE49-F238E27FC236}">
-                <a16:creationId xmlns:a16="http://schemas.microsoft.com/office/drawing/2014/main" id="{5E587BD0-96D2-44B9-8EC7-5C6C65CE05DA}"/>
+                <a16:creationId xmlns:a16="http://schemas.microsoft.com/office/drawing/2014/main" id="{5A2B525A-B2D2-45F5-9A18-95D33F7166FA}"/>
               </a:ext>
             </a:extLst>
           </p:cNvPr>
@@ -14760,7 +14888,7 @@
           <p:cNvPr id="12" name="">
             <a:extLst xmlns:a="http://schemas.openxmlformats.org/drawingml/2006/main">
               <a:ext uri="{FF2B5EF4-FFF2-40B4-BE49-F238E27FC236}">
-                <a16:creationId xmlns:a16="http://schemas.microsoft.com/office/drawing/2014/main" id="{C2909E25-4797-4BD8-8FD9-E9DE06996BFE}"/>
+                <a16:creationId xmlns:a16="http://schemas.microsoft.com/office/drawing/2014/main" id="{61C4FFE1-39AE-4D62-85C7-8507D5CD0A2A}"/>
               </a:ext>
             </a:extLst>
           </p:cNvPr>
@@ -14795,7 +14923,7 @@
           <p:cNvPr id="13" name="">
             <a:extLst xmlns:a="http://schemas.openxmlformats.org/drawingml/2006/main">
               <a:ext uri="{FF2B5EF4-FFF2-40B4-BE49-F238E27FC236}">
-                <a16:creationId xmlns:a16="http://schemas.microsoft.com/office/drawing/2014/main" id="{2012B375-1448-44D4-A1A5-53AF8E37D285}"/>
+                <a16:creationId xmlns:a16="http://schemas.microsoft.com/office/drawing/2014/main" id="{0B28A401-0550-4E0C-BCCC-DC1AC60C54E5}"/>
               </a:ext>
             </a:extLst>
           </p:cNvPr>
@@ -14859,7 +14987,7 @@
           <p:cNvPr id="14" name="">
             <a:extLst xmlns:a="http://schemas.openxmlformats.org/drawingml/2006/main">
               <a:ext uri="{FF2B5EF4-FFF2-40B4-BE49-F238E27FC236}">
-                <a16:creationId xmlns:a16="http://schemas.microsoft.com/office/drawing/2014/main" id="{9B187C7D-D0AA-4FFF-B066-90EFB6CF0E50}"/>
+                <a16:creationId xmlns:a16="http://schemas.microsoft.com/office/drawing/2014/main" id="{592903B2-8D61-4855-B832-B3D872EE6089}"/>
               </a:ext>
             </a:extLst>
           </p:cNvPr>
@@ -14923,7 +15051,7 @@
           <p:cNvPr id="15" name="">
             <a:extLst xmlns:a="http://schemas.openxmlformats.org/drawingml/2006/main">
               <a:ext uri="{FF2B5EF4-FFF2-40B4-BE49-F238E27FC236}">
-                <a16:creationId xmlns:a16="http://schemas.microsoft.com/office/drawing/2014/main" id="{3591404D-BDFC-499F-9C24-618CEEC73D0D}"/>
+                <a16:creationId xmlns:a16="http://schemas.microsoft.com/office/drawing/2014/main" id="{27E00587-2972-44C8-9B18-554978D2DA8A}"/>
               </a:ext>
             </a:extLst>
           </p:cNvPr>
@@ -14958,7 +15086,7 @@
           <p:cNvPr id="16" name="">
             <a:extLst xmlns:a="http://schemas.openxmlformats.org/drawingml/2006/main">
               <a:ext uri="{FF2B5EF4-FFF2-40B4-BE49-F238E27FC236}">
-                <a16:creationId xmlns:a16="http://schemas.microsoft.com/office/drawing/2014/main" id="{77C46808-FB14-4D69-B36D-05BD1A50DC8F}"/>
+                <a16:creationId xmlns:a16="http://schemas.microsoft.com/office/drawing/2014/main" id="{CD720219-BFEE-4685-9B89-31C9B7AB34AE}"/>
               </a:ext>
             </a:extLst>
           </p:cNvPr>
@@ -15022,7 +15150,7 @@
           <p:cNvPr id="17" name="">
             <a:extLst xmlns:a="http://schemas.openxmlformats.org/drawingml/2006/main">
               <a:ext uri="{FF2B5EF4-FFF2-40B4-BE49-F238E27FC236}">
-                <a16:creationId xmlns:a16="http://schemas.microsoft.com/office/drawing/2014/main" id="{4529E589-ED59-4BCA-95BF-783AA9DC708D}"/>
+                <a16:creationId xmlns:a16="http://schemas.microsoft.com/office/drawing/2014/main" id="{4FF58C91-8A8A-4DCF-A73A-7F6E619016F6}"/>
               </a:ext>
             </a:extLst>
           </p:cNvPr>
@@ -15086,7 +15214,7 @@
           <p:cNvPr id="18" name="">
             <a:extLst xmlns:a="http://schemas.openxmlformats.org/drawingml/2006/main">
               <a:ext uri="{FF2B5EF4-FFF2-40B4-BE49-F238E27FC236}">
-                <a16:creationId xmlns:a16="http://schemas.microsoft.com/office/drawing/2014/main" id="{F0843206-3B9B-48AD-8737-F66B71CD53C3}"/>
+                <a16:creationId xmlns:a16="http://schemas.microsoft.com/office/drawing/2014/main" id="{1F218444-9185-42A8-AF8E-74260F4F80D5}"/>
               </a:ext>
             </a:extLst>
           </p:cNvPr>
@@ -15121,7 +15249,7 @@
           <p:cNvPr id="19" name="">
             <a:extLst xmlns:a="http://schemas.openxmlformats.org/drawingml/2006/main">
               <a:ext uri="{FF2B5EF4-FFF2-40B4-BE49-F238E27FC236}">
-                <a16:creationId xmlns:a16="http://schemas.microsoft.com/office/drawing/2014/main" id="{23A7C7A9-C19A-4F26-BC3D-26A4403ED1E1}"/>
+                <a16:creationId xmlns:a16="http://schemas.microsoft.com/office/drawing/2014/main" id="{D8A07846-9B0E-4261-986D-A7CBEEB3D376}"/>
               </a:ext>
             </a:extLst>
           </p:cNvPr>
@@ -15185,7 +15313,7 @@
           <p:cNvPr id="20" name="">
             <a:extLst xmlns:a="http://schemas.openxmlformats.org/drawingml/2006/main">
               <a:ext uri="{FF2B5EF4-FFF2-40B4-BE49-F238E27FC236}">
-                <a16:creationId xmlns:a16="http://schemas.microsoft.com/office/drawing/2014/main" id="{87330E25-5B9D-4881-8DB3-E623A728D8F7}"/>
+                <a16:creationId xmlns:a16="http://schemas.microsoft.com/office/drawing/2014/main" id="{6B6727EA-E5A1-4FEE-9D6F-411113EB96D2}"/>
               </a:ext>
             </a:extLst>
           </p:cNvPr>
@@ -15249,7 +15377,7 @@
           <p:cNvPr id="21" name="">
             <a:extLst xmlns:a="http://schemas.openxmlformats.org/drawingml/2006/main">
               <a:ext uri="{FF2B5EF4-FFF2-40B4-BE49-F238E27FC236}">
-                <a16:creationId xmlns:a16="http://schemas.microsoft.com/office/drawing/2014/main" id="{32F0C31C-573F-4C3C-A9CF-9272EEDA7D4F}"/>
+                <a16:creationId xmlns:a16="http://schemas.microsoft.com/office/drawing/2014/main" id="{CF2F39E4-E245-4DDF-AB2A-BF6C25A5B167}"/>
               </a:ext>
             </a:extLst>
           </p:cNvPr>
@@ -15284,7 +15412,7 @@
           <p:cNvPr id="22" name="">
             <a:extLst xmlns:a="http://schemas.openxmlformats.org/drawingml/2006/main">
               <a:ext uri="{FF2B5EF4-FFF2-40B4-BE49-F238E27FC236}">
-                <a16:creationId xmlns:a16="http://schemas.microsoft.com/office/drawing/2014/main" id="{4B16A39A-030B-447B-828C-CEB7F8A8A3CC}"/>
+                <a16:creationId xmlns:a16="http://schemas.microsoft.com/office/drawing/2014/main" id="{960F36F6-74EF-4326-ADE6-9E0B3D37BF33}"/>
               </a:ext>
             </a:extLst>
           </p:cNvPr>
@@ -15348,7 +15476,7 @@
           <p:cNvPr id="23" name="">
             <a:extLst xmlns:a="http://schemas.openxmlformats.org/drawingml/2006/main">
               <a:ext uri="{FF2B5EF4-FFF2-40B4-BE49-F238E27FC236}">
-                <a16:creationId xmlns:a16="http://schemas.microsoft.com/office/drawing/2014/main" id="{769492B6-C3E7-42C8-B2F5-B065F2750EB0}"/>
+                <a16:creationId xmlns:a16="http://schemas.microsoft.com/office/drawing/2014/main" id="{C20F8213-E00D-49CA-A01B-1C733B7934DA}"/>
               </a:ext>
             </a:extLst>
           </p:cNvPr>
@@ -15383,7 +15511,7 @@
           <p:cNvPr id="24" name="">
             <a:extLst xmlns:a="http://schemas.openxmlformats.org/drawingml/2006/main">
               <a:ext uri="{FF2B5EF4-FFF2-40B4-BE49-F238E27FC236}">
-                <a16:creationId xmlns:a16="http://schemas.microsoft.com/office/drawing/2014/main" id="{987A981D-48EA-450A-92D8-7CBFC4E8B4E7}"/>
+                <a16:creationId xmlns:a16="http://schemas.microsoft.com/office/drawing/2014/main" id="{B3AE8009-0C91-49BC-A61C-E57056F34211}"/>
               </a:ext>
             </a:extLst>
           </p:cNvPr>
@@ -15447,7 +15575,7 @@
           <p:cNvPr id="25" name="">
             <a:extLst xmlns:a="http://schemas.openxmlformats.org/drawingml/2006/main">
               <a:ext uri="{FF2B5EF4-FFF2-40B4-BE49-F238E27FC236}">
-                <a16:creationId xmlns:a16="http://schemas.microsoft.com/office/drawing/2014/main" id="{BAA154F7-4C40-4007-93F5-2CD17B3FBC4F}"/>
+                <a16:creationId xmlns:a16="http://schemas.microsoft.com/office/drawing/2014/main" id="{A4B0BEC8-A9A9-4CE4-B800-934FEEC14268}"/>
               </a:ext>
             </a:extLst>
           </p:cNvPr>
@@ -15511,7 +15639,7 @@
           <p:cNvPr id="26" name="">
             <a:extLst xmlns:a="http://schemas.openxmlformats.org/drawingml/2006/main">
               <a:ext uri="{FF2B5EF4-FFF2-40B4-BE49-F238E27FC236}">
-                <a16:creationId xmlns:a16="http://schemas.microsoft.com/office/drawing/2014/main" id="{856B9B42-D24E-4EAC-907B-F95D5C7FF547}"/>
+                <a16:creationId xmlns:a16="http://schemas.microsoft.com/office/drawing/2014/main" id="{225E1F51-68CF-4121-A086-3F716BD69E34}"/>
               </a:ext>
             </a:extLst>
           </p:cNvPr>
@@ -15546,7 +15674,7 @@
           <p:cNvPr id="27" name="">
             <a:extLst xmlns:a="http://schemas.openxmlformats.org/drawingml/2006/main">
               <a:ext uri="{FF2B5EF4-FFF2-40B4-BE49-F238E27FC236}">
-                <a16:creationId xmlns:a16="http://schemas.microsoft.com/office/drawing/2014/main" id="{03A24C49-7946-4883-8586-940D371EE282}"/>
+                <a16:creationId xmlns:a16="http://schemas.microsoft.com/office/drawing/2014/main" id="{95B77452-4089-4994-BFA1-8C9E73EC74FD}"/>
               </a:ext>
             </a:extLst>
           </p:cNvPr>
@@ -15610,7 +15738,7 @@
           <p:cNvPr id="28" name="">
             <a:extLst xmlns:a="http://schemas.openxmlformats.org/drawingml/2006/main">
               <a:ext uri="{FF2B5EF4-FFF2-40B4-BE49-F238E27FC236}">
-                <a16:creationId xmlns:a16="http://schemas.microsoft.com/office/drawing/2014/main" id="{6CB368FD-D3D6-43F5-B461-1F0208ED1E8B}"/>
+                <a16:creationId xmlns:a16="http://schemas.microsoft.com/office/drawing/2014/main" id="{07DB27C0-52E5-4996-ADBC-868FEFE87C98}"/>
               </a:ext>
             </a:extLst>
           </p:cNvPr>
@@ -15674,7 +15802,7 @@
           <p:cNvPr id="29" name="">
             <a:extLst xmlns:a="http://schemas.openxmlformats.org/drawingml/2006/main">
               <a:ext uri="{FF2B5EF4-FFF2-40B4-BE49-F238E27FC236}">
-                <a16:creationId xmlns:a16="http://schemas.microsoft.com/office/drawing/2014/main" id="{92E4D9DE-6288-4E8C-A049-D4CBA11DE65A}"/>
+                <a16:creationId xmlns:a16="http://schemas.microsoft.com/office/drawing/2014/main" id="{E701D1ED-DBC8-4F80-9060-8C4BF9553728}"/>
               </a:ext>
             </a:extLst>
           </p:cNvPr>
@@ -15709,7 +15837,7 @@
           <p:cNvPr id="30" name="">
             <a:extLst xmlns:a="http://schemas.openxmlformats.org/drawingml/2006/main">
               <a:ext uri="{FF2B5EF4-FFF2-40B4-BE49-F238E27FC236}">
-                <a16:creationId xmlns:a16="http://schemas.microsoft.com/office/drawing/2014/main" id="{76957D74-E30D-40EA-B32F-E775F462B4D1}"/>
+                <a16:creationId xmlns:a16="http://schemas.microsoft.com/office/drawing/2014/main" id="{5F7FA227-1DF7-47CD-BABB-5DADF4F6620F}"/>
               </a:ext>
             </a:extLst>
           </p:cNvPr>
@@ -15773,7 +15901,7 @@
           <p:cNvPr id="31" name="">
             <a:extLst xmlns:a="http://schemas.openxmlformats.org/drawingml/2006/main">
               <a:ext uri="{FF2B5EF4-FFF2-40B4-BE49-F238E27FC236}">
-                <a16:creationId xmlns:a16="http://schemas.microsoft.com/office/drawing/2014/main" id="{ED4CDCEC-0CB3-4660-B909-ED7DB0FF6F08}"/>
+                <a16:creationId xmlns:a16="http://schemas.microsoft.com/office/drawing/2014/main" id="{2A201F44-7705-4A7A-9C02-92E5E64A50EB}"/>
               </a:ext>
             </a:extLst>
           </p:cNvPr>
@@ -15835,7 +15963,7 @@
     </p:spTree>
     <p:extLst>
       <p:ext uri="{BB962C8B-B14F-4D97-AF65-F5344CB8AC3E}">
-        <p14:creationId xmlns:p14="http://schemas.microsoft.com/office/powerpoint/2010/main" val="707169311"/>
+        <p14:creationId xmlns:p14="http://schemas.microsoft.com/office/powerpoint/2010/main" val="1470568113"/>
       </p:ext>
     </p:extLst>
   </p:cSld>
@@ -15866,7 +15994,7 @@
           <p:cNvPr id="1" name="">
             <a:extLst xmlns:a="http://schemas.openxmlformats.org/drawingml/2006/main">
               <a:ext uri="{FF2B5EF4-FFF2-40B4-BE49-F238E27FC236}">
-                <a16:creationId xmlns:a16="http://schemas.microsoft.com/office/drawing/2014/main" id="{FC0BC34A-5741-4446-9016-B114ADF9E2D9}"/>
+                <a16:creationId xmlns:a16="http://schemas.microsoft.com/office/drawing/2014/main" id="{0D9E1925-F103-40F9-8989-F855D7B29799}"/>
               </a:ext>
             </a:extLst>
           </p:cNvPr>
@@ -15901,7 +16029,7 @@
           <p:cNvPr id="2" name="">
             <a:extLst xmlns:a="http://schemas.openxmlformats.org/drawingml/2006/main">
               <a:ext uri="{FF2B5EF4-FFF2-40B4-BE49-F238E27FC236}">
-                <a16:creationId xmlns:a16="http://schemas.microsoft.com/office/drawing/2014/main" id="{E5ACCBA0-4BCC-4F4D-8B63-823CE32397F4}"/>
+                <a16:creationId xmlns:a16="http://schemas.microsoft.com/office/drawing/2014/main" id="{04A4C5B5-81BC-4845-8F0D-4D317CF34C1C}"/>
               </a:ext>
             </a:extLst>
           </p:cNvPr>
@@ -15936,7 +16064,7 @@
           <p:cNvPr id="3" name="">
             <a:extLst xmlns:a="http://schemas.openxmlformats.org/drawingml/2006/main">
               <a:ext uri="{FF2B5EF4-FFF2-40B4-BE49-F238E27FC236}">
-                <a16:creationId xmlns:a16="http://schemas.microsoft.com/office/drawing/2014/main" id="{4C27A44A-E3EE-4EEB-A11B-3F49EABC711D}"/>
+                <a16:creationId xmlns:a16="http://schemas.microsoft.com/office/drawing/2014/main" id="{EBDD2548-3AA0-4612-8FC6-82E748BC0A97}"/>
               </a:ext>
             </a:extLst>
           </p:cNvPr>
@@ -15971,7 +16099,7 @@
           <p:cNvPr id="4" name="">
             <a:extLst xmlns:a="http://schemas.openxmlformats.org/drawingml/2006/main">
               <a:ext uri="{FF2B5EF4-FFF2-40B4-BE49-F238E27FC236}">
-                <a16:creationId xmlns:a16="http://schemas.microsoft.com/office/drawing/2014/main" id="{D1A47F41-04A7-44C7-95F0-70DFC20DA5B4}"/>
+                <a16:creationId xmlns:a16="http://schemas.microsoft.com/office/drawing/2014/main" id="{CD74943C-4571-49B2-B32B-EFD8FCE9EB9E}"/>
               </a:ext>
             </a:extLst>
           </p:cNvPr>
@@ -16035,7 +16163,7 @@
           <p:cNvPr id="5" name="">
             <a:extLst xmlns:a="http://schemas.openxmlformats.org/drawingml/2006/main">
               <a:ext uri="{FF2B5EF4-FFF2-40B4-BE49-F238E27FC236}">
-                <a16:creationId xmlns:a16="http://schemas.microsoft.com/office/drawing/2014/main" id="{A3C7AAC7-FCD7-4626-BEAA-A66B9DD3F5D9}"/>
+                <a16:creationId xmlns:a16="http://schemas.microsoft.com/office/drawing/2014/main" id="{121511BC-D7AB-4A6F-9487-772D5F40E1FA}"/>
               </a:ext>
             </a:extLst>
           </p:cNvPr>
@@ -16099,7 +16227,7 @@
           <p:cNvPr id="6" name="">
             <a:extLst xmlns:a="http://schemas.openxmlformats.org/drawingml/2006/main">
               <a:ext uri="{FF2B5EF4-FFF2-40B4-BE49-F238E27FC236}">
-                <a16:creationId xmlns:a16="http://schemas.microsoft.com/office/drawing/2014/main" id="{EB0FF888-3C1B-4309-9327-6D194ABC7470}"/>
+                <a16:creationId xmlns:a16="http://schemas.microsoft.com/office/drawing/2014/main" id="{756EFE1F-EF6B-4514-B34E-7BEFD5B19316}"/>
               </a:ext>
             </a:extLst>
           </p:cNvPr>
@@ -16134,7 +16262,7 @@
           <p:cNvPr id="7" name="">
             <a:extLst xmlns:a="http://schemas.openxmlformats.org/drawingml/2006/main">
               <a:ext uri="{FF2B5EF4-FFF2-40B4-BE49-F238E27FC236}">
-                <a16:creationId xmlns:a16="http://schemas.microsoft.com/office/drawing/2014/main" id="{E7EE7221-269D-4E2F-B2D9-217EB9E6C777}"/>
+                <a16:creationId xmlns:a16="http://schemas.microsoft.com/office/drawing/2014/main" id="{E4F972B0-96A5-4BEE-934C-9618349A3C99}"/>
               </a:ext>
             </a:extLst>
           </p:cNvPr>
@@ -16198,7 +16326,7 @@
           <p:cNvPr id="8" name="">
             <a:extLst xmlns:a="http://schemas.openxmlformats.org/drawingml/2006/main">
               <a:ext uri="{FF2B5EF4-FFF2-40B4-BE49-F238E27FC236}">
-                <a16:creationId xmlns:a16="http://schemas.microsoft.com/office/drawing/2014/main" id="{D93E5782-FEBB-49F6-B80D-D48BD0F150CC}"/>
+                <a16:creationId xmlns:a16="http://schemas.microsoft.com/office/drawing/2014/main" id="{9A1B6228-2054-4185-A206-8B2D4F53F4FC}"/>
               </a:ext>
             </a:extLst>
           </p:cNvPr>
@@ -16262,7 +16390,7 @@
           <p:cNvPr id="9" name="">
             <a:extLst xmlns:a="http://schemas.openxmlformats.org/drawingml/2006/main">
               <a:ext uri="{FF2B5EF4-FFF2-40B4-BE49-F238E27FC236}">
-                <a16:creationId xmlns:a16="http://schemas.microsoft.com/office/drawing/2014/main" id="{C4E40C15-8BC2-4993-BC35-86515CB1BE99}"/>
+                <a16:creationId xmlns:a16="http://schemas.microsoft.com/office/drawing/2014/main" id="{F2A8D9F9-E7F7-4599-9961-BB2E1C146594}"/>
               </a:ext>
             </a:extLst>
           </p:cNvPr>
@@ -16299,7 +16427,7 @@
           <p:cNvPr id="10" name="">
             <a:extLst xmlns:a="http://schemas.openxmlformats.org/drawingml/2006/main">
               <a:ext uri="{FF2B5EF4-FFF2-40B4-BE49-F238E27FC236}">
-                <a16:creationId xmlns:a16="http://schemas.microsoft.com/office/drawing/2014/main" id="{5FDC7153-CFD5-4529-940B-D7E550F9C954}"/>
+                <a16:creationId xmlns:a16="http://schemas.microsoft.com/office/drawing/2014/main" id="{0C0118DB-4561-4DD3-9C8B-463572AA01D4}"/>
               </a:ext>
             </a:extLst>
           </p:cNvPr>
@@ -16363,7 +16491,7 @@
           <p:cNvPr id="11" name="">
             <a:extLst xmlns:a="http://schemas.openxmlformats.org/drawingml/2006/main">
               <a:ext uri="{FF2B5EF4-FFF2-40B4-BE49-F238E27FC236}">
-                <a16:creationId xmlns:a16="http://schemas.microsoft.com/office/drawing/2014/main" id="{10FE4FC5-E62B-4843-97C5-436FCBD64BAF}"/>
+                <a16:creationId xmlns:a16="http://schemas.microsoft.com/office/drawing/2014/main" id="{1B2EBB4F-A3AD-4339-913C-936ECBA9173B}"/>
               </a:ext>
             </a:extLst>
           </p:cNvPr>
@@ -16400,7 +16528,7 @@
           <p:cNvPr id="12" name="">
             <a:extLst xmlns:a="http://schemas.openxmlformats.org/drawingml/2006/main">
               <a:ext uri="{FF2B5EF4-FFF2-40B4-BE49-F238E27FC236}">
-                <a16:creationId xmlns:a16="http://schemas.microsoft.com/office/drawing/2014/main" id="{51774574-423D-4DC5-8FBA-79FB37BE026D}"/>
+                <a16:creationId xmlns:a16="http://schemas.microsoft.com/office/drawing/2014/main" id="{86B08323-3161-49E4-99FD-57D4EEDF71D2}"/>
               </a:ext>
             </a:extLst>
           </p:cNvPr>
@@ -16464,7 +16592,7 @@
           <p:cNvPr id="13" name="">
             <a:extLst xmlns:a="http://schemas.openxmlformats.org/drawingml/2006/main">
               <a:ext uri="{FF2B5EF4-FFF2-40B4-BE49-F238E27FC236}">
-                <a16:creationId xmlns:a16="http://schemas.microsoft.com/office/drawing/2014/main" id="{03999013-F4B9-4CA5-8F78-7525EFB13891}"/>
+                <a16:creationId xmlns:a16="http://schemas.microsoft.com/office/drawing/2014/main" id="{DBDD48E4-ED2F-4448-A56E-21BD54450EC4}"/>
               </a:ext>
             </a:extLst>
           </p:cNvPr>
@@ -16501,7 +16629,7 @@
           <p:cNvPr id="14" name="">
             <a:extLst xmlns:a="http://schemas.openxmlformats.org/drawingml/2006/main">
               <a:ext uri="{FF2B5EF4-FFF2-40B4-BE49-F238E27FC236}">
-                <a16:creationId xmlns:a16="http://schemas.microsoft.com/office/drawing/2014/main" id="{95FFD8CE-E67D-49EE-91AC-AAAB6AFDBBDF}"/>
+                <a16:creationId xmlns:a16="http://schemas.microsoft.com/office/drawing/2014/main" id="{17174F75-F337-4B22-BF4C-06F4354BFB92}"/>
               </a:ext>
             </a:extLst>
           </p:cNvPr>
@@ -16565,7 +16693,7 @@
           <p:cNvPr id="15" name="">
             <a:extLst xmlns:a="http://schemas.openxmlformats.org/drawingml/2006/main">
               <a:ext uri="{FF2B5EF4-FFF2-40B4-BE49-F238E27FC236}">
-                <a16:creationId xmlns:a16="http://schemas.microsoft.com/office/drawing/2014/main" id="{F8D42755-6F19-441B-A95B-CB48D86529B7}"/>
+                <a16:creationId xmlns:a16="http://schemas.microsoft.com/office/drawing/2014/main" id="{089B28F5-C7D4-474A-BDB6-8A84C5A0CEEB}"/>
               </a:ext>
             </a:extLst>
           </p:cNvPr>
@@ -16602,7 +16730,7 @@
           <p:cNvPr id="16" name="">
             <a:extLst xmlns:a="http://schemas.openxmlformats.org/drawingml/2006/main">
               <a:ext uri="{FF2B5EF4-FFF2-40B4-BE49-F238E27FC236}">
-                <a16:creationId xmlns:a16="http://schemas.microsoft.com/office/drawing/2014/main" id="{92B6F81C-AFE7-4430-A072-A1D62D630189}"/>
+                <a16:creationId xmlns:a16="http://schemas.microsoft.com/office/drawing/2014/main" id="{4D4972EF-F4B9-4D99-A6BC-0BD848364B4F}"/>
               </a:ext>
             </a:extLst>
           </p:cNvPr>
@@ -16666,7 +16794,7 @@
           <p:cNvPr id="17" name="">
             <a:extLst xmlns:a="http://schemas.openxmlformats.org/drawingml/2006/main">
               <a:ext uri="{FF2B5EF4-FFF2-40B4-BE49-F238E27FC236}">
-                <a16:creationId xmlns:a16="http://schemas.microsoft.com/office/drawing/2014/main" id="{38DA1540-685A-463A-BD9D-6C474BBEA287}"/>
+                <a16:creationId xmlns:a16="http://schemas.microsoft.com/office/drawing/2014/main" id="{8C72E8B1-919F-47B4-83AC-8F9A299656CC}"/>
               </a:ext>
             </a:extLst>
           </p:cNvPr>
@@ -16701,7 +16829,7 @@
           <p:cNvPr id="18" name="">
             <a:extLst xmlns:a="http://schemas.openxmlformats.org/drawingml/2006/main">
               <a:ext uri="{FF2B5EF4-FFF2-40B4-BE49-F238E27FC236}">
-                <a16:creationId xmlns:a16="http://schemas.microsoft.com/office/drawing/2014/main" id="{E7DA850D-38CD-43C8-9779-78A9E790F5C7}"/>
+                <a16:creationId xmlns:a16="http://schemas.microsoft.com/office/drawing/2014/main" id="{72CBFA4A-79CB-4B2E-B7DC-7A76054B081A}"/>
               </a:ext>
             </a:extLst>
           </p:cNvPr>
@@ -16763,7 +16891,7 @@
     </p:spTree>
     <p:extLst>
       <p:ext uri="{BB962C8B-B14F-4D97-AF65-F5344CB8AC3E}">
-        <p14:creationId xmlns:p14="http://schemas.microsoft.com/office/powerpoint/2010/main" val="2095570103"/>
+        <p14:creationId xmlns:p14="http://schemas.microsoft.com/office/powerpoint/2010/main" val="247389995"/>
       </p:ext>
     </p:extLst>
   </p:cSld>
@@ -16794,7 +16922,7 @@
           <p:cNvPr id="1" name="">
             <a:extLst xmlns:a="http://schemas.openxmlformats.org/drawingml/2006/main">
               <a:ext uri="{FF2B5EF4-FFF2-40B4-BE49-F238E27FC236}">
-                <a16:creationId xmlns:a16="http://schemas.microsoft.com/office/drawing/2014/main" id="{1078CB3D-58F6-4232-B027-83D2810C46F3}"/>
+                <a16:creationId xmlns:a16="http://schemas.microsoft.com/office/drawing/2014/main" id="{C761F1F9-D644-4E20-9284-76623665F598}"/>
               </a:ext>
             </a:extLst>
           </p:cNvPr>
@@ -16829,7 +16957,7 @@
           <p:cNvPr id="2" name="">
             <a:extLst xmlns:a="http://schemas.openxmlformats.org/drawingml/2006/main">
               <a:ext uri="{FF2B5EF4-FFF2-40B4-BE49-F238E27FC236}">
-                <a16:creationId xmlns:a16="http://schemas.microsoft.com/office/drawing/2014/main" id="{9BDB4E4B-77AE-4293-B1CD-EA410BE092C9}"/>
+                <a16:creationId xmlns:a16="http://schemas.microsoft.com/office/drawing/2014/main" id="{67664073-E772-48BA-BDFD-959B528D281A}"/>
               </a:ext>
             </a:extLst>
           </p:cNvPr>
@@ -16864,7 +16992,7 @@
           <p:cNvPr id="3" name="">
             <a:extLst xmlns:a="http://schemas.openxmlformats.org/drawingml/2006/main">
               <a:ext uri="{FF2B5EF4-FFF2-40B4-BE49-F238E27FC236}">
-                <a16:creationId xmlns:a16="http://schemas.microsoft.com/office/drawing/2014/main" id="{6423484C-F5BF-47C1-B69E-7EC54F88F590}"/>
+                <a16:creationId xmlns:a16="http://schemas.microsoft.com/office/drawing/2014/main" id="{FDCDE994-0F25-4E2F-B782-BC49321506F1}"/>
               </a:ext>
             </a:extLst>
           </p:cNvPr>
@@ -16899,7 +17027,7 @@
           <p:cNvPr id="4" name="">
             <a:extLst xmlns:a="http://schemas.openxmlformats.org/drawingml/2006/main">
               <a:ext uri="{FF2B5EF4-FFF2-40B4-BE49-F238E27FC236}">
-                <a16:creationId xmlns:a16="http://schemas.microsoft.com/office/drawing/2014/main" id="{BDCA22B4-41CF-4B38-9F58-EF8A511F9824}"/>
+                <a16:creationId xmlns:a16="http://schemas.microsoft.com/office/drawing/2014/main" id="{25ECC71E-B160-4494-B7AB-77658C791164}"/>
               </a:ext>
             </a:extLst>
           </p:cNvPr>
@@ -16963,7 +17091,7 @@
           <p:cNvPr id="5" name="">
             <a:extLst xmlns:a="http://schemas.openxmlformats.org/drawingml/2006/main">
               <a:ext uri="{FF2B5EF4-FFF2-40B4-BE49-F238E27FC236}">
-                <a16:creationId xmlns:a16="http://schemas.microsoft.com/office/drawing/2014/main" id="{89860643-2B5C-42F6-BDF2-B70CF072C7B3}"/>
+                <a16:creationId xmlns:a16="http://schemas.microsoft.com/office/drawing/2014/main" id="{CB0FAC01-0974-47E7-8F5B-25AD6ACF710A}"/>
               </a:ext>
             </a:extLst>
           </p:cNvPr>
@@ -17027,7 +17155,7 @@
           <p:cNvPr id="6" name="">
             <a:extLst xmlns:a="http://schemas.openxmlformats.org/drawingml/2006/main">
               <a:ext uri="{FF2B5EF4-FFF2-40B4-BE49-F238E27FC236}">
-                <a16:creationId xmlns:a16="http://schemas.microsoft.com/office/drawing/2014/main" id="{EB7BBED3-C2B7-4030-83A6-F81016A60664}"/>
+                <a16:creationId xmlns:a16="http://schemas.microsoft.com/office/drawing/2014/main" id="{7798D46C-524B-4D27-B366-C4324D8C0952}"/>
               </a:ext>
             </a:extLst>
           </p:cNvPr>
@@ -17062,7 +17190,7 @@
           <p:cNvPr id="7" name="">
             <a:extLst xmlns:a="http://schemas.openxmlformats.org/drawingml/2006/main">
               <a:ext uri="{FF2B5EF4-FFF2-40B4-BE49-F238E27FC236}">
-                <a16:creationId xmlns:a16="http://schemas.microsoft.com/office/drawing/2014/main" id="{EAF7980E-07A0-402B-8198-B9FF3403661C}"/>
+                <a16:creationId xmlns:a16="http://schemas.microsoft.com/office/drawing/2014/main" id="{0AE1F7F2-DA8C-4707-A5FF-ADAAD112FE22}"/>
               </a:ext>
             </a:extLst>
           </p:cNvPr>
@@ -17126,7 +17254,7 @@
           <p:cNvPr id="8" name="">
             <a:extLst xmlns:a="http://schemas.openxmlformats.org/drawingml/2006/main">
               <a:ext uri="{FF2B5EF4-FFF2-40B4-BE49-F238E27FC236}">
-                <a16:creationId xmlns:a16="http://schemas.microsoft.com/office/drawing/2014/main" id="{5870C5FA-5D89-4A2B-B8A2-2E00901FCF3B}"/>
+                <a16:creationId xmlns:a16="http://schemas.microsoft.com/office/drawing/2014/main" id="{D12AA7A6-663A-4904-BDA1-2E4568CCF11A}"/>
               </a:ext>
             </a:extLst>
           </p:cNvPr>
@@ -17190,7 +17318,7 @@
           <p:cNvPr id="9" name="">
             <a:extLst xmlns:a="http://schemas.openxmlformats.org/drawingml/2006/main">
               <a:ext uri="{FF2B5EF4-FFF2-40B4-BE49-F238E27FC236}">
-                <a16:creationId xmlns:a16="http://schemas.microsoft.com/office/drawing/2014/main" id="{4DF22344-9784-4D3D-A4D4-D7E5940E5961}"/>
+                <a16:creationId xmlns:a16="http://schemas.microsoft.com/office/drawing/2014/main" id="{0DA16277-BD4C-4225-BD7B-C07319EBC4E6}"/>
               </a:ext>
             </a:extLst>
           </p:cNvPr>
@@ -17227,7 +17355,7 @@
           <p:cNvPr id="10" name="">
             <a:extLst xmlns:a="http://schemas.openxmlformats.org/drawingml/2006/main">
               <a:ext uri="{FF2B5EF4-FFF2-40B4-BE49-F238E27FC236}">
-                <a16:creationId xmlns:a16="http://schemas.microsoft.com/office/drawing/2014/main" id="{83457400-AD30-4D00-AC71-3FD0C42D01C7}"/>
+                <a16:creationId xmlns:a16="http://schemas.microsoft.com/office/drawing/2014/main" id="{08908C51-05EE-4952-B3B2-7D605DD119C2}"/>
               </a:ext>
             </a:extLst>
           </p:cNvPr>
@@ -17291,7 +17419,7 @@
           <p:cNvPr id="11" name="">
             <a:extLst xmlns:a="http://schemas.openxmlformats.org/drawingml/2006/main">
               <a:ext uri="{FF2B5EF4-FFF2-40B4-BE49-F238E27FC236}">
-                <a16:creationId xmlns:a16="http://schemas.microsoft.com/office/drawing/2014/main" id="{0DFBD46E-E5CC-458D-BAF8-619392EF73E5}"/>
+                <a16:creationId xmlns:a16="http://schemas.microsoft.com/office/drawing/2014/main" id="{A7ECC24D-A21F-47C6-8D45-1A765FCAEC89}"/>
               </a:ext>
             </a:extLst>
           </p:cNvPr>
@@ -17328,7 +17456,7 @@
           <p:cNvPr id="12" name="">
             <a:extLst xmlns:a="http://schemas.openxmlformats.org/drawingml/2006/main">
               <a:ext uri="{FF2B5EF4-FFF2-40B4-BE49-F238E27FC236}">
-                <a16:creationId xmlns:a16="http://schemas.microsoft.com/office/drawing/2014/main" id="{E079F13C-912E-4000-9A7C-21EB5EBDA653}"/>
+                <a16:creationId xmlns:a16="http://schemas.microsoft.com/office/drawing/2014/main" id="{F8657BF7-634C-46CC-87CB-95E7A5FF61C3}"/>
               </a:ext>
             </a:extLst>
           </p:cNvPr>
@@ -17392,7 +17520,7 @@
           <p:cNvPr id="13" name="">
             <a:extLst xmlns:a="http://schemas.openxmlformats.org/drawingml/2006/main">
               <a:ext uri="{FF2B5EF4-FFF2-40B4-BE49-F238E27FC236}">
-                <a16:creationId xmlns:a16="http://schemas.microsoft.com/office/drawing/2014/main" id="{B272DF9A-88E3-4C40-9580-B785015B308E}"/>
+                <a16:creationId xmlns:a16="http://schemas.microsoft.com/office/drawing/2014/main" id="{35B6BEFA-028B-4F5B-A79C-8724ECAFA47A}"/>
               </a:ext>
             </a:extLst>
           </p:cNvPr>
@@ -17429,7 +17557,7 @@
           <p:cNvPr id="14" name="">
             <a:extLst xmlns:a="http://schemas.openxmlformats.org/drawingml/2006/main">
               <a:ext uri="{FF2B5EF4-FFF2-40B4-BE49-F238E27FC236}">
-                <a16:creationId xmlns:a16="http://schemas.microsoft.com/office/drawing/2014/main" id="{36F08CB0-ADF4-4A5D-8E61-284E649787BF}"/>
+                <a16:creationId xmlns:a16="http://schemas.microsoft.com/office/drawing/2014/main" id="{29FB7C6F-E092-40A6-9D4B-DF06EF3E57A6}"/>
               </a:ext>
             </a:extLst>
           </p:cNvPr>
@@ -17493,7 +17621,7 @@
           <p:cNvPr id="15" name="">
             <a:extLst xmlns:a="http://schemas.openxmlformats.org/drawingml/2006/main">
               <a:ext uri="{FF2B5EF4-FFF2-40B4-BE49-F238E27FC236}">
-                <a16:creationId xmlns:a16="http://schemas.microsoft.com/office/drawing/2014/main" id="{92B387C8-BBED-4AE8-958A-1264DD3A45C1}"/>
+                <a16:creationId xmlns:a16="http://schemas.microsoft.com/office/drawing/2014/main" id="{8B592994-6B3D-4F96-80BF-8B9A50F55C4C}"/>
               </a:ext>
             </a:extLst>
           </p:cNvPr>
@@ -17530,7 +17658,7 @@
           <p:cNvPr id="16" name="">
             <a:extLst xmlns:a="http://schemas.openxmlformats.org/drawingml/2006/main">
               <a:ext uri="{FF2B5EF4-FFF2-40B4-BE49-F238E27FC236}">
-                <a16:creationId xmlns:a16="http://schemas.microsoft.com/office/drawing/2014/main" id="{0046CD45-85DF-4AA1-9D09-09DEF41144C5}"/>
+                <a16:creationId xmlns:a16="http://schemas.microsoft.com/office/drawing/2014/main" id="{3333AFFD-68E8-46E3-B7B0-34D3012B8D14}"/>
               </a:ext>
             </a:extLst>
           </p:cNvPr>
@@ -17594,7 +17722,7 @@
           <p:cNvPr id="17" name="">
             <a:extLst xmlns:a="http://schemas.openxmlformats.org/drawingml/2006/main">
               <a:ext uri="{FF2B5EF4-FFF2-40B4-BE49-F238E27FC236}">
-                <a16:creationId xmlns:a16="http://schemas.microsoft.com/office/drawing/2014/main" id="{740E36C5-4E09-4880-B249-4393AE0D6029}"/>
+                <a16:creationId xmlns:a16="http://schemas.microsoft.com/office/drawing/2014/main" id="{9777234D-644E-438F-82D9-2A45A6F5130F}"/>
               </a:ext>
             </a:extLst>
           </p:cNvPr>
@@ -17629,7 +17757,7 @@
           <p:cNvPr id="18" name="">
             <a:extLst xmlns:a="http://schemas.openxmlformats.org/drawingml/2006/main">
               <a:ext uri="{FF2B5EF4-FFF2-40B4-BE49-F238E27FC236}">
-                <a16:creationId xmlns:a16="http://schemas.microsoft.com/office/drawing/2014/main" id="{9B433D32-9247-4061-A6F2-D8379AEE8B56}"/>
+                <a16:creationId xmlns:a16="http://schemas.microsoft.com/office/drawing/2014/main" id="{334349DA-FA5B-4BC6-ABCB-36AF84EA8778}"/>
               </a:ext>
             </a:extLst>
           </p:cNvPr>
@@ -17693,7 +17821,7 @@
           <p:cNvPr id="19" name="">
             <a:extLst xmlns:a="http://schemas.openxmlformats.org/drawingml/2006/main">
               <a:ext uri="{FF2B5EF4-FFF2-40B4-BE49-F238E27FC236}">
-                <a16:creationId xmlns:a16="http://schemas.microsoft.com/office/drawing/2014/main" id="{8992F46B-0A51-4392-810F-14D3CEC4F9D2}"/>
+                <a16:creationId xmlns:a16="http://schemas.microsoft.com/office/drawing/2014/main" id="{D26EA238-ABD1-4A06-A77D-5E0B983F1675}"/>
               </a:ext>
             </a:extLst>
           </p:cNvPr>
@@ -17757,7 +17885,7 @@
           <p:cNvPr id="20" name="">
             <a:extLst xmlns:a="http://schemas.openxmlformats.org/drawingml/2006/main">
               <a:ext uri="{FF2B5EF4-FFF2-40B4-BE49-F238E27FC236}">
-                <a16:creationId xmlns:a16="http://schemas.microsoft.com/office/drawing/2014/main" id="{B156664C-6F54-4C72-B2DD-807237EEE194}"/>
+                <a16:creationId xmlns:a16="http://schemas.microsoft.com/office/drawing/2014/main" id="{AD90330C-40AC-421C-8A2F-7B9A774FA8AA}"/>
               </a:ext>
             </a:extLst>
           </p:cNvPr>
@@ -17792,7 +17920,7 @@
           <p:cNvPr id="21" name="">
             <a:extLst xmlns:a="http://schemas.openxmlformats.org/drawingml/2006/main">
               <a:ext uri="{FF2B5EF4-FFF2-40B4-BE49-F238E27FC236}">
-                <a16:creationId xmlns:a16="http://schemas.microsoft.com/office/drawing/2014/main" id="{A4D53538-240E-411C-BF12-8320DD610911}"/>
+                <a16:creationId xmlns:a16="http://schemas.microsoft.com/office/drawing/2014/main" id="{B4DC5A46-3FFB-4852-B5FE-5154F537ED02}"/>
               </a:ext>
             </a:extLst>
           </p:cNvPr>
@@ -17856,7 +17984,7 @@
           <p:cNvPr id="22" name="">
             <a:extLst xmlns:a="http://schemas.openxmlformats.org/drawingml/2006/main">
               <a:ext uri="{FF2B5EF4-FFF2-40B4-BE49-F238E27FC236}">
-                <a16:creationId xmlns:a16="http://schemas.microsoft.com/office/drawing/2014/main" id="{DFCE9BDF-3074-41BA-A1DF-07690461BDD1}"/>
+                <a16:creationId xmlns:a16="http://schemas.microsoft.com/office/drawing/2014/main" id="{8CA9EBF9-6C1E-4FC1-B247-805D1751D188}"/>
               </a:ext>
             </a:extLst>
           </p:cNvPr>
@@ -17918,7 +18046,7 @@
     </p:spTree>
     <p:extLst>
       <p:ext uri="{BB962C8B-B14F-4D97-AF65-F5344CB8AC3E}">
-        <p14:creationId xmlns:p14="http://schemas.microsoft.com/office/powerpoint/2010/main" val="1072882691"/>
+        <p14:creationId xmlns:p14="http://schemas.microsoft.com/office/powerpoint/2010/main" val="228095652"/>
       </p:ext>
     </p:extLst>
   </p:cSld>
@@ -17949,7 +18077,7 @@
           <p:cNvPr id="1" name="">
             <a:extLst xmlns:a="http://schemas.openxmlformats.org/drawingml/2006/main">
               <a:ext uri="{FF2B5EF4-FFF2-40B4-BE49-F238E27FC236}">
-                <a16:creationId xmlns:a16="http://schemas.microsoft.com/office/drawing/2014/main" id="{A274F0F1-6E3F-48CE-874D-B3B16B87B5E9}"/>
+                <a16:creationId xmlns:a16="http://schemas.microsoft.com/office/drawing/2014/main" id="{F1DAA21E-E1E3-4019-A358-FD95154FABFA}"/>
               </a:ext>
             </a:extLst>
           </p:cNvPr>
@@ -17984,7 +18112,7 @@
           <p:cNvPr id="2" name="">
             <a:extLst xmlns:a="http://schemas.openxmlformats.org/drawingml/2006/main">
               <a:ext uri="{FF2B5EF4-FFF2-40B4-BE49-F238E27FC236}">
-                <a16:creationId xmlns:a16="http://schemas.microsoft.com/office/drawing/2014/main" id="{7EEDE676-C25C-46DC-9B60-5EA1B71717C8}"/>
+                <a16:creationId xmlns:a16="http://schemas.microsoft.com/office/drawing/2014/main" id="{11203FFC-5D06-486E-93C4-920453BA3586}"/>
               </a:ext>
             </a:extLst>
           </p:cNvPr>
@@ -18019,7 +18147,7 @@
           <p:cNvPr id="3" name="">
             <a:extLst xmlns:a="http://schemas.openxmlformats.org/drawingml/2006/main">
               <a:ext uri="{FF2B5EF4-FFF2-40B4-BE49-F238E27FC236}">
-                <a16:creationId xmlns:a16="http://schemas.microsoft.com/office/drawing/2014/main" id="{C4B538EB-DD8E-4837-8D85-C7D8BEBBAAD9}"/>
+                <a16:creationId xmlns:a16="http://schemas.microsoft.com/office/drawing/2014/main" id="{A6940AF7-18FF-4C83-9A79-D74BFCAD0318}"/>
               </a:ext>
             </a:extLst>
           </p:cNvPr>
@@ -18054,7 +18182,7 @@
           <p:cNvPr id="4" name="">
             <a:extLst xmlns:a="http://schemas.openxmlformats.org/drawingml/2006/main">
               <a:ext uri="{FF2B5EF4-FFF2-40B4-BE49-F238E27FC236}">
-                <a16:creationId xmlns:a16="http://schemas.microsoft.com/office/drawing/2014/main" id="{C2B85827-358E-4BEC-9834-46E66FE8484C}"/>
+                <a16:creationId xmlns:a16="http://schemas.microsoft.com/office/drawing/2014/main" id="{D0A39030-2FFF-4DC3-BE93-76889086FAF8}"/>
               </a:ext>
             </a:extLst>
           </p:cNvPr>
@@ -18108,7 +18236,7 @@
                 <a:ea typeface="Aptos Display"/>
                 <a:cs typeface="Aptos Display"/>
               </a:rPr>
-              <a:t>NEXT STEPS</a:t>
+              <a:t>THE ARCH HACKATHON</a:t>
             </a:r>
           </a:p>
         </p:txBody>
@@ -18118,7 +18246,7 @@
           <p:cNvPr id="5" name="">
             <a:extLst xmlns:a="http://schemas.openxmlformats.org/drawingml/2006/main">
               <a:ext uri="{FF2B5EF4-FFF2-40B4-BE49-F238E27FC236}">
-                <a16:creationId xmlns:a16="http://schemas.microsoft.com/office/drawing/2014/main" id="{1EB45977-E904-4555-AEE8-61872F782B4C}"/>
+                <a16:creationId xmlns:a16="http://schemas.microsoft.com/office/drawing/2014/main" id="{4B0DC378-A573-4018-9F4B-E55F2ADC4104}"/>
               </a:ext>
             </a:extLst>
           </p:cNvPr>
@@ -18172,7 +18300,7 @@
                 <a:ea typeface="Aptos Display"/>
                 <a:cs typeface="Aptos Display"/>
               </a:rPr>
-              <a:t>Roadmap and Submission Ask</a:t>
+              <a:t>Round 1 Submission Summary</a:t>
             </a:r>
           </a:p>
         </p:txBody>
@@ -18182,7 +18310,7 @@
           <p:cNvPr id="6" name="">
             <a:extLst xmlns:a="http://schemas.openxmlformats.org/drawingml/2006/main">
               <a:ext uri="{FF2B5EF4-FFF2-40B4-BE49-F238E27FC236}">
-                <a16:creationId xmlns:a16="http://schemas.microsoft.com/office/drawing/2014/main" id="{54A18190-E577-4DBB-BA49-5975705AD34D}"/>
+                <a16:creationId xmlns:a16="http://schemas.microsoft.com/office/drawing/2014/main" id="{1E978CC7-3A80-4B44-94B5-EC38F91E2103}"/>
               </a:ext>
             </a:extLst>
           </p:cNvPr>
@@ -18217,7 +18345,7 @@
           <p:cNvPr id="7" name="">
             <a:extLst xmlns:a="http://schemas.openxmlformats.org/drawingml/2006/main">
               <a:ext uri="{FF2B5EF4-FFF2-40B4-BE49-F238E27FC236}">
-                <a16:creationId xmlns:a16="http://schemas.microsoft.com/office/drawing/2014/main" id="{D5B4FCC9-466B-4EFD-A730-93B337918FF0}"/>
+                <a16:creationId xmlns:a16="http://schemas.microsoft.com/office/drawing/2014/main" id="{B3357E3B-9013-4F8A-BD28-2DBA1BE95A44}"/>
               </a:ext>
             </a:extLst>
           </p:cNvPr>
@@ -18281,7 +18409,7 @@
           <p:cNvPr id="8" name="">
             <a:extLst xmlns:a="http://schemas.openxmlformats.org/drawingml/2006/main">
               <a:ext uri="{FF2B5EF4-FFF2-40B4-BE49-F238E27FC236}">
-                <a16:creationId xmlns:a16="http://schemas.microsoft.com/office/drawing/2014/main" id="{0D6A1A01-D063-4098-92AA-AFE3FF25DBF6}"/>
+                <a16:creationId xmlns:a16="http://schemas.microsoft.com/office/drawing/2014/main" id="{08FA012C-388F-488A-AB5A-E01471D7FF89}"/>
               </a:ext>
             </a:extLst>
           </p:cNvPr>
@@ -18293,7 +18421,7 @@
         <p:spPr>
           <a:xfrm xmlns:a="http://schemas.openxmlformats.org/drawingml/2006/main">
             <a:off x="685800" y="1619250"/>
-            <a:ext cx="9144000" cy="552450"/>
+            <a:ext cx="9429750" cy="590550"/>
           </a:xfrm>
           <a:prstGeom xmlns:a="http://schemas.openxmlformats.org/drawingml/2006/main" prst="rect">
             <a:avLst/>
@@ -18335,7 +18463,7 @@
                 <a:ea typeface="Aptos"/>
                 <a:cs typeface="Aptos"/>
               </a:rPr>
-              <a:t>The current project is a working local product. The next phase turns it into a hosted, team-ready finance research platform.</a:t>
+              <a:t>CapitalLens AI is submitted as a Finance-track Agentic RAG system with a working full-stack demo, production-ready repository, and max-20-slide case study PDF.</a:t>
             </a:r>
           </a:p>
         </p:txBody>
@@ -18345,33 +18473,31 @@
           <p:cNvPr id="9" name="">
             <a:extLst xmlns:a="http://schemas.openxmlformats.org/drawingml/2006/main">
               <a:ext uri="{FF2B5EF4-FFF2-40B4-BE49-F238E27FC236}">
-                <a16:creationId xmlns:a16="http://schemas.microsoft.com/office/drawing/2014/main" id="{8C411E9D-8C01-47A2-9FC7-014F71CDA199}"/>
-              </a:ext>
-            </a:extLst>
-          </p:cNvPr>
-          <p:cNvSpPr>
-            <a:spLocks xmlns:a="http://schemas.openxmlformats.org/drawingml/2006/main" noGrp="1"/>
-          </p:cNvSpPr>
-          <p:nvPr/>
-        </p:nvSpPr>
-        <p:spPr>
-          <a:xfrm xmlns:a="http://schemas.openxmlformats.org/drawingml/2006/main">
-            <a:off x="1123950" y="2771775"/>
-            <a:ext cx="76200" cy="76200"/>
+                <a16:creationId xmlns:a16="http://schemas.microsoft.com/office/drawing/2014/main" id="{92D7D007-CE06-474D-B91B-238445CAAA38}"/>
+              </a:ext>
+            </a:extLst>
+          </p:cNvPr>
+          <p:cNvSpPr>
+            <a:spLocks xmlns:a="http://schemas.openxmlformats.org/drawingml/2006/main" noGrp="1"/>
+          </p:cNvSpPr>
+          <p:nvPr/>
+        </p:nvSpPr>
+        <p:spPr>
+          <a:xfrm xmlns:a="http://schemas.openxmlformats.org/drawingml/2006/main">
+            <a:off x="876300" y="2647950"/>
+            <a:ext cx="4762500" cy="2095500"/>
           </a:xfrm>
           <a:prstGeom xmlns:a="http://schemas.openxmlformats.org/drawingml/2006/main" prst="roundRect">
             <a:avLst>
-              <a:gd name="adj" fmla="val 50000"/>
+              <a:gd name="adj" fmla="val 5455"/>
             </a:avLst>
           </a:prstGeom>
           <a:solidFill xmlns:a="http://schemas.openxmlformats.org/drawingml/2006/main">
-            <a:srgbClr val="34D399"/>
-          </a:solidFill>
-          <a:ln xmlns:a="http://schemas.openxmlformats.org/drawingml/2006/main" w="0">
-            <a:solidFill>
-              <a:srgbClr val="000000">
-                <a:alpha val="0"/>
-              </a:srgbClr>
+            <a:srgbClr val="0E1B2D"/>
+          </a:solidFill>
+          <a:ln xmlns:a="http://schemas.openxmlformats.org/drawingml/2006/main" w="19050">
+            <a:solidFill>
+              <a:srgbClr val="34D399"/>
             </a:solidFill>
             <a:prstDash val="solid"/>
           </a:ln>
@@ -18382,19 +18508,19 @@
           <p:cNvPr id="10" name="">
             <a:extLst xmlns:a="http://schemas.openxmlformats.org/drawingml/2006/main">
               <a:ext uri="{FF2B5EF4-FFF2-40B4-BE49-F238E27FC236}">
-                <a16:creationId xmlns:a16="http://schemas.microsoft.com/office/drawing/2014/main" id="{097C5302-22B6-445F-A341-0C4B3C3938F8}"/>
-              </a:ext>
-            </a:extLst>
-          </p:cNvPr>
-          <p:cNvSpPr>
-            <a:spLocks xmlns:a="http://schemas.openxmlformats.org/drawingml/2006/main" noGrp="1"/>
-          </p:cNvSpPr>
-          <p:nvPr/>
-        </p:nvSpPr>
-        <p:spPr>
-          <a:xfrm xmlns:a="http://schemas.openxmlformats.org/drawingml/2006/main">
-            <a:off x="1333500" y="2686050"/>
-            <a:ext cx="9315450" cy="304800"/>
+                <a16:creationId xmlns:a16="http://schemas.microsoft.com/office/drawing/2014/main" id="{F1DBD847-7BB9-4EC8-8B22-CFCD9680959F}"/>
+              </a:ext>
+            </a:extLst>
+          </p:cNvPr>
+          <p:cNvSpPr>
+            <a:spLocks xmlns:a="http://schemas.openxmlformats.org/drawingml/2006/main" noGrp="1"/>
+          </p:cNvSpPr>
+          <p:nvPr/>
+        </p:nvSpPr>
+        <p:spPr>
+          <a:xfrm xmlns:a="http://schemas.openxmlformats.org/drawingml/2006/main">
+            <a:off x="1162050" y="2952750"/>
+            <a:ext cx="3429000" cy="285750"/>
           </a:xfrm>
           <a:prstGeom xmlns:a="http://schemas.openxmlformats.org/drawingml/2006/main" prst="rect">
             <a:avLst/>
@@ -18418,7 +18544,135 @@
           <a:lstStyle xmlns:a="http://schemas.openxmlformats.org/drawingml/2006/main"/>
           <a:p xmlns:a="http://schemas.openxmlformats.org/drawingml/2006/main">
             <a:pPr algn="l">
-              <a:defRPr sz="1500" b="0">
+              <a:defRPr sz="1875" b="1">
+                <a:solidFill>
+                  <a:srgbClr val="34D399"/>
+                </a:solidFill>
+                <a:latin typeface="Aptos Display"/>
+                <a:ea typeface="Aptos Display"/>
+                <a:cs typeface="Aptos Display"/>
+              </a:defRPr>
+            </a:pPr>
+            <a:r>
+              <a:rPr sz="1875" b="1">
+                <a:solidFill>
+                  <a:srgbClr val="34D399"/>
+                </a:solidFill>
+                <a:latin typeface="Aptos Display"/>
+                <a:ea typeface="Aptos Display"/>
+                <a:cs typeface="Aptos Display"/>
+              </a:rPr>
+              <a:t>Submission links</a:t>
+            </a:r>
+          </a:p>
+        </p:txBody>
+      </p:sp>
+      <p:sp>
+        <p:nvSpPr>
+          <p:cNvPr id="11" name="">
+            <a:extLst xmlns:a="http://schemas.openxmlformats.org/drawingml/2006/main">
+              <a:ext uri="{FF2B5EF4-FFF2-40B4-BE49-F238E27FC236}">
+                <a16:creationId xmlns:a16="http://schemas.microsoft.com/office/drawing/2014/main" id="{E4E30BE3-55EA-4173-9894-4F9342F6F55C}"/>
+              </a:ext>
+            </a:extLst>
+          </p:cNvPr>
+          <p:cNvSpPr>
+            <a:spLocks xmlns:a="http://schemas.openxmlformats.org/drawingml/2006/main" noGrp="1"/>
+          </p:cNvSpPr>
+          <p:nvPr/>
+        </p:nvSpPr>
+        <p:spPr>
+          <a:xfrm xmlns:a="http://schemas.openxmlformats.org/drawingml/2006/main">
+            <a:off x="1162050" y="3486150"/>
+            <a:ext cx="1714500" cy="228600"/>
+          </a:xfrm>
+          <a:prstGeom xmlns:a="http://schemas.openxmlformats.org/drawingml/2006/main" prst="rect">
+            <a:avLst/>
+          </a:prstGeom>
+          <a:solidFill xmlns:a="http://schemas.openxmlformats.org/drawingml/2006/main">
+            <a:srgbClr val="000000">
+              <a:alpha val="0"/>
+            </a:srgbClr>
+          </a:solidFill>
+          <a:ln xmlns:a="http://schemas.openxmlformats.org/drawingml/2006/main" w="0">
+            <a:solidFill>
+              <a:srgbClr val="000000">
+                <a:alpha val="0"/>
+              </a:srgbClr>
+            </a:solidFill>
+            <a:prstDash val="solid"/>
+          </a:ln>
+        </p:spPr>
+        <p:txBody>
+          <a:bodyPr xmlns:a="http://schemas.openxmlformats.org/drawingml/2006/main"/>
+          <a:lstStyle xmlns:a="http://schemas.openxmlformats.org/drawingml/2006/main"/>
+          <a:p xmlns:a="http://schemas.openxmlformats.org/drawingml/2006/main">
+            <a:pPr algn="l">
+              <a:defRPr sz="1350" b="1">
+                <a:solidFill>
+                  <a:srgbClr val="FFFFFF"/>
+                </a:solidFill>
+                <a:latin typeface="Aptos Display"/>
+                <a:ea typeface="Aptos Display"/>
+                <a:cs typeface="Aptos Display"/>
+              </a:defRPr>
+            </a:pPr>
+            <a:r>
+              <a:rPr sz="1350" b="1">
+                <a:solidFill>
+                  <a:srgbClr val="FFFFFF"/>
+                </a:solidFill>
+                <a:latin typeface="Aptos Display"/>
+                <a:ea typeface="Aptos Display"/>
+                <a:cs typeface="Aptos Display"/>
+              </a:rPr>
+              <a:t>GitHub repository</a:t>
+            </a:r>
+          </a:p>
+        </p:txBody>
+      </p:sp>
+      <p:sp>
+        <p:nvSpPr>
+          <p:cNvPr id="12" name="">
+            <a:extLst xmlns:a="http://schemas.openxmlformats.org/drawingml/2006/main">
+              <a:ext uri="{FF2B5EF4-FFF2-40B4-BE49-F238E27FC236}">
+                <a16:creationId xmlns:a16="http://schemas.microsoft.com/office/drawing/2014/main" id="{A7E352A0-9DF9-49AF-A159-2EE885B9C75B}"/>
+              </a:ext>
+            </a:extLst>
+          </p:cNvPr>
+          <p:cNvSpPr>
+            <a:spLocks xmlns:a="http://schemas.openxmlformats.org/drawingml/2006/main" noGrp="1"/>
+          </p:cNvSpPr>
+          <p:nvPr/>
+        </p:nvSpPr>
+        <p:spPr>
+          <a:xfrm xmlns:a="http://schemas.openxmlformats.org/drawingml/2006/main">
+            <a:off x="1162050" y="3752850"/>
+            <a:ext cx="4000500" cy="228600"/>
+          </a:xfrm>
+          <a:prstGeom xmlns:a="http://schemas.openxmlformats.org/drawingml/2006/main" prst="rect">
+            <a:avLst/>
+          </a:prstGeom>
+          <a:solidFill xmlns:a="http://schemas.openxmlformats.org/drawingml/2006/main">
+            <a:srgbClr val="000000">
+              <a:alpha val="0"/>
+            </a:srgbClr>
+          </a:solidFill>
+          <a:ln xmlns:a="http://schemas.openxmlformats.org/drawingml/2006/main" w="0">
+            <a:solidFill>
+              <a:srgbClr val="000000">
+                <a:alpha val="0"/>
+              </a:srgbClr>
+            </a:solidFill>
+            <a:prstDash val="solid"/>
+          </a:ln>
+        </p:spPr>
+        <p:txBody>
+          <a:bodyPr xmlns:a="http://schemas.openxmlformats.org/drawingml/2006/main"/>
+          <a:lstStyle xmlns:a="http://schemas.openxmlformats.org/drawingml/2006/main"/>
+          <a:p xmlns:a="http://schemas.openxmlformats.org/drawingml/2006/main">
+            <a:pPr algn="l">
+              <a:defRPr sz="1275" b="0">
                 <a:solidFill>
                   <a:srgbClr val="D8E6F3"/>
                 </a:solidFill>
@@ -18428,7 +18682,7 @@
               </a:defRPr>
             </a:pPr>
             <a:r>
-              <a:rPr sz="1500" b="0">
+              <a:rPr sz="1275" b="0">
                 <a:solidFill>
                   <a:srgbClr val="D8E6F3"/>
                 </a:solidFill>
@@ -18436,66 +18690,29 @@
                 <a:ea typeface="Aptos"/>
                 <a:cs typeface="Aptos"/>
               </a:rPr>
-              <a:t>Managed vector DB or Chroma Cloud with source freshness scoring.</a:t>
+              <a:t>github.com/Sai-Vivek17/capital-lens-ai</a:t>
             </a:r>
           </a:p>
         </p:txBody>
       </p:sp>
       <p:sp>
         <p:nvSpPr>
-          <p:cNvPr id="11" name="">
-            <a:extLst xmlns:a="http://schemas.openxmlformats.org/drawingml/2006/main">
-              <a:ext uri="{FF2B5EF4-FFF2-40B4-BE49-F238E27FC236}">
-                <a16:creationId xmlns:a16="http://schemas.microsoft.com/office/drawing/2014/main" id="{52C83EAA-0E61-43C6-B071-8091F91C0808}"/>
-              </a:ext>
-            </a:extLst>
-          </p:cNvPr>
-          <p:cNvSpPr>
-            <a:spLocks xmlns:a="http://schemas.openxmlformats.org/drawingml/2006/main" noGrp="1"/>
-          </p:cNvSpPr>
-          <p:nvPr/>
-        </p:nvSpPr>
-        <p:spPr>
-          <a:xfrm xmlns:a="http://schemas.openxmlformats.org/drawingml/2006/main">
-            <a:off x="1123950" y="3248025"/>
-            <a:ext cx="76200" cy="76200"/>
-          </a:xfrm>
-          <a:prstGeom xmlns:a="http://schemas.openxmlformats.org/drawingml/2006/main" prst="roundRect">
-            <a:avLst>
-              <a:gd name="adj" fmla="val 50000"/>
-            </a:avLst>
-          </a:prstGeom>
-          <a:solidFill xmlns:a="http://schemas.openxmlformats.org/drawingml/2006/main">
-            <a:srgbClr val="34D399"/>
-          </a:solidFill>
-          <a:ln xmlns:a="http://schemas.openxmlformats.org/drawingml/2006/main" w="0">
-            <a:solidFill>
-              <a:srgbClr val="000000">
-                <a:alpha val="0"/>
-              </a:srgbClr>
-            </a:solidFill>
-            <a:prstDash val="solid"/>
-          </a:ln>
-        </p:spPr>
-      </p:sp>
-      <p:sp>
-        <p:nvSpPr>
-          <p:cNvPr id="12" name="">
-            <a:extLst xmlns:a="http://schemas.openxmlformats.org/drawingml/2006/main">
-              <a:ext uri="{FF2B5EF4-FFF2-40B4-BE49-F238E27FC236}">
-                <a16:creationId xmlns:a16="http://schemas.microsoft.com/office/drawing/2014/main" id="{DD9DFDF9-241F-4F8F-9758-9226FC204ED3}"/>
-              </a:ext>
-            </a:extLst>
-          </p:cNvPr>
-          <p:cNvSpPr>
-            <a:spLocks xmlns:a="http://schemas.openxmlformats.org/drawingml/2006/main" noGrp="1"/>
-          </p:cNvSpPr>
-          <p:nvPr/>
-        </p:nvSpPr>
-        <p:spPr>
-          <a:xfrm xmlns:a="http://schemas.openxmlformats.org/drawingml/2006/main">
-            <a:off x="1333500" y="3162300"/>
-            <a:ext cx="9315450" cy="304800"/>
+          <p:cNvPr id="13" name="">
+            <a:extLst xmlns:a="http://schemas.openxmlformats.org/drawingml/2006/main">
+              <a:ext uri="{FF2B5EF4-FFF2-40B4-BE49-F238E27FC236}">
+                <a16:creationId xmlns:a16="http://schemas.microsoft.com/office/drawing/2014/main" id="{089D43D9-DDB3-41BF-ABAD-96B17A51B309}"/>
+              </a:ext>
+            </a:extLst>
+          </p:cNvPr>
+          <p:cNvSpPr>
+            <a:spLocks xmlns:a="http://schemas.openxmlformats.org/drawingml/2006/main" noGrp="1"/>
+          </p:cNvSpPr>
+          <p:nvPr/>
+        </p:nvSpPr>
+        <p:spPr>
+          <a:xfrm xmlns:a="http://schemas.openxmlformats.org/drawingml/2006/main">
+            <a:off x="1162050" y="4171950"/>
+            <a:ext cx="1714500" cy="228600"/>
           </a:xfrm>
           <a:prstGeom xmlns:a="http://schemas.openxmlformats.org/drawingml/2006/main" prst="rect">
             <a:avLst/>
@@ -18519,7 +18736,71 @@
           <a:lstStyle xmlns:a="http://schemas.openxmlformats.org/drawingml/2006/main"/>
           <a:p xmlns:a="http://schemas.openxmlformats.org/drawingml/2006/main">
             <a:pPr algn="l">
-              <a:defRPr sz="1500" b="0">
+              <a:defRPr sz="1350" b="1">
+                <a:solidFill>
+                  <a:srgbClr val="FFFFFF"/>
+                </a:solidFill>
+                <a:latin typeface="Aptos Display"/>
+                <a:ea typeface="Aptos Display"/>
+                <a:cs typeface="Aptos Display"/>
+              </a:defRPr>
+            </a:pPr>
+            <a:r>
+              <a:rPr sz="1350" b="1">
+                <a:solidFill>
+                  <a:srgbClr val="FFFFFF"/>
+                </a:solidFill>
+                <a:latin typeface="Aptos Display"/>
+                <a:ea typeface="Aptos Display"/>
+                <a:cs typeface="Aptos Display"/>
+              </a:rPr>
+              <a:t>Live demo URL</a:t>
+            </a:r>
+          </a:p>
+        </p:txBody>
+      </p:sp>
+      <p:sp>
+        <p:nvSpPr>
+          <p:cNvPr id="14" name="">
+            <a:extLst xmlns:a="http://schemas.openxmlformats.org/drawingml/2006/main">
+              <a:ext uri="{FF2B5EF4-FFF2-40B4-BE49-F238E27FC236}">
+                <a16:creationId xmlns:a16="http://schemas.microsoft.com/office/drawing/2014/main" id="{7A95481F-C625-4F5C-80A9-D9455E99C31A}"/>
+              </a:ext>
+            </a:extLst>
+          </p:cNvPr>
+          <p:cNvSpPr>
+            <a:spLocks xmlns:a="http://schemas.openxmlformats.org/drawingml/2006/main" noGrp="1"/>
+          </p:cNvSpPr>
+          <p:nvPr/>
+        </p:nvSpPr>
+        <p:spPr>
+          <a:xfrm xmlns:a="http://schemas.openxmlformats.org/drawingml/2006/main">
+            <a:off x="1162050" y="4438650"/>
+            <a:ext cx="4000500" cy="228600"/>
+          </a:xfrm>
+          <a:prstGeom xmlns:a="http://schemas.openxmlformats.org/drawingml/2006/main" prst="rect">
+            <a:avLst/>
+          </a:prstGeom>
+          <a:solidFill xmlns:a="http://schemas.openxmlformats.org/drawingml/2006/main">
+            <a:srgbClr val="000000">
+              <a:alpha val="0"/>
+            </a:srgbClr>
+          </a:solidFill>
+          <a:ln xmlns:a="http://schemas.openxmlformats.org/drawingml/2006/main" w="0">
+            <a:solidFill>
+              <a:srgbClr val="000000">
+                <a:alpha val="0"/>
+              </a:srgbClr>
+            </a:solidFill>
+            <a:prstDash val="solid"/>
+          </a:ln>
+        </p:spPr>
+        <p:txBody>
+          <a:bodyPr xmlns:a="http://schemas.openxmlformats.org/drawingml/2006/main"/>
+          <a:lstStyle xmlns:a="http://schemas.openxmlformats.org/drawingml/2006/main"/>
+          <a:p xmlns:a="http://schemas.openxmlformats.org/drawingml/2006/main">
+            <a:pPr algn="l">
+              <a:defRPr sz="1275" b="0">
                 <a:solidFill>
                   <a:srgbClr val="D8E6F3"/>
                 </a:solidFill>
@@ -18529,7 +18810,7 @@
               </a:defRPr>
             </a:pPr>
             <a:r>
-              <a:rPr sz="1500" b="0">
+              <a:rPr sz="1275" b="0">
                 <a:solidFill>
                   <a:srgbClr val="D8E6F3"/>
                 </a:solidFill>
@@ -18537,28 +18818,127 @@
                 <a:ea typeface="Aptos"/>
                 <a:cs typeface="Aptos"/>
               </a:rPr>
-              <a:t>Deeper SEC/XBRL ingestion, richer peer discovery, and DCF scenarios.</a:t>
+              <a:t>https://capital-lens-ai.streamlit.app</a:t>
             </a:r>
           </a:p>
         </p:txBody>
       </p:sp>
       <p:sp>
         <p:nvSpPr>
-          <p:cNvPr id="13" name="">
-            <a:extLst xmlns:a="http://schemas.openxmlformats.org/drawingml/2006/main">
-              <a:ext uri="{FF2B5EF4-FFF2-40B4-BE49-F238E27FC236}">
-                <a16:creationId xmlns:a16="http://schemas.microsoft.com/office/drawing/2014/main" id="{12C0E304-5ECE-4DB0-B604-98B97F772F5D}"/>
-              </a:ext>
-            </a:extLst>
-          </p:cNvPr>
-          <p:cNvSpPr>
-            <a:spLocks xmlns:a="http://schemas.openxmlformats.org/drawingml/2006/main" noGrp="1"/>
-          </p:cNvSpPr>
-          <p:nvPr/>
-        </p:nvSpPr>
-        <p:spPr>
-          <a:xfrm xmlns:a="http://schemas.openxmlformats.org/drawingml/2006/main">
-            <a:off x="1123950" y="3724275"/>
+          <p:cNvPr id="15" name="">
+            <a:extLst xmlns:a="http://schemas.openxmlformats.org/drawingml/2006/main">
+              <a:ext uri="{FF2B5EF4-FFF2-40B4-BE49-F238E27FC236}">
+                <a16:creationId xmlns:a16="http://schemas.microsoft.com/office/drawing/2014/main" id="{40DB7478-A022-4CC5-95C3-AE3F72F3BFCB}"/>
+              </a:ext>
+            </a:extLst>
+          </p:cNvPr>
+          <p:cNvSpPr>
+            <a:spLocks xmlns:a="http://schemas.openxmlformats.org/drawingml/2006/main" noGrp="1"/>
+          </p:cNvSpPr>
+          <p:nvPr/>
+        </p:nvSpPr>
+        <p:spPr>
+          <a:xfrm xmlns:a="http://schemas.openxmlformats.org/drawingml/2006/main">
+            <a:off x="6438900" y="2647950"/>
+            <a:ext cx="4095750" cy="2095500"/>
+          </a:xfrm>
+          <a:prstGeom xmlns:a="http://schemas.openxmlformats.org/drawingml/2006/main" prst="roundRect">
+            <a:avLst>
+              <a:gd name="adj" fmla="val 5455"/>
+            </a:avLst>
+          </a:prstGeom>
+          <a:solidFill xmlns:a="http://schemas.openxmlformats.org/drawingml/2006/main">
+            <a:srgbClr val="0E1B2D"/>
+          </a:solidFill>
+          <a:ln xmlns:a="http://schemas.openxmlformats.org/drawingml/2006/main" w="19050">
+            <a:solidFill>
+              <a:srgbClr val="F59E0B"/>
+            </a:solidFill>
+            <a:prstDash val="solid"/>
+          </a:ln>
+        </p:spPr>
+      </p:sp>
+      <p:sp>
+        <p:nvSpPr>
+          <p:cNvPr id="16" name="">
+            <a:extLst xmlns:a="http://schemas.openxmlformats.org/drawingml/2006/main">
+              <a:ext uri="{FF2B5EF4-FFF2-40B4-BE49-F238E27FC236}">
+                <a16:creationId xmlns:a16="http://schemas.microsoft.com/office/drawing/2014/main" id="{73D08877-B16C-45E7-BECF-08186F7B3BAA}"/>
+              </a:ext>
+            </a:extLst>
+          </p:cNvPr>
+          <p:cNvSpPr>
+            <a:spLocks xmlns:a="http://schemas.openxmlformats.org/drawingml/2006/main" noGrp="1"/>
+          </p:cNvSpPr>
+          <p:nvPr/>
+        </p:nvSpPr>
+        <p:spPr>
+          <a:xfrm xmlns:a="http://schemas.openxmlformats.org/drawingml/2006/main">
+            <a:off x="6724650" y="2952750"/>
+            <a:ext cx="3333750" cy="285750"/>
+          </a:xfrm>
+          <a:prstGeom xmlns:a="http://schemas.openxmlformats.org/drawingml/2006/main" prst="rect">
+            <a:avLst/>
+          </a:prstGeom>
+          <a:solidFill xmlns:a="http://schemas.openxmlformats.org/drawingml/2006/main">
+            <a:srgbClr val="000000">
+              <a:alpha val="0"/>
+            </a:srgbClr>
+          </a:solidFill>
+          <a:ln xmlns:a="http://schemas.openxmlformats.org/drawingml/2006/main" w="0">
+            <a:solidFill>
+              <a:srgbClr val="000000">
+                <a:alpha val="0"/>
+              </a:srgbClr>
+            </a:solidFill>
+            <a:prstDash val="solid"/>
+          </a:ln>
+        </p:spPr>
+        <p:txBody>
+          <a:bodyPr xmlns:a="http://schemas.openxmlformats.org/drawingml/2006/main"/>
+          <a:lstStyle xmlns:a="http://schemas.openxmlformats.org/drawingml/2006/main"/>
+          <a:p xmlns:a="http://schemas.openxmlformats.org/drawingml/2006/main">
+            <a:pPr algn="l">
+              <a:defRPr sz="1875" b="1">
+                <a:solidFill>
+                  <a:srgbClr val="F59E0B"/>
+                </a:solidFill>
+                <a:latin typeface="Aptos Display"/>
+                <a:ea typeface="Aptos Display"/>
+                <a:cs typeface="Aptos Display"/>
+              </a:defRPr>
+            </a:pPr>
+            <a:r>
+              <a:rPr sz="1875" b="1">
+                <a:solidFill>
+                  <a:srgbClr val="F59E0B"/>
+                </a:solidFill>
+                <a:latin typeface="Aptos Display"/>
+                <a:ea typeface="Aptos Display"/>
+                <a:cs typeface="Aptos Display"/>
+              </a:rPr>
+              <a:t>Why it is submission-ready</a:t>
+            </a:r>
+          </a:p>
+        </p:txBody>
+      </p:sp>
+      <p:sp>
+        <p:nvSpPr>
+          <p:cNvPr id="17" name="">
+            <a:extLst xmlns:a="http://schemas.openxmlformats.org/drawingml/2006/main">
+              <a:ext uri="{FF2B5EF4-FFF2-40B4-BE49-F238E27FC236}">
+                <a16:creationId xmlns:a16="http://schemas.microsoft.com/office/drawing/2014/main" id="{322EE2A5-1403-4E7D-AA23-D4DDF0B19BF5}"/>
+              </a:ext>
+            </a:extLst>
+          </p:cNvPr>
+          <p:cNvSpPr>
+            <a:spLocks xmlns:a="http://schemas.openxmlformats.org/drawingml/2006/main" noGrp="1"/>
+          </p:cNvSpPr>
+          <p:nvPr/>
+        </p:nvSpPr>
+        <p:spPr>
+          <a:xfrm xmlns:a="http://schemas.openxmlformats.org/drawingml/2006/main">
+            <a:off x="6838950" y="3552825"/>
             <a:ext cx="76200" cy="76200"/>
           </a:xfrm>
           <a:prstGeom xmlns:a="http://schemas.openxmlformats.org/drawingml/2006/main" prst="roundRect">
@@ -18581,22 +18961,22 @@
       </p:sp>
       <p:sp>
         <p:nvSpPr>
-          <p:cNvPr id="14" name="">
-            <a:extLst xmlns:a="http://schemas.openxmlformats.org/drawingml/2006/main">
-              <a:ext uri="{FF2B5EF4-FFF2-40B4-BE49-F238E27FC236}">
-                <a16:creationId xmlns:a16="http://schemas.microsoft.com/office/drawing/2014/main" id="{4BCFA316-C371-436C-A79E-337FF4978EE2}"/>
-              </a:ext>
-            </a:extLst>
-          </p:cNvPr>
-          <p:cNvSpPr>
-            <a:spLocks xmlns:a="http://schemas.openxmlformats.org/drawingml/2006/main" noGrp="1"/>
-          </p:cNvSpPr>
-          <p:nvPr/>
-        </p:nvSpPr>
-        <p:spPr>
-          <a:xfrm xmlns:a="http://schemas.openxmlformats.org/drawingml/2006/main">
-            <a:off x="1333500" y="3638550"/>
-            <a:ext cx="9315450" cy="304800"/>
+          <p:cNvPr id="18" name="">
+            <a:extLst xmlns:a="http://schemas.openxmlformats.org/drawingml/2006/main">
+              <a:ext uri="{FF2B5EF4-FFF2-40B4-BE49-F238E27FC236}">
+                <a16:creationId xmlns:a16="http://schemas.microsoft.com/office/drawing/2014/main" id="{C12DA8EE-7FBD-40C2-8D5B-575041635069}"/>
+              </a:ext>
+            </a:extLst>
+          </p:cNvPr>
+          <p:cNvSpPr>
+            <a:spLocks xmlns:a="http://schemas.openxmlformats.org/drawingml/2006/main" noGrp="1"/>
+          </p:cNvSpPr>
+          <p:nvPr/>
+        </p:nvSpPr>
+        <p:spPr>
+          <a:xfrm xmlns:a="http://schemas.openxmlformats.org/drawingml/2006/main">
+            <a:off x="7048500" y="3467100"/>
+            <a:ext cx="2933700" cy="304800"/>
           </a:xfrm>
           <a:prstGeom xmlns:a="http://schemas.openxmlformats.org/drawingml/2006/main" prst="rect">
             <a:avLst/>
@@ -18620,7 +19000,7 @@
           <a:lstStyle xmlns:a="http://schemas.openxmlformats.org/drawingml/2006/main"/>
           <a:p xmlns:a="http://schemas.openxmlformats.org/drawingml/2006/main">
             <a:pPr algn="l">
-              <a:defRPr sz="1500" b="0">
+              <a:defRPr sz="1350" b="0">
                 <a:solidFill>
                   <a:srgbClr val="D8E6F3"/>
                 </a:solidFill>
@@ -18630,7 +19010,7 @@
               </a:defRPr>
             </a:pPr>
             <a:r>
-              <a:rPr sz="1500" b="0">
+              <a:rPr sz="1350" b="0">
                 <a:solidFill>
                   <a:srgbClr val="D8E6F3"/>
                 </a:solidFill>
@@ -18638,28 +19018,28 @@
                 <a:ea typeface="Aptos"/>
                 <a:cs typeface="Aptos"/>
               </a:rPr>
-              <a:t>Auth, scheduled scans, Slack/email alerts, and team workspaces.</a:t>
+              <a:t>Autonomous multi-agent workflow</a:t>
             </a:r>
           </a:p>
         </p:txBody>
       </p:sp>
       <p:sp>
         <p:nvSpPr>
-          <p:cNvPr id="15" name="">
-            <a:extLst xmlns:a="http://schemas.openxmlformats.org/drawingml/2006/main">
-              <a:ext uri="{FF2B5EF4-FFF2-40B4-BE49-F238E27FC236}">
-                <a16:creationId xmlns:a16="http://schemas.microsoft.com/office/drawing/2014/main" id="{1E6E7779-94E0-4DC4-B4AC-D24F275F291F}"/>
-              </a:ext>
-            </a:extLst>
-          </p:cNvPr>
-          <p:cNvSpPr>
-            <a:spLocks xmlns:a="http://schemas.openxmlformats.org/drawingml/2006/main" noGrp="1"/>
-          </p:cNvSpPr>
-          <p:nvPr/>
-        </p:nvSpPr>
-        <p:spPr>
-          <a:xfrm xmlns:a="http://schemas.openxmlformats.org/drawingml/2006/main">
-            <a:off x="1123950" y="4200525"/>
+          <p:cNvPr id="19" name="">
+            <a:extLst xmlns:a="http://schemas.openxmlformats.org/drawingml/2006/main">
+              <a:ext uri="{FF2B5EF4-FFF2-40B4-BE49-F238E27FC236}">
+                <a16:creationId xmlns:a16="http://schemas.microsoft.com/office/drawing/2014/main" id="{B8C07026-75CF-4E71-A209-6AAA127CB8BE}"/>
+              </a:ext>
+            </a:extLst>
+          </p:cNvPr>
+          <p:cNvSpPr>
+            <a:spLocks xmlns:a="http://schemas.openxmlformats.org/drawingml/2006/main" noGrp="1"/>
+          </p:cNvSpPr>
+          <p:nvPr/>
+        </p:nvSpPr>
+        <p:spPr>
+          <a:xfrm xmlns:a="http://schemas.openxmlformats.org/drawingml/2006/main">
+            <a:off x="6838950" y="3876675"/>
             <a:ext cx="76200" cy="76200"/>
           </a:xfrm>
           <a:prstGeom xmlns:a="http://schemas.openxmlformats.org/drawingml/2006/main" prst="roundRect">
@@ -18682,22 +19062,22 @@
       </p:sp>
       <p:sp>
         <p:nvSpPr>
-          <p:cNvPr id="16" name="">
-            <a:extLst xmlns:a="http://schemas.openxmlformats.org/drawingml/2006/main">
-              <a:ext uri="{FF2B5EF4-FFF2-40B4-BE49-F238E27FC236}">
-                <a16:creationId xmlns:a16="http://schemas.microsoft.com/office/drawing/2014/main" id="{3DE00073-2802-470D-8DCE-266DA906CE3F}"/>
-              </a:ext>
-            </a:extLst>
-          </p:cNvPr>
-          <p:cNvSpPr>
-            <a:spLocks xmlns:a="http://schemas.openxmlformats.org/drawingml/2006/main" noGrp="1"/>
-          </p:cNvSpPr>
-          <p:nvPr/>
-        </p:nvSpPr>
-        <p:spPr>
-          <a:xfrm xmlns:a="http://schemas.openxmlformats.org/drawingml/2006/main">
-            <a:off x="1333500" y="4114800"/>
-            <a:ext cx="9315450" cy="304800"/>
+          <p:cNvPr id="20" name="">
+            <a:extLst xmlns:a="http://schemas.openxmlformats.org/drawingml/2006/main">
+              <a:ext uri="{FF2B5EF4-FFF2-40B4-BE49-F238E27FC236}">
+                <a16:creationId xmlns:a16="http://schemas.microsoft.com/office/drawing/2014/main" id="{B96EA8C2-8795-43D7-ABF4-195E5F019FA2}"/>
+              </a:ext>
+            </a:extLst>
+          </p:cNvPr>
+          <p:cNvSpPr>
+            <a:spLocks xmlns:a="http://schemas.openxmlformats.org/drawingml/2006/main" noGrp="1"/>
+          </p:cNvSpPr>
+          <p:nvPr/>
+        </p:nvSpPr>
+        <p:spPr>
+          <a:xfrm xmlns:a="http://schemas.openxmlformats.org/drawingml/2006/main">
+            <a:off x="7048500" y="3790950"/>
+            <a:ext cx="2933700" cy="304800"/>
           </a:xfrm>
           <a:prstGeom xmlns:a="http://schemas.openxmlformats.org/drawingml/2006/main" prst="rect">
             <a:avLst/>
@@ -18721,7 +19101,7 @@
           <a:lstStyle xmlns:a="http://schemas.openxmlformats.org/drawingml/2006/main"/>
           <a:p xmlns:a="http://schemas.openxmlformats.org/drawingml/2006/main">
             <a:pPr algn="l">
-              <a:defRPr sz="1500" b="0">
+              <a:defRPr sz="1350" b="0">
                 <a:solidFill>
                   <a:srgbClr val="D8E6F3"/>
                 </a:solidFill>
@@ -18731,7 +19111,7 @@
               </a:defRPr>
             </a:pPr>
             <a:r>
-              <a:rPr sz="1500" b="0">
+              <a:rPr sz="1350" b="0">
                 <a:solidFill>
                   <a:srgbClr val="D8E6F3"/>
                 </a:solidFill>
@@ -18739,29 +19119,66 @@
                 <a:ea typeface="Aptos"/>
                 <a:cs typeface="Aptos"/>
               </a:rPr>
-              <a:t>Observability dashboards, benchmark suites, and faithfulness evaluation.</a:t>
+              <a:t>Advanced retrieval with citations</a:t>
             </a:r>
           </a:p>
         </p:txBody>
       </p:sp>
       <p:sp>
         <p:nvSpPr>
-          <p:cNvPr id="17" name="">
-            <a:extLst xmlns:a="http://schemas.openxmlformats.org/drawingml/2006/main">
-              <a:ext uri="{FF2B5EF4-FFF2-40B4-BE49-F238E27FC236}">
-                <a16:creationId xmlns:a16="http://schemas.microsoft.com/office/drawing/2014/main" id="{0F5EFD90-5C51-46FC-9F5A-4B61ADEA58CD}"/>
-              </a:ext>
-            </a:extLst>
-          </p:cNvPr>
-          <p:cNvSpPr>
-            <a:spLocks xmlns:a="http://schemas.openxmlformats.org/drawingml/2006/main" noGrp="1"/>
-          </p:cNvSpPr>
-          <p:nvPr/>
-        </p:nvSpPr>
-        <p:spPr>
-          <a:xfrm xmlns:a="http://schemas.openxmlformats.org/drawingml/2006/main">
-            <a:off x="1123950" y="5334000"/>
-            <a:ext cx="9334500" cy="323850"/>
+          <p:cNvPr id="21" name="">
+            <a:extLst xmlns:a="http://schemas.openxmlformats.org/drawingml/2006/main">
+              <a:ext uri="{FF2B5EF4-FFF2-40B4-BE49-F238E27FC236}">
+                <a16:creationId xmlns:a16="http://schemas.microsoft.com/office/drawing/2014/main" id="{6D6EAAFA-F4E8-493A-B84A-8A73444EB76E}"/>
+              </a:ext>
+            </a:extLst>
+          </p:cNvPr>
+          <p:cNvSpPr>
+            <a:spLocks xmlns:a="http://schemas.openxmlformats.org/drawingml/2006/main" noGrp="1"/>
+          </p:cNvSpPr>
+          <p:nvPr/>
+        </p:nvSpPr>
+        <p:spPr>
+          <a:xfrm xmlns:a="http://schemas.openxmlformats.org/drawingml/2006/main">
+            <a:off x="6838950" y="4200525"/>
+            <a:ext cx="76200" cy="76200"/>
+          </a:xfrm>
+          <a:prstGeom xmlns:a="http://schemas.openxmlformats.org/drawingml/2006/main" prst="roundRect">
+            <a:avLst>
+              <a:gd name="adj" fmla="val 50000"/>
+            </a:avLst>
+          </a:prstGeom>
+          <a:solidFill xmlns:a="http://schemas.openxmlformats.org/drawingml/2006/main">
+            <a:srgbClr val="34D399"/>
+          </a:solidFill>
+          <a:ln xmlns:a="http://schemas.openxmlformats.org/drawingml/2006/main" w="0">
+            <a:solidFill>
+              <a:srgbClr val="000000">
+                <a:alpha val="0"/>
+              </a:srgbClr>
+            </a:solidFill>
+            <a:prstDash val="solid"/>
+          </a:ln>
+        </p:spPr>
+      </p:sp>
+      <p:sp>
+        <p:nvSpPr>
+          <p:cNvPr id="22" name="">
+            <a:extLst xmlns:a="http://schemas.openxmlformats.org/drawingml/2006/main">
+              <a:ext uri="{FF2B5EF4-FFF2-40B4-BE49-F238E27FC236}">
+                <a16:creationId xmlns:a16="http://schemas.microsoft.com/office/drawing/2014/main" id="{3EEA3958-05F5-4FC6-B8C2-FE8117E4AA19}"/>
+              </a:ext>
+            </a:extLst>
+          </p:cNvPr>
+          <p:cNvSpPr>
+            <a:spLocks xmlns:a="http://schemas.openxmlformats.org/drawingml/2006/main" noGrp="1"/>
+          </p:cNvSpPr>
+          <p:nvPr/>
+        </p:nvSpPr>
+        <p:spPr>
+          <a:xfrm xmlns:a="http://schemas.openxmlformats.org/drawingml/2006/main">
+            <a:off x="7048500" y="4114800"/>
+            <a:ext cx="2933700" cy="304800"/>
           </a:xfrm>
           <a:prstGeom xmlns:a="http://schemas.openxmlformats.org/drawingml/2006/main" prst="rect">
             <a:avLst/>
@@ -18785,25 +19202,190 @@
           <a:lstStyle xmlns:a="http://schemas.openxmlformats.org/drawingml/2006/main"/>
           <a:p xmlns:a="http://schemas.openxmlformats.org/drawingml/2006/main">
             <a:pPr algn="l">
-              <a:defRPr sz="1800" b="1">
-                <a:solidFill>
-                  <a:srgbClr val="34D399"/>
-                </a:solidFill>
-                <a:latin typeface="Aptos Display"/>
-                <a:ea typeface="Aptos Display"/>
-                <a:cs typeface="Aptos Display"/>
+              <a:defRPr sz="1350" b="0">
+                <a:solidFill>
+                  <a:srgbClr val="D8E6F3"/>
+                </a:solidFill>
+                <a:latin typeface="Aptos"/>
+                <a:ea typeface="Aptos"/>
+                <a:cs typeface="Aptos"/>
               </a:defRPr>
             </a:pPr>
             <a:r>
-              <a:rPr sz="1800" b="1">
+              <a:rPr sz="1350" b="0">
+                <a:solidFill>
+                  <a:srgbClr val="D8E6F3"/>
+                </a:solidFill>
+                <a:latin typeface="Aptos"/>
+                <a:ea typeface="Aptos"/>
+                <a:cs typeface="Aptos"/>
+              </a:rPr>
+              <a:t>Demo mode for no-key judging</a:t>
+            </a:r>
+          </a:p>
+        </p:txBody>
+      </p:sp>
+      <p:sp>
+        <p:nvSpPr>
+          <p:cNvPr id="23" name="">
+            <a:extLst xmlns:a="http://schemas.openxmlformats.org/drawingml/2006/main">
+              <a:ext uri="{FF2B5EF4-FFF2-40B4-BE49-F238E27FC236}">
+                <a16:creationId xmlns:a16="http://schemas.microsoft.com/office/drawing/2014/main" id="{5CFF29AE-D0B7-47A9-8287-682A67B976E7}"/>
+              </a:ext>
+            </a:extLst>
+          </p:cNvPr>
+          <p:cNvSpPr>
+            <a:spLocks xmlns:a="http://schemas.openxmlformats.org/drawingml/2006/main" noGrp="1"/>
+          </p:cNvSpPr>
+          <p:nvPr/>
+        </p:nvSpPr>
+        <p:spPr>
+          <a:xfrm xmlns:a="http://schemas.openxmlformats.org/drawingml/2006/main">
+            <a:off x="6838950" y="4524375"/>
+            <a:ext cx="76200" cy="76200"/>
+          </a:xfrm>
+          <a:prstGeom xmlns:a="http://schemas.openxmlformats.org/drawingml/2006/main" prst="roundRect">
+            <a:avLst>
+              <a:gd name="adj" fmla="val 50000"/>
+            </a:avLst>
+          </a:prstGeom>
+          <a:solidFill xmlns:a="http://schemas.openxmlformats.org/drawingml/2006/main">
+            <a:srgbClr val="34D399"/>
+          </a:solidFill>
+          <a:ln xmlns:a="http://schemas.openxmlformats.org/drawingml/2006/main" w="0">
+            <a:solidFill>
+              <a:srgbClr val="000000">
+                <a:alpha val="0"/>
+              </a:srgbClr>
+            </a:solidFill>
+            <a:prstDash val="solid"/>
+          </a:ln>
+        </p:spPr>
+      </p:sp>
+      <p:sp>
+        <p:nvSpPr>
+          <p:cNvPr id="24" name="">
+            <a:extLst xmlns:a="http://schemas.openxmlformats.org/drawingml/2006/main">
+              <a:ext uri="{FF2B5EF4-FFF2-40B4-BE49-F238E27FC236}">
+                <a16:creationId xmlns:a16="http://schemas.microsoft.com/office/drawing/2014/main" id="{59C48AAD-B013-4707-BCF3-754D37FCFFA9}"/>
+              </a:ext>
+            </a:extLst>
+          </p:cNvPr>
+          <p:cNvSpPr>
+            <a:spLocks xmlns:a="http://schemas.openxmlformats.org/drawingml/2006/main" noGrp="1"/>
+          </p:cNvSpPr>
+          <p:nvPr/>
+        </p:nvSpPr>
+        <p:spPr>
+          <a:xfrm xmlns:a="http://schemas.openxmlformats.org/drawingml/2006/main">
+            <a:off x="7048500" y="4438650"/>
+            <a:ext cx="2933700" cy="304800"/>
+          </a:xfrm>
+          <a:prstGeom xmlns:a="http://schemas.openxmlformats.org/drawingml/2006/main" prst="rect">
+            <a:avLst/>
+          </a:prstGeom>
+          <a:solidFill xmlns:a="http://schemas.openxmlformats.org/drawingml/2006/main">
+            <a:srgbClr val="000000">
+              <a:alpha val="0"/>
+            </a:srgbClr>
+          </a:solidFill>
+          <a:ln xmlns:a="http://schemas.openxmlformats.org/drawingml/2006/main" w="0">
+            <a:solidFill>
+              <a:srgbClr val="000000">
+                <a:alpha val="0"/>
+              </a:srgbClr>
+            </a:solidFill>
+            <a:prstDash val="solid"/>
+          </a:ln>
+        </p:spPr>
+        <p:txBody>
+          <a:bodyPr xmlns:a="http://schemas.openxmlformats.org/drawingml/2006/main"/>
+          <a:lstStyle xmlns:a="http://schemas.openxmlformats.org/drawingml/2006/main"/>
+          <a:p xmlns:a="http://schemas.openxmlformats.org/drawingml/2006/main">
+            <a:pPr algn="l">
+              <a:defRPr sz="1350" b="0">
+                <a:solidFill>
+                  <a:srgbClr val="D8E6F3"/>
+                </a:solidFill>
+                <a:latin typeface="Aptos"/>
+                <a:ea typeface="Aptos"/>
+                <a:cs typeface="Aptos"/>
+              </a:defRPr>
+            </a:pPr>
+            <a:r>
+              <a:rPr sz="1350" b="0">
+                <a:solidFill>
+                  <a:srgbClr val="D8E6F3"/>
+                </a:solidFill>
+                <a:latin typeface="Aptos"/>
+                <a:ea typeface="Aptos"/>
+                <a:cs typeface="Aptos"/>
+              </a:rPr>
+              <a:t>Safe, research-only finance output</a:t>
+            </a:r>
+          </a:p>
+        </p:txBody>
+      </p:sp>
+      <p:sp>
+        <p:nvSpPr>
+          <p:cNvPr id="25" name="">
+            <a:extLst xmlns:a="http://schemas.openxmlformats.org/drawingml/2006/main">
+              <a:ext uri="{FF2B5EF4-FFF2-40B4-BE49-F238E27FC236}">
+                <a16:creationId xmlns:a16="http://schemas.microsoft.com/office/drawing/2014/main" id="{E9EAFF7C-8491-48ED-ACBD-540528684A5D}"/>
+              </a:ext>
+            </a:extLst>
+          </p:cNvPr>
+          <p:cNvSpPr>
+            <a:spLocks xmlns:a="http://schemas.openxmlformats.org/drawingml/2006/main" noGrp="1"/>
+          </p:cNvSpPr>
+          <p:nvPr/>
+        </p:nvSpPr>
+        <p:spPr>
+          <a:xfrm xmlns:a="http://schemas.openxmlformats.org/drawingml/2006/main">
+            <a:off x="1123950" y="5353050"/>
+            <a:ext cx="9334500" cy="304800"/>
+          </a:xfrm>
+          <a:prstGeom xmlns:a="http://schemas.openxmlformats.org/drawingml/2006/main" prst="rect">
+            <a:avLst/>
+          </a:prstGeom>
+          <a:solidFill xmlns:a="http://schemas.openxmlformats.org/drawingml/2006/main">
+            <a:srgbClr val="000000">
+              <a:alpha val="0"/>
+            </a:srgbClr>
+          </a:solidFill>
+          <a:ln xmlns:a="http://schemas.openxmlformats.org/drawingml/2006/main" w="0">
+            <a:solidFill>
+              <a:srgbClr val="000000">
+                <a:alpha val="0"/>
+              </a:srgbClr>
+            </a:solidFill>
+            <a:prstDash val="solid"/>
+          </a:ln>
+        </p:spPr>
+        <p:txBody>
+          <a:bodyPr xmlns:a="http://schemas.openxmlformats.org/drawingml/2006/main"/>
+          <a:lstStyle xmlns:a="http://schemas.openxmlformats.org/drawingml/2006/main"/>
+          <a:p xmlns:a="http://schemas.openxmlformats.org/drawingml/2006/main">
+            <a:pPr algn="l">
+              <a:defRPr sz="1650" b="1">
                 <a:solidFill>
                   <a:srgbClr val="34D399"/>
                 </a:solidFill>
                 <a:latin typeface="Aptos Display"/>
                 <a:ea typeface="Aptos Display"/>
                 <a:cs typeface="Aptos Display"/>
+              </a:defRPr>
+            </a:pPr>
+            <a:r>
+              <a:rPr sz="1650" b="1">
+                <a:solidFill>
+                  <a:srgbClr val="34D399"/>
+                </a:solidFill>
+                <a:latin typeface="Aptos Display"/>
+                <a:ea typeface="Aptos Display"/>
+                <a:cs typeface="Aptos Display"/>
               </a:rPr>
-              <a:t>CapitalLens AI: a finance-track Agentic RAG system built for real-world research productivity.</a:t>
+              <a:t>Author: Sai-Vivek17 | Track: Finance | Artifact: CapitalLens AI submission PDF</a:t>
             </a:r>
           </a:p>
         </p:txBody>
@@ -18811,7 +19393,7 @@
     </p:spTree>
     <p:extLst>
       <p:ext uri="{BB962C8B-B14F-4D97-AF65-F5344CB8AC3E}">
-        <p14:creationId xmlns:p14="http://schemas.microsoft.com/office/powerpoint/2010/main" val="273223820"/>
+        <p14:creationId xmlns:p14="http://schemas.microsoft.com/office/powerpoint/2010/main" val="1041699789"/>
       </p:ext>
     </p:extLst>
   </p:cSld>
@@ -18842,7 +19424,7 @@
           <p:cNvPr id="1" name="">
             <a:extLst xmlns:a="http://schemas.openxmlformats.org/drawingml/2006/main">
               <a:ext uri="{FF2B5EF4-FFF2-40B4-BE49-F238E27FC236}">
-                <a16:creationId xmlns:a16="http://schemas.microsoft.com/office/drawing/2014/main" id="{EE4683F1-37C2-48A6-AAB9-447DBA52C0A3}"/>
+                <a16:creationId xmlns:a16="http://schemas.microsoft.com/office/drawing/2014/main" id="{DA509141-4550-49D6-88F4-D0A4900DBF5E}"/>
               </a:ext>
             </a:extLst>
           </p:cNvPr>
@@ -18877,7 +19459,7 @@
           <p:cNvPr id="2" name="">
             <a:extLst xmlns:a="http://schemas.openxmlformats.org/drawingml/2006/main">
               <a:ext uri="{FF2B5EF4-FFF2-40B4-BE49-F238E27FC236}">
-                <a16:creationId xmlns:a16="http://schemas.microsoft.com/office/drawing/2014/main" id="{D23BC1A6-9C11-499D-9DA8-67331CD9E6C2}"/>
+                <a16:creationId xmlns:a16="http://schemas.microsoft.com/office/drawing/2014/main" id="{BF1B2959-6B64-4C55-987B-DA917A8C11FA}"/>
               </a:ext>
             </a:extLst>
           </p:cNvPr>
@@ -18912,7 +19494,7 @@
           <p:cNvPr id="3" name="">
             <a:extLst xmlns:a="http://schemas.openxmlformats.org/drawingml/2006/main">
               <a:ext uri="{FF2B5EF4-FFF2-40B4-BE49-F238E27FC236}">
-                <a16:creationId xmlns:a16="http://schemas.microsoft.com/office/drawing/2014/main" id="{4F460440-B097-44B2-AF10-0B9BC186F8B2}"/>
+                <a16:creationId xmlns:a16="http://schemas.microsoft.com/office/drawing/2014/main" id="{0F546C4C-AD28-490A-8AC0-3A84A18A9D31}"/>
               </a:ext>
             </a:extLst>
           </p:cNvPr>
@@ -18947,7 +19529,7 @@
           <p:cNvPr id="4" name="">
             <a:extLst xmlns:a="http://schemas.openxmlformats.org/drawingml/2006/main">
               <a:ext uri="{FF2B5EF4-FFF2-40B4-BE49-F238E27FC236}">
-                <a16:creationId xmlns:a16="http://schemas.microsoft.com/office/drawing/2014/main" id="{3DDDE945-0377-4990-A073-3510B44892CB}"/>
+                <a16:creationId xmlns:a16="http://schemas.microsoft.com/office/drawing/2014/main" id="{423F32FD-F106-43E7-8E10-D647C9BEF53B}"/>
               </a:ext>
             </a:extLst>
           </p:cNvPr>
@@ -19011,7 +19593,7 @@
           <p:cNvPr id="5" name="">
             <a:extLst xmlns:a="http://schemas.openxmlformats.org/drawingml/2006/main">
               <a:ext uri="{FF2B5EF4-FFF2-40B4-BE49-F238E27FC236}">
-                <a16:creationId xmlns:a16="http://schemas.microsoft.com/office/drawing/2014/main" id="{73F6E5AE-C6F9-432B-88BB-A5EE24E582B2}"/>
+                <a16:creationId xmlns:a16="http://schemas.microsoft.com/office/drawing/2014/main" id="{7411457A-A92C-48AC-81C0-1756A398781F}"/>
               </a:ext>
             </a:extLst>
           </p:cNvPr>
@@ -19075,7 +19657,7 @@
           <p:cNvPr id="6" name="">
             <a:extLst xmlns:a="http://schemas.openxmlformats.org/drawingml/2006/main">
               <a:ext uri="{FF2B5EF4-FFF2-40B4-BE49-F238E27FC236}">
-                <a16:creationId xmlns:a16="http://schemas.microsoft.com/office/drawing/2014/main" id="{26C7EB35-84FF-4340-881A-06602B613667}"/>
+                <a16:creationId xmlns:a16="http://schemas.microsoft.com/office/drawing/2014/main" id="{B01288B6-6062-4143-A7DF-42E5BB7E6A4A}"/>
               </a:ext>
             </a:extLst>
           </p:cNvPr>
@@ -19110,7 +19692,7 @@
           <p:cNvPr id="7" name="">
             <a:extLst xmlns:a="http://schemas.openxmlformats.org/drawingml/2006/main">
               <a:ext uri="{FF2B5EF4-FFF2-40B4-BE49-F238E27FC236}">
-                <a16:creationId xmlns:a16="http://schemas.microsoft.com/office/drawing/2014/main" id="{A76F84C0-AFAA-4C08-9C7B-D05F1A75C4D8}"/>
+                <a16:creationId xmlns:a16="http://schemas.microsoft.com/office/drawing/2014/main" id="{467E11EB-2163-4BCA-A169-2749F69E4219}"/>
               </a:ext>
             </a:extLst>
           </p:cNvPr>
@@ -19174,7 +19756,7 @@
           <p:cNvPr id="8" name="">
             <a:extLst xmlns:a="http://schemas.openxmlformats.org/drawingml/2006/main">
               <a:ext uri="{FF2B5EF4-FFF2-40B4-BE49-F238E27FC236}">
-                <a16:creationId xmlns:a16="http://schemas.microsoft.com/office/drawing/2014/main" id="{0387EC77-CC75-4E18-84BF-9E9511BF814C}"/>
+                <a16:creationId xmlns:a16="http://schemas.microsoft.com/office/drawing/2014/main" id="{CA6E3D44-A7D7-4F63-903A-CB704331823E}"/>
               </a:ext>
             </a:extLst>
           </p:cNvPr>
@@ -19238,7 +19820,7 @@
           <p:cNvPr id="9" name="">
             <a:extLst xmlns:a="http://schemas.openxmlformats.org/drawingml/2006/main">
               <a:ext uri="{FF2B5EF4-FFF2-40B4-BE49-F238E27FC236}">
-                <a16:creationId xmlns:a16="http://schemas.microsoft.com/office/drawing/2014/main" id="{29F331DB-ABCF-4A72-A51D-B42606001C0D}"/>
+                <a16:creationId xmlns:a16="http://schemas.microsoft.com/office/drawing/2014/main" id="{40D45484-F518-4C0C-8C12-F5F517080B80}"/>
               </a:ext>
             </a:extLst>
           </p:cNvPr>
@@ -19273,7 +19855,7 @@
           <p:cNvPr id="10" name="">
             <a:extLst xmlns:a="http://schemas.openxmlformats.org/drawingml/2006/main">
               <a:ext uri="{FF2B5EF4-FFF2-40B4-BE49-F238E27FC236}">
-                <a16:creationId xmlns:a16="http://schemas.microsoft.com/office/drawing/2014/main" id="{FDBE9AC6-D7A8-4074-AEA2-09F19A32B4A1}"/>
+                <a16:creationId xmlns:a16="http://schemas.microsoft.com/office/drawing/2014/main" id="{70687D10-7D6D-4442-9FF9-5BA601C821D3}"/>
               </a:ext>
             </a:extLst>
           </p:cNvPr>
@@ -19337,7 +19919,7 @@
           <p:cNvPr id="11" name="">
             <a:extLst xmlns:a="http://schemas.openxmlformats.org/drawingml/2006/main">
               <a:ext uri="{FF2B5EF4-FFF2-40B4-BE49-F238E27FC236}">
-                <a16:creationId xmlns:a16="http://schemas.microsoft.com/office/drawing/2014/main" id="{6E57DE9F-1BB2-4EC3-95DA-6B76A3BC530D}"/>
+                <a16:creationId xmlns:a16="http://schemas.microsoft.com/office/drawing/2014/main" id="{2656FB44-1F4F-4D47-AA66-6C5CFFC50F32}"/>
               </a:ext>
             </a:extLst>
           </p:cNvPr>
@@ -19401,7 +19983,7 @@
           <p:cNvPr id="12" name="">
             <a:extLst xmlns:a="http://schemas.openxmlformats.org/drawingml/2006/main">
               <a:ext uri="{FF2B5EF4-FFF2-40B4-BE49-F238E27FC236}">
-                <a16:creationId xmlns:a16="http://schemas.microsoft.com/office/drawing/2014/main" id="{012223F0-A790-4E9B-8E2B-C59AC7B1B67A}"/>
+                <a16:creationId xmlns:a16="http://schemas.microsoft.com/office/drawing/2014/main" id="{5F3604A2-CAC9-4CEC-BEF2-D78283F2BF1D}"/>
               </a:ext>
             </a:extLst>
           </p:cNvPr>
@@ -19436,7 +20018,7 @@
           <p:cNvPr id="13" name="">
             <a:extLst xmlns:a="http://schemas.openxmlformats.org/drawingml/2006/main">
               <a:ext uri="{FF2B5EF4-FFF2-40B4-BE49-F238E27FC236}">
-                <a16:creationId xmlns:a16="http://schemas.microsoft.com/office/drawing/2014/main" id="{083A49D8-568A-4825-8564-289E9BB20F77}"/>
+                <a16:creationId xmlns:a16="http://schemas.microsoft.com/office/drawing/2014/main" id="{EFE41487-6C32-4312-A7C0-E6F390075E2F}"/>
               </a:ext>
             </a:extLst>
           </p:cNvPr>
@@ -19500,7 +20082,7 @@
           <p:cNvPr id="14" name="">
             <a:extLst xmlns:a="http://schemas.openxmlformats.org/drawingml/2006/main">
               <a:ext uri="{FF2B5EF4-FFF2-40B4-BE49-F238E27FC236}">
-                <a16:creationId xmlns:a16="http://schemas.microsoft.com/office/drawing/2014/main" id="{142C6F0E-B1B4-41A8-A0A9-A55FE3052433}"/>
+                <a16:creationId xmlns:a16="http://schemas.microsoft.com/office/drawing/2014/main" id="{C1D6E288-DFB7-47FC-A50A-46D7369EC0F7}"/>
               </a:ext>
             </a:extLst>
           </p:cNvPr>
@@ -19564,7 +20146,7 @@
           <p:cNvPr id="15" name="">
             <a:extLst xmlns:a="http://schemas.openxmlformats.org/drawingml/2006/main">
               <a:ext uri="{FF2B5EF4-FFF2-40B4-BE49-F238E27FC236}">
-                <a16:creationId xmlns:a16="http://schemas.microsoft.com/office/drawing/2014/main" id="{97321FFC-53DD-42A5-AFF3-4708B36C7BFC}"/>
+                <a16:creationId xmlns:a16="http://schemas.microsoft.com/office/drawing/2014/main" id="{5E6DB03F-79C8-4C33-A5C9-D8CF329D0C2B}"/>
               </a:ext>
             </a:extLst>
           </p:cNvPr>
@@ -19599,7 +20181,7 @@
           <p:cNvPr id="16" name="">
             <a:extLst xmlns:a="http://schemas.openxmlformats.org/drawingml/2006/main">
               <a:ext uri="{FF2B5EF4-FFF2-40B4-BE49-F238E27FC236}">
-                <a16:creationId xmlns:a16="http://schemas.microsoft.com/office/drawing/2014/main" id="{2698335D-E213-4CD5-82CA-ED54ADBEE3C8}"/>
+                <a16:creationId xmlns:a16="http://schemas.microsoft.com/office/drawing/2014/main" id="{B970A043-25E7-4634-985D-099E0D5C9A69}"/>
               </a:ext>
             </a:extLst>
           </p:cNvPr>
@@ -19663,7 +20245,7 @@
           <p:cNvPr id="17" name="">
             <a:extLst xmlns:a="http://schemas.openxmlformats.org/drawingml/2006/main">
               <a:ext uri="{FF2B5EF4-FFF2-40B4-BE49-F238E27FC236}">
-                <a16:creationId xmlns:a16="http://schemas.microsoft.com/office/drawing/2014/main" id="{82A04DC8-7594-4BE4-91F7-B697A786227F}"/>
+                <a16:creationId xmlns:a16="http://schemas.microsoft.com/office/drawing/2014/main" id="{E666F046-9AE5-4888-8DCB-1607A4C8FB05}"/>
               </a:ext>
             </a:extLst>
           </p:cNvPr>
@@ -19727,7 +20309,7 @@
           <p:cNvPr id="18" name="">
             <a:extLst xmlns:a="http://schemas.openxmlformats.org/drawingml/2006/main">
               <a:ext uri="{FF2B5EF4-FFF2-40B4-BE49-F238E27FC236}">
-                <a16:creationId xmlns:a16="http://schemas.microsoft.com/office/drawing/2014/main" id="{066E1C18-7F2F-429E-AADC-31AB4B822F91}"/>
+                <a16:creationId xmlns:a16="http://schemas.microsoft.com/office/drawing/2014/main" id="{F8586ABC-391F-41B7-AFE0-FCB910B16853}"/>
               </a:ext>
             </a:extLst>
           </p:cNvPr>
@@ -19762,7 +20344,7 @@
           <p:cNvPr id="19" name="">
             <a:extLst xmlns:a="http://schemas.openxmlformats.org/drawingml/2006/main">
               <a:ext uri="{FF2B5EF4-FFF2-40B4-BE49-F238E27FC236}">
-                <a16:creationId xmlns:a16="http://schemas.microsoft.com/office/drawing/2014/main" id="{3DA568B0-45CD-427D-8F35-0E9688B6B3D3}"/>
+                <a16:creationId xmlns:a16="http://schemas.microsoft.com/office/drawing/2014/main" id="{9E9A046E-5CB8-41F1-8AC9-55E3A5D5BF4F}"/>
               </a:ext>
             </a:extLst>
           </p:cNvPr>
@@ -19826,7 +20408,7 @@
           <p:cNvPr id="20" name="">
             <a:extLst xmlns:a="http://schemas.openxmlformats.org/drawingml/2006/main">
               <a:ext uri="{FF2B5EF4-FFF2-40B4-BE49-F238E27FC236}">
-                <a16:creationId xmlns:a16="http://schemas.microsoft.com/office/drawing/2014/main" id="{09F7936A-AA77-48A4-98BD-31154B096F7D}"/>
+                <a16:creationId xmlns:a16="http://schemas.microsoft.com/office/drawing/2014/main" id="{C4E5C146-5ACF-417A-A11E-0B69197D15B8}"/>
               </a:ext>
             </a:extLst>
           </p:cNvPr>
@@ -19890,7 +20472,7 @@
           <p:cNvPr id="21" name="">
             <a:extLst xmlns:a="http://schemas.openxmlformats.org/drawingml/2006/main">
               <a:ext uri="{FF2B5EF4-FFF2-40B4-BE49-F238E27FC236}">
-                <a16:creationId xmlns:a16="http://schemas.microsoft.com/office/drawing/2014/main" id="{4DA60868-3E43-4A33-83B3-584131BF3BA5}"/>
+                <a16:creationId xmlns:a16="http://schemas.microsoft.com/office/drawing/2014/main" id="{0F5ED2D0-BEA7-4931-BA01-97DC5D1E0459}"/>
               </a:ext>
             </a:extLst>
           </p:cNvPr>
@@ -19925,7 +20507,7 @@
           <p:cNvPr id="22" name="">
             <a:extLst xmlns:a="http://schemas.openxmlformats.org/drawingml/2006/main">
               <a:ext uri="{FF2B5EF4-FFF2-40B4-BE49-F238E27FC236}">
-                <a16:creationId xmlns:a16="http://schemas.microsoft.com/office/drawing/2014/main" id="{1F9AC3C0-C78A-4DFF-9EF0-EA3CE0A1C8A5}"/>
+                <a16:creationId xmlns:a16="http://schemas.microsoft.com/office/drawing/2014/main" id="{E221A3DD-5A7B-4B64-9073-95FCA9F24171}"/>
               </a:ext>
             </a:extLst>
           </p:cNvPr>
@@ -19987,7 +20569,7 @@
     </p:spTree>
     <p:extLst>
       <p:ext uri="{BB962C8B-B14F-4D97-AF65-F5344CB8AC3E}">
-        <p14:creationId xmlns:p14="http://schemas.microsoft.com/office/powerpoint/2010/main" val="183045850"/>
+        <p14:creationId xmlns:p14="http://schemas.microsoft.com/office/powerpoint/2010/main" val="226645042"/>
       </p:ext>
     </p:extLst>
   </p:cSld>
@@ -20018,7 +20600,7 @@
           <p:cNvPr id="1" name="">
             <a:extLst xmlns:a="http://schemas.openxmlformats.org/drawingml/2006/main">
               <a:ext uri="{FF2B5EF4-FFF2-40B4-BE49-F238E27FC236}">
-                <a16:creationId xmlns:a16="http://schemas.microsoft.com/office/drawing/2014/main" id="{E4930418-83FF-4A13-AA8E-30214DA1C915}"/>
+                <a16:creationId xmlns:a16="http://schemas.microsoft.com/office/drawing/2014/main" id="{E56C9504-B281-4DEC-8179-04AE6F67C4A3}"/>
               </a:ext>
             </a:extLst>
           </p:cNvPr>
@@ -20053,7 +20635,7 @@
           <p:cNvPr id="2" name="">
             <a:extLst xmlns:a="http://schemas.openxmlformats.org/drawingml/2006/main">
               <a:ext uri="{FF2B5EF4-FFF2-40B4-BE49-F238E27FC236}">
-                <a16:creationId xmlns:a16="http://schemas.microsoft.com/office/drawing/2014/main" id="{CEFBF8D2-B501-414D-8913-68EDBCDB0855}"/>
+                <a16:creationId xmlns:a16="http://schemas.microsoft.com/office/drawing/2014/main" id="{67D28155-55AE-4073-B4AE-1BCE9B4902A9}"/>
               </a:ext>
             </a:extLst>
           </p:cNvPr>
@@ -20088,7 +20670,7 @@
           <p:cNvPr id="3" name="">
             <a:extLst xmlns:a="http://schemas.openxmlformats.org/drawingml/2006/main">
               <a:ext uri="{FF2B5EF4-FFF2-40B4-BE49-F238E27FC236}">
-                <a16:creationId xmlns:a16="http://schemas.microsoft.com/office/drawing/2014/main" id="{328595C6-AC71-48A9-B671-05645C390D8C}"/>
+                <a16:creationId xmlns:a16="http://schemas.microsoft.com/office/drawing/2014/main" id="{39457859-446E-49E6-AD5C-BD3B74C724EC}"/>
               </a:ext>
             </a:extLst>
           </p:cNvPr>
@@ -20123,7 +20705,7 @@
           <p:cNvPr id="4" name="">
             <a:extLst xmlns:a="http://schemas.openxmlformats.org/drawingml/2006/main">
               <a:ext uri="{FF2B5EF4-FFF2-40B4-BE49-F238E27FC236}">
-                <a16:creationId xmlns:a16="http://schemas.microsoft.com/office/drawing/2014/main" id="{D58DCDD1-1667-4653-8EE5-0C4D38D7B619}"/>
+                <a16:creationId xmlns:a16="http://schemas.microsoft.com/office/drawing/2014/main" id="{BD0B147E-B685-4A63-871C-59A7967D650E}"/>
               </a:ext>
             </a:extLst>
           </p:cNvPr>
@@ -20187,7 +20769,7 @@
           <p:cNvPr id="5" name="">
             <a:extLst xmlns:a="http://schemas.openxmlformats.org/drawingml/2006/main">
               <a:ext uri="{FF2B5EF4-FFF2-40B4-BE49-F238E27FC236}">
-                <a16:creationId xmlns:a16="http://schemas.microsoft.com/office/drawing/2014/main" id="{D5D1BA04-AC34-4D1A-82AE-9F60F2400B02}"/>
+                <a16:creationId xmlns:a16="http://schemas.microsoft.com/office/drawing/2014/main" id="{7EADD8DA-E1A7-43C1-9EA0-20CF03093ADD}"/>
               </a:ext>
             </a:extLst>
           </p:cNvPr>
@@ -20251,7 +20833,7 @@
           <p:cNvPr id="6" name="">
             <a:extLst xmlns:a="http://schemas.openxmlformats.org/drawingml/2006/main">
               <a:ext uri="{FF2B5EF4-FFF2-40B4-BE49-F238E27FC236}">
-                <a16:creationId xmlns:a16="http://schemas.microsoft.com/office/drawing/2014/main" id="{455C6124-FBAA-4239-8393-51501C5B619E}"/>
+                <a16:creationId xmlns:a16="http://schemas.microsoft.com/office/drawing/2014/main" id="{C09F6375-E56B-42E6-B939-5840493128CF}"/>
               </a:ext>
             </a:extLst>
           </p:cNvPr>
@@ -20286,7 +20868,7 @@
           <p:cNvPr id="7" name="">
             <a:extLst xmlns:a="http://schemas.openxmlformats.org/drawingml/2006/main">
               <a:ext uri="{FF2B5EF4-FFF2-40B4-BE49-F238E27FC236}">
-                <a16:creationId xmlns:a16="http://schemas.microsoft.com/office/drawing/2014/main" id="{B71EF6DD-0CAC-41A9-9C49-E42270A0FC4F}"/>
+                <a16:creationId xmlns:a16="http://schemas.microsoft.com/office/drawing/2014/main" id="{B92400A1-7B13-49E3-9940-247E25B47B41}"/>
               </a:ext>
             </a:extLst>
           </p:cNvPr>
@@ -20350,7 +20932,7 @@
           <p:cNvPr id="8" name="">
             <a:extLst xmlns:a="http://schemas.openxmlformats.org/drawingml/2006/main">
               <a:ext uri="{FF2B5EF4-FFF2-40B4-BE49-F238E27FC236}">
-                <a16:creationId xmlns:a16="http://schemas.microsoft.com/office/drawing/2014/main" id="{AFD2EB58-E7F3-4E1B-93D2-7ABDECE12347}"/>
+                <a16:creationId xmlns:a16="http://schemas.microsoft.com/office/drawing/2014/main" id="{68457E7C-E9B9-477E-BCF5-DA26D7049412}"/>
               </a:ext>
             </a:extLst>
           </p:cNvPr>
@@ -20414,7 +20996,7 @@
           <p:cNvPr id="9" name="">
             <a:extLst xmlns:a="http://schemas.openxmlformats.org/drawingml/2006/main">
               <a:ext uri="{FF2B5EF4-FFF2-40B4-BE49-F238E27FC236}">
-                <a16:creationId xmlns:a16="http://schemas.microsoft.com/office/drawing/2014/main" id="{48ABBD8B-8B10-480F-8495-D4DE31C51B6D}"/>
+                <a16:creationId xmlns:a16="http://schemas.microsoft.com/office/drawing/2014/main" id="{BD83149D-F357-4E9B-8135-04B6DA9A3998}"/>
               </a:ext>
             </a:extLst>
           </p:cNvPr>
@@ -20449,7 +21031,7 @@
           <p:cNvPr id="10" name="">
             <a:extLst xmlns:a="http://schemas.openxmlformats.org/drawingml/2006/main">
               <a:ext uri="{FF2B5EF4-FFF2-40B4-BE49-F238E27FC236}">
-                <a16:creationId xmlns:a16="http://schemas.microsoft.com/office/drawing/2014/main" id="{E4F32613-87CF-4AD8-BB0D-A2952A3594BB}"/>
+                <a16:creationId xmlns:a16="http://schemas.microsoft.com/office/drawing/2014/main" id="{551CBCD1-261E-4C36-89FB-5BCD02643B8F}"/>
               </a:ext>
             </a:extLst>
           </p:cNvPr>
@@ -20513,7 +21095,7 @@
           <p:cNvPr id="11" name="">
             <a:extLst xmlns:a="http://schemas.openxmlformats.org/drawingml/2006/main">
               <a:ext uri="{FF2B5EF4-FFF2-40B4-BE49-F238E27FC236}">
-                <a16:creationId xmlns:a16="http://schemas.microsoft.com/office/drawing/2014/main" id="{5AD4F612-AE28-4682-8E9C-10D5F72125CE}"/>
+                <a16:creationId xmlns:a16="http://schemas.microsoft.com/office/drawing/2014/main" id="{CF5965B9-1FCC-409D-8B94-4F6CCD1B4D41}"/>
               </a:ext>
             </a:extLst>
           </p:cNvPr>
@@ -20577,7 +21159,7 @@
           <p:cNvPr id="12" name="">
             <a:extLst xmlns:a="http://schemas.openxmlformats.org/drawingml/2006/main">
               <a:ext uri="{FF2B5EF4-FFF2-40B4-BE49-F238E27FC236}">
-                <a16:creationId xmlns:a16="http://schemas.microsoft.com/office/drawing/2014/main" id="{357CD5A3-B9B8-4D1A-8DB8-3A8D5F748022}"/>
+                <a16:creationId xmlns:a16="http://schemas.microsoft.com/office/drawing/2014/main" id="{81B2B640-0980-4D7A-B25D-EB03AC6C8B52}"/>
               </a:ext>
             </a:extLst>
           </p:cNvPr>
@@ -20612,7 +21194,7 @@
           <p:cNvPr id="13" name="">
             <a:extLst xmlns:a="http://schemas.openxmlformats.org/drawingml/2006/main">
               <a:ext uri="{FF2B5EF4-FFF2-40B4-BE49-F238E27FC236}">
-                <a16:creationId xmlns:a16="http://schemas.microsoft.com/office/drawing/2014/main" id="{E5B31585-B8EA-4086-A650-C4A0DF6373DD}"/>
+                <a16:creationId xmlns:a16="http://schemas.microsoft.com/office/drawing/2014/main" id="{37E0D858-7CB8-4316-9D19-9FB3460A73CF}"/>
               </a:ext>
             </a:extLst>
           </p:cNvPr>
@@ -20676,7 +21258,7 @@
           <p:cNvPr id="14" name="">
             <a:extLst xmlns:a="http://schemas.openxmlformats.org/drawingml/2006/main">
               <a:ext uri="{FF2B5EF4-FFF2-40B4-BE49-F238E27FC236}">
-                <a16:creationId xmlns:a16="http://schemas.microsoft.com/office/drawing/2014/main" id="{86853F8D-BF10-49F8-8B1E-8AACA9246E43}"/>
+                <a16:creationId xmlns:a16="http://schemas.microsoft.com/office/drawing/2014/main" id="{ECE05D15-BF9E-40C9-A3F2-1936A98F5FD9}"/>
               </a:ext>
             </a:extLst>
           </p:cNvPr>
@@ -20740,7 +21322,7 @@
           <p:cNvPr id="15" name="">
             <a:extLst xmlns:a="http://schemas.openxmlformats.org/drawingml/2006/main">
               <a:ext uri="{FF2B5EF4-FFF2-40B4-BE49-F238E27FC236}">
-                <a16:creationId xmlns:a16="http://schemas.microsoft.com/office/drawing/2014/main" id="{952A55FD-AC9B-4AEE-9524-A655F47CC5A2}"/>
+                <a16:creationId xmlns:a16="http://schemas.microsoft.com/office/drawing/2014/main" id="{80AD1856-D8BB-4573-95E8-DA94E8B31038}"/>
               </a:ext>
             </a:extLst>
           </p:cNvPr>
@@ -20775,7 +21357,7 @@
           <p:cNvPr id="16" name="">
             <a:extLst xmlns:a="http://schemas.openxmlformats.org/drawingml/2006/main">
               <a:ext uri="{FF2B5EF4-FFF2-40B4-BE49-F238E27FC236}">
-                <a16:creationId xmlns:a16="http://schemas.microsoft.com/office/drawing/2014/main" id="{D8BC086E-4F5C-43D4-B464-B0218CF9C2D0}"/>
+                <a16:creationId xmlns:a16="http://schemas.microsoft.com/office/drawing/2014/main" id="{86FBC5CA-9F13-47D3-A864-CB1A75B8E36B}"/>
               </a:ext>
             </a:extLst>
           </p:cNvPr>
@@ -20839,7 +21421,7 @@
           <p:cNvPr id="17" name="">
             <a:extLst xmlns:a="http://schemas.openxmlformats.org/drawingml/2006/main">
               <a:ext uri="{FF2B5EF4-FFF2-40B4-BE49-F238E27FC236}">
-                <a16:creationId xmlns:a16="http://schemas.microsoft.com/office/drawing/2014/main" id="{463672A3-904B-43A9-ABAD-2A38F7DFD50C}"/>
+                <a16:creationId xmlns:a16="http://schemas.microsoft.com/office/drawing/2014/main" id="{896773CE-5CB7-463B-A477-ADDF3A40FEAB}"/>
               </a:ext>
             </a:extLst>
           </p:cNvPr>
@@ -20903,7 +21485,7 @@
           <p:cNvPr id="18" name="">
             <a:extLst xmlns:a="http://schemas.openxmlformats.org/drawingml/2006/main">
               <a:ext uri="{FF2B5EF4-FFF2-40B4-BE49-F238E27FC236}">
-                <a16:creationId xmlns:a16="http://schemas.microsoft.com/office/drawing/2014/main" id="{56B5EF18-2727-4D88-B988-23D9D24056BC}"/>
+                <a16:creationId xmlns:a16="http://schemas.microsoft.com/office/drawing/2014/main" id="{A82D93FB-19B2-4043-A4C4-37A8136EAE53}"/>
               </a:ext>
             </a:extLst>
           </p:cNvPr>
@@ -20938,7 +21520,7 @@
           <p:cNvPr id="19" name="">
             <a:extLst xmlns:a="http://schemas.openxmlformats.org/drawingml/2006/main">
               <a:ext uri="{FF2B5EF4-FFF2-40B4-BE49-F238E27FC236}">
-                <a16:creationId xmlns:a16="http://schemas.microsoft.com/office/drawing/2014/main" id="{F771D9BB-0BE6-493E-9E32-66E0A8BB2C29}"/>
+                <a16:creationId xmlns:a16="http://schemas.microsoft.com/office/drawing/2014/main" id="{3C4EEF59-89E3-4B86-8D42-EFD665438D76}"/>
               </a:ext>
             </a:extLst>
           </p:cNvPr>
@@ -21002,7 +21584,7 @@
           <p:cNvPr id="20" name="">
             <a:extLst xmlns:a="http://schemas.openxmlformats.org/drawingml/2006/main">
               <a:ext uri="{FF2B5EF4-FFF2-40B4-BE49-F238E27FC236}">
-                <a16:creationId xmlns:a16="http://schemas.microsoft.com/office/drawing/2014/main" id="{901639D3-FB38-4866-B435-C414D672660D}"/>
+                <a16:creationId xmlns:a16="http://schemas.microsoft.com/office/drawing/2014/main" id="{0035A5CF-552F-4305-B0AD-875C65B1447B}"/>
               </a:ext>
             </a:extLst>
           </p:cNvPr>
@@ -21066,7 +21648,7 @@
           <p:cNvPr id="21" name="">
             <a:extLst xmlns:a="http://schemas.openxmlformats.org/drawingml/2006/main">
               <a:ext uri="{FF2B5EF4-FFF2-40B4-BE49-F238E27FC236}">
-                <a16:creationId xmlns:a16="http://schemas.microsoft.com/office/drawing/2014/main" id="{BD96D2A4-39CB-45B9-8830-309D19D818B0}"/>
+                <a16:creationId xmlns:a16="http://schemas.microsoft.com/office/drawing/2014/main" id="{46D25736-8D40-4AE1-8FD1-08A6EE005171}"/>
               </a:ext>
             </a:extLst>
           </p:cNvPr>
@@ -21101,7 +21683,7 @@
           <p:cNvPr id="22" name="">
             <a:extLst xmlns:a="http://schemas.openxmlformats.org/drawingml/2006/main">
               <a:ext uri="{FF2B5EF4-FFF2-40B4-BE49-F238E27FC236}">
-                <a16:creationId xmlns:a16="http://schemas.microsoft.com/office/drawing/2014/main" id="{CD4116EA-C1CD-4939-9030-6A8AB119B287}"/>
+                <a16:creationId xmlns:a16="http://schemas.microsoft.com/office/drawing/2014/main" id="{B6977519-CB9B-4D03-9572-E3D06E0C1DA3}"/>
               </a:ext>
             </a:extLst>
           </p:cNvPr>
@@ -21165,7 +21747,7 @@
           <p:cNvPr id="23" name="">
             <a:extLst xmlns:a="http://schemas.openxmlformats.org/drawingml/2006/main">
               <a:ext uri="{FF2B5EF4-FFF2-40B4-BE49-F238E27FC236}">
-                <a16:creationId xmlns:a16="http://schemas.microsoft.com/office/drawing/2014/main" id="{65F94C10-1BA0-4EE3-A53B-43218F8A5720}"/>
+                <a16:creationId xmlns:a16="http://schemas.microsoft.com/office/drawing/2014/main" id="{AF2E3C3E-DAD9-4779-B20F-A210E5FE2115}"/>
               </a:ext>
             </a:extLst>
           </p:cNvPr>
@@ -21229,7 +21811,7 @@
           <p:cNvPr id="24" name="">
             <a:extLst xmlns:a="http://schemas.openxmlformats.org/drawingml/2006/main">
               <a:ext uri="{FF2B5EF4-FFF2-40B4-BE49-F238E27FC236}">
-                <a16:creationId xmlns:a16="http://schemas.microsoft.com/office/drawing/2014/main" id="{8116FFBD-B228-402F-BAB5-427448EA8737}"/>
+                <a16:creationId xmlns:a16="http://schemas.microsoft.com/office/drawing/2014/main" id="{6CBF0785-4714-459A-8D13-49385F2931EB}"/>
               </a:ext>
             </a:extLst>
           </p:cNvPr>
@@ -21264,7 +21846,7 @@
           <p:cNvPr id="25" name="">
             <a:extLst xmlns:a="http://schemas.openxmlformats.org/drawingml/2006/main">
               <a:ext uri="{FF2B5EF4-FFF2-40B4-BE49-F238E27FC236}">
-                <a16:creationId xmlns:a16="http://schemas.microsoft.com/office/drawing/2014/main" id="{5B74F26E-4091-4800-BB51-BDC7218228FA}"/>
+                <a16:creationId xmlns:a16="http://schemas.microsoft.com/office/drawing/2014/main" id="{F00FE7D2-F9EA-4DF3-AFC3-9E091D530320}"/>
               </a:ext>
             </a:extLst>
           </p:cNvPr>
@@ -21328,7 +21910,7 @@
           <p:cNvPr id="26" name="">
             <a:extLst xmlns:a="http://schemas.openxmlformats.org/drawingml/2006/main">
               <a:ext uri="{FF2B5EF4-FFF2-40B4-BE49-F238E27FC236}">
-                <a16:creationId xmlns:a16="http://schemas.microsoft.com/office/drawing/2014/main" id="{70227064-E35F-41F8-8F3A-BF6F73F8B47D}"/>
+                <a16:creationId xmlns:a16="http://schemas.microsoft.com/office/drawing/2014/main" id="{6A6C66E3-E2A9-4191-AABD-1E20F89DA6A0}"/>
               </a:ext>
             </a:extLst>
           </p:cNvPr>
@@ -21392,7 +21974,7 @@
           <p:cNvPr id="27" name="">
             <a:extLst xmlns:a="http://schemas.openxmlformats.org/drawingml/2006/main">
               <a:ext uri="{FF2B5EF4-FFF2-40B4-BE49-F238E27FC236}">
-                <a16:creationId xmlns:a16="http://schemas.microsoft.com/office/drawing/2014/main" id="{D2A1A30A-DAA4-4C2C-8BC6-53996D8E33DE}"/>
+                <a16:creationId xmlns:a16="http://schemas.microsoft.com/office/drawing/2014/main" id="{DDBA5B73-F861-4D38-9D45-A02F91AE5304}"/>
               </a:ext>
             </a:extLst>
           </p:cNvPr>
@@ -21427,7 +22009,7 @@
           <p:cNvPr id="28" name="">
             <a:extLst xmlns:a="http://schemas.openxmlformats.org/drawingml/2006/main">
               <a:ext uri="{FF2B5EF4-FFF2-40B4-BE49-F238E27FC236}">
-                <a16:creationId xmlns:a16="http://schemas.microsoft.com/office/drawing/2014/main" id="{61B2EC64-BB07-44A3-B339-CE653ABBD88F}"/>
+                <a16:creationId xmlns:a16="http://schemas.microsoft.com/office/drawing/2014/main" id="{1CAA78D9-83B0-45F5-AC81-B4560C2A7DA7}"/>
               </a:ext>
             </a:extLst>
           </p:cNvPr>
@@ -21491,7 +22073,7 @@
           <p:cNvPr id="29" name="">
             <a:extLst xmlns:a="http://schemas.openxmlformats.org/drawingml/2006/main">
               <a:ext uri="{FF2B5EF4-FFF2-40B4-BE49-F238E27FC236}">
-                <a16:creationId xmlns:a16="http://schemas.microsoft.com/office/drawing/2014/main" id="{23E01FC8-015B-4F36-B5D3-AB64EF9DAB17}"/>
+                <a16:creationId xmlns:a16="http://schemas.microsoft.com/office/drawing/2014/main" id="{52A014B2-1D54-42D1-B093-937FD0C60C1A}"/>
               </a:ext>
             </a:extLst>
           </p:cNvPr>
@@ -21528,7 +22110,7 @@
           <p:cNvPr id="30" name="">
             <a:extLst xmlns:a="http://schemas.openxmlformats.org/drawingml/2006/main">
               <a:ext uri="{FF2B5EF4-FFF2-40B4-BE49-F238E27FC236}">
-                <a16:creationId xmlns:a16="http://schemas.microsoft.com/office/drawing/2014/main" id="{41B9E2B3-8F65-4DA6-B998-BC749F9E65DB}"/>
+                <a16:creationId xmlns:a16="http://schemas.microsoft.com/office/drawing/2014/main" id="{F9D232C7-419C-4DD0-BE9C-1980B2C5B3F7}"/>
               </a:ext>
             </a:extLst>
           </p:cNvPr>
@@ -21592,7 +22174,7 @@
           <p:cNvPr id="31" name="">
             <a:extLst xmlns:a="http://schemas.openxmlformats.org/drawingml/2006/main">
               <a:ext uri="{FF2B5EF4-FFF2-40B4-BE49-F238E27FC236}">
-                <a16:creationId xmlns:a16="http://schemas.microsoft.com/office/drawing/2014/main" id="{E420309D-8E8C-43F2-917B-B03DDA0C01A3}"/>
+                <a16:creationId xmlns:a16="http://schemas.microsoft.com/office/drawing/2014/main" id="{B54389CC-1CC6-4EF2-8951-5B45CBC050EE}"/>
               </a:ext>
             </a:extLst>
           </p:cNvPr>
@@ -21629,7 +22211,7 @@
           <p:cNvPr id="32" name="">
             <a:extLst xmlns:a="http://schemas.openxmlformats.org/drawingml/2006/main">
               <a:ext uri="{FF2B5EF4-FFF2-40B4-BE49-F238E27FC236}">
-                <a16:creationId xmlns:a16="http://schemas.microsoft.com/office/drawing/2014/main" id="{3CAEA821-D01F-46DB-AA9B-5C3BF41882F3}"/>
+                <a16:creationId xmlns:a16="http://schemas.microsoft.com/office/drawing/2014/main" id="{673080BA-5AFA-4CE7-94A2-25B08D438561}"/>
               </a:ext>
             </a:extLst>
           </p:cNvPr>
@@ -21693,7 +22275,7 @@
           <p:cNvPr id="33" name="">
             <a:extLst xmlns:a="http://schemas.openxmlformats.org/drawingml/2006/main">
               <a:ext uri="{FF2B5EF4-FFF2-40B4-BE49-F238E27FC236}">
-                <a16:creationId xmlns:a16="http://schemas.microsoft.com/office/drawing/2014/main" id="{93C0EBFF-F782-4AE3-BD27-C399F7CA633A}"/>
+                <a16:creationId xmlns:a16="http://schemas.microsoft.com/office/drawing/2014/main" id="{D9D38007-540C-42A9-ABB7-C0D862AFD35C}"/>
               </a:ext>
             </a:extLst>
           </p:cNvPr>
@@ -21730,7 +22312,7 @@
           <p:cNvPr id="34" name="">
             <a:extLst xmlns:a="http://schemas.openxmlformats.org/drawingml/2006/main">
               <a:ext uri="{FF2B5EF4-FFF2-40B4-BE49-F238E27FC236}">
-                <a16:creationId xmlns:a16="http://schemas.microsoft.com/office/drawing/2014/main" id="{4CCD463F-CFC1-4092-B82F-5611A4E952CA}"/>
+                <a16:creationId xmlns:a16="http://schemas.microsoft.com/office/drawing/2014/main" id="{877C90E7-3181-4F95-A156-0CF97622F157}"/>
               </a:ext>
             </a:extLst>
           </p:cNvPr>
@@ -21792,7 +22374,7 @@
     </p:spTree>
     <p:extLst>
       <p:ext uri="{BB962C8B-B14F-4D97-AF65-F5344CB8AC3E}">
-        <p14:creationId xmlns:p14="http://schemas.microsoft.com/office/powerpoint/2010/main" val="1358781643"/>
+        <p14:creationId xmlns:p14="http://schemas.microsoft.com/office/powerpoint/2010/main" val="2091176952"/>
       </p:ext>
     </p:extLst>
   </p:cSld>
@@ -21823,7 +22405,7 @@
           <p:cNvPr id="1" name="">
             <a:extLst xmlns:a="http://schemas.openxmlformats.org/drawingml/2006/main">
               <a:ext uri="{FF2B5EF4-FFF2-40B4-BE49-F238E27FC236}">
-                <a16:creationId xmlns:a16="http://schemas.microsoft.com/office/drawing/2014/main" id="{6A5F5F18-03ED-4592-9A2E-A2397F711BA7}"/>
+                <a16:creationId xmlns:a16="http://schemas.microsoft.com/office/drawing/2014/main" id="{52394A42-358A-4F25-87B8-D4DFDD605907}"/>
               </a:ext>
             </a:extLst>
           </p:cNvPr>
@@ -21858,7 +22440,7 @@
           <p:cNvPr id="2" name="">
             <a:extLst xmlns:a="http://schemas.openxmlformats.org/drawingml/2006/main">
               <a:ext uri="{FF2B5EF4-FFF2-40B4-BE49-F238E27FC236}">
-                <a16:creationId xmlns:a16="http://schemas.microsoft.com/office/drawing/2014/main" id="{88023B8C-6256-4E40-904E-B07D0C668BFA}"/>
+                <a16:creationId xmlns:a16="http://schemas.microsoft.com/office/drawing/2014/main" id="{1F9F1A58-012E-4EC4-948C-2A1C20B787D5}"/>
               </a:ext>
             </a:extLst>
           </p:cNvPr>
@@ -21893,7 +22475,7 @@
           <p:cNvPr id="3" name="">
             <a:extLst xmlns:a="http://schemas.openxmlformats.org/drawingml/2006/main">
               <a:ext uri="{FF2B5EF4-FFF2-40B4-BE49-F238E27FC236}">
-                <a16:creationId xmlns:a16="http://schemas.microsoft.com/office/drawing/2014/main" id="{48AC6CC8-92AC-445F-96F1-8AA911985276}"/>
+                <a16:creationId xmlns:a16="http://schemas.microsoft.com/office/drawing/2014/main" id="{1D060FF1-45A9-44F3-9E4C-A366BDCE7BBC}"/>
               </a:ext>
             </a:extLst>
           </p:cNvPr>
@@ -21928,7 +22510,7 @@
           <p:cNvPr id="4" name="">
             <a:extLst xmlns:a="http://schemas.openxmlformats.org/drawingml/2006/main">
               <a:ext uri="{FF2B5EF4-FFF2-40B4-BE49-F238E27FC236}">
-                <a16:creationId xmlns:a16="http://schemas.microsoft.com/office/drawing/2014/main" id="{B2C499F6-5DC6-40ED-AC83-2DEEBD829338}"/>
+                <a16:creationId xmlns:a16="http://schemas.microsoft.com/office/drawing/2014/main" id="{85D30F10-A701-467B-87E4-DC98804A32BC}"/>
               </a:ext>
             </a:extLst>
           </p:cNvPr>
@@ -21992,7 +22574,7 @@
           <p:cNvPr id="5" name="">
             <a:extLst xmlns:a="http://schemas.openxmlformats.org/drawingml/2006/main">
               <a:ext uri="{FF2B5EF4-FFF2-40B4-BE49-F238E27FC236}">
-                <a16:creationId xmlns:a16="http://schemas.microsoft.com/office/drawing/2014/main" id="{70C88C69-E3A3-418A-99CF-07FAFBC93B54}"/>
+                <a16:creationId xmlns:a16="http://schemas.microsoft.com/office/drawing/2014/main" id="{F3E09529-86E3-4091-BA7C-EA6E5D2E2642}"/>
               </a:ext>
             </a:extLst>
           </p:cNvPr>
@@ -22056,7 +22638,7 @@
           <p:cNvPr id="6" name="">
             <a:extLst xmlns:a="http://schemas.openxmlformats.org/drawingml/2006/main">
               <a:ext uri="{FF2B5EF4-FFF2-40B4-BE49-F238E27FC236}">
-                <a16:creationId xmlns:a16="http://schemas.microsoft.com/office/drawing/2014/main" id="{51812542-E54B-49DC-8EE3-5E4FF60C5199}"/>
+                <a16:creationId xmlns:a16="http://schemas.microsoft.com/office/drawing/2014/main" id="{08A38566-5A9E-475F-AABF-4D9EF0A0FACB}"/>
               </a:ext>
             </a:extLst>
           </p:cNvPr>
@@ -22091,7 +22673,7 @@
           <p:cNvPr id="7" name="">
             <a:extLst xmlns:a="http://schemas.openxmlformats.org/drawingml/2006/main">
               <a:ext uri="{FF2B5EF4-FFF2-40B4-BE49-F238E27FC236}">
-                <a16:creationId xmlns:a16="http://schemas.microsoft.com/office/drawing/2014/main" id="{700FC5CB-0872-44B6-9B81-F72F5C00A4E7}"/>
+                <a16:creationId xmlns:a16="http://schemas.microsoft.com/office/drawing/2014/main" id="{7E8D283C-21D9-4358-94D1-6E916A4339B9}"/>
               </a:ext>
             </a:extLst>
           </p:cNvPr>
@@ -22155,7 +22737,7 @@
           <p:cNvPr id="8" name="">
             <a:extLst xmlns:a="http://schemas.openxmlformats.org/drawingml/2006/main">
               <a:ext uri="{FF2B5EF4-FFF2-40B4-BE49-F238E27FC236}">
-                <a16:creationId xmlns:a16="http://schemas.microsoft.com/office/drawing/2014/main" id="{6B85BCEA-E9F5-4C26-9FAD-11F48C96E39D}"/>
+                <a16:creationId xmlns:a16="http://schemas.microsoft.com/office/drawing/2014/main" id="{0522A933-AC0C-4C67-B3A5-D4EC705C3195}"/>
               </a:ext>
             </a:extLst>
           </p:cNvPr>
@@ -22223,7 +22805,7 @@
           <p:nvPr/>
         </p:nvPicPr>
         <p:blipFill>
-          <a:blip xmlns:r="http://schemas.openxmlformats.org/officeDocument/2006/relationships" xmlns:a="http://schemas.openxmlformats.org/drawingml/2006/main" r:embed="R59103d763d8d406c"/>
+          <a:blip xmlns:r="http://schemas.openxmlformats.org/officeDocument/2006/relationships" xmlns:a="http://schemas.openxmlformats.org/drawingml/2006/main" r:embed="R26eddfdfa4024508"/>
           <a:stretch xmlns:a="http://schemas.openxmlformats.org/drawingml/2006/main"/>
         </p:blipFill>
         <p:spPr>
@@ -22241,7 +22823,7 @@
           <p:cNvPr id="10" name="">
             <a:extLst xmlns:a="http://schemas.openxmlformats.org/drawingml/2006/main">
               <a:ext uri="{FF2B5EF4-FFF2-40B4-BE49-F238E27FC236}">
-                <a16:creationId xmlns:a16="http://schemas.microsoft.com/office/drawing/2014/main" id="{121E90DC-B1B0-4892-84B2-3495193310A0}"/>
+                <a16:creationId xmlns:a16="http://schemas.microsoft.com/office/drawing/2014/main" id="{6FC3132C-EC0C-4765-97AD-8E4C5A9A86E8}"/>
               </a:ext>
             </a:extLst>
           </p:cNvPr>
@@ -22278,7 +22860,7 @@
           <p:cNvPr id="11" name="">
             <a:extLst xmlns:a="http://schemas.openxmlformats.org/drawingml/2006/main">
               <a:ext uri="{FF2B5EF4-FFF2-40B4-BE49-F238E27FC236}">
-                <a16:creationId xmlns:a16="http://schemas.microsoft.com/office/drawing/2014/main" id="{908DEC38-7B61-4E2F-B0C6-0B31D298B872}"/>
+                <a16:creationId xmlns:a16="http://schemas.microsoft.com/office/drawing/2014/main" id="{C3867A24-6C87-43CE-B92A-AB2B93290FDC}"/>
               </a:ext>
             </a:extLst>
           </p:cNvPr>
@@ -22315,7 +22897,7 @@
           <p:cNvPr id="12" name="">
             <a:extLst xmlns:a="http://schemas.openxmlformats.org/drawingml/2006/main">
               <a:ext uri="{FF2B5EF4-FFF2-40B4-BE49-F238E27FC236}">
-                <a16:creationId xmlns:a16="http://schemas.microsoft.com/office/drawing/2014/main" id="{F44100E5-2D6E-4183-B505-E9E969A5577D}"/>
+                <a16:creationId xmlns:a16="http://schemas.microsoft.com/office/drawing/2014/main" id="{538CB7A3-3319-4EFB-8172-7AAB0A737E19}"/>
               </a:ext>
             </a:extLst>
           </p:cNvPr>
@@ -22379,7 +22961,7 @@
           <p:cNvPr id="13" name="">
             <a:extLst xmlns:a="http://schemas.openxmlformats.org/drawingml/2006/main">
               <a:ext uri="{FF2B5EF4-FFF2-40B4-BE49-F238E27FC236}">
-                <a16:creationId xmlns:a16="http://schemas.microsoft.com/office/drawing/2014/main" id="{28431018-C839-4E9E-99D4-811EA209BFE5}"/>
+                <a16:creationId xmlns:a16="http://schemas.microsoft.com/office/drawing/2014/main" id="{D3B97792-E6B3-4CFA-92F3-EB6F75C84FE3}"/>
               </a:ext>
             </a:extLst>
           </p:cNvPr>
@@ -22416,7 +22998,7 @@
           <p:cNvPr id="14" name="">
             <a:extLst xmlns:a="http://schemas.openxmlformats.org/drawingml/2006/main">
               <a:ext uri="{FF2B5EF4-FFF2-40B4-BE49-F238E27FC236}">
-                <a16:creationId xmlns:a16="http://schemas.microsoft.com/office/drawing/2014/main" id="{A892D071-3420-4BD5-A189-1CB255B566F8}"/>
+                <a16:creationId xmlns:a16="http://schemas.microsoft.com/office/drawing/2014/main" id="{107ECA55-D670-44B6-B56A-E52FB7084380}"/>
               </a:ext>
             </a:extLst>
           </p:cNvPr>
@@ -22480,7 +23062,7 @@
           <p:cNvPr id="15" name="">
             <a:extLst xmlns:a="http://schemas.openxmlformats.org/drawingml/2006/main">
               <a:ext uri="{FF2B5EF4-FFF2-40B4-BE49-F238E27FC236}">
-                <a16:creationId xmlns:a16="http://schemas.microsoft.com/office/drawing/2014/main" id="{7E4F46D6-0F58-4717-ACFB-3319218A62AF}"/>
+                <a16:creationId xmlns:a16="http://schemas.microsoft.com/office/drawing/2014/main" id="{A45F3BC5-6D5E-438A-AC7F-2964D07440A7}"/>
               </a:ext>
             </a:extLst>
           </p:cNvPr>
@@ -22517,7 +23099,7 @@
           <p:cNvPr id="16" name="">
             <a:extLst xmlns:a="http://schemas.openxmlformats.org/drawingml/2006/main">
               <a:ext uri="{FF2B5EF4-FFF2-40B4-BE49-F238E27FC236}">
-                <a16:creationId xmlns:a16="http://schemas.microsoft.com/office/drawing/2014/main" id="{25B4B964-E39B-4474-9B1D-DD07DCAD382B}"/>
+                <a16:creationId xmlns:a16="http://schemas.microsoft.com/office/drawing/2014/main" id="{17DBE20D-93EF-4A7F-9FA3-3B06672B6278}"/>
               </a:ext>
             </a:extLst>
           </p:cNvPr>
@@ -22579,7 +23161,7 @@
     </p:spTree>
     <p:extLst>
       <p:ext uri="{BB962C8B-B14F-4D97-AF65-F5344CB8AC3E}">
-        <p14:creationId xmlns:p14="http://schemas.microsoft.com/office/powerpoint/2010/main" val="386273689"/>
+        <p14:creationId xmlns:p14="http://schemas.microsoft.com/office/powerpoint/2010/main" val="1349735490"/>
       </p:ext>
     </p:extLst>
   </p:cSld>
@@ -22610,7 +23192,7 @@
           <p:cNvPr id="1" name="">
             <a:extLst xmlns:a="http://schemas.openxmlformats.org/drawingml/2006/main">
               <a:ext uri="{FF2B5EF4-FFF2-40B4-BE49-F238E27FC236}">
-                <a16:creationId xmlns:a16="http://schemas.microsoft.com/office/drawing/2014/main" id="{7AF1A48D-1DF2-4B6D-A1DA-11234613B992}"/>
+                <a16:creationId xmlns:a16="http://schemas.microsoft.com/office/drawing/2014/main" id="{A7E1F8F7-4A52-427F-A9F1-BC3A22889859}"/>
               </a:ext>
             </a:extLst>
           </p:cNvPr>
@@ -22645,7 +23227,7 @@
           <p:cNvPr id="2" name="">
             <a:extLst xmlns:a="http://schemas.openxmlformats.org/drawingml/2006/main">
               <a:ext uri="{FF2B5EF4-FFF2-40B4-BE49-F238E27FC236}">
-                <a16:creationId xmlns:a16="http://schemas.microsoft.com/office/drawing/2014/main" id="{BD140D92-D968-41F8-B9AC-A8739B8A3DA5}"/>
+                <a16:creationId xmlns:a16="http://schemas.microsoft.com/office/drawing/2014/main" id="{61E9CBE0-2B96-4749-A21E-F1A13BDAC73A}"/>
               </a:ext>
             </a:extLst>
           </p:cNvPr>
@@ -22680,7 +23262,7 @@
           <p:cNvPr id="3" name="">
             <a:extLst xmlns:a="http://schemas.openxmlformats.org/drawingml/2006/main">
               <a:ext uri="{FF2B5EF4-FFF2-40B4-BE49-F238E27FC236}">
-                <a16:creationId xmlns:a16="http://schemas.microsoft.com/office/drawing/2014/main" id="{CDCFE2F9-7A84-4AB5-A9BB-83F4FDF71279}"/>
+                <a16:creationId xmlns:a16="http://schemas.microsoft.com/office/drawing/2014/main" id="{67BDB069-2A50-4E1D-A5BB-306BDB18A2C7}"/>
               </a:ext>
             </a:extLst>
           </p:cNvPr>
@@ -22715,7 +23297,7 @@
           <p:cNvPr id="4" name="">
             <a:extLst xmlns:a="http://schemas.openxmlformats.org/drawingml/2006/main">
               <a:ext uri="{FF2B5EF4-FFF2-40B4-BE49-F238E27FC236}">
-                <a16:creationId xmlns:a16="http://schemas.microsoft.com/office/drawing/2014/main" id="{6FE94C8F-42ED-43C1-AEFA-464334B6CA4E}"/>
+                <a16:creationId xmlns:a16="http://schemas.microsoft.com/office/drawing/2014/main" id="{C8558449-200A-45F5-996A-FE69EA7A613A}"/>
               </a:ext>
             </a:extLst>
           </p:cNvPr>
@@ -22779,7 +23361,7 @@
           <p:cNvPr id="5" name="">
             <a:extLst xmlns:a="http://schemas.openxmlformats.org/drawingml/2006/main">
               <a:ext uri="{FF2B5EF4-FFF2-40B4-BE49-F238E27FC236}">
-                <a16:creationId xmlns:a16="http://schemas.microsoft.com/office/drawing/2014/main" id="{6EC91E1D-F174-4873-8F2E-DEC6626D6A1C}"/>
+                <a16:creationId xmlns:a16="http://schemas.microsoft.com/office/drawing/2014/main" id="{01CEE8FF-43B0-4361-9C52-A8AC880B3FEE}"/>
               </a:ext>
             </a:extLst>
           </p:cNvPr>
@@ -22843,7 +23425,7 @@
           <p:cNvPr id="6" name="">
             <a:extLst xmlns:a="http://schemas.openxmlformats.org/drawingml/2006/main">
               <a:ext uri="{FF2B5EF4-FFF2-40B4-BE49-F238E27FC236}">
-                <a16:creationId xmlns:a16="http://schemas.microsoft.com/office/drawing/2014/main" id="{D32DB2D8-D5E4-484C-B4A5-3054A4AB7646}"/>
+                <a16:creationId xmlns:a16="http://schemas.microsoft.com/office/drawing/2014/main" id="{E6DEEE40-281A-4992-B052-84CE55254A3B}"/>
               </a:ext>
             </a:extLst>
           </p:cNvPr>
@@ -22878,7 +23460,7 @@
           <p:cNvPr id="7" name="">
             <a:extLst xmlns:a="http://schemas.openxmlformats.org/drawingml/2006/main">
               <a:ext uri="{FF2B5EF4-FFF2-40B4-BE49-F238E27FC236}">
-                <a16:creationId xmlns:a16="http://schemas.microsoft.com/office/drawing/2014/main" id="{6F3A8571-87C3-4478-9D68-DEC475B339B3}"/>
+                <a16:creationId xmlns:a16="http://schemas.microsoft.com/office/drawing/2014/main" id="{306ACF20-A43A-4286-A583-0F85F9DAB034}"/>
               </a:ext>
             </a:extLst>
           </p:cNvPr>
@@ -22942,7 +23524,7 @@
           <p:cNvPr id="8" name="">
             <a:extLst xmlns:a="http://schemas.openxmlformats.org/drawingml/2006/main">
               <a:ext uri="{FF2B5EF4-FFF2-40B4-BE49-F238E27FC236}">
-                <a16:creationId xmlns:a16="http://schemas.microsoft.com/office/drawing/2014/main" id="{B884DE12-F112-42A3-B1EA-1CC93CE4AAC2}"/>
+                <a16:creationId xmlns:a16="http://schemas.microsoft.com/office/drawing/2014/main" id="{67F3FA26-0B62-44B5-8F5F-41C5739D4F0C}"/>
               </a:ext>
             </a:extLst>
           </p:cNvPr>
@@ -22977,7 +23559,7 @@
           <p:cNvPr id="9" name="">
             <a:extLst xmlns:a="http://schemas.openxmlformats.org/drawingml/2006/main">
               <a:ext uri="{FF2B5EF4-FFF2-40B4-BE49-F238E27FC236}">
-                <a16:creationId xmlns:a16="http://schemas.microsoft.com/office/drawing/2014/main" id="{B5DAB16D-08E3-49D6-9223-3234EAE25AC7}"/>
+                <a16:creationId xmlns:a16="http://schemas.microsoft.com/office/drawing/2014/main" id="{979D4C55-6C6D-4894-A64C-67AF51A1181E}"/>
               </a:ext>
             </a:extLst>
           </p:cNvPr>
@@ -23041,7 +23623,7 @@
           <p:cNvPr id="10" name="">
             <a:extLst xmlns:a="http://schemas.openxmlformats.org/drawingml/2006/main">
               <a:ext uri="{FF2B5EF4-FFF2-40B4-BE49-F238E27FC236}">
-                <a16:creationId xmlns:a16="http://schemas.microsoft.com/office/drawing/2014/main" id="{18AE7BFB-F5C5-40C2-8EDD-3E1D6A87D6E4}"/>
+                <a16:creationId xmlns:a16="http://schemas.microsoft.com/office/drawing/2014/main" id="{6BF69F23-5E2B-4E3C-B24D-B42ABD1D6DC0}"/>
               </a:ext>
             </a:extLst>
           </p:cNvPr>
@@ -23105,7 +23687,7 @@
           <p:cNvPr id="11" name="">
             <a:extLst xmlns:a="http://schemas.openxmlformats.org/drawingml/2006/main">
               <a:ext uri="{FF2B5EF4-FFF2-40B4-BE49-F238E27FC236}">
-                <a16:creationId xmlns:a16="http://schemas.microsoft.com/office/drawing/2014/main" id="{A6A17278-CA15-4CCE-8996-EF24F5E3D5D4}"/>
+                <a16:creationId xmlns:a16="http://schemas.microsoft.com/office/drawing/2014/main" id="{372D66A8-67B1-410F-895B-B7D13CB248B0}"/>
               </a:ext>
             </a:extLst>
           </p:cNvPr>
@@ -23140,7 +23722,7 @@
           <p:cNvPr id="12" name="">
             <a:extLst xmlns:a="http://schemas.openxmlformats.org/drawingml/2006/main">
               <a:ext uri="{FF2B5EF4-FFF2-40B4-BE49-F238E27FC236}">
-                <a16:creationId xmlns:a16="http://schemas.microsoft.com/office/drawing/2014/main" id="{87D11805-3B32-46C8-A6BF-0C7679422276}"/>
+                <a16:creationId xmlns:a16="http://schemas.microsoft.com/office/drawing/2014/main" id="{6522E331-5747-4BF1-BA03-506026829D22}"/>
               </a:ext>
             </a:extLst>
           </p:cNvPr>
@@ -23204,7 +23786,7 @@
           <p:cNvPr id="13" name="">
             <a:extLst xmlns:a="http://schemas.openxmlformats.org/drawingml/2006/main">
               <a:ext uri="{FF2B5EF4-FFF2-40B4-BE49-F238E27FC236}">
-                <a16:creationId xmlns:a16="http://schemas.microsoft.com/office/drawing/2014/main" id="{9129E608-4329-4CFB-BCF9-DFDEE74439C1}"/>
+                <a16:creationId xmlns:a16="http://schemas.microsoft.com/office/drawing/2014/main" id="{F3845770-C5CF-4A07-A906-1131A6C5B689}"/>
               </a:ext>
             </a:extLst>
           </p:cNvPr>
@@ -23268,7 +23850,7 @@
           <p:cNvPr id="14" name="">
             <a:extLst xmlns:a="http://schemas.openxmlformats.org/drawingml/2006/main">
               <a:ext uri="{FF2B5EF4-FFF2-40B4-BE49-F238E27FC236}">
-                <a16:creationId xmlns:a16="http://schemas.microsoft.com/office/drawing/2014/main" id="{6A694DDD-891A-451A-9092-C5A4E6A4197F}"/>
+                <a16:creationId xmlns:a16="http://schemas.microsoft.com/office/drawing/2014/main" id="{6BFF2C76-5259-46DB-A92E-4D0E0B2499C5}"/>
               </a:ext>
             </a:extLst>
           </p:cNvPr>
@@ -23303,7 +23885,7 @@
           <p:cNvPr id="15" name="">
             <a:extLst xmlns:a="http://schemas.openxmlformats.org/drawingml/2006/main">
               <a:ext uri="{FF2B5EF4-FFF2-40B4-BE49-F238E27FC236}">
-                <a16:creationId xmlns:a16="http://schemas.microsoft.com/office/drawing/2014/main" id="{6289042A-5FAF-4C2B-82AF-62B338D5641B}"/>
+                <a16:creationId xmlns:a16="http://schemas.microsoft.com/office/drawing/2014/main" id="{494F2AA0-CFB6-489E-A928-7177B28AF708}"/>
               </a:ext>
             </a:extLst>
           </p:cNvPr>
@@ -23367,7 +23949,7 @@
           <p:cNvPr id="16" name="">
             <a:extLst xmlns:a="http://schemas.openxmlformats.org/drawingml/2006/main">
               <a:ext uri="{FF2B5EF4-FFF2-40B4-BE49-F238E27FC236}">
-                <a16:creationId xmlns:a16="http://schemas.microsoft.com/office/drawing/2014/main" id="{5E135C72-7ED2-48A1-A367-45032677B453}"/>
+                <a16:creationId xmlns:a16="http://schemas.microsoft.com/office/drawing/2014/main" id="{2B782CEA-98A0-4894-86BD-58F924EB659E}"/>
               </a:ext>
             </a:extLst>
           </p:cNvPr>
@@ -23431,7 +24013,7 @@
           <p:cNvPr id="17" name="">
             <a:extLst xmlns:a="http://schemas.openxmlformats.org/drawingml/2006/main">
               <a:ext uri="{FF2B5EF4-FFF2-40B4-BE49-F238E27FC236}">
-                <a16:creationId xmlns:a16="http://schemas.microsoft.com/office/drawing/2014/main" id="{7516DEFE-48A4-4897-863B-59A6BBAF39E9}"/>
+                <a16:creationId xmlns:a16="http://schemas.microsoft.com/office/drawing/2014/main" id="{5B3734E9-6FF3-4AB9-A62F-F532B821BAFD}"/>
               </a:ext>
             </a:extLst>
           </p:cNvPr>
@@ -23466,7 +24048,7 @@
           <p:cNvPr id="18" name="">
             <a:extLst xmlns:a="http://schemas.openxmlformats.org/drawingml/2006/main">
               <a:ext uri="{FF2B5EF4-FFF2-40B4-BE49-F238E27FC236}">
-                <a16:creationId xmlns:a16="http://schemas.microsoft.com/office/drawing/2014/main" id="{A544C380-6D3D-4E31-AD3C-80D06AC78358}"/>
+                <a16:creationId xmlns:a16="http://schemas.microsoft.com/office/drawing/2014/main" id="{EA529EE6-9675-441F-B71A-D1E3D04C5297}"/>
               </a:ext>
             </a:extLst>
           </p:cNvPr>
@@ -23530,7 +24112,7 @@
           <p:cNvPr id="19" name="">
             <a:extLst xmlns:a="http://schemas.openxmlformats.org/drawingml/2006/main">
               <a:ext uri="{FF2B5EF4-FFF2-40B4-BE49-F238E27FC236}">
-                <a16:creationId xmlns:a16="http://schemas.microsoft.com/office/drawing/2014/main" id="{073195C6-8C48-449B-98AB-769FC78FCA2B}"/>
+                <a16:creationId xmlns:a16="http://schemas.microsoft.com/office/drawing/2014/main" id="{2ED56EF0-4082-406B-AF1D-C01605E309EE}"/>
               </a:ext>
             </a:extLst>
           </p:cNvPr>
@@ -23594,7 +24176,7 @@
           <p:cNvPr id="20" name="">
             <a:extLst xmlns:a="http://schemas.openxmlformats.org/drawingml/2006/main">
               <a:ext uri="{FF2B5EF4-FFF2-40B4-BE49-F238E27FC236}">
-                <a16:creationId xmlns:a16="http://schemas.microsoft.com/office/drawing/2014/main" id="{205AB660-3487-47BC-BE56-67ADEE158A00}"/>
+                <a16:creationId xmlns:a16="http://schemas.microsoft.com/office/drawing/2014/main" id="{1D7BCA93-52DA-4F99-9D34-3737A7459947}"/>
               </a:ext>
             </a:extLst>
           </p:cNvPr>
@@ -23629,7 +24211,7 @@
           <p:cNvPr id="21" name="">
             <a:extLst xmlns:a="http://schemas.openxmlformats.org/drawingml/2006/main">
               <a:ext uri="{FF2B5EF4-FFF2-40B4-BE49-F238E27FC236}">
-                <a16:creationId xmlns:a16="http://schemas.microsoft.com/office/drawing/2014/main" id="{7CB3D4BA-AF3D-41CE-B827-ABBE05F24879}"/>
+                <a16:creationId xmlns:a16="http://schemas.microsoft.com/office/drawing/2014/main" id="{6EE5C098-2726-4010-BFCC-178D274BF3A8}"/>
               </a:ext>
             </a:extLst>
           </p:cNvPr>
@@ -23693,7 +24275,7 @@
           <p:cNvPr id="22" name="">
             <a:extLst xmlns:a="http://schemas.openxmlformats.org/drawingml/2006/main">
               <a:ext uri="{FF2B5EF4-FFF2-40B4-BE49-F238E27FC236}">
-                <a16:creationId xmlns:a16="http://schemas.microsoft.com/office/drawing/2014/main" id="{EDD2DD6E-1F54-45A8-BAEE-E6591997645A}"/>
+                <a16:creationId xmlns:a16="http://schemas.microsoft.com/office/drawing/2014/main" id="{698761D8-73E7-400A-B192-FD3944A36E60}"/>
               </a:ext>
             </a:extLst>
           </p:cNvPr>
@@ -23757,7 +24339,7 @@
           <p:cNvPr id="23" name="">
             <a:extLst xmlns:a="http://schemas.openxmlformats.org/drawingml/2006/main">
               <a:ext uri="{FF2B5EF4-FFF2-40B4-BE49-F238E27FC236}">
-                <a16:creationId xmlns:a16="http://schemas.microsoft.com/office/drawing/2014/main" id="{C770561D-53A0-455B-BF69-C8601F5AC9F0}"/>
+                <a16:creationId xmlns:a16="http://schemas.microsoft.com/office/drawing/2014/main" id="{2C0C42FB-4B2A-495E-A641-07A55BDE6C4F}"/>
               </a:ext>
             </a:extLst>
           </p:cNvPr>
@@ -23792,7 +24374,7 @@
           <p:cNvPr id="24" name="">
             <a:extLst xmlns:a="http://schemas.openxmlformats.org/drawingml/2006/main">
               <a:ext uri="{FF2B5EF4-FFF2-40B4-BE49-F238E27FC236}">
-                <a16:creationId xmlns:a16="http://schemas.microsoft.com/office/drawing/2014/main" id="{D722C432-3982-400D-8470-D04D9C48F66D}"/>
+                <a16:creationId xmlns:a16="http://schemas.microsoft.com/office/drawing/2014/main" id="{AC00327E-EF25-4C0E-AC07-B453FCB9103C}"/>
               </a:ext>
             </a:extLst>
           </p:cNvPr>
@@ -23856,7 +24438,7 @@
           <p:cNvPr id="25" name="">
             <a:extLst xmlns:a="http://schemas.openxmlformats.org/drawingml/2006/main">
               <a:ext uri="{FF2B5EF4-FFF2-40B4-BE49-F238E27FC236}">
-                <a16:creationId xmlns:a16="http://schemas.microsoft.com/office/drawing/2014/main" id="{066DD658-F0C1-4F06-8766-A8F54ECF4423}"/>
+                <a16:creationId xmlns:a16="http://schemas.microsoft.com/office/drawing/2014/main" id="{7F6969D5-19DF-44D4-8425-FF1430680587}"/>
               </a:ext>
             </a:extLst>
           </p:cNvPr>
@@ -23920,7 +24502,7 @@
           <p:cNvPr id="26" name="">
             <a:extLst xmlns:a="http://schemas.openxmlformats.org/drawingml/2006/main">
               <a:ext uri="{FF2B5EF4-FFF2-40B4-BE49-F238E27FC236}">
-                <a16:creationId xmlns:a16="http://schemas.microsoft.com/office/drawing/2014/main" id="{8F045A46-EA6D-4140-BEF1-FCB58C416452}"/>
+                <a16:creationId xmlns:a16="http://schemas.microsoft.com/office/drawing/2014/main" id="{F80E798F-6D91-4CFB-AC49-0C6C656AAD22}"/>
               </a:ext>
             </a:extLst>
           </p:cNvPr>
@@ -23955,7 +24537,7 @@
           <p:cNvPr id="27" name="">
             <a:extLst xmlns:a="http://schemas.openxmlformats.org/drawingml/2006/main">
               <a:ext uri="{FF2B5EF4-FFF2-40B4-BE49-F238E27FC236}">
-                <a16:creationId xmlns:a16="http://schemas.microsoft.com/office/drawing/2014/main" id="{26EA9044-30E3-4F62-B915-9D4F81CCC6A6}"/>
+                <a16:creationId xmlns:a16="http://schemas.microsoft.com/office/drawing/2014/main" id="{1BEB7875-EB8F-4D39-9551-8757DE2CC02B}"/>
               </a:ext>
             </a:extLst>
           </p:cNvPr>
@@ -24019,7 +24601,7 @@
           <p:cNvPr id="28" name="">
             <a:extLst xmlns:a="http://schemas.openxmlformats.org/drawingml/2006/main">
               <a:ext uri="{FF2B5EF4-FFF2-40B4-BE49-F238E27FC236}">
-                <a16:creationId xmlns:a16="http://schemas.microsoft.com/office/drawing/2014/main" id="{A357DCFB-17A7-448B-8F10-CC4A1ED682B9}"/>
+                <a16:creationId xmlns:a16="http://schemas.microsoft.com/office/drawing/2014/main" id="{743F6B92-D631-4DB4-AB1E-C55808783208}"/>
               </a:ext>
             </a:extLst>
           </p:cNvPr>
@@ -24083,7 +24665,7 @@
           <p:cNvPr id="29" name="">
             <a:extLst xmlns:a="http://schemas.openxmlformats.org/drawingml/2006/main">
               <a:ext uri="{FF2B5EF4-FFF2-40B4-BE49-F238E27FC236}">
-                <a16:creationId xmlns:a16="http://schemas.microsoft.com/office/drawing/2014/main" id="{BFEE5703-C384-48EF-B21C-5BE0EFD7C80C}"/>
+                <a16:creationId xmlns:a16="http://schemas.microsoft.com/office/drawing/2014/main" id="{3AEFC744-2FBD-40E0-A31B-16DAEA79773B}"/>
               </a:ext>
             </a:extLst>
           </p:cNvPr>
@@ -24118,7 +24700,7 @@
           <p:cNvPr id="30" name="">
             <a:extLst xmlns:a="http://schemas.openxmlformats.org/drawingml/2006/main">
               <a:ext uri="{FF2B5EF4-FFF2-40B4-BE49-F238E27FC236}">
-                <a16:creationId xmlns:a16="http://schemas.microsoft.com/office/drawing/2014/main" id="{36D2EA5F-6C51-4962-A5D5-F82031457B97}"/>
+                <a16:creationId xmlns:a16="http://schemas.microsoft.com/office/drawing/2014/main" id="{12F120EB-0182-4FEE-8CFE-AA2503773815}"/>
               </a:ext>
             </a:extLst>
           </p:cNvPr>
@@ -24182,7 +24764,7 @@
           <p:cNvPr id="31" name="">
             <a:extLst xmlns:a="http://schemas.openxmlformats.org/drawingml/2006/main">
               <a:ext uri="{FF2B5EF4-FFF2-40B4-BE49-F238E27FC236}">
-                <a16:creationId xmlns:a16="http://schemas.microsoft.com/office/drawing/2014/main" id="{41F86F0F-BCA8-42D1-8B5C-3CCAF5E8597B}"/>
+                <a16:creationId xmlns:a16="http://schemas.microsoft.com/office/drawing/2014/main" id="{114A7B6A-FDC5-454D-A534-3491D84A25EB}"/>
               </a:ext>
             </a:extLst>
           </p:cNvPr>
@@ -24246,7 +24828,7 @@
           <p:cNvPr id="32" name="">
             <a:extLst xmlns:a="http://schemas.openxmlformats.org/drawingml/2006/main">
               <a:ext uri="{FF2B5EF4-FFF2-40B4-BE49-F238E27FC236}">
-                <a16:creationId xmlns:a16="http://schemas.microsoft.com/office/drawing/2014/main" id="{784E6790-25C5-4CF0-BBB6-465534378F7F}"/>
+                <a16:creationId xmlns:a16="http://schemas.microsoft.com/office/drawing/2014/main" id="{509815F0-24D1-4B09-AD8D-A3648C94952B}"/>
               </a:ext>
             </a:extLst>
           </p:cNvPr>
@@ -24281,7 +24863,7 @@
           <p:cNvPr id="33" name="">
             <a:extLst xmlns:a="http://schemas.openxmlformats.org/drawingml/2006/main">
               <a:ext uri="{FF2B5EF4-FFF2-40B4-BE49-F238E27FC236}">
-                <a16:creationId xmlns:a16="http://schemas.microsoft.com/office/drawing/2014/main" id="{0A03B5C7-A5F0-49FF-B8FC-77A5764CF73B}"/>
+                <a16:creationId xmlns:a16="http://schemas.microsoft.com/office/drawing/2014/main" id="{45026E71-2D63-4412-A519-13DF4565BA53}"/>
               </a:ext>
             </a:extLst>
           </p:cNvPr>
@@ -24345,7 +24927,7 @@
           <p:cNvPr id="34" name="">
             <a:extLst xmlns:a="http://schemas.openxmlformats.org/drawingml/2006/main">
               <a:ext uri="{FF2B5EF4-FFF2-40B4-BE49-F238E27FC236}">
-                <a16:creationId xmlns:a16="http://schemas.microsoft.com/office/drawing/2014/main" id="{70DFFA89-A1C3-436E-9B50-E930DB5DC812}"/>
+                <a16:creationId xmlns:a16="http://schemas.microsoft.com/office/drawing/2014/main" id="{B676A34C-0133-44B1-84A0-0D6FE8E7D8FA}"/>
               </a:ext>
             </a:extLst>
           </p:cNvPr>
@@ -24409,7 +24991,7 @@
           <p:cNvPr id="35" name="">
             <a:extLst xmlns:a="http://schemas.openxmlformats.org/drawingml/2006/main">
               <a:ext uri="{FF2B5EF4-FFF2-40B4-BE49-F238E27FC236}">
-                <a16:creationId xmlns:a16="http://schemas.microsoft.com/office/drawing/2014/main" id="{4229879E-A9AE-4056-A368-D81336480DC4}"/>
+                <a16:creationId xmlns:a16="http://schemas.microsoft.com/office/drawing/2014/main" id="{251BF08F-D773-4CB4-B2AC-CDA3D1F7237E}"/>
               </a:ext>
             </a:extLst>
           </p:cNvPr>
@@ -24444,7 +25026,7 @@
           <p:cNvPr id="36" name="">
             <a:extLst xmlns:a="http://schemas.openxmlformats.org/drawingml/2006/main">
               <a:ext uri="{FF2B5EF4-FFF2-40B4-BE49-F238E27FC236}">
-                <a16:creationId xmlns:a16="http://schemas.microsoft.com/office/drawing/2014/main" id="{232EA0F0-3C15-434A-BCD4-FD397FC38DB4}"/>
+                <a16:creationId xmlns:a16="http://schemas.microsoft.com/office/drawing/2014/main" id="{E68B55E6-AFE3-4C95-A9AA-89EA53A8FEFF}"/>
               </a:ext>
             </a:extLst>
           </p:cNvPr>
@@ -24508,7 +25090,7 @@
           <p:cNvPr id="37" name="">
             <a:extLst xmlns:a="http://schemas.openxmlformats.org/drawingml/2006/main">
               <a:ext uri="{FF2B5EF4-FFF2-40B4-BE49-F238E27FC236}">
-                <a16:creationId xmlns:a16="http://schemas.microsoft.com/office/drawing/2014/main" id="{01AB4D5F-E251-455A-A3CB-77C95167E37D}"/>
+                <a16:creationId xmlns:a16="http://schemas.microsoft.com/office/drawing/2014/main" id="{7332B2F6-6085-497B-BC6A-8B51B7AE2D87}"/>
               </a:ext>
             </a:extLst>
           </p:cNvPr>
@@ -24570,7 +25152,7 @@
     </p:spTree>
     <p:extLst>
       <p:ext uri="{BB962C8B-B14F-4D97-AF65-F5344CB8AC3E}">
-        <p14:creationId xmlns:p14="http://schemas.microsoft.com/office/powerpoint/2010/main" val="1053648113"/>
+        <p14:creationId xmlns:p14="http://schemas.microsoft.com/office/powerpoint/2010/main" val="954503207"/>
       </p:ext>
     </p:extLst>
   </p:cSld>
@@ -24601,7 +25183,7 @@
           <p:cNvPr id="1" name="">
             <a:extLst xmlns:a="http://schemas.openxmlformats.org/drawingml/2006/main">
               <a:ext uri="{FF2B5EF4-FFF2-40B4-BE49-F238E27FC236}">
-                <a16:creationId xmlns:a16="http://schemas.microsoft.com/office/drawing/2014/main" id="{69990E21-32EE-49AB-90E0-41F12FB31354}"/>
+                <a16:creationId xmlns:a16="http://schemas.microsoft.com/office/drawing/2014/main" id="{D9C7B560-CA86-43FD-B62C-9C8600459A92}"/>
               </a:ext>
             </a:extLst>
           </p:cNvPr>
@@ -24636,7 +25218,7 @@
           <p:cNvPr id="2" name="">
             <a:extLst xmlns:a="http://schemas.openxmlformats.org/drawingml/2006/main">
               <a:ext uri="{FF2B5EF4-FFF2-40B4-BE49-F238E27FC236}">
-                <a16:creationId xmlns:a16="http://schemas.microsoft.com/office/drawing/2014/main" id="{EC3B6E18-163B-4562-8BB1-0F711FF30A0E}"/>
+                <a16:creationId xmlns:a16="http://schemas.microsoft.com/office/drawing/2014/main" id="{0CD49531-2085-4C5F-BDD4-92972F8CCE64}"/>
               </a:ext>
             </a:extLst>
           </p:cNvPr>
@@ -24671,7 +25253,7 @@
           <p:cNvPr id="3" name="">
             <a:extLst xmlns:a="http://schemas.openxmlformats.org/drawingml/2006/main">
               <a:ext uri="{FF2B5EF4-FFF2-40B4-BE49-F238E27FC236}">
-                <a16:creationId xmlns:a16="http://schemas.microsoft.com/office/drawing/2014/main" id="{845EF3D8-D184-4E07-AB2C-AECCC2B8405F}"/>
+                <a16:creationId xmlns:a16="http://schemas.microsoft.com/office/drawing/2014/main" id="{DA4D97BC-637C-447E-B6A9-68928EEE3311}"/>
               </a:ext>
             </a:extLst>
           </p:cNvPr>
@@ -24706,7 +25288,7 @@
           <p:cNvPr id="4" name="">
             <a:extLst xmlns:a="http://schemas.openxmlformats.org/drawingml/2006/main">
               <a:ext uri="{FF2B5EF4-FFF2-40B4-BE49-F238E27FC236}">
-                <a16:creationId xmlns:a16="http://schemas.microsoft.com/office/drawing/2014/main" id="{ABEC16B0-DA3B-45D9-B942-4D7158AA9980}"/>
+                <a16:creationId xmlns:a16="http://schemas.microsoft.com/office/drawing/2014/main" id="{B62BA2AD-85B6-44D3-8853-FB9CFCA00D9B}"/>
               </a:ext>
             </a:extLst>
           </p:cNvPr>
@@ -24770,7 +25352,7 @@
           <p:cNvPr id="5" name="">
             <a:extLst xmlns:a="http://schemas.openxmlformats.org/drawingml/2006/main">
               <a:ext uri="{FF2B5EF4-FFF2-40B4-BE49-F238E27FC236}">
-                <a16:creationId xmlns:a16="http://schemas.microsoft.com/office/drawing/2014/main" id="{8A35CC4F-5DB8-4BC0-9919-5EBD7F4E4F99}"/>
+                <a16:creationId xmlns:a16="http://schemas.microsoft.com/office/drawing/2014/main" id="{AD5071EB-1759-4621-98DB-E6F6D65C9B9F}"/>
               </a:ext>
             </a:extLst>
           </p:cNvPr>
@@ -24834,7 +25416,7 @@
           <p:cNvPr id="6" name="">
             <a:extLst xmlns:a="http://schemas.openxmlformats.org/drawingml/2006/main">
               <a:ext uri="{FF2B5EF4-FFF2-40B4-BE49-F238E27FC236}">
-                <a16:creationId xmlns:a16="http://schemas.microsoft.com/office/drawing/2014/main" id="{337E36AC-1290-4316-82BC-D418017993C2}"/>
+                <a16:creationId xmlns:a16="http://schemas.microsoft.com/office/drawing/2014/main" id="{3F97D784-E423-44A4-98DD-69F098FFACCF}"/>
               </a:ext>
             </a:extLst>
           </p:cNvPr>
@@ -24869,7 +25451,7 @@
           <p:cNvPr id="7" name="">
             <a:extLst xmlns:a="http://schemas.openxmlformats.org/drawingml/2006/main">
               <a:ext uri="{FF2B5EF4-FFF2-40B4-BE49-F238E27FC236}">
-                <a16:creationId xmlns:a16="http://schemas.microsoft.com/office/drawing/2014/main" id="{3682CA14-2516-4EDD-9085-B28C720D04F4}"/>
+                <a16:creationId xmlns:a16="http://schemas.microsoft.com/office/drawing/2014/main" id="{5152C682-1EDE-42D9-B20B-3D8F439BF38C}"/>
               </a:ext>
             </a:extLst>
           </p:cNvPr>
@@ -24933,7 +25515,7 @@
           <p:cNvPr id="8" name="">
             <a:extLst xmlns:a="http://schemas.openxmlformats.org/drawingml/2006/main">
               <a:ext uri="{FF2B5EF4-FFF2-40B4-BE49-F238E27FC236}">
-                <a16:creationId xmlns:a16="http://schemas.microsoft.com/office/drawing/2014/main" id="{7B78B172-7D4C-407D-8BCD-161BD9B36DBD}"/>
+                <a16:creationId xmlns:a16="http://schemas.microsoft.com/office/drawing/2014/main" id="{243E630C-B2BC-4B2F-9E61-3615A2689FCE}"/>
               </a:ext>
             </a:extLst>
           </p:cNvPr>
@@ -24997,7 +25579,7 @@
           <p:cNvPr id="9" name="">
             <a:extLst xmlns:a="http://schemas.openxmlformats.org/drawingml/2006/main">
               <a:ext uri="{FF2B5EF4-FFF2-40B4-BE49-F238E27FC236}">
-                <a16:creationId xmlns:a16="http://schemas.microsoft.com/office/drawing/2014/main" id="{018B9D15-3697-477A-BA4E-D4C9516081D9}"/>
+                <a16:creationId xmlns:a16="http://schemas.microsoft.com/office/drawing/2014/main" id="{7021B5EF-327E-4E70-9349-DF07CAB076D7}"/>
               </a:ext>
             </a:extLst>
           </p:cNvPr>
@@ -25032,7 +25614,7 @@
           <p:cNvPr id="10" name="">
             <a:extLst xmlns:a="http://schemas.openxmlformats.org/drawingml/2006/main">
               <a:ext uri="{FF2B5EF4-FFF2-40B4-BE49-F238E27FC236}">
-                <a16:creationId xmlns:a16="http://schemas.microsoft.com/office/drawing/2014/main" id="{ED7699DA-EBFC-4E90-9C76-281452C5EF86}"/>
+                <a16:creationId xmlns:a16="http://schemas.microsoft.com/office/drawing/2014/main" id="{B883589C-E89C-4851-9451-408373484305}"/>
               </a:ext>
             </a:extLst>
           </p:cNvPr>
@@ -25096,7 +25678,7 @@
           <p:cNvPr id="11" name="">
             <a:extLst xmlns:a="http://schemas.openxmlformats.org/drawingml/2006/main">
               <a:ext uri="{FF2B5EF4-FFF2-40B4-BE49-F238E27FC236}">
-                <a16:creationId xmlns:a16="http://schemas.microsoft.com/office/drawing/2014/main" id="{44520D84-007D-4C95-88E0-92E77BDD1428}"/>
+                <a16:creationId xmlns:a16="http://schemas.microsoft.com/office/drawing/2014/main" id="{C7E75228-E06B-4B37-B65E-F90574E658C5}"/>
               </a:ext>
             </a:extLst>
           </p:cNvPr>
@@ -25131,7 +25713,7 @@
           <p:cNvPr id="12" name="">
             <a:extLst xmlns:a="http://schemas.openxmlformats.org/drawingml/2006/main">
               <a:ext uri="{FF2B5EF4-FFF2-40B4-BE49-F238E27FC236}">
-                <a16:creationId xmlns:a16="http://schemas.microsoft.com/office/drawing/2014/main" id="{DF756B9D-B8D9-462B-8C73-3DBDD3B40CC4}"/>
+                <a16:creationId xmlns:a16="http://schemas.microsoft.com/office/drawing/2014/main" id="{4BEE4869-3663-4D12-9BEA-7B2B7CEA4160}"/>
               </a:ext>
             </a:extLst>
           </p:cNvPr>
@@ -25195,7 +25777,7 @@
           <p:cNvPr id="13" name="">
             <a:extLst xmlns:a="http://schemas.openxmlformats.org/drawingml/2006/main">
               <a:ext uri="{FF2B5EF4-FFF2-40B4-BE49-F238E27FC236}">
-                <a16:creationId xmlns:a16="http://schemas.microsoft.com/office/drawing/2014/main" id="{A2B95052-850A-40A8-9B82-719AFE0974AF}"/>
+                <a16:creationId xmlns:a16="http://schemas.microsoft.com/office/drawing/2014/main" id="{84EABC4C-2090-4385-91DB-34B884ED2027}"/>
               </a:ext>
             </a:extLst>
           </p:cNvPr>
@@ -25230,7 +25812,7 @@
           <p:cNvPr id="14" name="">
             <a:extLst xmlns:a="http://schemas.openxmlformats.org/drawingml/2006/main">
               <a:ext uri="{FF2B5EF4-FFF2-40B4-BE49-F238E27FC236}">
-                <a16:creationId xmlns:a16="http://schemas.microsoft.com/office/drawing/2014/main" id="{5D607FB1-EFD6-4544-B9FA-CD1634FAC48D}"/>
+                <a16:creationId xmlns:a16="http://schemas.microsoft.com/office/drawing/2014/main" id="{F55688DB-AD31-458D-83A1-4E7F9613F161}"/>
               </a:ext>
             </a:extLst>
           </p:cNvPr>
@@ -25294,7 +25876,7 @@
           <p:cNvPr id="15" name="">
             <a:extLst xmlns:a="http://schemas.openxmlformats.org/drawingml/2006/main">
               <a:ext uri="{FF2B5EF4-FFF2-40B4-BE49-F238E27FC236}">
-                <a16:creationId xmlns:a16="http://schemas.microsoft.com/office/drawing/2014/main" id="{CE63338E-EFC9-44FD-B3A6-C6B5B7B356CA}"/>
+                <a16:creationId xmlns:a16="http://schemas.microsoft.com/office/drawing/2014/main" id="{A0BA1522-61BF-43CD-9DEB-B1618D76B941}"/>
               </a:ext>
             </a:extLst>
           </p:cNvPr>
@@ -25329,7 +25911,7 @@
           <p:cNvPr id="16" name="">
             <a:extLst xmlns:a="http://schemas.openxmlformats.org/drawingml/2006/main">
               <a:ext uri="{FF2B5EF4-FFF2-40B4-BE49-F238E27FC236}">
-                <a16:creationId xmlns:a16="http://schemas.microsoft.com/office/drawing/2014/main" id="{7EA5A5CF-0B36-4E45-9E4D-91C1A754B858}"/>
+                <a16:creationId xmlns:a16="http://schemas.microsoft.com/office/drawing/2014/main" id="{09D51D82-02FB-41F5-822B-B3CC8E2EBC32}"/>
               </a:ext>
             </a:extLst>
           </p:cNvPr>
@@ -25393,7 +25975,7 @@
           <p:cNvPr id="17" name="">
             <a:extLst xmlns:a="http://schemas.openxmlformats.org/drawingml/2006/main">
               <a:ext uri="{FF2B5EF4-FFF2-40B4-BE49-F238E27FC236}">
-                <a16:creationId xmlns:a16="http://schemas.microsoft.com/office/drawing/2014/main" id="{64AB878D-E4C9-49CB-9BCB-B4027E0215C8}"/>
+                <a16:creationId xmlns:a16="http://schemas.microsoft.com/office/drawing/2014/main" id="{ACE86291-6E63-49B6-96DE-DE09DB4826DE}"/>
               </a:ext>
             </a:extLst>
           </p:cNvPr>
@@ -25428,7 +26010,7 @@
           <p:cNvPr id="18" name="">
             <a:extLst xmlns:a="http://schemas.openxmlformats.org/drawingml/2006/main">
               <a:ext uri="{FF2B5EF4-FFF2-40B4-BE49-F238E27FC236}">
-                <a16:creationId xmlns:a16="http://schemas.microsoft.com/office/drawing/2014/main" id="{A1E24E9B-CBA2-452E-A65F-76E383D4F9C9}"/>
+                <a16:creationId xmlns:a16="http://schemas.microsoft.com/office/drawing/2014/main" id="{5035067C-0D53-4D76-B8FF-CBD4F33FA4C8}"/>
               </a:ext>
             </a:extLst>
           </p:cNvPr>
@@ -25492,7 +26074,7 @@
           <p:cNvPr id="19" name="">
             <a:extLst xmlns:a="http://schemas.openxmlformats.org/drawingml/2006/main">
               <a:ext uri="{FF2B5EF4-FFF2-40B4-BE49-F238E27FC236}">
-                <a16:creationId xmlns:a16="http://schemas.microsoft.com/office/drawing/2014/main" id="{26ED3B55-C37F-4A17-91A1-476F2DD80338}"/>
+                <a16:creationId xmlns:a16="http://schemas.microsoft.com/office/drawing/2014/main" id="{8521E024-2BCE-46DB-AAF2-48C602749E03}"/>
               </a:ext>
             </a:extLst>
           </p:cNvPr>
@@ -25527,7 +26109,7 @@
           <p:cNvPr id="20" name="">
             <a:extLst xmlns:a="http://schemas.openxmlformats.org/drawingml/2006/main">
               <a:ext uri="{FF2B5EF4-FFF2-40B4-BE49-F238E27FC236}">
-                <a16:creationId xmlns:a16="http://schemas.microsoft.com/office/drawing/2014/main" id="{FA88C24A-514A-4FB4-9C91-468EDEAA245A}"/>
+                <a16:creationId xmlns:a16="http://schemas.microsoft.com/office/drawing/2014/main" id="{B6C38308-53C5-48E8-9974-3A0C6151AABB}"/>
               </a:ext>
             </a:extLst>
           </p:cNvPr>
@@ -25591,7 +26173,7 @@
           <p:cNvPr id="21" name="">
             <a:extLst xmlns:a="http://schemas.openxmlformats.org/drawingml/2006/main">
               <a:ext uri="{FF2B5EF4-FFF2-40B4-BE49-F238E27FC236}">
-                <a16:creationId xmlns:a16="http://schemas.microsoft.com/office/drawing/2014/main" id="{14B7BFD8-B56F-41B9-9EF4-5AA77369F6D6}"/>
+                <a16:creationId xmlns:a16="http://schemas.microsoft.com/office/drawing/2014/main" id="{22948E0F-BEEC-4EDF-BE7C-003E6E19DD08}"/>
               </a:ext>
             </a:extLst>
           </p:cNvPr>
@@ -25626,7 +26208,7 @@
           <p:cNvPr id="22" name="">
             <a:extLst xmlns:a="http://schemas.openxmlformats.org/drawingml/2006/main">
               <a:ext uri="{FF2B5EF4-FFF2-40B4-BE49-F238E27FC236}">
-                <a16:creationId xmlns:a16="http://schemas.microsoft.com/office/drawing/2014/main" id="{47B89124-133E-4F2B-8CBB-46C12BD24B0C}"/>
+                <a16:creationId xmlns:a16="http://schemas.microsoft.com/office/drawing/2014/main" id="{84E843A2-7226-4F5D-A633-A92D292D24F1}"/>
               </a:ext>
             </a:extLst>
           </p:cNvPr>
@@ -25690,7 +26272,7 @@
           <p:cNvPr id="23" name="">
             <a:extLst xmlns:a="http://schemas.openxmlformats.org/drawingml/2006/main">
               <a:ext uri="{FF2B5EF4-FFF2-40B4-BE49-F238E27FC236}">
-                <a16:creationId xmlns:a16="http://schemas.microsoft.com/office/drawing/2014/main" id="{7DCD2ADA-137D-48C4-98B6-4386D1518F68}"/>
+                <a16:creationId xmlns:a16="http://schemas.microsoft.com/office/drawing/2014/main" id="{C0697056-2BE2-4037-8F24-AC461B28FB5C}"/>
               </a:ext>
             </a:extLst>
           </p:cNvPr>
@@ -25725,7 +26307,7 @@
           <p:cNvPr id="24" name="">
             <a:extLst xmlns:a="http://schemas.openxmlformats.org/drawingml/2006/main">
               <a:ext uri="{FF2B5EF4-FFF2-40B4-BE49-F238E27FC236}">
-                <a16:creationId xmlns:a16="http://schemas.microsoft.com/office/drawing/2014/main" id="{DB4156D6-F00C-4C09-AAFD-98F517612430}"/>
+                <a16:creationId xmlns:a16="http://schemas.microsoft.com/office/drawing/2014/main" id="{2703475D-25D4-4472-86FE-3E08E66B1E35}"/>
               </a:ext>
             </a:extLst>
           </p:cNvPr>
@@ -25789,7 +26371,7 @@
           <p:cNvPr id="25" name="">
             <a:extLst xmlns:a="http://schemas.openxmlformats.org/drawingml/2006/main">
               <a:ext uri="{FF2B5EF4-FFF2-40B4-BE49-F238E27FC236}">
-                <a16:creationId xmlns:a16="http://schemas.microsoft.com/office/drawing/2014/main" id="{3EC22764-6E09-4D54-9B89-38C23C2E629D}"/>
+                <a16:creationId xmlns:a16="http://schemas.microsoft.com/office/drawing/2014/main" id="{F5137429-88E5-4C05-AAC6-2524400B51BA}"/>
               </a:ext>
             </a:extLst>
           </p:cNvPr>
@@ -25824,7 +26406,7 @@
           <p:cNvPr id="26" name="">
             <a:extLst xmlns:a="http://schemas.openxmlformats.org/drawingml/2006/main">
               <a:ext uri="{FF2B5EF4-FFF2-40B4-BE49-F238E27FC236}">
-                <a16:creationId xmlns:a16="http://schemas.microsoft.com/office/drawing/2014/main" id="{B7C83A51-030F-4C9D-8CF4-8888628B6441}"/>
+                <a16:creationId xmlns:a16="http://schemas.microsoft.com/office/drawing/2014/main" id="{ACC0F21D-76EE-4118-B4F9-97B2E13547B1}"/>
               </a:ext>
             </a:extLst>
           </p:cNvPr>
@@ -25886,7 +26468,7 @@
     </p:spTree>
     <p:extLst>
       <p:ext uri="{BB962C8B-B14F-4D97-AF65-F5344CB8AC3E}">
-        <p14:creationId xmlns:p14="http://schemas.microsoft.com/office/powerpoint/2010/main" val="160196928"/>
+        <p14:creationId xmlns:p14="http://schemas.microsoft.com/office/powerpoint/2010/main" val="1754497791"/>
       </p:ext>
     </p:extLst>
   </p:cSld>
@@ -25917,7 +26499,7 @@
           <p:cNvPr id="1" name="">
             <a:extLst xmlns:a="http://schemas.openxmlformats.org/drawingml/2006/main">
               <a:ext uri="{FF2B5EF4-FFF2-40B4-BE49-F238E27FC236}">
-                <a16:creationId xmlns:a16="http://schemas.microsoft.com/office/drawing/2014/main" id="{2E8605B3-5E2A-48A1-B446-B35D1709C349}"/>
+                <a16:creationId xmlns:a16="http://schemas.microsoft.com/office/drawing/2014/main" id="{32D7B865-16F0-4C74-A8AD-7ED5ABC1F475}"/>
               </a:ext>
             </a:extLst>
           </p:cNvPr>
@@ -25952,7 +26534,7 @@
           <p:cNvPr id="2" name="">
             <a:extLst xmlns:a="http://schemas.openxmlformats.org/drawingml/2006/main">
               <a:ext uri="{FF2B5EF4-FFF2-40B4-BE49-F238E27FC236}">
-                <a16:creationId xmlns:a16="http://schemas.microsoft.com/office/drawing/2014/main" id="{D04895BB-7C8E-428C-81B7-784B343D829E}"/>
+                <a16:creationId xmlns:a16="http://schemas.microsoft.com/office/drawing/2014/main" id="{4C05E8FF-6B89-4205-9402-0636EB087F69}"/>
               </a:ext>
             </a:extLst>
           </p:cNvPr>
@@ -25987,7 +26569,7 @@
           <p:cNvPr id="3" name="">
             <a:extLst xmlns:a="http://schemas.openxmlformats.org/drawingml/2006/main">
               <a:ext uri="{FF2B5EF4-FFF2-40B4-BE49-F238E27FC236}">
-                <a16:creationId xmlns:a16="http://schemas.microsoft.com/office/drawing/2014/main" id="{F0F5C03C-80E7-4FF8-AC59-2DB4769203EC}"/>
+                <a16:creationId xmlns:a16="http://schemas.microsoft.com/office/drawing/2014/main" id="{E1D61696-0744-4F18-A666-2204444F9B55}"/>
               </a:ext>
             </a:extLst>
           </p:cNvPr>
@@ -26022,7 +26604,7 @@
           <p:cNvPr id="4" name="">
             <a:extLst xmlns:a="http://schemas.openxmlformats.org/drawingml/2006/main">
               <a:ext uri="{FF2B5EF4-FFF2-40B4-BE49-F238E27FC236}">
-                <a16:creationId xmlns:a16="http://schemas.microsoft.com/office/drawing/2014/main" id="{87FAC11B-7EC7-4A71-8242-FBBD7B5BD587}"/>
+                <a16:creationId xmlns:a16="http://schemas.microsoft.com/office/drawing/2014/main" id="{FD8F4B98-2CA1-4D1D-AE68-429B54126036}"/>
               </a:ext>
             </a:extLst>
           </p:cNvPr>
@@ -26086,7 +26668,7 @@
           <p:cNvPr id="5" name="">
             <a:extLst xmlns:a="http://schemas.openxmlformats.org/drawingml/2006/main">
               <a:ext uri="{FF2B5EF4-FFF2-40B4-BE49-F238E27FC236}">
-                <a16:creationId xmlns:a16="http://schemas.microsoft.com/office/drawing/2014/main" id="{103FE8B3-6AE5-4D01-A3E9-B6AD6AC3101B}"/>
+                <a16:creationId xmlns:a16="http://schemas.microsoft.com/office/drawing/2014/main" id="{51187A78-FEC4-411D-A7E2-C74B4935855E}"/>
               </a:ext>
             </a:extLst>
           </p:cNvPr>
@@ -26150,7 +26732,7 @@
           <p:cNvPr id="6" name="">
             <a:extLst xmlns:a="http://schemas.openxmlformats.org/drawingml/2006/main">
               <a:ext uri="{FF2B5EF4-FFF2-40B4-BE49-F238E27FC236}">
-                <a16:creationId xmlns:a16="http://schemas.microsoft.com/office/drawing/2014/main" id="{68D8C475-8F21-446A-B0C3-98AC6E1533E6}"/>
+                <a16:creationId xmlns:a16="http://schemas.microsoft.com/office/drawing/2014/main" id="{1A0FA5D9-0E7D-4250-AF0C-673DA44E1B90}"/>
               </a:ext>
             </a:extLst>
           </p:cNvPr>
@@ -26185,7 +26767,7 @@
           <p:cNvPr id="7" name="">
             <a:extLst xmlns:a="http://schemas.openxmlformats.org/drawingml/2006/main">
               <a:ext uri="{FF2B5EF4-FFF2-40B4-BE49-F238E27FC236}">
-                <a16:creationId xmlns:a16="http://schemas.microsoft.com/office/drawing/2014/main" id="{8C4C2342-EAC3-4ECB-95CE-43AF15AF6BC7}"/>
+                <a16:creationId xmlns:a16="http://schemas.microsoft.com/office/drawing/2014/main" id="{1EB9A1FE-0A06-49D8-968C-B92F32D95EEF}"/>
               </a:ext>
             </a:extLst>
           </p:cNvPr>
@@ -26249,7 +26831,7 @@
           <p:cNvPr id="8" name="">
             <a:extLst xmlns:a="http://schemas.openxmlformats.org/drawingml/2006/main">
               <a:ext uri="{FF2B5EF4-FFF2-40B4-BE49-F238E27FC236}">
-                <a16:creationId xmlns:a16="http://schemas.microsoft.com/office/drawing/2014/main" id="{89FFE177-247B-4F4C-9D10-989A7D226F3C}"/>
+                <a16:creationId xmlns:a16="http://schemas.microsoft.com/office/drawing/2014/main" id="{B7CE255E-6213-47BE-A4BC-B5C03D6389E9}"/>
               </a:ext>
             </a:extLst>
           </p:cNvPr>
@@ -26313,7 +26895,7 @@
           <p:cNvPr id="9" name="">
             <a:extLst xmlns:a="http://schemas.openxmlformats.org/drawingml/2006/main">
               <a:ext uri="{FF2B5EF4-FFF2-40B4-BE49-F238E27FC236}">
-                <a16:creationId xmlns:a16="http://schemas.microsoft.com/office/drawing/2014/main" id="{CC7DEE8C-F5BC-4E8B-8088-9434C19B3824}"/>
+                <a16:creationId xmlns:a16="http://schemas.microsoft.com/office/drawing/2014/main" id="{BF912F7A-7B7A-48C5-B400-0BCB0F15A8C8}"/>
               </a:ext>
             </a:extLst>
           </p:cNvPr>
@@ -26348,7 +26930,7 @@
           <p:cNvPr id="10" name="">
             <a:extLst xmlns:a="http://schemas.openxmlformats.org/drawingml/2006/main">
               <a:ext uri="{FF2B5EF4-FFF2-40B4-BE49-F238E27FC236}">
-                <a16:creationId xmlns:a16="http://schemas.microsoft.com/office/drawing/2014/main" id="{3A2540E8-EE4A-4DD1-8E0B-14BB0C57FEA0}"/>
+                <a16:creationId xmlns:a16="http://schemas.microsoft.com/office/drawing/2014/main" id="{FFC558A6-C62F-417E-BA6C-825FF9E0DF10}"/>
               </a:ext>
             </a:extLst>
           </p:cNvPr>
@@ -26412,7 +26994,7 @@
           <p:cNvPr id="11" name="">
             <a:extLst xmlns:a="http://schemas.openxmlformats.org/drawingml/2006/main">
               <a:ext uri="{FF2B5EF4-FFF2-40B4-BE49-F238E27FC236}">
-                <a16:creationId xmlns:a16="http://schemas.microsoft.com/office/drawing/2014/main" id="{55EB391F-F0AF-4AD7-9043-AB01EFFE4EBD}"/>
+                <a16:creationId xmlns:a16="http://schemas.microsoft.com/office/drawing/2014/main" id="{F050561B-1BDF-4AF0-846F-1A555143AEE6}"/>
               </a:ext>
             </a:extLst>
           </p:cNvPr>
@@ -26476,7 +27058,7 @@
           <p:cNvPr id="12" name="">
             <a:extLst xmlns:a="http://schemas.openxmlformats.org/drawingml/2006/main">
               <a:ext uri="{FF2B5EF4-FFF2-40B4-BE49-F238E27FC236}">
-                <a16:creationId xmlns:a16="http://schemas.microsoft.com/office/drawing/2014/main" id="{79C522D2-D08D-4920-9890-E49A645B7CC0}"/>
+                <a16:creationId xmlns:a16="http://schemas.microsoft.com/office/drawing/2014/main" id="{72B4770A-A750-4C19-A7E9-565E2C47DD1D}"/>
               </a:ext>
             </a:extLst>
           </p:cNvPr>
@@ -26511,7 +27093,7 @@
           <p:cNvPr id="13" name="">
             <a:extLst xmlns:a="http://schemas.openxmlformats.org/drawingml/2006/main">
               <a:ext uri="{FF2B5EF4-FFF2-40B4-BE49-F238E27FC236}">
-                <a16:creationId xmlns:a16="http://schemas.microsoft.com/office/drawing/2014/main" id="{7EFC05B3-2E77-4A81-A63C-9FECB2E38448}"/>
+                <a16:creationId xmlns:a16="http://schemas.microsoft.com/office/drawing/2014/main" id="{AB67B307-E108-450C-85F0-F563DC882958}"/>
               </a:ext>
             </a:extLst>
           </p:cNvPr>
@@ -26575,7 +27157,7 @@
           <p:cNvPr id="14" name="">
             <a:extLst xmlns:a="http://schemas.openxmlformats.org/drawingml/2006/main">
               <a:ext uri="{FF2B5EF4-FFF2-40B4-BE49-F238E27FC236}">
-                <a16:creationId xmlns:a16="http://schemas.microsoft.com/office/drawing/2014/main" id="{1E1AA87A-11D6-43C4-9AC3-C92A6F8802CB}"/>
+                <a16:creationId xmlns:a16="http://schemas.microsoft.com/office/drawing/2014/main" id="{4D729036-E64A-4A0D-AEE3-AEA7710C2BE4}"/>
               </a:ext>
             </a:extLst>
           </p:cNvPr>
@@ -26639,7 +27221,7 @@
           <p:cNvPr id="15" name="">
             <a:extLst xmlns:a="http://schemas.openxmlformats.org/drawingml/2006/main">
               <a:ext uri="{FF2B5EF4-FFF2-40B4-BE49-F238E27FC236}">
-                <a16:creationId xmlns:a16="http://schemas.microsoft.com/office/drawing/2014/main" id="{BF3D6B52-BE06-4814-B6AF-91E8C36163E2}"/>
+                <a16:creationId xmlns:a16="http://schemas.microsoft.com/office/drawing/2014/main" id="{74BEE315-1EA7-4E72-AB48-DCE01C26AE7A}"/>
               </a:ext>
             </a:extLst>
           </p:cNvPr>
@@ -26674,7 +27256,7 @@
           <p:cNvPr id="16" name="">
             <a:extLst xmlns:a="http://schemas.openxmlformats.org/drawingml/2006/main">
               <a:ext uri="{FF2B5EF4-FFF2-40B4-BE49-F238E27FC236}">
-                <a16:creationId xmlns:a16="http://schemas.microsoft.com/office/drawing/2014/main" id="{6DD193FE-8EB9-4BED-826D-554E43ABA2A8}"/>
+                <a16:creationId xmlns:a16="http://schemas.microsoft.com/office/drawing/2014/main" id="{A749F6AA-07B1-4CA2-A73F-65032415A132}"/>
               </a:ext>
             </a:extLst>
           </p:cNvPr>
@@ -26738,7 +27320,7 @@
           <p:cNvPr id="17" name="">
             <a:extLst xmlns:a="http://schemas.openxmlformats.org/drawingml/2006/main">
               <a:ext uri="{FF2B5EF4-FFF2-40B4-BE49-F238E27FC236}">
-                <a16:creationId xmlns:a16="http://schemas.microsoft.com/office/drawing/2014/main" id="{31B4477A-E46C-45AB-8614-56A66C944363}"/>
+                <a16:creationId xmlns:a16="http://schemas.microsoft.com/office/drawing/2014/main" id="{18E590C9-A667-4142-87D8-FC7D31EE315A}"/>
               </a:ext>
             </a:extLst>
           </p:cNvPr>
@@ -26802,7 +27384,7 @@
           <p:cNvPr id="18" name="">
             <a:extLst xmlns:a="http://schemas.openxmlformats.org/drawingml/2006/main">
               <a:ext uri="{FF2B5EF4-FFF2-40B4-BE49-F238E27FC236}">
-                <a16:creationId xmlns:a16="http://schemas.microsoft.com/office/drawing/2014/main" id="{96637CE8-3928-4EB9-8CFF-7D8916F80412}"/>
+                <a16:creationId xmlns:a16="http://schemas.microsoft.com/office/drawing/2014/main" id="{8721EBFC-5457-4313-A24D-3C44392C015F}"/>
               </a:ext>
             </a:extLst>
           </p:cNvPr>
@@ -26837,7 +27419,7 @@
           <p:cNvPr id="19" name="">
             <a:extLst xmlns:a="http://schemas.openxmlformats.org/drawingml/2006/main">
               <a:ext uri="{FF2B5EF4-FFF2-40B4-BE49-F238E27FC236}">
-                <a16:creationId xmlns:a16="http://schemas.microsoft.com/office/drawing/2014/main" id="{ACE0093F-AC95-43B6-81A6-6DCC8005DF1B}"/>
+                <a16:creationId xmlns:a16="http://schemas.microsoft.com/office/drawing/2014/main" id="{D497BB98-8DEE-4EDB-BEA3-C2EBE95761DE}"/>
               </a:ext>
             </a:extLst>
           </p:cNvPr>
@@ -26901,7 +27483,7 @@
           <p:cNvPr id="20" name="">
             <a:extLst xmlns:a="http://schemas.openxmlformats.org/drawingml/2006/main">
               <a:ext uri="{FF2B5EF4-FFF2-40B4-BE49-F238E27FC236}">
-                <a16:creationId xmlns:a16="http://schemas.microsoft.com/office/drawing/2014/main" id="{92064773-573B-41C2-8FD2-0DE8E1EF14F7}"/>
+                <a16:creationId xmlns:a16="http://schemas.microsoft.com/office/drawing/2014/main" id="{33A033C6-2CD3-4C03-AD20-60F0A466BD0B}"/>
               </a:ext>
             </a:extLst>
           </p:cNvPr>
@@ -26965,7 +27547,7 @@
           <p:cNvPr id="21" name="">
             <a:extLst xmlns:a="http://schemas.openxmlformats.org/drawingml/2006/main">
               <a:ext uri="{FF2B5EF4-FFF2-40B4-BE49-F238E27FC236}">
-                <a16:creationId xmlns:a16="http://schemas.microsoft.com/office/drawing/2014/main" id="{416356A0-734F-4FE8-BFA2-55E0F7F1E823}"/>
+                <a16:creationId xmlns:a16="http://schemas.microsoft.com/office/drawing/2014/main" id="{B423FD39-0E1C-401E-ACB1-84884762793F}"/>
               </a:ext>
             </a:extLst>
           </p:cNvPr>
@@ -27000,7 +27582,7 @@
           <p:cNvPr id="22" name="">
             <a:extLst xmlns:a="http://schemas.openxmlformats.org/drawingml/2006/main">
               <a:ext uri="{FF2B5EF4-FFF2-40B4-BE49-F238E27FC236}">
-                <a16:creationId xmlns:a16="http://schemas.microsoft.com/office/drawing/2014/main" id="{83E56DFB-B200-4FEF-B418-FFDA0B2EBA77}"/>
+                <a16:creationId xmlns:a16="http://schemas.microsoft.com/office/drawing/2014/main" id="{748DAE49-5910-48E6-8E07-B39C8227BDC5}"/>
               </a:ext>
             </a:extLst>
           </p:cNvPr>
@@ -27064,7 +27646,7 @@
           <p:cNvPr id="23" name="">
             <a:extLst xmlns:a="http://schemas.openxmlformats.org/drawingml/2006/main">
               <a:ext uri="{FF2B5EF4-FFF2-40B4-BE49-F238E27FC236}">
-                <a16:creationId xmlns:a16="http://schemas.microsoft.com/office/drawing/2014/main" id="{4038D4C8-BACD-49BE-ADDC-61D36F069887}"/>
+                <a16:creationId xmlns:a16="http://schemas.microsoft.com/office/drawing/2014/main" id="{5E13038B-EA3C-458A-8545-DB58E7313B65}"/>
               </a:ext>
             </a:extLst>
           </p:cNvPr>
@@ -27128,7 +27710,7 @@
           <p:cNvPr id="24" name="">
             <a:extLst xmlns:a="http://schemas.openxmlformats.org/drawingml/2006/main">
               <a:ext uri="{FF2B5EF4-FFF2-40B4-BE49-F238E27FC236}">
-                <a16:creationId xmlns:a16="http://schemas.microsoft.com/office/drawing/2014/main" id="{B1DFC697-ECD5-442F-9A20-523F80AECAD4}"/>
+                <a16:creationId xmlns:a16="http://schemas.microsoft.com/office/drawing/2014/main" id="{95F7BC5D-C19D-453F-9C9A-6A524B1F1051}"/>
               </a:ext>
             </a:extLst>
           </p:cNvPr>
@@ -27163,7 +27745,7 @@
           <p:cNvPr id="25" name="">
             <a:extLst xmlns:a="http://schemas.openxmlformats.org/drawingml/2006/main">
               <a:ext uri="{FF2B5EF4-FFF2-40B4-BE49-F238E27FC236}">
-                <a16:creationId xmlns:a16="http://schemas.microsoft.com/office/drawing/2014/main" id="{2EB21F44-65FC-4190-9620-ADE1760C8780}"/>
+                <a16:creationId xmlns:a16="http://schemas.microsoft.com/office/drawing/2014/main" id="{5FF6E58B-5F1F-4455-A595-35247C35E03A}"/>
               </a:ext>
             </a:extLst>
           </p:cNvPr>
@@ -27227,7 +27809,7 @@
           <p:cNvPr id="26" name="">
             <a:extLst xmlns:a="http://schemas.openxmlformats.org/drawingml/2006/main">
               <a:ext uri="{FF2B5EF4-FFF2-40B4-BE49-F238E27FC236}">
-                <a16:creationId xmlns:a16="http://schemas.microsoft.com/office/drawing/2014/main" id="{AAFD3308-8981-4EC9-B5BF-C0F272739CFF}"/>
+                <a16:creationId xmlns:a16="http://schemas.microsoft.com/office/drawing/2014/main" id="{37B80301-7E42-4C23-A947-134B1E42A693}"/>
               </a:ext>
             </a:extLst>
           </p:cNvPr>
@@ -27264,7 +27846,7 @@
           <p:cNvPr id="27" name="">
             <a:extLst xmlns:a="http://schemas.openxmlformats.org/drawingml/2006/main">
               <a:ext uri="{FF2B5EF4-FFF2-40B4-BE49-F238E27FC236}">
-                <a16:creationId xmlns:a16="http://schemas.microsoft.com/office/drawing/2014/main" id="{43E9DB8E-0B61-495A-A864-51813338EB20}"/>
+                <a16:creationId xmlns:a16="http://schemas.microsoft.com/office/drawing/2014/main" id="{06132793-020C-47AA-B8E0-8A843DB310FF}"/>
               </a:ext>
             </a:extLst>
           </p:cNvPr>
@@ -27328,7 +27910,7 @@
           <p:cNvPr id="28" name="">
             <a:extLst xmlns:a="http://schemas.openxmlformats.org/drawingml/2006/main">
               <a:ext uri="{FF2B5EF4-FFF2-40B4-BE49-F238E27FC236}">
-                <a16:creationId xmlns:a16="http://schemas.microsoft.com/office/drawing/2014/main" id="{6A393D69-B1C8-4C56-8DB0-7B2FED044BD6}"/>
+                <a16:creationId xmlns:a16="http://schemas.microsoft.com/office/drawing/2014/main" id="{AB217735-55C0-4D99-85B7-E2826B254CF3}"/>
               </a:ext>
             </a:extLst>
           </p:cNvPr>
@@ -27365,7 +27947,7 @@
           <p:cNvPr id="29" name="">
             <a:extLst xmlns:a="http://schemas.openxmlformats.org/drawingml/2006/main">
               <a:ext uri="{FF2B5EF4-FFF2-40B4-BE49-F238E27FC236}">
-                <a16:creationId xmlns:a16="http://schemas.microsoft.com/office/drawing/2014/main" id="{4C9D5427-09C9-4D84-A50C-D4F69323435C}"/>
+                <a16:creationId xmlns:a16="http://schemas.microsoft.com/office/drawing/2014/main" id="{4EBA6132-3701-47C1-B609-C5BA71DE92D9}"/>
               </a:ext>
             </a:extLst>
           </p:cNvPr>
@@ -27429,7 +28011,7 @@
           <p:cNvPr id="30" name="">
             <a:extLst xmlns:a="http://schemas.openxmlformats.org/drawingml/2006/main">
               <a:ext uri="{FF2B5EF4-FFF2-40B4-BE49-F238E27FC236}">
-                <a16:creationId xmlns:a16="http://schemas.microsoft.com/office/drawing/2014/main" id="{A40D123A-862E-4931-858B-4271A3916AE8}"/>
+                <a16:creationId xmlns:a16="http://schemas.microsoft.com/office/drawing/2014/main" id="{BD6B49A4-D628-4274-BA66-9492C3E4DE2F}"/>
               </a:ext>
             </a:extLst>
           </p:cNvPr>
@@ -27466,7 +28048,7 @@
           <p:cNvPr id="31" name="">
             <a:extLst xmlns:a="http://schemas.openxmlformats.org/drawingml/2006/main">
               <a:ext uri="{FF2B5EF4-FFF2-40B4-BE49-F238E27FC236}">
-                <a16:creationId xmlns:a16="http://schemas.microsoft.com/office/drawing/2014/main" id="{F16C4F42-434F-4F2A-AFD2-03ADBCD2E36A}"/>
+                <a16:creationId xmlns:a16="http://schemas.microsoft.com/office/drawing/2014/main" id="{64406B00-CADF-4223-8B00-2E3EB6C1DE60}"/>
               </a:ext>
             </a:extLst>
           </p:cNvPr>
@@ -27528,7 +28110,7 @@
     </p:spTree>
     <p:extLst>
       <p:ext uri="{BB962C8B-B14F-4D97-AF65-F5344CB8AC3E}">
-        <p14:creationId xmlns:p14="http://schemas.microsoft.com/office/powerpoint/2010/main" val="1721048482"/>
+        <p14:creationId xmlns:p14="http://schemas.microsoft.com/office/powerpoint/2010/main" val="1071406046"/>
       </p:ext>
     </p:extLst>
   </p:cSld>
@@ -27559,7 +28141,7 @@
           <p:cNvPr id="1" name="">
             <a:extLst xmlns:a="http://schemas.openxmlformats.org/drawingml/2006/main">
               <a:ext uri="{FF2B5EF4-FFF2-40B4-BE49-F238E27FC236}">
-                <a16:creationId xmlns:a16="http://schemas.microsoft.com/office/drawing/2014/main" id="{AB8AC340-9521-43B0-9F7B-B95EB1A2AF9A}"/>
+                <a16:creationId xmlns:a16="http://schemas.microsoft.com/office/drawing/2014/main" id="{3DC4BD86-5DC9-468F-AF01-BCDE1D53263D}"/>
               </a:ext>
             </a:extLst>
           </p:cNvPr>
@@ -27594,7 +28176,7 @@
           <p:cNvPr id="2" name="">
             <a:extLst xmlns:a="http://schemas.openxmlformats.org/drawingml/2006/main">
               <a:ext uri="{FF2B5EF4-FFF2-40B4-BE49-F238E27FC236}">
-                <a16:creationId xmlns:a16="http://schemas.microsoft.com/office/drawing/2014/main" id="{7592BF09-6C7E-41A7-AB31-F76BBC00AB67}"/>
+                <a16:creationId xmlns:a16="http://schemas.microsoft.com/office/drawing/2014/main" id="{2FA679DC-423D-478F-8586-94DA7E80FCE9}"/>
               </a:ext>
             </a:extLst>
           </p:cNvPr>
@@ -27629,7 +28211,7 @@
           <p:cNvPr id="3" name="">
             <a:extLst xmlns:a="http://schemas.openxmlformats.org/drawingml/2006/main">
               <a:ext uri="{FF2B5EF4-FFF2-40B4-BE49-F238E27FC236}">
-                <a16:creationId xmlns:a16="http://schemas.microsoft.com/office/drawing/2014/main" id="{488A1B8C-5DA1-44D1-B482-C2AC47ABF691}"/>
+                <a16:creationId xmlns:a16="http://schemas.microsoft.com/office/drawing/2014/main" id="{7264CD66-B690-433B-9441-D2A6DDE59326}"/>
               </a:ext>
             </a:extLst>
           </p:cNvPr>
@@ -27664,7 +28246,7 @@
           <p:cNvPr id="4" name="">
             <a:extLst xmlns:a="http://schemas.openxmlformats.org/drawingml/2006/main">
               <a:ext uri="{FF2B5EF4-FFF2-40B4-BE49-F238E27FC236}">
-                <a16:creationId xmlns:a16="http://schemas.microsoft.com/office/drawing/2014/main" id="{263D93BB-415F-4EC1-9DE2-B2951FC1C4D3}"/>
+                <a16:creationId xmlns:a16="http://schemas.microsoft.com/office/drawing/2014/main" id="{3969AA86-5E03-451F-B94A-A691E6C5ECF5}"/>
               </a:ext>
             </a:extLst>
           </p:cNvPr>
@@ -27728,7 +28310,7 @@
           <p:cNvPr id="5" name="">
             <a:extLst xmlns:a="http://schemas.openxmlformats.org/drawingml/2006/main">
               <a:ext uri="{FF2B5EF4-FFF2-40B4-BE49-F238E27FC236}">
-                <a16:creationId xmlns:a16="http://schemas.microsoft.com/office/drawing/2014/main" id="{80529EE3-58E2-4035-A0C6-2E072D81F4CD}"/>
+                <a16:creationId xmlns:a16="http://schemas.microsoft.com/office/drawing/2014/main" id="{040F3AE8-3603-4B3D-88A1-3DEFD38B8D8C}"/>
               </a:ext>
             </a:extLst>
           </p:cNvPr>
@@ -27792,7 +28374,7 @@
           <p:cNvPr id="6" name="">
             <a:extLst xmlns:a="http://schemas.openxmlformats.org/drawingml/2006/main">
               <a:ext uri="{FF2B5EF4-FFF2-40B4-BE49-F238E27FC236}">
-                <a16:creationId xmlns:a16="http://schemas.microsoft.com/office/drawing/2014/main" id="{5E37B58B-688E-4B93-B556-6F3DE7BEA872}"/>
+                <a16:creationId xmlns:a16="http://schemas.microsoft.com/office/drawing/2014/main" id="{8DB4FCF6-BCC0-4383-87A2-5285D0330525}"/>
               </a:ext>
             </a:extLst>
           </p:cNvPr>
@@ -27827,7 +28409,7 @@
           <p:cNvPr id="7" name="">
             <a:extLst xmlns:a="http://schemas.openxmlformats.org/drawingml/2006/main">
               <a:ext uri="{FF2B5EF4-FFF2-40B4-BE49-F238E27FC236}">
-                <a16:creationId xmlns:a16="http://schemas.microsoft.com/office/drawing/2014/main" id="{B3ABE024-1C8F-4FF4-AEEF-53289B71CB33}"/>
+                <a16:creationId xmlns:a16="http://schemas.microsoft.com/office/drawing/2014/main" id="{9A8BDF1B-F897-4CAA-88D9-62BDB32CC949}"/>
               </a:ext>
             </a:extLst>
           </p:cNvPr>
@@ -27891,7 +28473,7 @@
           <p:cNvPr id="8" name="">
             <a:extLst xmlns:a="http://schemas.openxmlformats.org/drawingml/2006/main">
               <a:ext uri="{FF2B5EF4-FFF2-40B4-BE49-F238E27FC236}">
-                <a16:creationId xmlns:a16="http://schemas.microsoft.com/office/drawing/2014/main" id="{F45050A7-1D46-475E-99F5-4127F7E31D6B}"/>
+                <a16:creationId xmlns:a16="http://schemas.microsoft.com/office/drawing/2014/main" id="{04A5CEAB-AF31-42DE-A988-BCBE9A6CD255}"/>
               </a:ext>
             </a:extLst>
           </p:cNvPr>
@@ -27955,7 +28537,7 @@
           <p:cNvPr id="9" name="">
             <a:extLst xmlns:a="http://schemas.openxmlformats.org/drawingml/2006/main">
               <a:ext uri="{FF2B5EF4-FFF2-40B4-BE49-F238E27FC236}">
-                <a16:creationId xmlns:a16="http://schemas.microsoft.com/office/drawing/2014/main" id="{527CC777-52B4-448A-B5D3-4CAE6A2BC75D}"/>
+                <a16:creationId xmlns:a16="http://schemas.microsoft.com/office/drawing/2014/main" id="{F4BA844B-4B1E-44A3-A62F-2A024CB961BD}"/>
               </a:ext>
             </a:extLst>
           </p:cNvPr>
@@ -27990,7 +28572,7 @@
           <p:cNvPr id="10" name="">
             <a:extLst xmlns:a="http://schemas.openxmlformats.org/drawingml/2006/main">
               <a:ext uri="{FF2B5EF4-FFF2-40B4-BE49-F238E27FC236}">
-                <a16:creationId xmlns:a16="http://schemas.microsoft.com/office/drawing/2014/main" id="{A43CF004-32A3-470B-8111-FB7226171AB3}"/>
+                <a16:creationId xmlns:a16="http://schemas.microsoft.com/office/drawing/2014/main" id="{220A3BCD-B2AB-434C-8C8C-328179915B8C}"/>
               </a:ext>
             </a:extLst>
           </p:cNvPr>
@@ -28054,7 +28636,7 @@
           <p:cNvPr id="11" name="">
             <a:extLst xmlns:a="http://schemas.openxmlformats.org/drawingml/2006/main">
               <a:ext uri="{FF2B5EF4-FFF2-40B4-BE49-F238E27FC236}">
-                <a16:creationId xmlns:a16="http://schemas.microsoft.com/office/drawing/2014/main" id="{FBAB77BB-D7F2-4C10-A547-ADCF68728FFF}"/>
+                <a16:creationId xmlns:a16="http://schemas.microsoft.com/office/drawing/2014/main" id="{EC362910-34BF-475C-8B9A-2C5ACAA2F2A2}"/>
               </a:ext>
             </a:extLst>
           </p:cNvPr>
@@ -28118,7 +28700,7 @@
           <p:cNvPr id="12" name="">
             <a:extLst xmlns:a="http://schemas.openxmlformats.org/drawingml/2006/main">
               <a:ext uri="{FF2B5EF4-FFF2-40B4-BE49-F238E27FC236}">
-                <a16:creationId xmlns:a16="http://schemas.microsoft.com/office/drawing/2014/main" id="{73F38967-24BE-4C0F-B746-0CD0D9FE4E04}"/>
+                <a16:creationId xmlns:a16="http://schemas.microsoft.com/office/drawing/2014/main" id="{033D01E4-31F0-4072-AA60-9CACF6F76842}"/>
               </a:ext>
             </a:extLst>
           </p:cNvPr>
@@ -28153,7 +28735,7 @@
           <p:cNvPr id="13" name="">
             <a:extLst xmlns:a="http://schemas.openxmlformats.org/drawingml/2006/main">
               <a:ext uri="{FF2B5EF4-FFF2-40B4-BE49-F238E27FC236}">
-                <a16:creationId xmlns:a16="http://schemas.microsoft.com/office/drawing/2014/main" id="{A81E8100-D39C-418B-A3EE-AA8F7087EBE6}"/>
+                <a16:creationId xmlns:a16="http://schemas.microsoft.com/office/drawing/2014/main" id="{6C5F571F-2832-4EF9-B0AE-815E73BEA024}"/>
               </a:ext>
             </a:extLst>
           </p:cNvPr>
@@ -28217,7 +28799,7 @@
           <p:cNvPr id="14" name="">
             <a:extLst xmlns:a="http://schemas.openxmlformats.org/drawingml/2006/main">
               <a:ext uri="{FF2B5EF4-FFF2-40B4-BE49-F238E27FC236}">
-                <a16:creationId xmlns:a16="http://schemas.microsoft.com/office/drawing/2014/main" id="{580FA1B9-630D-4D29-85EF-72A2286CF006}"/>
+                <a16:creationId xmlns:a16="http://schemas.microsoft.com/office/drawing/2014/main" id="{C73D2C63-9BF5-4640-B6B8-97D8D00AED4B}"/>
               </a:ext>
             </a:extLst>
           </p:cNvPr>
@@ -28281,7 +28863,7 @@
           <p:cNvPr id="15" name="">
             <a:extLst xmlns:a="http://schemas.openxmlformats.org/drawingml/2006/main">
               <a:ext uri="{FF2B5EF4-FFF2-40B4-BE49-F238E27FC236}">
-                <a16:creationId xmlns:a16="http://schemas.microsoft.com/office/drawing/2014/main" id="{A039954B-2C60-4A6C-A86E-D47848533ADE}"/>
+                <a16:creationId xmlns:a16="http://schemas.microsoft.com/office/drawing/2014/main" id="{B6C7D304-1561-40E9-8571-2B79E6B1BF36}"/>
               </a:ext>
             </a:extLst>
           </p:cNvPr>
@@ -28316,7 +28898,7 @@
           <p:cNvPr id="16" name="">
             <a:extLst xmlns:a="http://schemas.openxmlformats.org/drawingml/2006/main">
               <a:ext uri="{FF2B5EF4-FFF2-40B4-BE49-F238E27FC236}">
-                <a16:creationId xmlns:a16="http://schemas.microsoft.com/office/drawing/2014/main" id="{06D1BC03-C8A5-4F21-8F87-B24A54A99F74}"/>
+                <a16:creationId xmlns:a16="http://schemas.microsoft.com/office/drawing/2014/main" id="{39569011-C321-4E8A-B390-F8DEDF82FAEA}"/>
               </a:ext>
             </a:extLst>
           </p:cNvPr>
@@ -28380,7 +28962,7 @@
           <p:cNvPr id="17" name="">
             <a:extLst xmlns:a="http://schemas.openxmlformats.org/drawingml/2006/main">
               <a:ext uri="{FF2B5EF4-FFF2-40B4-BE49-F238E27FC236}">
-                <a16:creationId xmlns:a16="http://schemas.microsoft.com/office/drawing/2014/main" id="{956159D6-D703-4BEB-941C-6E6276FB6AD5}"/>
+                <a16:creationId xmlns:a16="http://schemas.microsoft.com/office/drawing/2014/main" id="{B1142410-A270-4958-8CA9-88DD45D3089C}"/>
               </a:ext>
             </a:extLst>
           </p:cNvPr>
@@ -28444,7 +29026,7 @@
           <p:cNvPr id="18" name="">
             <a:extLst xmlns:a="http://schemas.openxmlformats.org/drawingml/2006/main">
               <a:ext uri="{FF2B5EF4-FFF2-40B4-BE49-F238E27FC236}">
-                <a16:creationId xmlns:a16="http://schemas.microsoft.com/office/drawing/2014/main" id="{476F9D57-A7F8-4697-8BE8-CDD4F892D498}"/>
+                <a16:creationId xmlns:a16="http://schemas.microsoft.com/office/drawing/2014/main" id="{43714E8E-8221-4C9F-9173-948AC9CEA0C9}"/>
               </a:ext>
             </a:extLst>
           </p:cNvPr>
@@ -28479,7 +29061,7 @@
           <p:cNvPr id="19" name="">
             <a:extLst xmlns:a="http://schemas.openxmlformats.org/drawingml/2006/main">
               <a:ext uri="{FF2B5EF4-FFF2-40B4-BE49-F238E27FC236}">
-                <a16:creationId xmlns:a16="http://schemas.microsoft.com/office/drawing/2014/main" id="{79006B99-25AA-4614-B96C-C8194870B91E}"/>
+                <a16:creationId xmlns:a16="http://schemas.microsoft.com/office/drawing/2014/main" id="{69E55577-1628-4A8C-B46D-5799811FD5C8}"/>
               </a:ext>
             </a:extLst>
           </p:cNvPr>
@@ -28543,7 +29125,7 @@
           <p:cNvPr id="20" name="">
             <a:extLst xmlns:a="http://schemas.openxmlformats.org/drawingml/2006/main">
               <a:ext uri="{FF2B5EF4-FFF2-40B4-BE49-F238E27FC236}">
-                <a16:creationId xmlns:a16="http://schemas.microsoft.com/office/drawing/2014/main" id="{0F07FED7-FFD7-46CF-A4F5-EDEA10C8FD8A}"/>
+                <a16:creationId xmlns:a16="http://schemas.microsoft.com/office/drawing/2014/main" id="{91D99A4E-221D-49F2-92E2-C93EE94252B0}"/>
               </a:ext>
             </a:extLst>
           </p:cNvPr>
@@ -28607,7 +29189,7 @@
           <p:cNvPr id="21" name="">
             <a:extLst xmlns:a="http://schemas.openxmlformats.org/drawingml/2006/main">
               <a:ext uri="{FF2B5EF4-FFF2-40B4-BE49-F238E27FC236}">
-                <a16:creationId xmlns:a16="http://schemas.microsoft.com/office/drawing/2014/main" id="{9472CB7C-1B4D-42CA-9D30-4BFB74D06E69}"/>
+                <a16:creationId xmlns:a16="http://schemas.microsoft.com/office/drawing/2014/main" id="{76409AB2-4226-4479-8EC9-63DC324A863B}"/>
               </a:ext>
             </a:extLst>
           </p:cNvPr>
@@ -28642,7 +29224,7 @@
           <p:cNvPr id="22" name="">
             <a:extLst xmlns:a="http://schemas.openxmlformats.org/drawingml/2006/main">
               <a:ext uri="{FF2B5EF4-FFF2-40B4-BE49-F238E27FC236}">
-                <a16:creationId xmlns:a16="http://schemas.microsoft.com/office/drawing/2014/main" id="{9D57F8C5-F1A8-40BE-88F7-97CF4D01B156}"/>
+                <a16:creationId xmlns:a16="http://schemas.microsoft.com/office/drawing/2014/main" id="{5391DBF2-AC5A-44F1-AA33-1273C33692BE}"/>
               </a:ext>
             </a:extLst>
           </p:cNvPr>
@@ -28706,7 +29288,7 @@
           <p:cNvPr id="23" name="">
             <a:extLst xmlns:a="http://schemas.openxmlformats.org/drawingml/2006/main">
               <a:ext uri="{FF2B5EF4-FFF2-40B4-BE49-F238E27FC236}">
-                <a16:creationId xmlns:a16="http://schemas.microsoft.com/office/drawing/2014/main" id="{80DB8B68-E9F8-44DA-851B-AE82EFE77696}"/>
+                <a16:creationId xmlns:a16="http://schemas.microsoft.com/office/drawing/2014/main" id="{25DB7926-1835-48E4-AE6C-DED0C1593479}"/>
               </a:ext>
             </a:extLst>
           </p:cNvPr>
@@ -28743,7 +29325,7 @@
           <p:cNvPr id="24" name="">
             <a:extLst xmlns:a="http://schemas.openxmlformats.org/drawingml/2006/main">
               <a:ext uri="{FF2B5EF4-FFF2-40B4-BE49-F238E27FC236}">
-                <a16:creationId xmlns:a16="http://schemas.microsoft.com/office/drawing/2014/main" id="{0530A59F-9BEB-400C-A381-1863B4C9D872}"/>
+                <a16:creationId xmlns:a16="http://schemas.microsoft.com/office/drawing/2014/main" id="{F74E94DA-5DC3-4AA8-93D6-35C69F1C3D95}"/>
               </a:ext>
             </a:extLst>
           </p:cNvPr>
@@ -28807,7 +29389,7 @@
           <p:cNvPr id="25" name="">
             <a:extLst xmlns:a="http://schemas.openxmlformats.org/drawingml/2006/main">
               <a:ext uri="{FF2B5EF4-FFF2-40B4-BE49-F238E27FC236}">
-                <a16:creationId xmlns:a16="http://schemas.microsoft.com/office/drawing/2014/main" id="{07086EC5-59E1-4900-A4D6-F0F6232036B3}"/>
+                <a16:creationId xmlns:a16="http://schemas.microsoft.com/office/drawing/2014/main" id="{8700D107-564E-4D6B-AA07-363693A9AFDF}"/>
               </a:ext>
             </a:extLst>
           </p:cNvPr>
@@ -28844,7 +29426,7 @@
           <p:cNvPr id="26" name="">
             <a:extLst xmlns:a="http://schemas.openxmlformats.org/drawingml/2006/main">
               <a:ext uri="{FF2B5EF4-FFF2-40B4-BE49-F238E27FC236}">
-                <a16:creationId xmlns:a16="http://schemas.microsoft.com/office/drawing/2014/main" id="{8EB9812D-0F3E-4E9B-864B-BAE2D612DBA7}"/>
+                <a16:creationId xmlns:a16="http://schemas.microsoft.com/office/drawing/2014/main" id="{3A027388-91CD-4093-A75C-69E7B18904CF}"/>
               </a:ext>
             </a:extLst>
           </p:cNvPr>
@@ -28908,7 +29490,7 @@
           <p:cNvPr id="27" name="">
             <a:extLst xmlns:a="http://schemas.openxmlformats.org/drawingml/2006/main">
               <a:ext uri="{FF2B5EF4-FFF2-40B4-BE49-F238E27FC236}">
-                <a16:creationId xmlns:a16="http://schemas.microsoft.com/office/drawing/2014/main" id="{94FC4E94-32BB-4D3B-A72A-2E0386BA7C4E}"/>
+                <a16:creationId xmlns:a16="http://schemas.microsoft.com/office/drawing/2014/main" id="{064696F7-6539-406F-A899-AEDF9B62D73F}"/>
               </a:ext>
             </a:extLst>
           </p:cNvPr>
@@ -28945,7 +29527,7 @@
           <p:cNvPr id="28" name="">
             <a:extLst xmlns:a="http://schemas.openxmlformats.org/drawingml/2006/main">
               <a:ext uri="{FF2B5EF4-FFF2-40B4-BE49-F238E27FC236}">
-                <a16:creationId xmlns:a16="http://schemas.microsoft.com/office/drawing/2014/main" id="{9FE82A61-D833-4AA4-B28D-2CBF0E6D0579}"/>
+                <a16:creationId xmlns:a16="http://schemas.microsoft.com/office/drawing/2014/main" id="{4A870734-A843-4B3C-8FC3-DB40F90BF544}"/>
               </a:ext>
             </a:extLst>
           </p:cNvPr>
@@ -29007,7 +29589,7 @@
     </p:spTree>
     <p:extLst>
       <p:ext uri="{BB962C8B-B14F-4D97-AF65-F5344CB8AC3E}">
-        <p14:creationId xmlns:p14="http://schemas.microsoft.com/office/powerpoint/2010/main" val="1927175738"/>
+        <p14:creationId xmlns:p14="http://schemas.microsoft.com/office/powerpoint/2010/main" val="1203844640"/>
       </p:ext>
     </p:extLst>
   </p:cSld>
